--- a/docs/theme-preview/pptx/claymorphism.pptx
+++ b/docs/theme-preview/pptx/claymorphism.pptx
@@ -366,7 +366,7 @@
             <a:pPr>
               <a:defRPr sz="1100" b="0" i="0" u="none" strike="noStrike">
                 <a:solidFill>
-                  <a:srgbClr val="1F2937"/>
+                  <a:srgbClr val="111111"/>
                 </a:solidFill>
                 <a:latin typeface="Pretendard"/>
               </a:defRPr>
@@ -418,7 +418,7 @@
             <a:pPr>
               <a:defRPr sz="1100" b="0" i="0" u="none" strike="noStrike">
                 <a:solidFill>
-                  <a:srgbClr val="4B5563"/>
+                  <a:srgbClr val="8F8F8F"/>
                 </a:solidFill>
                 <a:latin typeface="Pretendard"/>
               </a:defRPr>
@@ -448,7 +448,7 @@
           <a:pPr>
             <a:defRPr sz="1100">
               <a:solidFill>
-                <a:srgbClr val="4B5563"/>
+                <a:srgbClr val="8F8F8F"/>
               </a:solidFill>
               <a:latin typeface="Pretendard"/>
               <a:cs typeface="Pretendard"/>
@@ -626,7 +626,7 @@
             <a:pPr>
               <a:defRPr sz="1100" b="0" i="0" u="none" strike="noStrike">
                 <a:solidFill>
-                  <a:srgbClr val="1F2937"/>
+                  <a:srgbClr val="111111"/>
                 </a:solidFill>
                 <a:latin typeface="Pretendard"/>
               </a:defRPr>
@@ -678,7 +678,7 @@
             <a:pPr>
               <a:defRPr sz="1100" b="0" i="0" u="none" strike="noStrike">
                 <a:solidFill>
-                  <a:srgbClr val="4B5563"/>
+                  <a:srgbClr val="8F8F8F"/>
                 </a:solidFill>
                 <a:latin typeface="Pretendard"/>
               </a:defRPr>
@@ -4132,7 +4132,7 @@
             <a:r>
               <a:rPr lang="en-US" sz="3400" b="1" dirty="0">
                 <a:solidFill>
-                  <a:srgbClr val="1F2937"/>
+                  <a:srgbClr val="111111"/>
                 </a:solidFill>
                 <a:latin typeface="Pretendard" pitchFamily="34" charset="0"/>
                 <a:ea typeface="Pretendard" pitchFamily="34" charset="-122"/>
@@ -4191,7 +4191,7 @@
             <a:r>
               <a:rPr lang="en-US" sz="2200" dirty="0">
                 <a:solidFill>
-                  <a:srgbClr val="1F2937"/>
+                  <a:srgbClr val="111111"/>
                 </a:solidFill>
                 <a:latin typeface="Pretendard" pitchFamily="34" charset="0"/>
                 <a:ea typeface="Pretendard" pitchFamily="34" charset="-122"/>
@@ -4250,7 +4250,7 @@
             <a:r>
               <a:rPr lang="en-US" sz="2200" dirty="0">
                 <a:solidFill>
-                  <a:srgbClr val="1F2937"/>
+                  <a:srgbClr val="111111"/>
                 </a:solidFill>
                 <a:latin typeface="Pretendard" pitchFamily="34" charset="0"/>
                 <a:ea typeface="Pretendard" pitchFamily="34" charset="-122"/>
@@ -4486,7 +4486,7 @@
             <a:r>
               <a:rPr lang="en-US" sz="3400" b="1" dirty="0">
                 <a:solidFill>
-                  <a:srgbClr val="1F2937"/>
+                  <a:srgbClr val="111111"/>
                 </a:solidFill>
                 <a:latin typeface="Pretendard" pitchFamily="34" charset="0"/>
                 <a:ea typeface="Pretendard" pitchFamily="34" charset="-122"/>
@@ -4782,7 +4782,7 @@
             <a:r>
               <a:rPr lang="en-US" sz="1600" dirty="0">
                 <a:solidFill>
-                  <a:srgbClr val="1F2937"/>
+                  <a:srgbClr val="111111"/>
                 </a:solidFill>
                 <a:latin typeface="Pretendard" pitchFamily="34" charset="0"/>
                 <a:ea typeface="Pretendard" pitchFamily="34" charset="-122"/>
@@ -4958,7 +4958,7 @@
             <a:r>
               <a:rPr lang="en-US" sz="1600" dirty="0">
                 <a:solidFill>
-                  <a:srgbClr val="1F2937"/>
+                  <a:srgbClr val="111111"/>
                 </a:solidFill>
                 <a:latin typeface="Pretendard" pitchFamily="34" charset="0"/>
                 <a:ea typeface="Pretendard" pitchFamily="34" charset="-122"/>
@@ -5134,7 +5134,7 @@
             <a:r>
               <a:rPr lang="en-US" sz="1600" dirty="0">
                 <a:solidFill>
-                  <a:srgbClr val="1F2937"/>
+                  <a:srgbClr val="111111"/>
                 </a:solidFill>
                 <a:latin typeface="Pretendard" pitchFamily="34" charset="0"/>
                 <a:ea typeface="Pretendard" pitchFamily="34" charset="-122"/>
@@ -5310,7 +5310,7 @@
             <a:r>
               <a:rPr lang="en-US" sz="1600" dirty="0">
                 <a:solidFill>
-                  <a:srgbClr val="1F2937"/>
+                  <a:srgbClr val="111111"/>
                 </a:solidFill>
                 <a:latin typeface="Pretendard" pitchFamily="34" charset="0"/>
                 <a:ea typeface="Pretendard" pitchFamily="34" charset="-122"/>
@@ -5486,7 +5486,7 @@
             <a:r>
               <a:rPr lang="en-US" sz="1600" dirty="0">
                 <a:solidFill>
-                  <a:srgbClr val="1F2937"/>
+                  <a:srgbClr val="111111"/>
                 </a:solidFill>
                 <a:latin typeface="Pretendard" pitchFamily="34" charset="0"/>
                 <a:ea typeface="Pretendard" pitchFamily="34" charset="-122"/>
@@ -5662,7 +5662,7 @@
             <a:r>
               <a:rPr lang="en-US" sz="1600" dirty="0">
                 <a:solidFill>
-                  <a:srgbClr val="1F2937"/>
+                  <a:srgbClr val="111111"/>
                 </a:solidFill>
                 <a:latin typeface="Pretendard" pitchFamily="34" charset="0"/>
                 <a:ea typeface="Pretendard" pitchFamily="34" charset="-122"/>
@@ -6270,7 +6270,7 @@
             <a:r>
               <a:rPr lang="en-US" sz="3400" b="1" dirty="0">
                 <a:solidFill>
-                  <a:srgbClr val="1F2937"/>
+                  <a:srgbClr val="111111"/>
                 </a:solidFill>
                 <a:latin typeface="Pretendard" pitchFamily="34" charset="0"/>
                 <a:ea typeface="Pretendard" pitchFamily="34" charset="-122"/>
@@ -6386,7 +6386,7 @@
             <a:r>
               <a:rPr lang="en-US" sz="2200" dirty="0">
                 <a:solidFill>
-                  <a:srgbClr val="1F2937"/>
+                  <a:srgbClr val="111111"/>
                 </a:solidFill>
                 <a:latin typeface="Pretendard" pitchFamily="34" charset="0"/>
                 <a:ea typeface="Pretendard" pitchFamily="34" charset="-122"/>
@@ -6502,7 +6502,7 @@
             <a:r>
               <a:rPr lang="en-US" sz="2200" dirty="0">
                 <a:solidFill>
-                  <a:srgbClr val="1F2937"/>
+                  <a:srgbClr val="111111"/>
                 </a:solidFill>
                 <a:latin typeface="Pretendard" pitchFamily="34" charset="0"/>
                 <a:ea typeface="Pretendard" pitchFamily="34" charset="-122"/>
@@ -6618,7 +6618,7 @@
             <a:r>
               <a:rPr lang="en-US" sz="2200" dirty="0">
                 <a:solidFill>
-                  <a:srgbClr val="1F2937"/>
+                  <a:srgbClr val="111111"/>
                 </a:solidFill>
                 <a:latin typeface="Pretendard" pitchFamily="34" charset="0"/>
                 <a:ea typeface="Pretendard" pitchFamily="34" charset="-122"/>
@@ -6734,7 +6734,7 @@
             <a:r>
               <a:rPr lang="en-US" sz="2200" dirty="0">
                 <a:solidFill>
-                  <a:srgbClr val="1F2937"/>
+                  <a:srgbClr val="111111"/>
                 </a:solidFill>
                 <a:latin typeface="Pretendard" pitchFamily="34" charset="0"/>
                 <a:ea typeface="Pretendard" pitchFamily="34" charset="-122"/>
@@ -7024,7 +7024,7 @@
             <a:r>
               <a:rPr lang="en-US" sz="3400" b="1" dirty="0">
                 <a:solidFill>
-                  <a:srgbClr val="1F2937"/>
+                  <a:srgbClr val="111111"/>
                 </a:solidFill>
                 <a:latin typeface="Pretendard" pitchFamily="34" charset="0"/>
                 <a:ea typeface="Pretendard" pitchFamily="34" charset="-122"/>
@@ -7083,7 +7083,7 @@
             <a:r>
               <a:rPr lang="en-US" sz="2200" dirty="0">
                 <a:solidFill>
-                  <a:srgbClr val="1F2937"/>
+                  <a:srgbClr val="111111"/>
                 </a:solidFill>
                 <a:latin typeface="Pretendard" pitchFamily="34" charset="0"/>
                 <a:ea typeface="Pretendard" pitchFamily="34" charset="-122"/>
@@ -7142,7 +7142,7 @@
             <a:r>
               <a:rPr lang="en-US" sz="2200" dirty="0">
                 <a:solidFill>
-                  <a:srgbClr val="1F2937"/>
+                  <a:srgbClr val="111111"/>
                 </a:solidFill>
                 <a:latin typeface="Pretendard" pitchFamily="34" charset="0"/>
                 <a:ea typeface="Pretendard" pitchFamily="34" charset="-122"/>
@@ -7444,7 +7444,7 @@
             <a:r>
               <a:rPr lang="en-US" sz="3400" b="1" dirty="0">
                 <a:solidFill>
-                  <a:srgbClr val="1F2937"/>
+                  <a:srgbClr val="111111"/>
                 </a:solidFill>
                 <a:latin typeface="Pretendard" pitchFamily="34" charset="0"/>
                 <a:ea typeface="Pretendard" pitchFamily="34" charset="-122"/>
@@ -7701,7 +7701,7 @@
                       <a:r>
                         <a:rPr lang="en-US" sz="1800" b="1" dirty="0">
                           <a:solidFill>
-                            <a:srgbClr val="1F2937"/>
+                            <a:srgbClr val="111111"/>
                           </a:solidFill>
                           <a:latin typeface="Pretendard" pitchFamily="34" charset="0"/>
                           <a:ea typeface="Pretendard" pitchFamily="34" charset="-122"/>
@@ -7766,7 +7766,7 @@
                       <a:r>
                         <a:rPr lang="en-US" sz="1800" dirty="0">
                           <a:solidFill>
-                            <a:srgbClr val="1F2937"/>
+                            <a:srgbClr val="111111"/>
                           </a:solidFill>
                           <a:latin typeface="Pretendard" pitchFamily="34" charset="0"/>
                           <a:ea typeface="Pretendard" pitchFamily="34" charset="-122"/>
@@ -7831,7 +7831,7 @@
                       <a:r>
                         <a:rPr lang="en-US" sz="1800" dirty="0">
                           <a:solidFill>
-                            <a:srgbClr val="1F2937"/>
+                            <a:srgbClr val="111111"/>
                           </a:solidFill>
                           <a:latin typeface="Pretendard" pitchFamily="34" charset="0"/>
                           <a:ea typeface="Pretendard" pitchFamily="34" charset="-122"/>
@@ -7898,7 +7898,7 @@
                       <a:r>
                         <a:rPr lang="en-US" sz="1800" b="1" dirty="0">
                           <a:solidFill>
-                            <a:srgbClr val="1F2937"/>
+                            <a:srgbClr val="111111"/>
                           </a:solidFill>
                           <a:latin typeface="Pretendard" pitchFamily="34" charset="0"/>
                           <a:ea typeface="Pretendard" pitchFamily="34" charset="-122"/>
@@ -7968,7 +7968,7 @@
                       <a:r>
                         <a:rPr lang="en-US" sz="1800" dirty="0">
                           <a:solidFill>
-                            <a:srgbClr val="1F2937"/>
+                            <a:srgbClr val="111111"/>
                           </a:solidFill>
                           <a:latin typeface="Pretendard" pitchFamily="34" charset="0"/>
                           <a:ea typeface="Pretendard" pitchFamily="34" charset="-122"/>
@@ -8038,7 +8038,7 @@
                       <a:r>
                         <a:rPr lang="en-US" sz="1800" dirty="0">
                           <a:solidFill>
-                            <a:srgbClr val="1F2937"/>
+                            <a:srgbClr val="111111"/>
                           </a:solidFill>
                           <a:latin typeface="Pretendard" pitchFamily="34" charset="0"/>
                           <a:ea typeface="Pretendard" pitchFamily="34" charset="-122"/>
@@ -8110,7 +8110,7 @@
                       <a:r>
                         <a:rPr lang="en-US" sz="1800" b="1" dirty="0">
                           <a:solidFill>
-                            <a:srgbClr val="1F2937"/>
+                            <a:srgbClr val="111111"/>
                           </a:solidFill>
                           <a:latin typeface="Pretendard" pitchFamily="34" charset="0"/>
                           <a:ea typeface="Pretendard" pitchFamily="34" charset="-122"/>
@@ -8175,7 +8175,7 @@
                       <a:r>
                         <a:rPr lang="en-US" sz="1800" dirty="0">
                           <a:solidFill>
-                            <a:srgbClr val="1F2937"/>
+                            <a:srgbClr val="111111"/>
                           </a:solidFill>
                           <a:latin typeface="Pretendard" pitchFamily="34" charset="0"/>
                           <a:ea typeface="Pretendard" pitchFamily="34" charset="-122"/>
@@ -8240,7 +8240,7 @@
                       <a:r>
                         <a:rPr lang="en-US" sz="1800" dirty="0">
                           <a:solidFill>
-                            <a:srgbClr val="1F2937"/>
+                            <a:srgbClr val="111111"/>
                           </a:solidFill>
                           <a:latin typeface="Pretendard" pitchFamily="34" charset="0"/>
                           <a:ea typeface="Pretendard" pitchFamily="34" charset="-122"/>
@@ -8307,7 +8307,7 @@
                       <a:r>
                         <a:rPr lang="en-US" sz="1800" b="1" dirty="0">
                           <a:solidFill>
-                            <a:srgbClr val="1F2937"/>
+                            <a:srgbClr val="111111"/>
                           </a:solidFill>
                           <a:latin typeface="Pretendard" pitchFamily="34" charset="0"/>
                           <a:ea typeface="Pretendard" pitchFamily="34" charset="-122"/>
@@ -8377,7 +8377,7 @@
                       <a:r>
                         <a:rPr lang="en-US" sz="1800" dirty="0">
                           <a:solidFill>
-                            <a:srgbClr val="1F2937"/>
+                            <a:srgbClr val="111111"/>
                           </a:solidFill>
                           <a:latin typeface="Pretendard" pitchFamily="34" charset="0"/>
                           <a:ea typeface="Pretendard" pitchFamily="34" charset="-122"/>
@@ -8447,7 +8447,7 @@
                       <a:r>
                         <a:rPr lang="en-US" sz="1800" dirty="0">
                           <a:solidFill>
-                            <a:srgbClr val="1F2937"/>
+                            <a:srgbClr val="111111"/>
                           </a:solidFill>
                           <a:latin typeface="Pretendard" pitchFamily="34" charset="0"/>
                           <a:ea typeface="Pretendard" pitchFamily="34" charset="-122"/>
@@ -8828,7 +8828,7 @@
             <a:r>
               <a:rPr lang="en-US" sz="3400" b="1" dirty="0">
                 <a:solidFill>
-                  <a:srgbClr val="1F2937"/>
+                  <a:srgbClr val="111111"/>
                 </a:solidFill>
                 <a:latin typeface="Pretendard" pitchFamily="34" charset="0"/>
                 <a:ea typeface="Pretendard" pitchFamily="34" charset="-122"/>
@@ -8887,7 +8887,7 @@
             <a:r>
               <a:rPr lang="en-US" sz="2200" dirty="0">
                 <a:solidFill>
-                  <a:srgbClr val="1F2937"/>
+                  <a:srgbClr val="111111"/>
                 </a:solidFill>
                 <a:latin typeface="Pretendard" pitchFamily="34" charset="0"/>
                 <a:ea typeface="Pretendard" pitchFamily="34" charset="-122"/>
@@ -8927,7 +8927,7 @@
             <a:r>
               <a:rPr lang="en-US" sz="2200" dirty="0">
                 <a:solidFill>
-                  <a:srgbClr val="1F2937"/>
+                  <a:srgbClr val="111111"/>
                 </a:solidFill>
                 <a:latin typeface="Pretendard" pitchFamily="34" charset="0"/>
                 <a:ea typeface="Pretendard" pitchFamily="34" charset="-122"/>
@@ -8967,7 +8967,7 @@
             <a:r>
               <a:rPr lang="en-US" sz="2200" dirty="0">
                 <a:solidFill>
-                  <a:srgbClr val="1F2937"/>
+                  <a:srgbClr val="111111"/>
                 </a:solidFill>
                 <a:latin typeface="Pretendard" pitchFamily="34" charset="0"/>
                 <a:ea typeface="Pretendard" pitchFamily="34" charset="-122"/>
@@ -9285,7 +9285,7 @@
             <a:r>
               <a:rPr lang="en-US" sz="3400" b="1" dirty="0">
                 <a:solidFill>
-                  <a:srgbClr val="1F2937"/>
+                  <a:srgbClr val="111111"/>
                 </a:solidFill>
                 <a:latin typeface="Pretendard" pitchFamily="34" charset="0"/>
                 <a:ea typeface="Pretendard" pitchFamily="34" charset="-122"/>
@@ -9542,7 +9542,7 @@
                       <a:r>
                         <a:rPr lang="en-US" sz="1800" b="1" dirty="0">
                           <a:solidFill>
-                            <a:srgbClr val="1F2937"/>
+                            <a:srgbClr val="111111"/>
                           </a:solidFill>
                           <a:latin typeface="Pretendard" pitchFamily="34" charset="0"/>
                           <a:ea typeface="Pretendard" pitchFamily="34" charset="-122"/>
@@ -9607,7 +9607,7 @@
                       <a:r>
                         <a:rPr lang="en-US" sz="1800" dirty="0">
                           <a:solidFill>
-                            <a:srgbClr val="1F2937"/>
+                            <a:srgbClr val="111111"/>
                           </a:solidFill>
                           <a:latin typeface="Pretendard" pitchFamily="34" charset="0"/>
                           <a:ea typeface="Pretendard" pitchFamily="34" charset="-122"/>
@@ -9672,7 +9672,7 @@
                       <a:r>
                         <a:rPr lang="en-US" sz="1800" dirty="0">
                           <a:solidFill>
-                            <a:srgbClr val="1F2937"/>
+                            <a:srgbClr val="111111"/>
                           </a:solidFill>
                           <a:latin typeface="Pretendard" pitchFamily="34" charset="0"/>
                           <a:ea typeface="Pretendard" pitchFamily="34" charset="-122"/>
@@ -9739,7 +9739,7 @@
                       <a:r>
                         <a:rPr lang="en-US" sz="1800" b="1" dirty="0">
                           <a:solidFill>
-                            <a:srgbClr val="1F2937"/>
+                            <a:srgbClr val="111111"/>
                           </a:solidFill>
                           <a:latin typeface="Pretendard" pitchFamily="34" charset="0"/>
                           <a:ea typeface="Pretendard" pitchFamily="34" charset="-122"/>
@@ -9809,7 +9809,7 @@
                       <a:r>
                         <a:rPr lang="en-US" sz="1800" dirty="0">
                           <a:solidFill>
-                            <a:srgbClr val="1F2937"/>
+                            <a:srgbClr val="111111"/>
                           </a:solidFill>
                           <a:latin typeface="Pretendard" pitchFamily="34" charset="0"/>
                           <a:ea typeface="Pretendard" pitchFamily="34" charset="-122"/>
@@ -9879,7 +9879,7 @@
                       <a:r>
                         <a:rPr lang="en-US" sz="1800" dirty="0">
                           <a:solidFill>
-                            <a:srgbClr val="1F2937"/>
+                            <a:srgbClr val="111111"/>
                           </a:solidFill>
                           <a:latin typeface="Pretendard" pitchFamily="34" charset="0"/>
                           <a:ea typeface="Pretendard" pitchFamily="34" charset="-122"/>
@@ -9951,7 +9951,7 @@
                       <a:r>
                         <a:rPr lang="en-US" sz="1800" b="1" dirty="0">
                           <a:solidFill>
-                            <a:srgbClr val="1F2937"/>
+                            <a:srgbClr val="111111"/>
                           </a:solidFill>
                           <a:latin typeface="Pretendard" pitchFamily="34" charset="0"/>
                           <a:ea typeface="Pretendard" pitchFamily="34" charset="-122"/>
@@ -10016,7 +10016,7 @@
                       <a:r>
                         <a:rPr lang="en-US" sz="1800" dirty="0">
                           <a:solidFill>
-                            <a:srgbClr val="1F2937"/>
+                            <a:srgbClr val="111111"/>
                           </a:solidFill>
                           <a:latin typeface="Pretendard" pitchFamily="34" charset="0"/>
                           <a:ea typeface="Pretendard" pitchFamily="34" charset="-122"/>
@@ -10081,7 +10081,7 @@
                       <a:r>
                         <a:rPr lang="en-US" sz="1800" dirty="0">
                           <a:solidFill>
-                            <a:srgbClr val="1F2937"/>
+                            <a:srgbClr val="111111"/>
                           </a:solidFill>
                           <a:latin typeface="Pretendard" pitchFamily="34" charset="0"/>
                           <a:ea typeface="Pretendard" pitchFamily="34" charset="-122"/>
@@ -10430,7 +10430,7 @@
             <a:r>
               <a:rPr lang="en-US" sz="3400" b="1" dirty="0">
                 <a:solidFill>
-                  <a:srgbClr val="1F2937"/>
+                  <a:srgbClr val="111111"/>
                 </a:solidFill>
                 <a:latin typeface="Pretendard" pitchFamily="34" charset="0"/>
                 <a:ea typeface="Pretendard" pitchFamily="34" charset="-122"/>
@@ -10621,7 +10621,7 @@
             <a:r>
               <a:rPr lang="en-US" sz="3000" b="1" dirty="0">
                 <a:solidFill>
-                  <a:srgbClr val="1F2937"/>
+                  <a:srgbClr val="111111"/>
                 </a:solidFill>
                 <a:latin typeface="Pretendard" pitchFamily="34" charset="0"/>
                 <a:ea typeface="Pretendard" pitchFamily="34" charset="-122"/>
@@ -10663,7 +10663,7 @@
             <a:r>
               <a:rPr lang="en-US" sz="1600" dirty="0">
                 <a:solidFill>
-                  <a:srgbClr val="4B5563"/>
+                  <a:srgbClr val="8F8F8F"/>
                 </a:solidFill>
                 <a:latin typeface="Pretendard" pitchFamily="34" charset="0"/>
                 <a:ea typeface="Pretendard" pitchFamily="34" charset="-122"/>
@@ -10734,7 +10734,7 @@
             <a:r>
               <a:rPr lang="en-US" sz="1600" b="1" dirty="0">
                 <a:solidFill>
-                  <a:srgbClr val="1F2937"/>
+                  <a:srgbClr val="111111"/>
                 </a:solidFill>
                 <a:latin typeface="Pretendard" pitchFamily="34" charset="0"/>
                 <a:ea typeface="Pretendard" pitchFamily="34" charset="-122"/>
@@ -10805,7 +10805,7 @@
             <a:r>
               <a:rPr lang="en-US" sz="1600" dirty="0">
                 <a:solidFill>
-                  <a:srgbClr val="4B5563"/>
+                  <a:srgbClr val="8F8F8F"/>
                 </a:solidFill>
                 <a:latin typeface="Pretendard" pitchFamily="34" charset="0"/>
                 <a:ea typeface="Pretendard" pitchFamily="34" charset="-122"/>
@@ -10894,7 +10894,7 @@
           <a:noFill/>
           <a:ln w="12700">
             <a:solidFill>
-              <a:srgbClr val="1F2937"/>
+              <a:srgbClr val="111111"/>
             </a:solidFill>
             <a:prstDash val="solid"/>
           </a:ln>
@@ -11007,7 +11007,7 @@
             <a:r>
               <a:rPr lang="en-US" sz="3200" b="1" dirty="0">
                 <a:solidFill>
-                  <a:srgbClr val="1F2937"/>
+                  <a:srgbClr val="111111"/>
                 </a:solidFill>
                 <a:latin typeface="Pretendard" pitchFamily="34" charset="0"/>
                 <a:ea typeface="Pretendard" pitchFamily="34" charset="-122"/>
@@ -11049,7 +11049,7 @@
             <a:r>
               <a:rPr lang="en-US" sz="1700" dirty="0">
                 <a:solidFill>
-                  <a:srgbClr val="4B5563"/>
+                  <a:srgbClr val="8F8F8F"/>
                 </a:solidFill>
                 <a:latin typeface="Pretendard" pitchFamily="34" charset="0"/>
                 <a:ea typeface="Pretendard" pitchFamily="34" charset="-122"/>
@@ -11091,7 +11091,7 @@
             <a:r>
               <a:rPr lang="en-US" sz="1400" dirty="0">
                 <a:solidFill>
-                  <a:srgbClr val="4B5563"/>
+                  <a:srgbClr val="8F8F8F"/>
                 </a:solidFill>
                 <a:latin typeface="Pretendard" pitchFamily="34" charset="0"/>
                 <a:ea typeface="Pretendard" pitchFamily="34" charset="-122"/>
@@ -11133,7 +11133,7 @@
             <a:r>
               <a:rPr lang="en-US" sz="1400" dirty="0">
                 <a:solidFill>
-                  <a:srgbClr val="4B5563"/>
+                  <a:srgbClr val="8F8F8F"/>
                 </a:solidFill>
                 <a:latin typeface="Pretendard" pitchFamily="34" charset="0"/>
                 <a:ea typeface="Pretendard" pitchFamily="34" charset="-122"/>
@@ -11435,7 +11435,7 @@
             <a:r>
               <a:rPr lang="en-US" sz="3400" b="1" dirty="0">
                 <a:solidFill>
-                  <a:srgbClr val="1F2937"/>
+                  <a:srgbClr val="111111"/>
                 </a:solidFill>
                 <a:latin typeface="Pretendard" pitchFamily="34" charset="0"/>
                 <a:ea typeface="Pretendard" pitchFamily="34" charset="-122"/>
@@ -11533,7 +11533,7 @@
             <a:r>
               <a:rPr lang="en-US" sz="1800" b="1" dirty="0">
                 <a:solidFill>
-                  <a:srgbClr val="1F2937"/>
+                  <a:srgbClr val="111111"/>
                 </a:solidFill>
                 <a:latin typeface="Pretendard" pitchFamily="34" charset="0"/>
                 <a:ea typeface="Pretendard" pitchFamily="34" charset="-122"/>
@@ -11675,7 +11675,7 @@
             <a:r>
               <a:rPr lang="en-US" sz="1800" b="1" dirty="0">
                 <a:solidFill>
-                  <a:srgbClr val="1F2937"/>
+                  <a:srgbClr val="111111"/>
                 </a:solidFill>
                 <a:latin typeface="Pretendard" pitchFamily="34" charset="0"/>
                 <a:ea typeface="Pretendard" pitchFamily="34" charset="-122"/>
@@ -11817,7 +11817,7 @@
             <a:r>
               <a:rPr lang="en-US" sz="1800" b="1" dirty="0">
                 <a:solidFill>
-                  <a:srgbClr val="1F2937"/>
+                  <a:srgbClr val="111111"/>
                 </a:solidFill>
                 <a:latin typeface="Pretendard" pitchFamily="34" charset="0"/>
                 <a:ea typeface="Pretendard" pitchFamily="34" charset="-122"/>
@@ -11959,7 +11959,7 @@
             <a:r>
               <a:rPr lang="en-US" sz="1800" b="1" dirty="0">
                 <a:solidFill>
-                  <a:srgbClr val="1F2937"/>
+                  <a:srgbClr val="111111"/>
                 </a:solidFill>
                 <a:latin typeface="Pretendard" pitchFamily="34" charset="0"/>
                 <a:ea typeface="Pretendard" pitchFamily="34" charset="-122"/>
@@ -12619,7 +12619,7 @@
             <a:r>
               <a:rPr lang="en-US" sz="3400" b="1" dirty="0">
                 <a:solidFill>
-                  <a:srgbClr val="1F2937"/>
+                  <a:srgbClr val="111111"/>
                 </a:solidFill>
                 <a:latin typeface="Pretendard" pitchFamily="34" charset="0"/>
                 <a:ea typeface="Pretendard" pitchFamily="34" charset="-122"/>
@@ -12735,7 +12735,7 @@
             <a:r>
               <a:rPr lang="en-US" sz="2200" dirty="0">
                 <a:solidFill>
-                  <a:srgbClr val="1F2937"/>
+                  <a:srgbClr val="111111"/>
                 </a:solidFill>
                 <a:latin typeface="Pretendard" pitchFamily="34" charset="0"/>
                 <a:ea typeface="Pretendard" pitchFamily="34" charset="-122"/>
@@ -12851,7 +12851,7 @@
             <a:r>
               <a:rPr lang="en-US" sz="2200" dirty="0">
                 <a:solidFill>
-                  <a:srgbClr val="1F2937"/>
+                  <a:srgbClr val="111111"/>
                 </a:solidFill>
                 <a:latin typeface="Pretendard" pitchFamily="34" charset="0"/>
                 <a:ea typeface="Pretendard" pitchFamily="34" charset="-122"/>
@@ -12967,7 +12967,7 @@
             <a:r>
               <a:rPr lang="en-US" sz="2200" dirty="0">
                 <a:solidFill>
-                  <a:srgbClr val="1F2937"/>
+                  <a:srgbClr val="111111"/>
                 </a:solidFill>
                 <a:latin typeface="Pretendard" pitchFamily="34" charset="0"/>
                 <a:ea typeface="Pretendard" pitchFamily="34" charset="-122"/>
@@ -13664,7 +13664,7 @@
             <a:r>
               <a:rPr lang="en-US" sz="3800" b="1" dirty="0">
                 <a:solidFill>
-                  <a:srgbClr val="1F2937"/>
+                  <a:srgbClr val="111111"/>
                 </a:solidFill>
                 <a:latin typeface="Pretendard" pitchFamily="34" charset="0"/>
                 <a:ea typeface="Pretendard" pitchFamily="34" charset="-122"/>
@@ -13706,7 +13706,7 @@
             <a:r>
               <a:rPr lang="en-US" sz="1800" dirty="0">
                 <a:solidFill>
-                  <a:srgbClr val="1F2937"/>
+                  <a:srgbClr val="111111"/>
                 </a:solidFill>
                 <a:latin typeface="Pretendard" pitchFamily="34" charset="0"/>
                 <a:ea typeface="Pretendard" pitchFamily="34" charset="-122"/>
@@ -13748,7 +13748,7 @@
             <a:r>
               <a:rPr lang="en-US" sz="1800" dirty="0">
                 <a:solidFill>
-                  <a:srgbClr val="1F2937"/>
+                  <a:srgbClr val="111111"/>
                 </a:solidFill>
                 <a:latin typeface="Pretendard" pitchFamily="34" charset="0"/>
                 <a:ea typeface="Pretendard" pitchFamily="34" charset="-122"/>
@@ -13790,7 +13790,7 @@
             <a:r>
               <a:rPr lang="en-US" sz="1800" dirty="0">
                 <a:solidFill>
-                  <a:srgbClr val="1F2937"/>
+                  <a:srgbClr val="111111"/>
                 </a:solidFill>
                 <a:latin typeface="Pretendard" pitchFamily="34" charset="0"/>
                 <a:ea typeface="Pretendard" pitchFamily="34" charset="-122"/>
@@ -13832,7 +13832,7 @@
             <a:r>
               <a:rPr lang="en-US" sz="1800" dirty="0">
                 <a:solidFill>
-                  <a:srgbClr val="1F2937"/>
+                  <a:srgbClr val="111111"/>
                 </a:solidFill>
                 <a:latin typeface="Pretendard" pitchFamily="34" charset="0"/>
                 <a:ea typeface="Pretendard" pitchFamily="34" charset="-122"/>
@@ -13874,7 +13874,7 @@
             <a:r>
               <a:rPr lang="en-US" sz="1800" dirty="0">
                 <a:solidFill>
-                  <a:srgbClr val="1F2937"/>
+                  <a:srgbClr val="111111"/>
                 </a:solidFill>
                 <a:latin typeface="Pretendard" pitchFamily="34" charset="0"/>
                 <a:ea typeface="Pretendard" pitchFamily="34" charset="-122"/>
@@ -13916,7 +13916,7 @@
             <a:r>
               <a:rPr lang="en-US" sz="1800" dirty="0">
                 <a:solidFill>
-                  <a:srgbClr val="1F2937"/>
+                  <a:srgbClr val="111111"/>
                 </a:solidFill>
                 <a:latin typeface="Pretendard" pitchFamily="34" charset="0"/>
                 <a:ea typeface="Pretendard" pitchFamily="34" charset="-122"/>
@@ -13958,7 +13958,7 @@
             <a:r>
               <a:rPr lang="en-US" sz="1800" dirty="0">
                 <a:solidFill>
-                  <a:srgbClr val="1F2937"/>
+                  <a:srgbClr val="111111"/>
                 </a:solidFill>
                 <a:latin typeface="Pretendard" pitchFamily="34" charset="0"/>
                 <a:ea typeface="Pretendard" pitchFamily="34" charset="-122"/>
@@ -14000,7 +14000,7 @@
             <a:r>
               <a:rPr lang="en-US" sz="1800" dirty="0">
                 <a:solidFill>
-                  <a:srgbClr val="1F2937"/>
+                  <a:srgbClr val="111111"/>
                 </a:solidFill>
                 <a:latin typeface="Pretendard" pitchFamily="34" charset="0"/>
                 <a:ea typeface="Pretendard" pitchFamily="34" charset="-122"/>
@@ -14042,7 +14042,7 @@
             <a:r>
               <a:rPr lang="en-US" sz="1800" dirty="0">
                 <a:solidFill>
-                  <a:srgbClr val="1F2937"/>
+                  <a:srgbClr val="111111"/>
                 </a:solidFill>
                 <a:latin typeface="Pretendard" pitchFamily="34" charset="0"/>
                 <a:ea typeface="Pretendard" pitchFamily="34" charset="-122"/>
@@ -14084,7 +14084,7 @@
             <a:r>
               <a:rPr lang="en-US" sz="1800" dirty="0">
                 <a:solidFill>
-                  <a:srgbClr val="1F2937"/>
+                  <a:srgbClr val="111111"/>
                 </a:solidFill>
                 <a:latin typeface="Pretendard" pitchFamily="34" charset="0"/>
                 <a:ea typeface="Pretendard" pitchFamily="34" charset="-122"/>
@@ -14126,7 +14126,7 @@
             <a:r>
               <a:rPr lang="en-US" sz="1800" dirty="0">
                 <a:solidFill>
-                  <a:srgbClr val="1F2937"/>
+                  <a:srgbClr val="111111"/>
                 </a:solidFill>
                 <a:latin typeface="Pretendard" pitchFamily="34" charset="0"/>
                 <a:ea typeface="Pretendard" pitchFamily="34" charset="-122"/>
@@ -14168,7 +14168,7 @@
             <a:r>
               <a:rPr lang="en-US" sz="1800" dirty="0">
                 <a:solidFill>
-                  <a:srgbClr val="1F2937"/>
+                  <a:srgbClr val="111111"/>
                 </a:solidFill>
                 <a:latin typeface="Pretendard" pitchFamily="34" charset="0"/>
                 <a:ea typeface="Pretendard" pitchFamily="34" charset="-122"/>
@@ -14210,7 +14210,7 @@
             <a:r>
               <a:rPr lang="en-US" sz="1800" dirty="0">
                 <a:solidFill>
-                  <a:srgbClr val="1F2937"/>
+                  <a:srgbClr val="111111"/>
                 </a:solidFill>
                 <a:latin typeface="Pretendard" pitchFamily="34" charset="0"/>
                 <a:ea typeface="Pretendard" pitchFamily="34" charset="-122"/>
@@ -14252,7 +14252,7 @@
             <a:r>
               <a:rPr lang="en-US" sz="1800" dirty="0">
                 <a:solidFill>
-                  <a:srgbClr val="1F2937"/>
+                  <a:srgbClr val="111111"/>
                 </a:solidFill>
                 <a:latin typeface="Pretendard" pitchFamily="34" charset="0"/>
                 <a:ea typeface="Pretendard" pitchFamily="34" charset="-122"/>
@@ -14542,7 +14542,7 @@
             <a:r>
               <a:rPr lang="en-US" sz="3400" b="1" dirty="0">
                 <a:solidFill>
-                  <a:srgbClr val="1F2937"/>
+                  <a:srgbClr val="111111"/>
                 </a:solidFill>
                 <a:latin typeface="Pretendard" pitchFamily="34" charset="0"/>
                 <a:ea typeface="Pretendard" pitchFamily="34" charset="-122"/>
@@ -14601,7 +14601,7 @@
             <a:r>
               <a:rPr lang="en-US" sz="2200" dirty="0">
                 <a:solidFill>
-                  <a:srgbClr val="1F2937"/>
+                  <a:srgbClr val="111111"/>
                 </a:solidFill>
                 <a:latin typeface="Pretendard" pitchFamily="34" charset="0"/>
                 <a:ea typeface="Pretendard" pitchFamily="34" charset="-122"/>
@@ -14660,7 +14660,7 @@
             <a:r>
               <a:rPr lang="en-US" sz="2200" dirty="0">
                 <a:solidFill>
-                  <a:srgbClr val="1F2937"/>
+                  <a:srgbClr val="111111"/>
                 </a:solidFill>
                 <a:latin typeface="Pretendard" pitchFamily="34" charset="0"/>
                 <a:ea typeface="Pretendard" pitchFamily="34" charset="-122"/>
@@ -15268,7 +15268,7 @@
             <a:r>
               <a:rPr lang="en-US" sz="3400" b="1" dirty="0">
                 <a:solidFill>
-                  <a:srgbClr val="1F2937"/>
+                  <a:srgbClr val="111111"/>
                 </a:solidFill>
                 <a:latin typeface="Pretendard" pitchFamily="34" charset="0"/>
                 <a:ea typeface="Pretendard" pitchFamily="34" charset="-122"/>
@@ -15384,7 +15384,7 @@
             <a:r>
               <a:rPr lang="en-US" sz="2200" dirty="0">
                 <a:solidFill>
-                  <a:srgbClr val="1F2937"/>
+                  <a:srgbClr val="111111"/>
                 </a:solidFill>
                 <a:latin typeface="Pretendard" pitchFamily="34" charset="0"/>
                 <a:ea typeface="Pretendard" pitchFamily="34" charset="-122"/>
@@ -15500,7 +15500,7 @@
             <a:r>
               <a:rPr lang="en-US" sz="2200" dirty="0">
                 <a:solidFill>
-                  <a:srgbClr val="1F2937"/>
+                  <a:srgbClr val="111111"/>
                 </a:solidFill>
                 <a:latin typeface="Pretendard" pitchFamily="34" charset="0"/>
                 <a:ea typeface="Pretendard" pitchFamily="34" charset="-122"/>
@@ -15616,7 +15616,7 @@
             <a:r>
               <a:rPr lang="en-US" sz="2200" dirty="0">
                 <a:solidFill>
-                  <a:srgbClr val="1F2937"/>
+                  <a:srgbClr val="111111"/>
                 </a:solidFill>
                 <a:latin typeface="Pretendard" pitchFamily="34" charset="0"/>
                 <a:ea typeface="Pretendard" pitchFamily="34" charset="-122"/>
@@ -15732,7 +15732,7 @@
             <a:r>
               <a:rPr lang="en-US" sz="2200" dirty="0">
                 <a:solidFill>
-                  <a:srgbClr val="1F2937"/>
+                  <a:srgbClr val="111111"/>
                 </a:solidFill>
                 <a:latin typeface="Pretendard" pitchFamily="34" charset="0"/>
                 <a:ea typeface="Pretendard" pitchFamily="34" charset="-122"/>
@@ -16340,7 +16340,7 @@
             <a:r>
               <a:rPr lang="en-US" sz="3400" b="1" dirty="0">
                 <a:solidFill>
-                  <a:srgbClr val="1F2937"/>
+                  <a:srgbClr val="111111"/>
                 </a:solidFill>
                 <a:latin typeface="Pretendard" pitchFamily="34" charset="0"/>
                 <a:ea typeface="Pretendard" pitchFamily="34" charset="-122"/>
@@ -16456,7 +16456,7 @@
             <a:r>
               <a:rPr lang="en-US" sz="2200" dirty="0">
                 <a:solidFill>
-                  <a:srgbClr val="1F2937"/>
+                  <a:srgbClr val="111111"/>
                 </a:solidFill>
                 <a:latin typeface="Pretendard" pitchFamily="34" charset="0"/>
                 <a:ea typeface="Pretendard" pitchFamily="34" charset="-122"/>
@@ -16572,7 +16572,7 @@
             <a:r>
               <a:rPr lang="en-US" sz="2200" dirty="0">
                 <a:solidFill>
-                  <a:srgbClr val="1F2937"/>
+                  <a:srgbClr val="111111"/>
                 </a:solidFill>
                 <a:latin typeface="Pretendard" pitchFamily="34" charset="0"/>
                 <a:ea typeface="Pretendard" pitchFamily="34" charset="-122"/>
@@ -16688,7 +16688,7 @@
             <a:r>
               <a:rPr lang="en-US" sz="2200" dirty="0">
                 <a:solidFill>
-                  <a:srgbClr val="1F2937"/>
+                  <a:srgbClr val="111111"/>
                 </a:solidFill>
                 <a:latin typeface="Pretendard" pitchFamily="34" charset="0"/>
                 <a:ea typeface="Pretendard" pitchFamily="34" charset="-122"/>
@@ -16804,7 +16804,7 @@
             <a:r>
               <a:rPr lang="en-US" sz="2200" dirty="0">
                 <a:solidFill>
-                  <a:srgbClr val="1F2937"/>
+                  <a:srgbClr val="111111"/>
                 </a:solidFill>
                 <a:latin typeface="Pretendard" pitchFamily="34" charset="0"/>
                 <a:ea typeface="Pretendard" pitchFamily="34" charset="-122"/>
@@ -17133,7 +17133,7 @@
             <a:r>
               <a:rPr lang="en-US" sz="3400" b="1" dirty="0">
                 <a:solidFill>
-                  <a:srgbClr val="1F2937"/>
+                  <a:srgbClr val="111111"/>
                 </a:solidFill>
                 <a:latin typeface="Pretendard" pitchFamily="34" charset="0"/>
                 <a:ea typeface="Pretendard" pitchFamily="34" charset="-122"/>
@@ -17192,7 +17192,7 @@
             <a:r>
               <a:rPr lang="en-US" sz="2200" dirty="0">
                 <a:solidFill>
-                  <a:srgbClr val="1F2937"/>
+                  <a:srgbClr val="111111"/>
                 </a:solidFill>
                 <a:latin typeface="Pretendard" pitchFamily="34" charset="0"/>
                 <a:ea typeface="Pretendard" pitchFamily="34" charset="-122"/>
@@ -17232,7 +17232,7 @@
             <a:r>
               <a:rPr lang="en-US" sz="2200" dirty="0">
                 <a:solidFill>
-                  <a:srgbClr val="1F2937"/>
+                  <a:srgbClr val="111111"/>
                 </a:solidFill>
                 <a:latin typeface="Pretendard" pitchFamily="34" charset="0"/>
                 <a:ea typeface="Pretendard" pitchFamily="34" charset="-122"/>
@@ -17272,7 +17272,7 @@
             <a:r>
               <a:rPr lang="en-US" sz="2200" dirty="0">
                 <a:solidFill>
-                  <a:srgbClr val="1F2937"/>
+                  <a:srgbClr val="111111"/>
                 </a:solidFill>
                 <a:latin typeface="Pretendard" pitchFamily="34" charset="0"/>
                 <a:ea typeface="Pretendard" pitchFamily="34" charset="-122"/>
@@ -17763,7 +17763,7 @@
             <a:r>
               <a:rPr lang="en-US" sz="3400" b="1" dirty="0">
                 <a:solidFill>
-                  <a:srgbClr val="1F2937"/>
+                  <a:srgbClr val="111111"/>
                 </a:solidFill>
                 <a:latin typeface="Pretendard" pitchFamily="34" charset="0"/>
                 <a:ea typeface="Pretendard" pitchFamily="34" charset="-122"/>
@@ -17967,7 +17967,7 @@
                       <a:r>
                         <a:rPr lang="en-US" sz="1800" b="1" dirty="0">
                           <a:solidFill>
-                            <a:srgbClr val="1F2937"/>
+                            <a:srgbClr val="111111"/>
                           </a:solidFill>
                           <a:latin typeface="Pretendard" pitchFamily="34" charset="0"/>
                           <a:ea typeface="Pretendard" pitchFamily="34" charset="-122"/>
@@ -18032,7 +18032,7 @@
                       <a:r>
                         <a:rPr lang="en-US" sz="1800" dirty="0">
                           <a:solidFill>
-                            <a:srgbClr val="1F2937"/>
+                            <a:srgbClr val="111111"/>
                           </a:solidFill>
                           <a:latin typeface="Pretendard" pitchFamily="34" charset="0"/>
                           <a:ea typeface="Pretendard" pitchFamily="34" charset="-122"/>
@@ -18099,7 +18099,7 @@
                       <a:r>
                         <a:rPr lang="en-US" sz="1800" b="1" dirty="0">
                           <a:solidFill>
-                            <a:srgbClr val="1F2937"/>
+                            <a:srgbClr val="111111"/>
                           </a:solidFill>
                           <a:latin typeface="Pretendard" pitchFamily="34" charset="0"/>
                           <a:ea typeface="Pretendard" pitchFamily="34" charset="-122"/>
@@ -18169,7 +18169,7 @@
                       <a:r>
                         <a:rPr lang="en-US" sz="1800" dirty="0">
                           <a:solidFill>
-                            <a:srgbClr val="1F2937"/>
+                            <a:srgbClr val="111111"/>
                           </a:solidFill>
                           <a:latin typeface="Pretendard" pitchFamily="34" charset="0"/>
                           <a:ea typeface="Pretendard" pitchFamily="34" charset="-122"/>
@@ -18280,7 +18280,7 @@
             <a:r>
               <a:rPr lang="en-US" sz="1800" dirty="0">
                 <a:solidFill>
-                  <a:srgbClr val="1F2937"/>
+                  <a:srgbClr val="111111"/>
                 </a:solidFill>
                 <a:latin typeface="Pretendard" pitchFamily="34" charset="0"/>
                 <a:ea typeface="Pretendard" pitchFamily="34" charset="-122"/>
@@ -18320,7 +18320,7 @@
             <a:r>
               <a:rPr lang="en-US" sz="1800" dirty="0">
                 <a:solidFill>
-                  <a:srgbClr val="1F2937"/>
+                  <a:srgbClr val="111111"/>
                 </a:solidFill>
                 <a:latin typeface="Pretendard" pitchFamily="34" charset="0"/>
                 <a:ea typeface="Pretendard" pitchFamily="34" charset="-122"/>
@@ -18894,7 +18894,7 @@
             <a:r>
               <a:rPr lang="en-US" sz="3400" b="1" dirty="0">
                 <a:solidFill>
-                  <a:srgbClr val="1F2937"/>
+                  <a:srgbClr val="111111"/>
                 </a:solidFill>
                 <a:latin typeface="Pretendard" pitchFamily="34" charset="0"/>
                 <a:ea typeface="Pretendard" pitchFamily="34" charset="-122"/>
@@ -19010,7 +19010,7 @@
             <a:r>
               <a:rPr lang="en-US" sz="2200" dirty="0">
                 <a:solidFill>
-                  <a:srgbClr val="1F2937"/>
+                  <a:srgbClr val="111111"/>
                 </a:solidFill>
                 <a:latin typeface="Pretendard" pitchFamily="34" charset="0"/>
                 <a:ea typeface="Pretendard" pitchFamily="34" charset="-122"/>
@@ -19126,7 +19126,7 @@
             <a:r>
               <a:rPr lang="en-US" sz="2200" dirty="0">
                 <a:solidFill>
-                  <a:srgbClr val="1F2937"/>
+                  <a:srgbClr val="111111"/>
                 </a:solidFill>
                 <a:latin typeface="Pretendard" pitchFamily="34" charset="0"/>
                 <a:ea typeface="Pretendard" pitchFamily="34" charset="-122"/>
@@ -19242,7 +19242,7 @@
             <a:r>
               <a:rPr lang="en-US" sz="2200" dirty="0">
                 <a:solidFill>
-                  <a:srgbClr val="1F2937"/>
+                  <a:srgbClr val="111111"/>
                 </a:solidFill>
                 <a:latin typeface="Pretendard" pitchFamily="34" charset="0"/>
                 <a:ea typeface="Pretendard" pitchFamily="34" charset="-122"/>
@@ -19559,7 +19559,7 @@
             <a:r>
               <a:rPr lang="en-US" sz="3800" b="1" dirty="0">
                 <a:solidFill>
-                  <a:srgbClr val="1F2937"/>
+                  <a:srgbClr val="111111"/>
                 </a:solidFill>
                 <a:latin typeface="Pretendard" pitchFamily="34" charset="0"/>
                 <a:ea typeface="Pretendard" pitchFamily="34" charset="-122"/>
@@ -19601,7 +19601,7 @@
             <a:r>
               <a:rPr lang="en-US" sz="2200" dirty="0">
                 <a:solidFill>
-                  <a:srgbClr val="1F2937"/>
+                  <a:srgbClr val="111111"/>
                 </a:solidFill>
                 <a:latin typeface="Pretendard" pitchFamily="34" charset="0"/>
                 <a:ea typeface="Pretendard" pitchFamily="34" charset="-122"/>
@@ -19959,7 +19959,7 @@
             <a:r>
               <a:rPr lang="en-US" sz="3400" b="1" dirty="0">
                 <a:solidFill>
-                  <a:srgbClr val="1F2937"/>
+                  <a:srgbClr val="111111"/>
                 </a:solidFill>
                 <a:latin typeface="Pretendard" pitchFamily="34" charset="0"/>
                 <a:ea typeface="Pretendard" pitchFamily="34" charset="-122"/>
@@ -20001,7 +20001,7 @@
             <a:r>
               <a:rPr lang="en-US" sz="2200" b="1" dirty="0">
                 <a:solidFill>
-                  <a:srgbClr val="1F2937"/>
+                  <a:srgbClr val="111111"/>
                 </a:solidFill>
                 <a:latin typeface="Pretendard" pitchFamily="34" charset="0"/>
                 <a:ea typeface="Pretendard" pitchFamily="34" charset="-122"/>
@@ -20060,7 +20060,7 @@
             <a:r>
               <a:rPr lang="en-US" sz="2200" dirty="0">
                 <a:solidFill>
-                  <a:srgbClr val="1F2937"/>
+                  <a:srgbClr val="111111"/>
                 </a:solidFill>
                 <a:latin typeface="Pretendard" pitchFamily="34" charset="0"/>
                 <a:ea typeface="Pretendard" pitchFamily="34" charset="-122"/>
@@ -20100,7 +20100,7 @@
             <a:r>
               <a:rPr lang="en-US" sz="2200" dirty="0">
                 <a:solidFill>
-                  <a:srgbClr val="1F2937"/>
+                  <a:srgbClr val="111111"/>
                 </a:solidFill>
                 <a:latin typeface="Pretendard" pitchFamily="34" charset="0"/>
                 <a:ea typeface="Pretendard" pitchFamily="34" charset="-122"/>
@@ -20140,7 +20140,7 @@
             <a:r>
               <a:rPr lang="en-US" sz="2200" dirty="0">
                 <a:solidFill>
-                  <a:srgbClr val="1F2937"/>
+                  <a:srgbClr val="111111"/>
                 </a:solidFill>
                 <a:latin typeface="Pretendard" pitchFamily="34" charset="0"/>
                 <a:ea typeface="Pretendard" pitchFamily="34" charset="-122"/>
@@ -20180,7 +20180,7 @@
             <a:r>
               <a:rPr lang="en-US" sz="2200" dirty="0">
                 <a:solidFill>
-                  <a:srgbClr val="1F2937"/>
+                  <a:srgbClr val="111111"/>
                 </a:solidFill>
                 <a:latin typeface="Pretendard" pitchFamily="34" charset="0"/>
                 <a:ea typeface="Pretendard" pitchFamily="34" charset="-122"/>
@@ -20724,7 +20724,7 @@
             <a:r>
               <a:rPr lang="en-US" sz="3400" b="1" dirty="0">
                 <a:solidFill>
-                  <a:srgbClr val="1F2937"/>
+                  <a:srgbClr val="111111"/>
                 </a:solidFill>
                 <a:latin typeface="Pretendard" pitchFamily="34" charset="0"/>
                 <a:ea typeface="Pretendard" pitchFamily="34" charset="-122"/>
@@ -20840,7 +20840,7 @@
             <a:r>
               <a:rPr lang="en-US" sz="2200" dirty="0">
                 <a:solidFill>
-                  <a:srgbClr val="1F2937"/>
+                  <a:srgbClr val="111111"/>
                 </a:solidFill>
                 <a:latin typeface="Pretendard" pitchFamily="34" charset="0"/>
                 <a:ea typeface="Pretendard" pitchFamily="34" charset="-122"/>
@@ -20956,7 +20956,7 @@
             <a:r>
               <a:rPr lang="en-US" sz="2200" dirty="0">
                 <a:solidFill>
-                  <a:srgbClr val="1F2937"/>
+                  <a:srgbClr val="111111"/>
                 </a:solidFill>
                 <a:latin typeface="Pretendard" pitchFamily="34" charset="0"/>
                 <a:ea typeface="Pretendard" pitchFamily="34" charset="-122"/>
@@ -21072,7 +21072,7 @@
             <a:r>
               <a:rPr lang="en-US" sz="2200" dirty="0">
                 <a:solidFill>
-                  <a:srgbClr val="1F2937"/>
+                  <a:srgbClr val="111111"/>
                 </a:solidFill>
                 <a:latin typeface="Pretendard" pitchFamily="34" charset="0"/>
                 <a:ea typeface="Pretendard" pitchFamily="34" charset="-122"/>
@@ -21362,7 +21362,7 @@
             <a:r>
               <a:rPr lang="en-US" sz="3400" b="1" dirty="0">
                 <a:solidFill>
-                  <a:srgbClr val="1F2937"/>
+                  <a:srgbClr val="111111"/>
                 </a:solidFill>
                 <a:latin typeface="Pretendard" pitchFamily="34" charset="0"/>
                 <a:ea typeface="Pretendard" pitchFamily="34" charset="-122"/>
@@ -21421,7 +21421,7 @@
             <a:r>
               <a:rPr lang="en-US" sz="2200" dirty="0">
                 <a:solidFill>
-                  <a:srgbClr val="1F2937"/>
+                  <a:srgbClr val="111111"/>
                 </a:solidFill>
                 <a:latin typeface="Pretendard" pitchFamily="34" charset="0"/>
                 <a:ea typeface="Pretendard" pitchFamily="34" charset="-122"/>
@@ -21480,7 +21480,7 @@
             <a:r>
               <a:rPr lang="en-US" sz="2200" dirty="0">
                 <a:solidFill>
-                  <a:srgbClr val="1F2937"/>
+                  <a:srgbClr val="111111"/>
                 </a:solidFill>
                 <a:latin typeface="Pretendard" pitchFamily="34" charset="0"/>
                 <a:ea typeface="Pretendard" pitchFamily="34" charset="-122"/>
@@ -22024,7 +22024,7 @@
             <a:r>
               <a:rPr lang="en-US" sz="3400" b="1" dirty="0">
                 <a:solidFill>
-                  <a:srgbClr val="1F2937"/>
+                  <a:srgbClr val="111111"/>
                 </a:solidFill>
                 <a:latin typeface="Pretendard" pitchFamily="34" charset="0"/>
                 <a:ea typeface="Pretendard" pitchFamily="34" charset="-122"/>
@@ -22140,7 +22140,7 @@
             <a:r>
               <a:rPr lang="en-US" sz="2200" dirty="0">
                 <a:solidFill>
-                  <a:srgbClr val="1F2937"/>
+                  <a:srgbClr val="111111"/>
                 </a:solidFill>
                 <a:latin typeface="Pretendard" pitchFamily="34" charset="0"/>
                 <a:ea typeface="Pretendard" pitchFamily="34" charset="-122"/>
@@ -22256,7 +22256,7 @@
             <a:r>
               <a:rPr lang="en-US" sz="2200" dirty="0">
                 <a:solidFill>
-                  <a:srgbClr val="1F2937"/>
+                  <a:srgbClr val="111111"/>
                 </a:solidFill>
                 <a:latin typeface="Pretendard" pitchFamily="34" charset="0"/>
                 <a:ea typeface="Pretendard" pitchFamily="34" charset="-122"/>
@@ -22372,7 +22372,7 @@
             <a:r>
               <a:rPr lang="en-US" sz="2200" dirty="0">
                 <a:solidFill>
-                  <a:srgbClr val="1F2937"/>
+                  <a:srgbClr val="111111"/>
                 </a:solidFill>
                 <a:latin typeface="Pretendard" pitchFamily="34" charset="0"/>
                 <a:ea typeface="Pretendard" pitchFamily="34" charset="-122"/>
@@ -22662,7 +22662,7 @@
             <a:r>
               <a:rPr lang="en-US" sz="3400" b="1" dirty="0">
                 <a:solidFill>
-                  <a:srgbClr val="1F2937"/>
+                  <a:srgbClr val="111111"/>
                 </a:solidFill>
                 <a:latin typeface="Pretendard" pitchFamily="34" charset="0"/>
                 <a:ea typeface="Pretendard" pitchFamily="34" charset="-122"/>
@@ -22721,7 +22721,7 @@
             <a:r>
               <a:rPr lang="en-US" sz="2200" dirty="0">
                 <a:solidFill>
-                  <a:srgbClr val="1F2937"/>
+                  <a:srgbClr val="111111"/>
                 </a:solidFill>
                 <a:latin typeface="Pretendard" pitchFamily="34" charset="0"/>
                 <a:ea typeface="Pretendard" pitchFamily="34" charset="-122"/>
@@ -22780,7 +22780,7 @@
             <a:r>
               <a:rPr lang="en-US" sz="2200" dirty="0">
                 <a:solidFill>
-                  <a:srgbClr val="1F2937"/>
+                  <a:srgbClr val="111111"/>
                 </a:solidFill>
                 <a:latin typeface="Pretendard" pitchFamily="34" charset="0"/>
                 <a:ea typeface="Pretendard" pitchFamily="34" charset="-122"/>
@@ -23070,7 +23070,7 @@
             <a:r>
               <a:rPr lang="en-US" sz="3400" b="1" dirty="0">
                 <a:solidFill>
-                  <a:srgbClr val="1F2937"/>
+                  <a:srgbClr val="111111"/>
                 </a:solidFill>
                 <a:latin typeface="Pretendard" pitchFamily="34" charset="0"/>
                 <a:ea typeface="Pretendard" pitchFamily="34" charset="-122"/>
@@ -23129,7 +23129,7 @@
             <a:r>
               <a:rPr lang="en-US" sz="2200" dirty="0">
                 <a:solidFill>
-                  <a:srgbClr val="1F2937"/>
+                  <a:srgbClr val="111111"/>
                 </a:solidFill>
                 <a:latin typeface="Pretendard" pitchFamily="34" charset="0"/>
                 <a:ea typeface="Pretendard" pitchFamily="34" charset="-122"/>
@@ -23188,7 +23188,7 @@
             <a:r>
               <a:rPr lang="en-US" sz="2200" dirty="0">
                 <a:solidFill>
-                  <a:srgbClr val="1F2937"/>
+                  <a:srgbClr val="111111"/>
                 </a:solidFill>
                 <a:latin typeface="Pretendard" pitchFamily="34" charset="0"/>
                 <a:ea typeface="Pretendard" pitchFamily="34" charset="-122"/>
@@ -23213,13 +23213,13 @@
   <a:themeElements>
     <a:clrScheme name="Office">
       <a:dk1>
-        <a:srgbClr val="1F2937"/>
+        <a:srgbClr val="111111"/>
       </a:dk1>
       <a:lt1>
         <a:srgbClr val="F6F7FB"/>
       </a:lt1>
       <a:dk2>
-        <a:srgbClr val="4B5563"/>
+        <a:srgbClr val="8F8F8F"/>
       </a:dk2>
       <a:lt2>
         <a:srgbClr val="FFFFFF"/>
@@ -23234,13 +23234,13 @@
         <a:srgbClr val="F43F5E"/>
       </a:accent3>
       <a:accent4>
-        <a:srgbClr val="4B5563"/>
+        <a:srgbClr val="8F8F8F"/>
       </a:accent4>
       <a:accent5>
         <a:srgbClr val="E5E7EB"/>
       </a:accent5>
       <a:accent6>
-        <a:srgbClr val="1F2937"/>
+        <a:srgbClr val="111111"/>
       </a:accent6>
       <a:hlink>
         <a:srgbClr val="F43F5E"/>

--- a/docs/theme-preview/pptx/claymorphism.pptx
+++ b/docs/theme-preview/pptx/claymorphism.pptx
@@ -3602,21 +3602,21 @@
         </p:nvSpPr>
         <p:spPr>
           <a:xfrm>
-            <a:off x="9859975" y="438912"/>
-            <a:ext cx="1024128" cy="1024128"/>
+            <a:off x="9768535" y="420624"/>
+            <a:ext cx="1078992" cy="1078992"/>
           </a:xfrm>
           <a:prstGeom prst="ellipse">
             <a:avLst/>
           </a:prstGeom>
           <a:solidFill>
             <a:srgbClr val="F43F5E">
-              <a:alpha val="82000"/>
+              <a:alpha val="86000"/>
             </a:srgbClr>
           </a:solidFill>
           <a:ln w="12700">
             <a:solidFill>
-              <a:srgbClr val="F43F5E">
-                <a:alpha val="0"/>
+              <a:srgbClr val="FFFFFF">
+                <a:alpha val="28000"/>
               </a:srgbClr>
             </a:solidFill>
             <a:prstDash val="solid"/>
@@ -3638,21 +3638,21 @@
         </p:nvSpPr>
         <p:spPr>
           <a:xfrm>
-            <a:off x="530352" y="5614416"/>
-            <a:ext cx="914400" cy="914400"/>
+            <a:off x="502920" y="5596128"/>
+            <a:ext cx="950976" cy="950976"/>
           </a:xfrm>
           <a:prstGeom prst="ellipse">
             <a:avLst/>
           </a:prstGeom>
           <a:solidFill>
             <a:srgbClr val="38BDF8">
-              <a:alpha val="84000"/>
+              <a:alpha val="86000"/>
             </a:srgbClr>
           </a:solidFill>
           <a:ln w="12700">
             <a:solidFill>
-              <a:srgbClr val="38BDF8">
-                <a:alpha val="0"/>
+              <a:srgbClr val="FFFFFF">
+                <a:alpha val="28000"/>
               </a:srgbClr>
             </a:solidFill>
             <a:prstDash val="solid"/>
@@ -3674,7 +3674,7 @@
         </p:nvSpPr>
         <p:spPr>
           <a:xfrm>
-            <a:off x="10746943" y="5760720"/>
+            <a:off x="10728655" y="5760720"/>
             <a:ext cx="658368" cy="658368"/>
           </a:xfrm>
           <a:prstGeom prst="ellipse">
@@ -3682,13 +3682,13 @@
           </a:prstGeom>
           <a:solidFill>
             <a:srgbClr val="FDE047">
-              <a:alpha val="80000"/>
+              <a:alpha val="82000"/>
             </a:srgbClr>
           </a:solidFill>
           <a:ln w="12700">
             <a:solidFill>
-              <a:srgbClr val="FDE047">
-                <a:alpha val="0"/>
+              <a:srgbClr val="FFFFFF">
+                <a:alpha val="28000"/>
               </a:srgbClr>
             </a:solidFill>
             <a:prstDash val="solid"/>
@@ -3710,6 +3710,64 @@
         </p:nvSpPr>
         <p:spPr>
           <a:xfrm>
+            <a:off x="11112703" y="164592"/>
+            <a:ext cx="713232" cy="128016"/>
+          </a:xfrm>
+          <a:prstGeom prst="roundRect">
+            <a:avLst>
+              <a:gd name="adj" fmla="val 28571"/>
+            </a:avLst>
+          </a:prstGeom>
+          <a:solidFill>
+            <a:srgbClr val="38BDF8"/>
+          </a:solidFill>
+          <a:ln w="12700">
+            <a:solidFill>
+              <a:srgbClr val="38BDF8">
+                <a:alpha val="0"/>
+              </a:srgbClr>
+            </a:solidFill>
+            <a:prstDash val="solid"/>
+          </a:ln>
+        </p:spPr>
+      </p:sp>
+      <p:sp>
+        <p:nvSpPr>
+          <p:cNvPr id="6" name="Shape 4"/>
+          <p:cNvSpPr/>
+          <p:nvPr/>
+        </p:nvSpPr>
+        <p:spPr>
+          <a:xfrm>
+            <a:off x="10198303" y="219456"/>
+            <a:ext cx="841248" cy="109728"/>
+          </a:xfrm>
+          <a:prstGeom prst="roundRect">
+            <a:avLst>
+              <a:gd name="adj" fmla="val 33333"/>
+            </a:avLst>
+          </a:prstGeom>
+          <a:solidFill>
+            <a:srgbClr val="F43F5E"/>
+          </a:solidFill>
+          <a:ln w="12700">
+            <a:solidFill>
+              <a:srgbClr val="FFFFFF">
+                <a:alpha val="0"/>
+              </a:srgbClr>
+            </a:solidFill>
+            <a:prstDash val="solid"/>
+          </a:ln>
+        </p:spPr>
+      </p:sp>
+      <p:sp>
+        <p:nvSpPr>
+          <p:cNvPr id="7" name="Shape 5"/>
+          <p:cNvSpPr/>
+          <p:nvPr/>
+        </p:nvSpPr>
+        <p:spPr>
+          <a:xfrm>
             <a:off x="10134295" y="0"/>
             <a:ext cx="2057400" cy="256032"/>
           </a:xfrm>
@@ -3731,7 +3789,7 @@
       </p:sp>
       <p:sp>
         <p:nvSpPr>
-          <p:cNvPr id="6" name="Shape 4"/>
+          <p:cNvPr id="8" name="Shape 6"/>
           <p:cNvSpPr/>
           <p:nvPr/>
         </p:nvSpPr>
@@ -3758,7 +3816,7 @@
       </p:sp>
       <p:sp>
         <p:nvSpPr>
-          <p:cNvPr id="7" name="Shape 5"/>
+          <p:cNvPr id="9" name="Shape 7"/>
           <p:cNvSpPr/>
           <p:nvPr/>
         </p:nvSpPr>
@@ -3785,7 +3843,7 @@
       </p:sp>
       <p:sp>
         <p:nvSpPr>
-          <p:cNvPr id="8" name="Shape 6"/>
+          <p:cNvPr id="10" name="Shape 8"/>
           <p:cNvSpPr/>
           <p:nvPr/>
         </p:nvSpPr>
@@ -3814,7 +3872,7 @@
       </p:sp>
       <p:sp>
         <p:nvSpPr>
-          <p:cNvPr id="9" name="mdpr:mdpr-design-grammar-b3a462:title:__title:mdpr-design-grammar-b3a462"/>
+          <p:cNvPr id="11" name="mdpr:mdpr-design-grammar-b3a462:title:__title:mdpr-design-grammar-b3a462"/>
           <p:cNvSpPr txBox="1"/>
           <p:nvPr/>
         </p:nvSpPr>
@@ -3894,21 +3952,21 @@
         </p:nvSpPr>
         <p:spPr>
           <a:xfrm>
-            <a:off x="9859975" y="438912"/>
-            <a:ext cx="1024128" cy="1024128"/>
+            <a:off x="9768535" y="420624"/>
+            <a:ext cx="1078992" cy="1078992"/>
           </a:xfrm>
           <a:prstGeom prst="ellipse">
             <a:avLst/>
           </a:prstGeom>
           <a:solidFill>
             <a:srgbClr val="F43F5E">
-              <a:alpha val="82000"/>
+              <a:alpha val="86000"/>
             </a:srgbClr>
           </a:solidFill>
           <a:ln w="12700">
             <a:solidFill>
-              <a:srgbClr val="F43F5E">
-                <a:alpha val="0"/>
+              <a:srgbClr val="FFFFFF">
+                <a:alpha val="28000"/>
               </a:srgbClr>
             </a:solidFill>
             <a:prstDash val="solid"/>
@@ -3930,21 +3988,21 @@
         </p:nvSpPr>
         <p:spPr>
           <a:xfrm>
-            <a:off x="530352" y="5614416"/>
-            <a:ext cx="914400" cy="914400"/>
+            <a:off x="502920" y="5596128"/>
+            <a:ext cx="950976" cy="950976"/>
           </a:xfrm>
           <a:prstGeom prst="ellipse">
             <a:avLst/>
           </a:prstGeom>
           <a:solidFill>
             <a:srgbClr val="38BDF8">
-              <a:alpha val="84000"/>
+              <a:alpha val="86000"/>
             </a:srgbClr>
           </a:solidFill>
           <a:ln w="12700">
             <a:solidFill>
-              <a:srgbClr val="38BDF8">
-                <a:alpha val="0"/>
+              <a:srgbClr val="FFFFFF">
+                <a:alpha val="28000"/>
               </a:srgbClr>
             </a:solidFill>
             <a:prstDash val="solid"/>
@@ -3966,7 +4024,7 @@
         </p:nvSpPr>
         <p:spPr>
           <a:xfrm>
-            <a:off x="10746943" y="5760720"/>
+            <a:off x="10728655" y="5760720"/>
             <a:ext cx="658368" cy="658368"/>
           </a:xfrm>
           <a:prstGeom prst="ellipse">
@@ -3974,13 +4032,13 @@
           </a:prstGeom>
           <a:solidFill>
             <a:srgbClr val="FDE047">
-              <a:alpha val="80000"/>
+              <a:alpha val="82000"/>
             </a:srgbClr>
           </a:solidFill>
           <a:ln w="12700">
             <a:solidFill>
-              <a:srgbClr val="FDE047">
-                <a:alpha val="0"/>
+              <a:srgbClr val="FFFFFF">
+                <a:alpha val="28000"/>
               </a:srgbClr>
             </a:solidFill>
             <a:prstDash val="solid"/>
@@ -4002,6 +4060,64 @@
         </p:nvSpPr>
         <p:spPr>
           <a:xfrm>
+            <a:off x="11112703" y="164592"/>
+            <a:ext cx="713232" cy="128016"/>
+          </a:xfrm>
+          <a:prstGeom prst="roundRect">
+            <a:avLst>
+              <a:gd name="adj" fmla="val 28571"/>
+            </a:avLst>
+          </a:prstGeom>
+          <a:solidFill>
+            <a:srgbClr val="38BDF8"/>
+          </a:solidFill>
+          <a:ln w="12700">
+            <a:solidFill>
+              <a:srgbClr val="38BDF8">
+                <a:alpha val="0"/>
+              </a:srgbClr>
+            </a:solidFill>
+            <a:prstDash val="solid"/>
+          </a:ln>
+        </p:spPr>
+      </p:sp>
+      <p:sp>
+        <p:nvSpPr>
+          <p:cNvPr id="6" name="Shape 4"/>
+          <p:cNvSpPr/>
+          <p:nvPr/>
+        </p:nvSpPr>
+        <p:spPr>
+          <a:xfrm>
+            <a:off x="10198303" y="219456"/>
+            <a:ext cx="841248" cy="109728"/>
+          </a:xfrm>
+          <a:prstGeom prst="roundRect">
+            <a:avLst>
+              <a:gd name="adj" fmla="val 33333"/>
+            </a:avLst>
+          </a:prstGeom>
+          <a:solidFill>
+            <a:srgbClr val="F43F5E"/>
+          </a:solidFill>
+          <a:ln w="12700">
+            <a:solidFill>
+              <a:srgbClr val="FFFFFF">
+                <a:alpha val="0"/>
+              </a:srgbClr>
+            </a:solidFill>
+            <a:prstDash val="solid"/>
+          </a:ln>
+        </p:spPr>
+      </p:sp>
+      <p:sp>
+        <p:nvSpPr>
+          <p:cNvPr id="7" name="Shape 5"/>
+          <p:cNvSpPr/>
+          <p:nvPr/>
+        </p:nvSpPr>
+        <p:spPr>
+          <a:xfrm>
             <a:off x="10134295" y="0"/>
             <a:ext cx="2057400" cy="256032"/>
           </a:xfrm>
@@ -4023,7 +4139,7 @@
       </p:sp>
       <p:sp>
         <p:nvSpPr>
-          <p:cNvPr id="6" name="Shape 4"/>
+          <p:cNvPr id="8" name="Shape 6"/>
           <p:cNvSpPr/>
           <p:nvPr/>
         </p:nvSpPr>
@@ -4050,7 +4166,7 @@
       </p:sp>
       <p:sp>
         <p:nvSpPr>
-          <p:cNvPr id="7" name="Shape 5"/>
+          <p:cNvPr id="9" name="Shape 7"/>
           <p:cNvSpPr/>
           <p:nvPr/>
         </p:nvSpPr>
@@ -4077,7 +4193,7 @@
       </p:sp>
       <p:sp>
         <p:nvSpPr>
-          <p:cNvPr id="8" name="Shape 6"/>
+          <p:cNvPr id="10" name="Shape 8"/>
           <p:cNvSpPr/>
           <p:nvPr/>
         </p:nvSpPr>
@@ -4104,7 +4220,7 @@
       </p:sp>
       <p:sp>
         <p:nvSpPr>
-          <p:cNvPr id="9" name="mdpr:2-2-a9df10:title:__title:2-2-a9df10"/>
+          <p:cNvPr id="11" name="mdpr:2-2-a9df10:title:__title:2-2-a9df10"/>
           <p:cNvSpPr txBox="1"/>
           <p:nvPr/>
         </p:nvSpPr>
@@ -4146,7 +4262,7 @@
       </p:sp>
       <p:sp>
         <p:nvSpPr>
-          <p:cNvPr id="10" name="mdpr:2-2-a9df10:left:block-10-chunk-2"/>
+          <p:cNvPr id="12" name="mdpr:2-2-a9df10:left:block-10-chunk-2"/>
           <p:cNvSpPr txBox="1"/>
           <p:nvPr/>
         </p:nvSpPr>
@@ -4205,7 +4321,7 @@
       </p:sp>
       <p:sp>
         <p:nvSpPr>
-          <p:cNvPr id="11" name="mdpr:2-2-a9df10:right:block-10-chunk-2"/>
+          <p:cNvPr id="13" name="mdpr:2-2-a9df10:right:block-10-chunk-2"/>
           <p:cNvSpPr txBox="1"/>
           <p:nvPr/>
         </p:nvSpPr>
@@ -4302,21 +4418,21 @@
         </p:nvSpPr>
         <p:spPr>
           <a:xfrm>
-            <a:off x="9859975" y="438912"/>
-            <a:ext cx="1024128" cy="1024128"/>
+            <a:off x="9768535" y="420624"/>
+            <a:ext cx="1078992" cy="1078992"/>
           </a:xfrm>
           <a:prstGeom prst="ellipse">
             <a:avLst/>
           </a:prstGeom>
           <a:solidFill>
             <a:srgbClr val="F43F5E">
-              <a:alpha val="82000"/>
+              <a:alpha val="86000"/>
             </a:srgbClr>
           </a:solidFill>
           <a:ln w="12700">
             <a:solidFill>
-              <a:srgbClr val="F43F5E">
-                <a:alpha val="0"/>
+              <a:srgbClr val="FFFFFF">
+                <a:alpha val="28000"/>
               </a:srgbClr>
             </a:solidFill>
             <a:prstDash val="solid"/>
@@ -4338,21 +4454,21 @@
         </p:nvSpPr>
         <p:spPr>
           <a:xfrm>
-            <a:off x="530352" y="5614416"/>
-            <a:ext cx="914400" cy="914400"/>
+            <a:off x="502920" y="5596128"/>
+            <a:ext cx="950976" cy="950976"/>
           </a:xfrm>
           <a:prstGeom prst="ellipse">
             <a:avLst/>
           </a:prstGeom>
           <a:solidFill>
             <a:srgbClr val="38BDF8">
-              <a:alpha val="84000"/>
+              <a:alpha val="86000"/>
             </a:srgbClr>
           </a:solidFill>
           <a:ln w="12700">
             <a:solidFill>
-              <a:srgbClr val="38BDF8">
-                <a:alpha val="0"/>
+              <a:srgbClr val="FFFFFF">
+                <a:alpha val="28000"/>
               </a:srgbClr>
             </a:solidFill>
             <a:prstDash val="solid"/>
@@ -4374,7 +4490,7 @@
         </p:nvSpPr>
         <p:spPr>
           <a:xfrm>
-            <a:off x="10746943" y="5760720"/>
+            <a:off x="10728655" y="5760720"/>
             <a:ext cx="658368" cy="658368"/>
           </a:xfrm>
           <a:prstGeom prst="ellipse">
@@ -4382,13 +4498,13 @@
           </a:prstGeom>
           <a:solidFill>
             <a:srgbClr val="FDE047">
-              <a:alpha val="80000"/>
+              <a:alpha val="82000"/>
             </a:srgbClr>
           </a:solidFill>
           <a:ln w="12700">
             <a:solidFill>
-              <a:srgbClr val="FDE047">
-                <a:alpha val="0"/>
+              <a:srgbClr val="FFFFFF">
+                <a:alpha val="28000"/>
               </a:srgbClr>
             </a:solidFill>
             <a:prstDash val="solid"/>
@@ -4410,6 +4526,64 @@
         </p:nvSpPr>
         <p:spPr>
           <a:xfrm>
+            <a:off x="11112703" y="164592"/>
+            <a:ext cx="713232" cy="128016"/>
+          </a:xfrm>
+          <a:prstGeom prst="roundRect">
+            <a:avLst>
+              <a:gd name="adj" fmla="val 28571"/>
+            </a:avLst>
+          </a:prstGeom>
+          <a:solidFill>
+            <a:srgbClr val="38BDF8"/>
+          </a:solidFill>
+          <a:ln w="12700">
+            <a:solidFill>
+              <a:srgbClr val="38BDF8">
+                <a:alpha val="0"/>
+              </a:srgbClr>
+            </a:solidFill>
+            <a:prstDash val="solid"/>
+          </a:ln>
+        </p:spPr>
+      </p:sp>
+      <p:sp>
+        <p:nvSpPr>
+          <p:cNvPr id="6" name="Shape 4"/>
+          <p:cNvSpPr/>
+          <p:nvPr/>
+        </p:nvSpPr>
+        <p:spPr>
+          <a:xfrm>
+            <a:off x="10198303" y="219456"/>
+            <a:ext cx="841248" cy="109728"/>
+          </a:xfrm>
+          <a:prstGeom prst="roundRect">
+            <a:avLst>
+              <a:gd name="adj" fmla="val 33333"/>
+            </a:avLst>
+          </a:prstGeom>
+          <a:solidFill>
+            <a:srgbClr val="F43F5E"/>
+          </a:solidFill>
+          <a:ln w="12700">
+            <a:solidFill>
+              <a:srgbClr val="FFFFFF">
+                <a:alpha val="0"/>
+              </a:srgbClr>
+            </a:solidFill>
+            <a:prstDash val="solid"/>
+          </a:ln>
+        </p:spPr>
+      </p:sp>
+      <p:sp>
+        <p:nvSpPr>
+          <p:cNvPr id="7" name="Shape 5"/>
+          <p:cNvSpPr/>
+          <p:nvPr/>
+        </p:nvSpPr>
+        <p:spPr>
+          <a:xfrm>
             <a:off x="10134295" y="0"/>
             <a:ext cx="2057400" cy="256032"/>
           </a:xfrm>
@@ -4431,7 +4605,7 @@
       </p:sp>
       <p:sp>
         <p:nvSpPr>
-          <p:cNvPr id="6" name="Shape 4"/>
+          <p:cNvPr id="8" name="Shape 6"/>
           <p:cNvSpPr/>
           <p:nvPr/>
         </p:nvSpPr>
@@ -4458,7 +4632,7 @@
       </p:sp>
       <p:sp>
         <p:nvSpPr>
-          <p:cNvPr id="7" name="mdpr:pipeline-diagram-51792c:title:__title:pipeline-diagram-51792c"/>
+          <p:cNvPr id="9" name="mdpr:pipeline-diagram-51792c:title:__title:pipeline-diagram-51792c"/>
           <p:cNvSpPr txBox="1"/>
           <p:nvPr/>
         </p:nvSpPr>
@@ -4500,7 +4674,7 @@
       </p:sp>
       <p:sp>
         <p:nvSpPr>
-          <p:cNvPr id="8" name="Shape 6"/>
+          <p:cNvPr id="10" name="Shape 8"/>
           <p:cNvSpPr/>
           <p:nvPr/>
         </p:nvSpPr>
@@ -4524,7 +4698,7 @@
       </p:sp>
       <p:sp>
         <p:nvSpPr>
-          <p:cNvPr id="9" name="Shape 7"/>
+          <p:cNvPr id="11" name="Shape 9"/>
           <p:cNvSpPr/>
           <p:nvPr/>
         </p:nvSpPr>
@@ -4548,7 +4722,7 @@
       </p:sp>
       <p:sp>
         <p:nvSpPr>
-          <p:cNvPr id="10" name="Shape 8"/>
+          <p:cNvPr id="12" name="Shape 10"/>
           <p:cNvSpPr/>
           <p:nvPr/>
         </p:nvSpPr>
@@ -4572,7 +4746,7 @@
       </p:sp>
       <p:sp>
         <p:nvSpPr>
-          <p:cNvPr id="11" name="Shape 9"/>
+          <p:cNvPr id="13" name="Shape 11"/>
           <p:cNvSpPr/>
           <p:nvPr/>
         </p:nvSpPr>
@@ -4596,7 +4770,7 @@
       </p:sp>
       <p:sp>
         <p:nvSpPr>
-          <p:cNvPr id="12" name="Shape 10"/>
+          <p:cNvPr id="14" name="Shape 12"/>
           <p:cNvSpPr/>
           <p:nvPr/>
         </p:nvSpPr>
@@ -4620,7 +4794,7 @@
       </p:sp>
       <p:sp>
         <p:nvSpPr>
-          <p:cNvPr id="13" name="Shape 11"/>
+          <p:cNvPr id="15" name="Shape 13"/>
           <p:cNvSpPr/>
           <p:nvPr/>
         </p:nvSpPr>
@@ -4654,7 +4828,7 @@
       </p:sp>
       <p:sp>
         <p:nvSpPr>
-          <p:cNvPr id="14" name="Shape 12"/>
+          <p:cNvPr id="16" name="Shape 14"/>
           <p:cNvSpPr/>
           <p:nvPr/>
         </p:nvSpPr>
@@ -4681,7 +4855,7 @@
       </p:sp>
       <p:sp>
         <p:nvSpPr>
-          <p:cNvPr id="15" name="Shape 13"/>
+          <p:cNvPr id="17" name="Shape 15"/>
           <p:cNvSpPr/>
           <p:nvPr/>
         </p:nvSpPr>
@@ -4708,7 +4882,7 @@
       </p:sp>
       <p:sp>
         <p:nvSpPr>
-          <p:cNvPr id="16" name="Text 14"/>
+          <p:cNvPr id="18" name="Text 16"/>
           <p:cNvSpPr txBox="1"/>
           <p:nvPr/>
         </p:nvSpPr>
@@ -4752,7 +4926,7 @@
       </p:sp>
       <p:sp>
         <p:nvSpPr>
-          <p:cNvPr id="17" name="Text 15"/>
+          <p:cNvPr id="19" name="Text 17"/>
           <p:cNvSpPr txBox="1"/>
           <p:nvPr/>
         </p:nvSpPr>
@@ -4796,7 +4970,7 @@
       </p:sp>
       <p:sp>
         <p:nvSpPr>
-          <p:cNvPr id="18" name="Shape 16"/>
+          <p:cNvPr id="20" name="Shape 18"/>
           <p:cNvSpPr/>
           <p:nvPr/>
         </p:nvSpPr>
@@ -4830,7 +5004,7 @@
       </p:sp>
       <p:sp>
         <p:nvSpPr>
-          <p:cNvPr id="19" name="Shape 17"/>
+          <p:cNvPr id="21" name="Shape 19"/>
           <p:cNvSpPr/>
           <p:nvPr/>
         </p:nvSpPr>
@@ -4857,7 +5031,7 @@
       </p:sp>
       <p:sp>
         <p:nvSpPr>
-          <p:cNvPr id="20" name="Shape 18"/>
+          <p:cNvPr id="22" name="Shape 20"/>
           <p:cNvSpPr/>
           <p:nvPr/>
         </p:nvSpPr>
@@ -4884,7 +5058,7 @@
       </p:sp>
       <p:sp>
         <p:nvSpPr>
-          <p:cNvPr id="21" name="Text 19"/>
+          <p:cNvPr id="23" name="Text 21"/>
           <p:cNvSpPr txBox="1"/>
           <p:nvPr/>
         </p:nvSpPr>
@@ -4928,7 +5102,7 @@
       </p:sp>
       <p:sp>
         <p:nvSpPr>
-          <p:cNvPr id="22" name="Text 20"/>
+          <p:cNvPr id="24" name="Text 22"/>
           <p:cNvSpPr txBox="1"/>
           <p:nvPr/>
         </p:nvSpPr>
@@ -4972,7 +5146,7 @@
       </p:sp>
       <p:sp>
         <p:nvSpPr>
-          <p:cNvPr id="23" name="Shape 21"/>
+          <p:cNvPr id="25" name="Shape 23"/>
           <p:cNvSpPr/>
           <p:nvPr/>
         </p:nvSpPr>
@@ -5006,7 +5180,7 @@
       </p:sp>
       <p:sp>
         <p:nvSpPr>
-          <p:cNvPr id="24" name="Shape 22"/>
+          <p:cNvPr id="26" name="Shape 24"/>
           <p:cNvSpPr/>
           <p:nvPr/>
         </p:nvSpPr>
@@ -5033,7 +5207,7 @@
       </p:sp>
       <p:sp>
         <p:nvSpPr>
-          <p:cNvPr id="25" name="Shape 23"/>
+          <p:cNvPr id="27" name="Shape 25"/>
           <p:cNvSpPr/>
           <p:nvPr/>
         </p:nvSpPr>
@@ -5060,7 +5234,7 @@
       </p:sp>
       <p:sp>
         <p:nvSpPr>
-          <p:cNvPr id="26" name="Text 24"/>
+          <p:cNvPr id="28" name="Text 26"/>
           <p:cNvSpPr txBox="1"/>
           <p:nvPr/>
         </p:nvSpPr>
@@ -5104,7 +5278,7 @@
       </p:sp>
       <p:sp>
         <p:nvSpPr>
-          <p:cNvPr id="27" name="Text 25"/>
+          <p:cNvPr id="29" name="Text 27"/>
           <p:cNvSpPr txBox="1"/>
           <p:nvPr/>
         </p:nvSpPr>
@@ -5148,7 +5322,7 @@
       </p:sp>
       <p:sp>
         <p:nvSpPr>
-          <p:cNvPr id="28" name="Shape 26"/>
+          <p:cNvPr id="30" name="Shape 28"/>
           <p:cNvSpPr/>
           <p:nvPr/>
         </p:nvSpPr>
@@ -5182,7 +5356,7 @@
       </p:sp>
       <p:sp>
         <p:nvSpPr>
-          <p:cNvPr id="29" name="Shape 27"/>
+          <p:cNvPr id="31" name="Shape 29"/>
           <p:cNvSpPr/>
           <p:nvPr/>
         </p:nvSpPr>
@@ -5209,7 +5383,7 @@
       </p:sp>
       <p:sp>
         <p:nvSpPr>
-          <p:cNvPr id="30" name="Shape 28"/>
+          <p:cNvPr id="32" name="Shape 30"/>
           <p:cNvSpPr/>
           <p:nvPr/>
         </p:nvSpPr>
@@ -5236,7 +5410,7 @@
       </p:sp>
       <p:sp>
         <p:nvSpPr>
-          <p:cNvPr id="31" name="Text 29"/>
+          <p:cNvPr id="33" name="Text 31"/>
           <p:cNvSpPr txBox="1"/>
           <p:nvPr/>
         </p:nvSpPr>
@@ -5280,7 +5454,7 @@
       </p:sp>
       <p:sp>
         <p:nvSpPr>
-          <p:cNvPr id="32" name="Text 30"/>
+          <p:cNvPr id="34" name="Text 32"/>
           <p:cNvSpPr txBox="1"/>
           <p:nvPr/>
         </p:nvSpPr>
@@ -5324,7 +5498,7 @@
       </p:sp>
       <p:sp>
         <p:nvSpPr>
-          <p:cNvPr id="33" name="Shape 31"/>
+          <p:cNvPr id="35" name="Shape 33"/>
           <p:cNvSpPr/>
           <p:nvPr/>
         </p:nvSpPr>
@@ -5358,7 +5532,7 @@
       </p:sp>
       <p:sp>
         <p:nvSpPr>
-          <p:cNvPr id="34" name="Shape 32"/>
+          <p:cNvPr id="36" name="Shape 34"/>
           <p:cNvSpPr/>
           <p:nvPr/>
         </p:nvSpPr>
@@ -5385,7 +5559,7 @@
       </p:sp>
       <p:sp>
         <p:nvSpPr>
-          <p:cNvPr id="35" name="Shape 33"/>
+          <p:cNvPr id="37" name="Shape 35"/>
           <p:cNvSpPr/>
           <p:nvPr/>
         </p:nvSpPr>
@@ -5412,7 +5586,7 @@
       </p:sp>
       <p:sp>
         <p:nvSpPr>
-          <p:cNvPr id="36" name="Text 34"/>
+          <p:cNvPr id="38" name="Text 36"/>
           <p:cNvSpPr txBox="1"/>
           <p:nvPr/>
         </p:nvSpPr>
@@ -5456,7 +5630,7 @@
       </p:sp>
       <p:sp>
         <p:nvSpPr>
-          <p:cNvPr id="37" name="Text 35"/>
+          <p:cNvPr id="39" name="Text 37"/>
           <p:cNvSpPr txBox="1"/>
           <p:nvPr/>
         </p:nvSpPr>
@@ -5500,7 +5674,7 @@
       </p:sp>
       <p:sp>
         <p:nvSpPr>
-          <p:cNvPr id="38" name="Shape 36"/>
+          <p:cNvPr id="40" name="Shape 38"/>
           <p:cNvSpPr/>
           <p:nvPr/>
         </p:nvSpPr>
@@ -5534,7 +5708,7 @@
       </p:sp>
       <p:sp>
         <p:nvSpPr>
-          <p:cNvPr id="39" name="Shape 37"/>
+          <p:cNvPr id="41" name="Shape 39"/>
           <p:cNvSpPr/>
           <p:nvPr/>
         </p:nvSpPr>
@@ -5561,7 +5735,7 @@
       </p:sp>
       <p:sp>
         <p:nvSpPr>
-          <p:cNvPr id="40" name="Shape 38"/>
+          <p:cNvPr id="42" name="Shape 40"/>
           <p:cNvSpPr/>
           <p:nvPr/>
         </p:nvSpPr>
@@ -5588,7 +5762,7 @@
       </p:sp>
       <p:sp>
         <p:nvSpPr>
-          <p:cNvPr id="41" name="Text 39"/>
+          <p:cNvPr id="43" name="Text 41"/>
           <p:cNvSpPr txBox="1"/>
           <p:nvPr/>
         </p:nvSpPr>
@@ -5632,7 +5806,7 @@
       </p:sp>
       <p:sp>
         <p:nvSpPr>
-          <p:cNvPr id="42" name="Text 40"/>
+          <p:cNvPr id="44" name="Text 42"/>
           <p:cNvSpPr txBox="1"/>
           <p:nvPr/>
         </p:nvSpPr>
@@ -5714,21 +5888,21 @@
         </p:nvSpPr>
         <p:spPr>
           <a:xfrm>
-            <a:off x="9859975" y="438912"/>
-            <a:ext cx="1024128" cy="1024128"/>
+            <a:off x="9768535" y="420624"/>
+            <a:ext cx="1078992" cy="1078992"/>
           </a:xfrm>
           <a:prstGeom prst="ellipse">
             <a:avLst/>
           </a:prstGeom>
           <a:solidFill>
             <a:srgbClr val="F43F5E">
-              <a:alpha val="82000"/>
+              <a:alpha val="86000"/>
             </a:srgbClr>
           </a:solidFill>
           <a:ln w="12700">
             <a:solidFill>
-              <a:srgbClr val="F43F5E">
-                <a:alpha val="0"/>
+              <a:srgbClr val="FFFFFF">
+                <a:alpha val="28000"/>
               </a:srgbClr>
             </a:solidFill>
             <a:prstDash val="solid"/>
@@ -5750,21 +5924,21 @@
         </p:nvSpPr>
         <p:spPr>
           <a:xfrm>
-            <a:off x="530352" y="5614416"/>
-            <a:ext cx="914400" cy="914400"/>
+            <a:off x="502920" y="5596128"/>
+            <a:ext cx="950976" cy="950976"/>
           </a:xfrm>
           <a:prstGeom prst="ellipse">
             <a:avLst/>
           </a:prstGeom>
           <a:solidFill>
             <a:srgbClr val="38BDF8">
-              <a:alpha val="84000"/>
+              <a:alpha val="86000"/>
             </a:srgbClr>
           </a:solidFill>
           <a:ln w="12700">
             <a:solidFill>
-              <a:srgbClr val="38BDF8">
-                <a:alpha val="0"/>
+              <a:srgbClr val="FFFFFF">
+                <a:alpha val="28000"/>
               </a:srgbClr>
             </a:solidFill>
             <a:prstDash val="solid"/>
@@ -5786,7 +5960,7 @@
         </p:nvSpPr>
         <p:spPr>
           <a:xfrm>
-            <a:off x="10746943" y="5760720"/>
+            <a:off x="10728655" y="5760720"/>
             <a:ext cx="658368" cy="658368"/>
           </a:xfrm>
           <a:prstGeom prst="ellipse">
@@ -5794,13 +5968,13 @@
           </a:prstGeom>
           <a:solidFill>
             <a:srgbClr val="FDE047">
-              <a:alpha val="80000"/>
+              <a:alpha val="82000"/>
             </a:srgbClr>
           </a:solidFill>
           <a:ln w="12700">
             <a:solidFill>
-              <a:srgbClr val="FDE047">
-                <a:alpha val="0"/>
+              <a:srgbClr val="FFFFFF">
+                <a:alpha val="28000"/>
               </a:srgbClr>
             </a:solidFill>
             <a:prstDash val="solid"/>
@@ -5822,6 +5996,64 @@
         </p:nvSpPr>
         <p:spPr>
           <a:xfrm>
+            <a:off x="11112703" y="164592"/>
+            <a:ext cx="713232" cy="128016"/>
+          </a:xfrm>
+          <a:prstGeom prst="roundRect">
+            <a:avLst>
+              <a:gd name="adj" fmla="val 28571"/>
+            </a:avLst>
+          </a:prstGeom>
+          <a:solidFill>
+            <a:srgbClr val="38BDF8"/>
+          </a:solidFill>
+          <a:ln w="12700">
+            <a:solidFill>
+              <a:srgbClr val="38BDF8">
+                <a:alpha val="0"/>
+              </a:srgbClr>
+            </a:solidFill>
+            <a:prstDash val="solid"/>
+          </a:ln>
+        </p:spPr>
+      </p:sp>
+      <p:sp>
+        <p:nvSpPr>
+          <p:cNvPr id="6" name="Shape 4"/>
+          <p:cNvSpPr/>
+          <p:nvPr/>
+        </p:nvSpPr>
+        <p:spPr>
+          <a:xfrm>
+            <a:off x="10198303" y="219456"/>
+            <a:ext cx="841248" cy="109728"/>
+          </a:xfrm>
+          <a:prstGeom prst="roundRect">
+            <a:avLst>
+              <a:gd name="adj" fmla="val 33333"/>
+            </a:avLst>
+          </a:prstGeom>
+          <a:solidFill>
+            <a:srgbClr val="F43F5E"/>
+          </a:solidFill>
+          <a:ln w="12700">
+            <a:solidFill>
+              <a:srgbClr val="FFFFFF">
+                <a:alpha val="0"/>
+              </a:srgbClr>
+            </a:solidFill>
+            <a:prstDash val="solid"/>
+          </a:ln>
+        </p:spPr>
+      </p:sp>
+      <p:sp>
+        <p:nvSpPr>
+          <p:cNvPr id="7" name="Shape 5"/>
+          <p:cNvSpPr/>
+          <p:nvPr/>
+        </p:nvSpPr>
+        <p:spPr>
+          <a:xfrm>
             <a:off x="10134295" y="0"/>
             <a:ext cx="2057400" cy="256032"/>
           </a:xfrm>
@@ -5843,7 +6075,7 @@
       </p:sp>
       <p:sp>
         <p:nvSpPr>
-          <p:cNvPr id="6" name="Shape 4"/>
+          <p:cNvPr id="8" name="Shape 6"/>
           <p:cNvSpPr/>
           <p:nvPr/>
         </p:nvSpPr>
@@ -5870,7 +6102,7 @@
       </p:sp>
       <p:pic>
         <p:nvPicPr>
-          <p:cNvPr id="7" name="Image 0" descr="preencoded.png">    </p:cNvPr>
+          <p:cNvPr id="9" name="Image 0" descr="preencoded.png">    </p:cNvPr>
           <p:cNvPicPr>
             <a:picLocks noChangeAspect="1"/>
           </p:cNvPicPr>
@@ -5900,7 +6132,7 @@
       </p:pic>
       <p:sp>
         <p:nvSpPr>
-          <p:cNvPr id="8" name="Shape 5"/>
+          <p:cNvPr id="10" name="Shape 7"/>
           <p:cNvSpPr/>
           <p:nvPr/>
         </p:nvSpPr>
@@ -5936,7 +6168,7 @@
       </p:sp>
       <p:pic>
         <p:nvPicPr>
-          <p:cNvPr id="9" name="Image 1" descr="preencoded.png">    </p:cNvPr>
+          <p:cNvPr id="11" name="Image 1" descr="preencoded.png">    </p:cNvPr>
           <p:cNvPicPr>
             <a:picLocks noChangeAspect="1"/>
           </p:cNvPicPr>
@@ -5966,7 +6198,7 @@
       </p:pic>
       <p:sp>
         <p:nvSpPr>
-          <p:cNvPr id="10" name="Shape 6"/>
+          <p:cNvPr id="12" name="Shape 8"/>
           <p:cNvSpPr/>
           <p:nvPr/>
         </p:nvSpPr>
@@ -6002,7 +6234,7 @@
       </p:sp>
       <p:pic>
         <p:nvPicPr>
-          <p:cNvPr id="11" name="Image 2" descr="preencoded.png">    </p:cNvPr>
+          <p:cNvPr id="13" name="Image 2" descr="preencoded.png">    </p:cNvPr>
           <p:cNvPicPr>
             <a:picLocks noChangeAspect="1"/>
           </p:cNvPicPr>
@@ -6032,7 +6264,7 @@
       </p:pic>
       <p:sp>
         <p:nvSpPr>
-          <p:cNvPr id="12" name="Shape 7"/>
+          <p:cNvPr id="14" name="Shape 9"/>
           <p:cNvSpPr/>
           <p:nvPr/>
         </p:nvSpPr>
@@ -6068,7 +6300,7 @@
       </p:sp>
       <p:pic>
         <p:nvPicPr>
-          <p:cNvPr id="13" name="Image 3" descr="preencoded.png">    </p:cNvPr>
+          <p:cNvPr id="15" name="Image 3" descr="preencoded.png">    </p:cNvPr>
           <p:cNvPicPr>
             <a:picLocks noChangeAspect="1"/>
           </p:cNvPicPr>
@@ -6098,7 +6330,7 @@
       </p:pic>
       <p:sp>
         <p:nvSpPr>
-          <p:cNvPr id="14" name="Shape 8"/>
+          <p:cNvPr id="16" name="Shape 10"/>
           <p:cNvSpPr/>
           <p:nvPr/>
         </p:nvSpPr>
@@ -6134,7 +6366,7 @@
       </p:sp>
       <p:sp>
         <p:nvSpPr>
-          <p:cNvPr id="15" name="Shape 9"/>
+          <p:cNvPr id="17" name="Shape 11"/>
           <p:cNvSpPr/>
           <p:nvPr/>
         </p:nvSpPr>
@@ -6161,7 +6393,7 @@
       </p:sp>
       <p:sp>
         <p:nvSpPr>
-          <p:cNvPr id="16" name="Shape 10"/>
+          <p:cNvPr id="18" name="Shape 12"/>
           <p:cNvSpPr/>
           <p:nvPr/>
         </p:nvSpPr>
@@ -6188,7 +6420,7 @@
       </p:sp>
       <p:sp>
         <p:nvSpPr>
-          <p:cNvPr id="17" name="Shape 11"/>
+          <p:cNvPr id="19" name="Shape 13"/>
           <p:cNvSpPr/>
           <p:nvPr/>
         </p:nvSpPr>
@@ -6215,7 +6447,7 @@
       </p:sp>
       <p:sp>
         <p:nvSpPr>
-          <p:cNvPr id="18" name="Shape 12"/>
+          <p:cNvPr id="20" name="Shape 14"/>
           <p:cNvSpPr/>
           <p:nvPr/>
         </p:nvSpPr>
@@ -6242,7 +6474,7 @@
       </p:sp>
       <p:sp>
         <p:nvSpPr>
-          <p:cNvPr id="19" name="mdpr:1-2-e3669a:title:__title:1-2-e3669a"/>
+          <p:cNvPr id="21" name="mdpr:1-2-e3669a:title:__title:1-2-e3669a"/>
           <p:cNvSpPr txBox="1"/>
           <p:nvPr/>
         </p:nvSpPr>
@@ -6284,7 +6516,7 @@
       </p:sp>
       <p:sp>
         <p:nvSpPr>
-          <p:cNvPr id="20" name="Shape 14"/>
+          <p:cNvPr id="22" name="Shape 16"/>
           <p:cNvSpPr/>
           <p:nvPr/>
         </p:nvSpPr>
@@ -6311,7 +6543,7 @@
       </p:sp>
       <p:pic>
         <p:nvPicPr>
-          <p:cNvPr id="21" name="Image 4" descr="article icon from tabler-icons (MIT)">    </p:cNvPr>
+          <p:cNvPr id="23" name="Image 4" descr="article icon from tabler-icons (MIT)">    </p:cNvPr>
           <p:cNvPicPr>
             <a:picLocks noChangeAspect="1"/>
           </p:cNvPicPr>
@@ -6341,7 +6573,7 @@
       </p:pic>
       <p:sp>
         <p:nvSpPr>
-          <p:cNvPr id="22" name="mdpr:1-2-e3669a:item-1:block-15-chunk-1"/>
+          <p:cNvPr id="24" name="mdpr:1-2-e3669a:item-1:block-15-chunk-1"/>
           <p:cNvSpPr txBox="1"/>
           <p:nvPr/>
         </p:nvSpPr>
@@ -6400,7 +6632,7 @@
       </p:sp>
       <p:sp>
         <p:nvSpPr>
-          <p:cNvPr id="23" name="Shape 16"/>
+          <p:cNvPr id="25" name="Shape 18"/>
           <p:cNvSpPr/>
           <p:nvPr/>
         </p:nvSpPr>
@@ -6427,7 +6659,7 @@
       </p:sp>
       <p:pic>
         <p:nvPicPr>
-          <p:cNvPr id="24" name="Image 5" descr="table icon from tabler-icons (MIT)">    </p:cNvPr>
+          <p:cNvPr id="26" name="Image 5" descr="table icon from tabler-icons (MIT)">    </p:cNvPr>
           <p:cNvPicPr>
             <a:picLocks noChangeAspect="1"/>
           </p:cNvPicPr>
@@ -6457,7 +6689,7 @@
       </p:pic>
       <p:sp>
         <p:nvSpPr>
-          <p:cNvPr id="25" name="mdpr:1-2-e3669a:item-2:block-15-chunk-1"/>
+          <p:cNvPr id="27" name="mdpr:1-2-e3669a:item-2:block-15-chunk-1"/>
           <p:cNvSpPr txBox="1"/>
           <p:nvPr/>
         </p:nvSpPr>
@@ -6516,7 +6748,7 @@
       </p:sp>
       <p:sp>
         <p:nvSpPr>
-          <p:cNvPr id="26" name="Shape 18"/>
+          <p:cNvPr id="28" name="Shape 20"/>
           <p:cNvSpPr/>
           <p:nvPr/>
         </p:nvSpPr>
@@ -6543,7 +6775,7 @@
       </p:sp>
       <p:pic>
         <p:nvPicPr>
-          <p:cNvPr id="27" name="Image 6" descr="chart icon from tabler-icons (MIT)">    </p:cNvPr>
+          <p:cNvPr id="29" name="Image 6" descr="chart icon from tabler-icons (MIT)">    </p:cNvPr>
           <p:cNvPicPr>
             <a:picLocks noChangeAspect="1"/>
           </p:cNvPicPr>
@@ -6573,7 +6805,7 @@
       </p:pic>
       <p:sp>
         <p:nvSpPr>
-          <p:cNvPr id="28" name="mdpr:1-2-e3669a:item-3:block-15-chunk-1"/>
+          <p:cNvPr id="30" name="mdpr:1-2-e3669a:item-3:block-15-chunk-1"/>
           <p:cNvSpPr txBox="1"/>
           <p:nvPr/>
         </p:nvSpPr>
@@ -6632,7 +6864,7 @@
       </p:sp>
       <p:sp>
         <p:nvSpPr>
-          <p:cNvPr id="29" name="Shape 20"/>
+          <p:cNvPr id="31" name="Shape 22"/>
           <p:cNvSpPr/>
           <p:nvPr/>
         </p:nvSpPr>
@@ -6659,7 +6891,7 @@
       </p:sp>
       <p:pic>
         <p:nvPicPr>
-          <p:cNvPr id="30" name="Image 7" descr="flow icon from tabler-icons (MIT)">    </p:cNvPr>
+          <p:cNvPr id="32" name="Image 7" descr="flow icon from tabler-icons (MIT)">    </p:cNvPr>
           <p:cNvPicPr>
             <a:picLocks noChangeAspect="1"/>
           </p:cNvPicPr>
@@ -6689,7 +6921,7 @@
       </p:pic>
       <p:sp>
         <p:nvSpPr>
-          <p:cNvPr id="31" name="mdpr:1-2-e3669a:item-4:block-15-chunk-1"/>
+          <p:cNvPr id="33" name="mdpr:1-2-e3669a:item-4:block-15-chunk-1"/>
           <p:cNvSpPr txBox="1"/>
           <p:nvPr/>
         </p:nvSpPr>
@@ -6786,21 +7018,21 @@
         </p:nvSpPr>
         <p:spPr>
           <a:xfrm>
-            <a:off x="9859975" y="438912"/>
-            <a:ext cx="1024128" cy="1024128"/>
+            <a:off x="9768535" y="420624"/>
+            <a:ext cx="1078992" cy="1078992"/>
           </a:xfrm>
           <a:prstGeom prst="ellipse">
             <a:avLst/>
           </a:prstGeom>
           <a:solidFill>
             <a:srgbClr val="F43F5E">
-              <a:alpha val="82000"/>
+              <a:alpha val="86000"/>
             </a:srgbClr>
           </a:solidFill>
           <a:ln w="12700">
             <a:solidFill>
-              <a:srgbClr val="F43F5E">
-                <a:alpha val="0"/>
+              <a:srgbClr val="FFFFFF">
+                <a:alpha val="28000"/>
               </a:srgbClr>
             </a:solidFill>
             <a:prstDash val="solid"/>
@@ -6822,21 +7054,21 @@
         </p:nvSpPr>
         <p:spPr>
           <a:xfrm>
-            <a:off x="530352" y="5614416"/>
-            <a:ext cx="914400" cy="914400"/>
+            <a:off x="502920" y="5596128"/>
+            <a:ext cx="950976" cy="950976"/>
           </a:xfrm>
           <a:prstGeom prst="ellipse">
             <a:avLst/>
           </a:prstGeom>
           <a:solidFill>
             <a:srgbClr val="38BDF8">
-              <a:alpha val="84000"/>
+              <a:alpha val="86000"/>
             </a:srgbClr>
           </a:solidFill>
           <a:ln w="12700">
             <a:solidFill>
-              <a:srgbClr val="38BDF8">
-                <a:alpha val="0"/>
+              <a:srgbClr val="FFFFFF">
+                <a:alpha val="28000"/>
               </a:srgbClr>
             </a:solidFill>
             <a:prstDash val="solid"/>
@@ -6858,7 +7090,7 @@
         </p:nvSpPr>
         <p:spPr>
           <a:xfrm>
-            <a:off x="10746943" y="5760720"/>
+            <a:off x="10728655" y="5760720"/>
             <a:ext cx="658368" cy="658368"/>
           </a:xfrm>
           <a:prstGeom prst="ellipse">
@@ -6866,13 +7098,13 @@
           </a:prstGeom>
           <a:solidFill>
             <a:srgbClr val="FDE047">
-              <a:alpha val="80000"/>
+              <a:alpha val="82000"/>
             </a:srgbClr>
           </a:solidFill>
           <a:ln w="12700">
             <a:solidFill>
-              <a:srgbClr val="FDE047">
-                <a:alpha val="0"/>
+              <a:srgbClr val="FFFFFF">
+                <a:alpha val="28000"/>
               </a:srgbClr>
             </a:solidFill>
             <a:prstDash val="solid"/>
@@ -6894,6 +7126,64 @@
         </p:nvSpPr>
         <p:spPr>
           <a:xfrm>
+            <a:off x="11112703" y="164592"/>
+            <a:ext cx="713232" cy="128016"/>
+          </a:xfrm>
+          <a:prstGeom prst="roundRect">
+            <a:avLst>
+              <a:gd name="adj" fmla="val 28571"/>
+            </a:avLst>
+          </a:prstGeom>
+          <a:solidFill>
+            <a:srgbClr val="38BDF8"/>
+          </a:solidFill>
+          <a:ln w="12700">
+            <a:solidFill>
+              <a:srgbClr val="38BDF8">
+                <a:alpha val="0"/>
+              </a:srgbClr>
+            </a:solidFill>
+            <a:prstDash val="solid"/>
+          </a:ln>
+        </p:spPr>
+      </p:sp>
+      <p:sp>
+        <p:nvSpPr>
+          <p:cNvPr id="6" name="Shape 4"/>
+          <p:cNvSpPr/>
+          <p:nvPr/>
+        </p:nvSpPr>
+        <p:spPr>
+          <a:xfrm>
+            <a:off x="10198303" y="219456"/>
+            <a:ext cx="841248" cy="109728"/>
+          </a:xfrm>
+          <a:prstGeom prst="roundRect">
+            <a:avLst>
+              <a:gd name="adj" fmla="val 33333"/>
+            </a:avLst>
+          </a:prstGeom>
+          <a:solidFill>
+            <a:srgbClr val="F43F5E"/>
+          </a:solidFill>
+          <a:ln w="12700">
+            <a:solidFill>
+              <a:srgbClr val="FFFFFF">
+                <a:alpha val="0"/>
+              </a:srgbClr>
+            </a:solidFill>
+            <a:prstDash val="solid"/>
+          </a:ln>
+        </p:spPr>
+      </p:sp>
+      <p:sp>
+        <p:nvSpPr>
+          <p:cNvPr id="7" name="Shape 5"/>
+          <p:cNvSpPr/>
+          <p:nvPr/>
+        </p:nvSpPr>
+        <p:spPr>
+          <a:xfrm>
             <a:off x="10134295" y="0"/>
             <a:ext cx="2057400" cy="256032"/>
           </a:xfrm>
@@ -6915,7 +7205,7 @@
       </p:sp>
       <p:sp>
         <p:nvSpPr>
-          <p:cNvPr id="6" name="Shape 4"/>
+          <p:cNvPr id="8" name="Shape 6"/>
           <p:cNvSpPr/>
           <p:nvPr/>
         </p:nvSpPr>
@@ -6942,7 +7232,7 @@
       </p:sp>
       <p:sp>
         <p:nvSpPr>
-          <p:cNvPr id="7" name="Shape 5"/>
+          <p:cNvPr id="9" name="Shape 7"/>
           <p:cNvSpPr/>
           <p:nvPr/>
         </p:nvSpPr>
@@ -6969,7 +7259,7 @@
       </p:sp>
       <p:sp>
         <p:nvSpPr>
-          <p:cNvPr id="8" name="Shape 6"/>
+          <p:cNvPr id="10" name="Shape 8"/>
           <p:cNvSpPr/>
           <p:nvPr/>
         </p:nvSpPr>
@@ -6996,7 +7286,7 @@
       </p:sp>
       <p:sp>
         <p:nvSpPr>
-          <p:cNvPr id="9" name="mdpr:2-2-c23e9b:title:__title:2-2-c23e9b"/>
+          <p:cNvPr id="11" name="mdpr:2-2-c23e9b:title:__title:2-2-c23e9b"/>
           <p:cNvSpPr txBox="1"/>
           <p:nvPr/>
         </p:nvSpPr>
@@ -7038,7 +7328,7 @@
       </p:sp>
       <p:sp>
         <p:nvSpPr>
-          <p:cNvPr id="10" name="mdpr:2-2-c23e9b:left:block-15-chunk-2"/>
+          <p:cNvPr id="12" name="mdpr:2-2-c23e9b:left:block-15-chunk-2"/>
           <p:cNvSpPr txBox="1"/>
           <p:nvPr/>
         </p:nvSpPr>
@@ -7097,7 +7387,7 @@
       </p:sp>
       <p:sp>
         <p:nvSpPr>
-          <p:cNvPr id="11" name="mdpr:2-2-c23e9b:right:block-15-chunk-2"/>
+          <p:cNvPr id="13" name="mdpr:2-2-c23e9b:right:block-15-chunk-2"/>
           <p:cNvSpPr txBox="1"/>
           <p:nvPr/>
         </p:nvSpPr>
@@ -7194,21 +7484,21 @@
         </p:nvSpPr>
         <p:spPr>
           <a:xfrm>
-            <a:off x="9859975" y="438912"/>
-            <a:ext cx="1024128" cy="1024128"/>
+            <a:off x="9768535" y="420624"/>
+            <a:ext cx="1078992" cy="1078992"/>
           </a:xfrm>
           <a:prstGeom prst="ellipse">
             <a:avLst/>
           </a:prstGeom>
           <a:solidFill>
             <a:srgbClr val="F43F5E">
-              <a:alpha val="82000"/>
+              <a:alpha val="86000"/>
             </a:srgbClr>
           </a:solidFill>
           <a:ln w="12700">
             <a:solidFill>
-              <a:srgbClr val="F43F5E">
-                <a:alpha val="0"/>
+              <a:srgbClr val="FFFFFF">
+                <a:alpha val="28000"/>
               </a:srgbClr>
             </a:solidFill>
             <a:prstDash val="solid"/>
@@ -7230,21 +7520,21 @@
         </p:nvSpPr>
         <p:spPr>
           <a:xfrm>
-            <a:off x="530352" y="5614416"/>
-            <a:ext cx="914400" cy="914400"/>
+            <a:off x="502920" y="5596128"/>
+            <a:ext cx="950976" cy="950976"/>
           </a:xfrm>
           <a:prstGeom prst="ellipse">
             <a:avLst/>
           </a:prstGeom>
           <a:solidFill>
             <a:srgbClr val="38BDF8">
-              <a:alpha val="84000"/>
+              <a:alpha val="86000"/>
             </a:srgbClr>
           </a:solidFill>
           <a:ln w="12700">
             <a:solidFill>
-              <a:srgbClr val="38BDF8">
-                <a:alpha val="0"/>
+              <a:srgbClr val="FFFFFF">
+                <a:alpha val="28000"/>
               </a:srgbClr>
             </a:solidFill>
             <a:prstDash val="solid"/>
@@ -7266,7 +7556,7 @@
         </p:nvSpPr>
         <p:spPr>
           <a:xfrm>
-            <a:off x="10746943" y="5760720"/>
+            <a:off x="10728655" y="5760720"/>
             <a:ext cx="658368" cy="658368"/>
           </a:xfrm>
           <a:prstGeom prst="ellipse">
@@ -7274,13 +7564,13 @@
           </a:prstGeom>
           <a:solidFill>
             <a:srgbClr val="FDE047">
-              <a:alpha val="80000"/>
+              <a:alpha val="82000"/>
             </a:srgbClr>
           </a:solidFill>
           <a:ln w="12700">
             <a:solidFill>
-              <a:srgbClr val="FDE047">
-                <a:alpha val="0"/>
+              <a:srgbClr val="FFFFFF">
+                <a:alpha val="28000"/>
               </a:srgbClr>
             </a:solidFill>
             <a:prstDash val="solid"/>
@@ -7302,6 +7592,64 @@
         </p:nvSpPr>
         <p:spPr>
           <a:xfrm>
+            <a:off x="11112703" y="164592"/>
+            <a:ext cx="713232" cy="128016"/>
+          </a:xfrm>
+          <a:prstGeom prst="roundRect">
+            <a:avLst>
+              <a:gd name="adj" fmla="val 28571"/>
+            </a:avLst>
+          </a:prstGeom>
+          <a:solidFill>
+            <a:srgbClr val="38BDF8"/>
+          </a:solidFill>
+          <a:ln w="12700">
+            <a:solidFill>
+              <a:srgbClr val="38BDF8">
+                <a:alpha val="0"/>
+              </a:srgbClr>
+            </a:solidFill>
+            <a:prstDash val="solid"/>
+          </a:ln>
+        </p:spPr>
+      </p:sp>
+      <p:sp>
+        <p:nvSpPr>
+          <p:cNvPr id="6" name="Shape 4"/>
+          <p:cNvSpPr/>
+          <p:nvPr/>
+        </p:nvSpPr>
+        <p:spPr>
+          <a:xfrm>
+            <a:off x="10198303" y="219456"/>
+            <a:ext cx="841248" cy="109728"/>
+          </a:xfrm>
+          <a:prstGeom prst="roundRect">
+            <a:avLst>
+              <a:gd name="adj" fmla="val 33333"/>
+            </a:avLst>
+          </a:prstGeom>
+          <a:solidFill>
+            <a:srgbClr val="F43F5E"/>
+          </a:solidFill>
+          <a:ln w="12700">
+            <a:solidFill>
+              <a:srgbClr val="FFFFFF">
+                <a:alpha val="0"/>
+              </a:srgbClr>
+            </a:solidFill>
+            <a:prstDash val="solid"/>
+          </a:ln>
+        </p:spPr>
+      </p:sp>
+      <p:sp>
+        <p:nvSpPr>
+          <p:cNvPr id="7" name="Shape 5"/>
+          <p:cNvSpPr/>
+          <p:nvPr/>
+        </p:nvSpPr>
+        <p:spPr>
+          <a:xfrm>
             <a:off x="10134295" y="0"/>
             <a:ext cx="2057400" cy="256032"/>
           </a:xfrm>
@@ -7323,7 +7671,7 @@
       </p:sp>
       <p:sp>
         <p:nvSpPr>
-          <p:cNvPr id="6" name="Shape 4"/>
+          <p:cNvPr id="8" name="Shape 6"/>
           <p:cNvSpPr/>
           <p:nvPr/>
         </p:nvSpPr>
@@ -7350,7 +7698,7 @@
       </p:sp>
       <p:pic>
         <p:nvPicPr>
-          <p:cNvPr id="7" name="Image 0" descr="preencoded.png">    </p:cNvPr>
+          <p:cNvPr id="9" name="Image 0" descr="preencoded.png">    </p:cNvPr>
           <p:cNvPicPr>
             <a:picLocks noChangeAspect="1"/>
           </p:cNvPicPr>
@@ -7380,7 +7728,7 @@
       </p:pic>
       <p:sp>
         <p:nvSpPr>
-          <p:cNvPr id="8" name="Shape 5"/>
+          <p:cNvPr id="10" name="Shape 7"/>
           <p:cNvSpPr/>
           <p:nvPr/>
         </p:nvSpPr>
@@ -7416,7 +7764,7 @@
       </p:sp>
       <p:sp>
         <p:nvSpPr>
-          <p:cNvPr id="9" name="mdpr:table-coherence-2f9a7b:title:__title:table-coherence-2f9a7b"/>
+          <p:cNvPr id="11" name="mdpr:table-coherence-2f9a7b:title:__title:table-coherence-2f9a7b"/>
           <p:cNvSpPr txBox="1"/>
           <p:nvPr/>
         </p:nvSpPr>
@@ -8551,21 +8899,21 @@
         </p:nvSpPr>
         <p:spPr>
           <a:xfrm>
-            <a:off x="9859975" y="438912"/>
-            <a:ext cx="1024128" cy="1024128"/>
+            <a:off x="9768535" y="420624"/>
+            <a:ext cx="1078992" cy="1078992"/>
           </a:xfrm>
           <a:prstGeom prst="ellipse">
             <a:avLst/>
           </a:prstGeom>
           <a:solidFill>
             <a:srgbClr val="F43F5E">
-              <a:alpha val="82000"/>
+              <a:alpha val="86000"/>
             </a:srgbClr>
           </a:solidFill>
           <a:ln w="12700">
             <a:solidFill>
-              <a:srgbClr val="F43F5E">
-                <a:alpha val="0"/>
+              <a:srgbClr val="FFFFFF">
+                <a:alpha val="28000"/>
               </a:srgbClr>
             </a:solidFill>
             <a:prstDash val="solid"/>
@@ -8587,21 +8935,21 @@
         </p:nvSpPr>
         <p:spPr>
           <a:xfrm>
-            <a:off x="530352" y="5614416"/>
-            <a:ext cx="914400" cy="914400"/>
+            <a:off x="502920" y="5596128"/>
+            <a:ext cx="950976" cy="950976"/>
           </a:xfrm>
           <a:prstGeom prst="ellipse">
             <a:avLst/>
           </a:prstGeom>
           <a:solidFill>
             <a:srgbClr val="38BDF8">
-              <a:alpha val="84000"/>
+              <a:alpha val="86000"/>
             </a:srgbClr>
           </a:solidFill>
           <a:ln w="12700">
             <a:solidFill>
-              <a:srgbClr val="38BDF8">
-                <a:alpha val="0"/>
+              <a:srgbClr val="FFFFFF">
+                <a:alpha val="28000"/>
               </a:srgbClr>
             </a:solidFill>
             <a:prstDash val="solid"/>
@@ -8623,7 +8971,7 @@
         </p:nvSpPr>
         <p:spPr>
           <a:xfrm>
-            <a:off x="10746943" y="5760720"/>
+            <a:off x="10728655" y="5760720"/>
             <a:ext cx="658368" cy="658368"/>
           </a:xfrm>
           <a:prstGeom prst="ellipse">
@@ -8631,13 +8979,13 @@
           </a:prstGeom>
           <a:solidFill>
             <a:srgbClr val="FDE047">
-              <a:alpha val="80000"/>
+              <a:alpha val="82000"/>
             </a:srgbClr>
           </a:solidFill>
           <a:ln w="12700">
             <a:solidFill>
-              <a:srgbClr val="FDE047">
-                <a:alpha val="0"/>
+              <a:srgbClr val="FFFFFF">
+                <a:alpha val="28000"/>
               </a:srgbClr>
             </a:solidFill>
             <a:prstDash val="solid"/>
@@ -8659,6 +9007,64 @@
         </p:nvSpPr>
         <p:spPr>
           <a:xfrm>
+            <a:off x="11112703" y="164592"/>
+            <a:ext cx="713232" cy="128016"/>
+          </a:xfrm>
+          <a:prstGeom prst="roundRect">
+            <a:avLst>
+              <a:gd name="adj" fmla="val 28571"/>
+            </a:avLst>
+          </a:prstGeom>
+          <a:solidFill>
+            <a:srgbClr val="38BDF8"/>
+          </a:solidFill>
+          <a:ln w="12700">
+            <a:solidFill>
+              <a:srgbClr val="38BDF8">
+                <a:alpha val="0"/>
+              </a:srgbClr>
+            </a:solidFill>
+            <a:prstDash val="solid"/>
+          </a:ln>
+        </p:spPr>
+      </p:sp>
+      <p:sp>
+        <p:nvSpPr>
+          <p:cNvPr id="6" name="Shape 4"/>
+          <p:cNvSpPr/>
+          <p:nvPr/>
+        </p:nvSpPr>
+        <p:spPr>
+          <a:xfrm>
+            <a:off x="10198303" y="219456"/>
+            <a:ext cx="841248" cy="109728"/>
+          </a:xfrm>
+          <a:prstGeom prst="roundRect">
+            <a:avLst>
+              <a:gd name="adj" fmla="val 33333"/>
+            </a:avLst>
+          </a:prstGeom>
+          <a:solidFill>
+            <a:srgbClr val="F43F5E"/>
+          </a:solidFill>
+          <a:ln w="12700">
+            <a:solidFill>
+              <a:srgbClr val="FFFFFF">
+                <a:alpha val="0"/>
+              </a:srgbClr>
+            </a:solidFill>
+            <a:prstDash val="solid"/>
+          </a:ln>
+        </p:spPr>
+      </p:sp>
+      <p:sp>
+        <p:nvSpPr>
+          <p:cNvPr id="7" name="Shape 5"/>
+          <p:cNvSpPr/>
+          <p:nvPr/>
+        </p:nvSpPr>
+        <p:spPr>
+          <a:xfrm>
             <a:off x="10134295" y="0"/>
             <a:ext cx="2057400" cy="256032"/>
           </a:xfrm>
@@ -8680,7 +9086,7 @@
       </p:sp>
       <p:sp>
         <p:nvSpPr>
-          <p:cNvPr id="6" name="Shape 4"/>
+          <p:cNvPr id="8" name="Shape 6"/>
           <p:cNvSpPr/>
           <p:nvPr/>
         </p:nvSpPr>
@@ -8707,7 +9113,7 @@
       </p:sp>
       <p:pic>
         <p:nvPicPr>
-          <p:cNvPr id="7" name="Image 0" descr="preencoded.png">    </p:cNvPr>
+          <p:cNvPr id="9" name="Image 0" descr="preencoded.png">    </p:cNvPr>
           <p:cNvPicPr>
             <a:picLocks noChangeAspect="1"/>
           </p:cNvPicPr>
@@ -8737,7 +9143,7 @@
       </p:pic>
       <p:sp>
         <p:nvSpPr>
-          <p:cNvPr id="8" name="Shape 5"/>
+          <p:cNvPr id="10" name="Shape 7"/>
           <p:cNvSpPr/>
           <p:nvPr/>
         </p:nvSpPr>
@@ -8773,7 +9179,7 @@
       </p:sp>
       <p:sp>
         <p:nvSpPr>
-          <p:cNvPr id="9" name="Shape 6"/>
+          <p:cNvPr id="11" name="Shape 8"/>
           <p:cNvSpPr/>
           <p:nvPr/>
         </p:nvSpPr>
@@ -8800,7 +9206,7 @@
       </p:sp>
       <p:sp>
         <p:nvSpPr>
-          <p:cNvPr id="10" name="mdpr:1-2-2ff3f0:title:__title:1-2-2ff3f0"/>
+          <p:cNvPr id="12" name="mdpr:1-2-2ff3f0:title:__title:1-2-2ff3f0"/>
           <p:cNvSpPr txBox="1"/>
           <p:nvPr/>
         </p:nvSpPr>
@@ -8842,7 +9248,7 @@
       </p:sp>
       <p:sp>
         <p:nvSpPr>
-          <p:cNvPr id="11" name="mdpr:1-2-2ff3f0:body:block-19"/>
+          <p:cNvPr id="13" name="mdpr:1-2-2ff3f0:body:block-19"/>
           <p:cNvSpPr txBox="1"/>
           <p:nvPr/>
         </p:nvSpPr>
@@ -8981,7 +9387,7 @@
       </p:sp>
       <p:graphicFrame>
         <p:nvGraphicFramePr>
-          <p:cNvPr id="12" name="Chart 0" descr=""/>
+          <p:cNvPr id="14" name="Chart 0" descr=""/>
           <p:cNvGraphicFramePr/>
           <p:nvPr/>
         </p:nvGraphicFramePr>
@@ -9035,21 +9441,21 @@
         </p:nvSpPr>
         <p:spPr>
           <a:xfrm>
-            <a:off x="9859975" y="438912"/>
-            <a:ext cx="1024128" cy="1024128"/>
+            <a:off x="9768535" y="420624"/>
+            <a:ext cx="1078992" cy="1078992"/>
           </a:xfrm>
           <a:prstGeom prst="ellipse">
             <a:avLst/>
           </a:prstGeom>
           <a:solidFill>
             <a:srgbClr val="F43F5E">
-              <a:alpha val="82000"/>
+              <a:alpha val="86000"/>
             </a:srgbClr>
           </a:solidFill>
           <a:ln w="12700">
             <a:solidFill>
-              <a:srgbClr val="F43F5E">
-                <a:alpha val="0"/>
+              <a:srgbClr val="FFFFFF">
+                <a:alpha val="28000"/>
               </a:srgbClr>
             </a:solidFill>
             <a:prstDash val="solid"/>
@@ -9071,21 +9477,21 @@
         </p:nvSpPr>
         <p:spPr>
           <a:xfrm>
-            <a:off x="530352" y="5614416"/>
-            <a:ext cx="914400" cy="914400"/>
+            <a:off x="502920" y="5596128"/>
+            <a:ext cx="950976" cy="950976"/>
           </a:xfrm>
           <a:prstGeom prst="ellipse">
             <a:avLst/>
           </a:prstGeom>
           <a:solidFill>
             <a:srgbClr val="38BDF8">
-              <a:alpha val="84000"/>
+              <a:alpha val="86000"/>
             </a:srgbClr>
           </a:solidFill>
           <a:ln w="12700">
             <a:solidFill>
-              <a:srgbClr val="38BDF8">
-                <a:alpha val="0"/>
+              <a:srgbClr val="FFFFFF">
+                <a:alpha val="28000"/>
               </a:srgbClr>
             </a:solidFill>
             <a:prstDash val="solid"/>
@@ -9107,7 +9513,7 @@
         </p:nvSpPr>
         <p:spPr>
           <a:xfrm>
-            <a:off x="10746943" y="5760720"/>
+            <a:off x="10728655" y="5760720"/>
             <a:ext cx="658368" cy="658368"/>
           </a:xfrm>
           <a:prstGeom prst="ellipse">
@@ -9115,13 +9521,13 @@
           </a:prstGeom>
           <a:solidFill>
             <a:srgbClr val="FDE047">
-              <a:alpha val="80000"/>
+              <a:alpha val="82000"/>
             </a:srgbClr>
           </a:solidFill>
           <a:ln w="12700">
             <a:solidFill>
-              <a:srgbClr val="FDE047">
-                <a:alpha val="0"/>
+              <a:srgbClr val="FFFFFF">
+                <a:alpha val="28000"/>
               </a:srgbClr>
             </a:solidFill>
             <a:prstDash val="solid"/>
@@ -9143,6 +9549,64 @@
         </p:nvSpPr>
         <p:spPr>
           <a:xfrm>
+            <a:off x="11112703" y="164592"/>
+            <a:ext cx="713232" cy="128016"/>
+          </a:xfrm>
+          <a:prstGeom prst="roundRect">
+            <a:avLst>
+              <a:gd name="adj" fmla="val 28571"/>
+            </a:avLst>
+          </a:prstGeom>
+          <a:solidFill>
+            <a:srgbClr val="38BDF8"/>
+          </a:solidFill>
+          <a:ln w="12700">
+            <a:solidFill>
+              <a:srgbClr val="38BDF8">
+                <a:alpha val="0"/>
+              </a:srgbClr>
+            </a:solidFill>
+            <a:prstDash val="solid"/>
+          </a:ln>
+        </p:spPr>
+      </p:sp>
+      <p:sp>
+        <p:nvSpPr>
+          <p:cNvPr id="6" name="Shape 4"/>
+          <p:cNvSpPr/>
+          <p:nvPr/>
+        </p:nvSpPr>
+        <p:spPr>
+          <a:xfrm>
+            <a:off x="10198303" y="219456"/>
+            <a:ext cx="841248" cy="109728"/>
+          </a:xfrm>
+          <a:prstGeom prst="roundRect">
+            <a:avLst>
+              <a:gd name="adj" fmla="val 33333"/>
+            </a:avLst>
+          </a:prstGeom>
+          <a:solidFill>
+            <a:srgbClr val="F43F5E"/>
+          </a:solidFill>
+          <a:ln w="12700">
+            <a:solidFill>
+              <a:srgbClr val="FFFFFF">
+                <a:alpha val="0"/>
+              </a:srgbClr>
+            </a:solidFill>
+            <a:prstDash val="solid"/>
+          </a:ln>
+        </p:spPr>
+      </p:sp>
+      <p:sp>
+        <p:nvSpPr>
+          <p:cNvPr id="7" name="Shape 5"/>
+          <p:cNvSpPr/>
+          <p:nvPr/>
+        </p:nvSpPr>
+        <p:spPr>
+          <a:xfrm>
             <a:off x="10134295" y="0"/>
             <a:ext cx="2057400" cy="256032"/>
           </a:xfrm>
@@ -9164,7 +9628,7 @@
       </p:sp>
       <p:sp>
         <p:nvSpPr>
-          <p:cNvPr id="6" name="Shape 4"/>
+          <p:cNvPr id="8" name="Shape 6"/>
           <p:cNvSpPr/>
           <p:nvPr/>
         </p:nvSpPr>
@@ -9191,7 +9655,7 @@
       </p:sp>
       <p:pic>
         <p:nvPicPr>
-          <p:cNvPr id="7" name="Image 0" descr="preencoded.png">    </p:cNvPr>
+          <p:cNvPr id="9" name="Image 0" descr="preencoded.png">    </p:cNvPr>
           <p:cNvPicPr>
             <a:picLocks noChangeAspect="1"/>
           </p:cNvPicPr>
@@ -9221,7 +9685,7 @@
       </p:pic>
       <p:sp>
         <p:nvSpPr>
-          <p:cNvPr id="8" name="Shape 5"/>
+          <p:cNvPr id="10" name="Shape 7"/>
           <p:cNvSpPr/>
           <p:nvPr/>
         </p:nvSpPr>
@@ -9257,7 +9721,7 @@
       </p:sp>
       <p:sp>
         <p:nvSpPr>
-          <p:cNvPr id="9" name="mdpr:2-2-542095:title:__title:2-2-542095"/>
+          <p:cNvPr id="11" name="mdpr:2-2-542095:title:__title:2-2-542095"/>
           <p:cNvSpPr txBox="1"/>
           <p:nvPr/>
         </p:nvSpPr>
@@ -10180,21 +10644,21 @@
         </p:nvSpPr>
         <p:spPr>
           <a:xfrm>
-            <a:off x="9859975" y="438912"/>
-            <a:ext cx="1024128" cy="1024128"/>
+            <a:off x="9768535" y="420624"/>
+            <a:ext cx="1078992" cy="1078992"/>
           </a:xfrm>
           <a:prstGeom prst="ellipse">
             <a:avLst/>
           </a:prstGeom>
           <a:solidFill>
             <a:srgbClr val="F43F5E">
-              <a:alpha val="82000"/>
+              <a:alpha val="86000"/>
             </a:srgbClr>
           </a:solidFill>
           <a:ln w="12700">
             <a:solidFill>
-              <a:srgbClr val="F43F5E">
-                <a:alpha val="0"/>
+              <a:srgbClr val="FFFFFF">
+                <a:alpha val="28000"/>
               </a:srgbClr>
             </a:solidFill>
             <a:prstDash val="solid"/>
@@ -10216,21 +10680,21 @@
         </p:nvSpPr>
         <p:spPr>
           <a:xfrm>
-            <a:off x="530352" y="5614416"/>
-            <a:ext cx="914400" cy="914400"/>
+            <a:off x="502920" y="5596128"/>
+            <a:ext cx="950976" cy="950976"/>
           </a:xfrm>
           <a:prstGeom prst="ellipse">
             <a:avLst/>
           </a:prstGeom>
           <a:solidFill>
             <a:srgbClr val="38BDF8">
-              <a:alpha val="84000"/>
+              <a:alpha val="86000"/>
             </a:srgbClr>
           </a:solidFill>
           <a:ln w="12700">
             <a:solidFill>
-              <a:srgbClr val="38BDF8">
-                <a:alpha val="0"/>
+              <a:srgbClr val="FFFFFF">
+                <a:alpha val="28000"/>
               </a:srgbClr>
             </a:solidFill>
             <a:prstDash val="solid"/>
@@ -10252,7 +10716,7 @@
         </p:nvSpPr>
         <p:spPr>
           <a:xfrm>
-            <a:off x="10746943" y="5760720"/>
+            <a:off x="10728655" y="5760720"/>
             <a:ext cx="658368" cy="658368"/>
           </a:xfrm>
           <a:prstGeom prst="ellipse">
@@ -10260,13 +10724,13 @@
           </a:prstGeom>
           <a:solidFill>
             <a:srgbClr val="FDE047">
-              <a:alpha val="80000"/>
+              <a:alpha val="82000"/>
             </a:srgbClr>
           </a:solidFill>
           <a:ln w="12700">
             <a:solidFill>
-              <a:srgbClr val="FDE047">
-                <a:alpha val="0"/>
+              <a:srgbClr val="FFFFFF">
+                <a:alpha val="28000"/>
               </a:srgbClr>
             </a:solidFill>
             <a:prstDash val="solid"/>
@@ -10288,6 +10752,64 @@
         </p:nvSpPr>
         <p:spPr>
           <a:xfrm>
+            <a:off x="11112703" y="164592"/>
+            <a:ext cx="713232" cy="128016"/>
+          </a:xfrm>
+          <a:prstGeom prst="roundRect">
+            <a:avLst>
+              <a:gd name="adj" fmla="val 28571"/>
+            </a:avLst>
+          </a:prstGeom>
+          <a:solidFill>
+            <a:srgbClr val="38BDF8"/>
+          </a:solidFill>
+          <a:ln w="12700">
+            <a:solidFill>
+              <a:srgbClr val="38BDF8">
+                <a:alpha val="0"/>
+              </a:srgbClr>
+            </a:solidFill>
+            <a:prstDash val="solid"/>
+          </a:ln>
+        </p:spPr>
+      </p:sp>
+      <p:sp>
+        <p:nvSpPr>
+          <p:cNvPr id="6" name="Shape 4"/>
+          <p:cNvSpPr/>
+          <p:nvPr/>
+        </p:nvSpPr>
+        <p:spPr>
+          <a:xfrm>
+            <a:off x="10198303" y="219456"/>
+            <a:ext cx="841248" cy="109728"/>
+          </a:xfrm>
+          <a:prstGeom prst="roundRect">
+            <a:avLst>
+              <a:gd name="adj" fmla="val 33333"/>
+            </a:avLst>
+          </a:prstGeom>
+          <a:solidFill>
+            <a:srgbClr val="F43F5E"/>
+          </a:solidFill>
+          <a:ln w="12700">
+            <a:solidFill>
+              <a:srgbClr val="FFFFFF">
+                <a:alpha val="0"/>
+              </a:srgbClr>
+            </a:solidFill>
+            <a:prstDash val="solid"/>
+          </a:ln>
+        </p:spPr>
+      </p:sp>
+      <p:sp>
+        <p:nvSpPr>
+          <p:cNvPr id="7" name="Shape 5"/>
+          <p:cNvSpPr/>
+          <p:nvPr/>
+        </p:nvSpPr>
+        <p:spPr>
+          <a:xfrm>
             <a:off x="10134295" y="0"/>
             <a:ext cx="2057400" cy="256032"/>
           </a:xfrm>
@@ -10309,7 +10831,7 @@
       </p:sp>
       <p:sp>
         <p:nvSpPr>
-          <p:cNvPr id="6" name="Shape 4"/>
+          <p:cNvPr id="8" name="Shape 6"/>
           <p:cNvSpPr/>
           <p:nvPr/>
         </p:nvSpPr>
@@ -10336,7 +10858,7 @@
       </p:sp>
       <p:pic>
         <p:nvPicPr>
-          <p:cNvPr id="7" name="Image 0" descr="preencoded.png">    </p:cNvPr>
+          <p:cNvPr id="9" name="Image 0" descr="preencoded.png">    </p:cNvPr>
           <p:cNvPicPr>
             <a:picLocks noChangeAspect="1"/>
           </p:cNvPicPr>
@@ -10366,7 +10888,7 @@
       </p:pic>
       <p:sp>
         <p:nvSpPr>
-          <p:cNvPr id="8" name="Shape 5"/>
+          <p:cNvPr id="10" name="Shape 7"/>
           <p:cNvSpPr/>
           <p:nvPr/>
         </p:nvSpPr>
@@ -10402,7 +10924,7 @@
       </p:sp>
       <p:sp>
         <p:nvSpPr>
-          <p:cNvPr id="9" name="mdpr:1-2-b8955f:title:__title:1-2-b8955f"/>
+          <p:cNvPr id="11" name="mdpr:1-2-b8955f:title:__title:1-2-b8955f"/>
           <p:cNvSpPr txBox="1"/>
           <p:nvPr/>
         </p:nvSpPr>
@@ -10444,7 +10966,7 @@
       </p:sp>
       <p:sp>
         <p:nvSpPr>
-          <p:cNvPr id="10" name="Shape 7"/>
+          <p:cNvPr id="12" name="Shape 9"/>
           <p:cNvSpPr/>
           <p:nvPr/>
         </p:nvSpPr>
@@ -10477,7 +10999,7 @@
       </p:sp>
       <p:sp>
         <p:nvSpPr>
-          <p:cNvPr id="11" name="Shape 8"/>
+          <p:cNvPr id="13" name="Shape 10"/>
           <p:cNvSpPr/>
           <p:nvPr/>
         </p:nvSpPr>
@@ -10508,7 +11030,7 @@
       </p:sp>
       <p:sp>
         <p:nvSpPr>
-          <p:cNvPr id="12" name="Shape 9"/>
+          <p:cNvPr id="14" name="Shape 11"/>
           <p:cNvSpPr/>
           <p:nvPr/>
         </p:nvSpPr>
@@ -10539,7 +11061,7 @@
       </p:sp>
       <p:sp>
         <p:nvSpPr>
-          <p:cNvPr id="13" name="Shape 10"/>
+          <p:cNvPr id="15" name="Shape 12"/>
           <p:cNvSpPr/>
           <p:nvPr/>
         </p:nvSpPr>
@@ -10564,7 +11086,7 @@
       </p:sp>
       <p:sp>
         <p:nvSpPr>
-          <p:cNvPr id="14" name="Shape 11"/>
+          <p:cNvPr id="16" name="Shape 13"/>
           <p:cNvSpPr/>
           <p:nvPr/>
         </p:nvSpPr>
@@ -10591,7 +11113,7 @@
       </p:sp>
       <p:sp>
         <p:nvSpPr>
-          <p:cNvPr id="15" name="Text 12"/>
+          <p:cNvPr id="17" name="Text 14"/>
           <p:cNvSpPr txBox="1"/>
           <p:nvPr/>
         </p:nvSpPr>
@@ -10635,7 +11157,7 @@
       </p:sp>
       <p:sp>
         <p:nvSpPr>
-          <p:cNvPr id="16" name="Text 13"/>
+          <p:cNvPr id="18" name="Text 15"/>
           <p:cNvSpPr txBox="1"/>
           <p:nvPr/>
         </p:nvSpPr>
@@ -10677,7 +11199,7 @@
       </p:sp>
       <p:sp>
         <p:nvSpPr>
-          <p:cNvPr id="17" name="Shape 14"/>
+          <p:cNvPr id="19" name="Shape 16"/>
           <p:cNvSpPr/>
           <p:nvPr/>
         </p:nvSpPr>
@@ -10704,7 +11226,7 @@
       </p:sp>
       <p:sp>
         <p:nvSpPr>
-          <p:cNvPr id="18" name="Text 15"/>
+          <p:cNvPr id="20" name="Text 17"/>
           <p:cNvSpPr txBox="1"/>
           <p:nvPr/>
         </p:nvSpPr>
@@ -10748,7 +11270,7 @@
       </p:sp>
       <p:sp>
         <p:nvSpPr>
-          <p:cNvPr id="19" name="Shape 16"/>
+          <p:cNvPr id="21" name="Shape 18"/>
           <p:cNvSpPr/>
           <p:nvPr/>
         </p:nvSpPr>
@@ -10775,7 +11297,7 @@
       </p:sp>
       <p:sp>
         <p:nvSpPr>
-          <p:cNvPr id="20" name="Text 17"/>
+          <p:cNvPr id="22" name="Text 19"/>
           <p:cNvSpPr txBox="1"/>
           <p:nvPr/>
         </p:nvSpPr>
@@ -10819,7 +11341,7 @@
       </p:sp>
       <p:sp>
         <p:nvSpPr>
-          <p:cNvPr id="21" name="Shape 18"/>
+          <p:cNvPr id="23" name="Shape 20"/>
           <p:cNvSpPr/>
           <p:nvPr/>
         </p:nvSpPr>
@@ -10850,7 +11372,7 @@
       </p:sp>
       <p:sp>
         <p:nvSpPr>
-          <p:cNvPr id="22" name="Shape 19"/>
+          <p:cNvPr id="24" name="Shape 21"/>
           <p:cNvSpPr/>
           <p:nvPr/>
         </p:nvSpPr>
@@ -10879,7 +11401,7 @@
       </p:sp>
       <p:sp>
         <p:nvSpPr>
-          <p:cNvPr id="23" name="Shape 20"/>
+          <p:cNvPr id="25" name="Shape 22"/>
           <p:cNvSpPr/>
           <p:nvPr/>
         </p:nvSpPr>
@@ -10902,7 +11424,7 @@
       </p:sp>
       <p:sp>
         <p:nvSpPr>
-          <p:cNvPr id="24" name="Shape 21"/>
+          <p:cNvPr id="26" name="Shape 23"/>
           <p:cNvSpPr/>
           <p:nvPr/>
         </p:nvSpPr>
@@ -10927,7 +11449,7 @@
       </p:sp>
       <p:sp>
         <p:nvSpPr>
-          <p:cNvPr id="25" name="Shape 22"/>
+          <p:cNvPr id="27" name="Shape 24"/>
           <p:cNvSpPr/>
           <p:nvPr/>
         </p:nvSpPr>
@@ -10952,7 +11474,7 @@
       </p:sp>
       <p:sp>
         <p:nvSpPr>
-          <p:cNvPr id="26" name="Shape 23"/>
+          <p:cNvPr id="28" name="Shape 25"/>
           <p:cNvSpPr/>
           <p:nvPr/>
         </p:nvSpPr>
@@ -10977,7 +11499,7 @@
       </p:sp>
       <p:sp>
         <p:nvSpPr>
-          <p:cNvPr id="27" name="Text 24"/>
+          <p:cNvPr id="29" name="Text 26"/>
           <p:cNvSpPr txBox="1"/>
           <p:nvPr/>
         </p:nvSpPr>
@@ -11021,7 +11543,7 @@
       </p:sp>
       <p:sp>
         <p:nvSpPr>
-          <p:cNvPr id="28" name="Text 25"/>
+          <p:cNvPr id="30" name="Text 27"/>
           <p:cNvSpPr txBox="1"/>
           <p:nvPr/>
         </p:nvSpPr>
@@ -11063,7 +11585,7 @@
       </p:sp>
       <p:sp>
         <p:nvSpPr>
-          <p:cNvPr id="29" name="Text 26"/>
+          <p:cNvPr id="31" name="Text 28"/>
           <p:cNvSpPr txBox="1"/>
           <p:nvPr/>
         </p:nvSpPr>
@@ -11105,7 +11627,7 @@
       </p:sp>
       <p:sp>
         <p:nvSpPr>
-          <p:cNvPr id="30" name="Text 27"/>
+          <p:cNvPr id="32" name="Text 29"/>
           <p:cNvSpPr txBox="1"/>
           <p:nvPr/>
         </p:nvSpPr>
@@ -11185,21 +11707,21 @@
         </p:nvSpPr>
         <p:spPr>
           <a:xfrm>
-            <a:off x="9859975" y="438912"/>
-            <a:ext cx="1024128" cy="1024128"/>
+            <a:off x="9768535" y="420624"/>
+            <a:ext cx="1078992" cy="1078992"/>
           </a:xfrm>
           <a:prstGeom prst="ellipse">
             <a:avLst/>
           </a:prstGeom>
           <a:solidFill>
             <a:srgbClr val="F43F5E">
-              <a:alpha val="82000"/>
+              <a:alpha val="86000"/>
             </a:srgbClr>
           </a:solidFill>
           <a:ln w="12700">
             <a:solidFill>
-              <a:srgbClr val="F43F5E">
-                <a:alpha val="0"/>
+              <a:srgbClr val="FFFFFF">
+                <a:alpha val="28000"/>
               </a:srgbClr>
             </a:solidFill>
             <a:prstDash val="solid"/>
@@ -11221,21 +11743,21 @@
         </p:nvSpPr>
         <p:spPr>
           <a:xfrm>
-            <a:off x="530352" y="5614416"/>
-            <a:ext cx="914400" cy="914400"/>
+            <a:off x="502920" y="5596128"/>
+            <a:ext cx="950976" cy="950976"/>
           </a:xfrm>
           <a:prstGeom prst="ellipse">
             <a:avLst/>
           </a:prstGeom>
           <a:solidFill>
             <a:srgbClr val="38BDF8">
-              <a:alpha val="84000"/>
+              <a:alpha val="86000"/>
             </a:srgbClr>
           </a:solidFill>
           <a:ln w="12700">
             <a:solidFill>
-              <a:srgbClr val="38BDF8">
-                <a:alpha val="0"/>
+              <a:srgbClr val="FFFFFF">
+                <a:alpha val="28000"/>
               </a:srgbClr>
             </a:solidFill>
             <a:prstDash val="solid"/>
@@ -11257,7 +11779,7 @@
         </p:nvSpPr>
         <p:spPr>
           <a:xfrm>
-            <a:off x="10746943" y="5760720"/>
+            <a:off x="10728655" y="5760720"/>
             <a:ext cx="658368" cy="658368"/>
           </a:xfrm>
           <a:prstGeom prst="ellipse">
@@ -11265,13 +11787,13 @@
           </a:prstGeom>
           <a:solidFill>
             <a:srgbClr val="FDE047">
-              <a:alpha val="80000"/>
+              <a:alpha val="82000"/>
             </a:srgbClr>
           </a:solidFill>
           <a:ln w="12700">
             <a:solidFill>
-              <a:srgbClr val="FDE047">
-                <a:alpha val="0"/>
+              <a:srgbClr val="FFFFFF">
+                <a:alpha val="28000"/>
               </a:srgbClr>
             </a:solidFill>
             <a:prstDash val="solid"/>
@@ -11293,6 +11815,64 @@
         </p:nvSpPr>
         <p:spPr>
           <a:xfrm>
+            <a:off x="11112703" y="164592"/>
+            <a:ext cx="713232" cy="128016"/>
+          </a:xfrm>
+          <a:prstGeom prst="roundRect">
+            <a:avLst>
+              <a:gd name="adj" fmla="val 28571"/>
+            </a:avLst>
+          </a:prstGeom>
+          <a:solidFill>
+            <a:srgbClr val="38BDF8"/>
+          </a:solidFill>
+          <a:ln w="12700">
+            <a:solidFill>
+              <a:srgbClr val="38BDF8">
+                <a:alpha val="0"/>
+              </a:srgbClr>
+            </a:solidFill>
+            <a:prstDash val="solid"/>
+          </a:ln>
+        </p:spPr>
+      </p:sp>
+      <p:sp>
+        <p:nvSpPr>
+          <p:cNvPr id="6" name="Shape 4"/>
+          <p:cNvSpPr/>
+          <p:nvPr/>
+        </p:nvSpPr>
+        <p:spPr>
+          <a:xfrm>
+            <a:off x="10198303" y="219456"/>
+            <a:ext cx="841248" cy="109728"/>
+          </a:xfrm>
+          <a:prstGeom prst="roundRect">
+            <a:avLst>
+              <a:gd name="adj" fmla="val 33333"/>
+            </a:avLst>
+          </a:prstGeom>
+          <a:solidFill>
+            <a:srgbClr val="F43F5E"/>
+          </a:solidFill>
+          <a:ln w="12700">
+            <a:solidFill>
+              <a:srgbClr val="FFFFFF">
+                <a:alpha val="0"/>
+              </a:srgbClr>
+            </a:solidFill>
+            <a:prstDash val="solid"/>
+          </a:ln>
+        </p:spPr>
+      </p:sp>
+      <p:sp>
+        <p:nvSpPr>
+          <p:cNvPr id="7" name="Shape 5"/>
+          <p:cNvSpPr/>
+          <p:nvPr/>
+        </p:nvSpPr>
+        <p:spPr>
+          <a:xfrm>
             <a:off x="10134295" y="0"/>
             <a:ext cx="2057400" cy="256032"/>
           </a:xfrm>
@@ -11314,7 +11894,7 @@
       </p:sp>
       <p:sp>
         <p:nvSpPr>
-          <p:cNvPr id="6" name="Shape 4"/>
+          <p:cNvPr id="8" name="Shape 6"/>
           <p:cNvSpPr/>
           <p:nvPr/>
         </p:nvSpPr>
@@ -11341,7 +11921,7 @@
       </p:sp>
       <p:pic>
         <p:nvPicPr>
-          <p:cNvPr id="7" name="Image 0" descr="preencoded.png">    </p:cNvPr>
+          <p:cNvPr id="9" name="Image 0" descr="preencoded.png">    </p:cNvPr>
           <p:cNvPicPr>
             <a:picLocks noChangeAspect="1"/>
           </p:cNvPicPr>
@@ -11371,7 +11951,7 @@
       </p:pic>
       <p:sp>
         <p:nvSpPr>
-          <p:cNvPr id="8" name="Shape 5"/>
+          <p:cNvPr id="10" name="Shape 7"/>
           <p:cNvSpPr/>
           <p:nvPr/>
         </p:nvSpPr>
@@ -11407,7 +11987,7 @@
       </p:sp>
       <p:sp>
         <p:nvSpPr>
-          <p:cNvPr id="9" name="mdpr:2-2-4dc4c1:title:__title:2-2-4dc4c1"/>
+          <p:cNvPr id="11" name="mdpr:2-2-4dc4c1:title:__title:2-2-4dc4c1"/>
           <p:cNvSpPr txBox="1"/>
           <p:nvPr/>
         </p:nvSpPr>
@@ -11449,7 +12029,7 @@
       </p:sp>
       <p:sp>
         <p:nvSpPr>
-          <p:cNvPr id="10" name="Shape 7"/>
+          <p:cNvPr id="12" name="Shape 9"/>
           <p:cNvSpPr/>
           <p:nvPr/>
         </p:nvSpPr>
@@ -11476,7 +12056,7 @@
       </p:sp>
       <p:sp>
         <p:nvSpPr>
-          <p:cNvPr id="11" name="Shape 8"/>
+          <p:cNvPr id="13" name="Shape 10"/>
           <p:cNvSpPr/>
           <p:nvPr/>
         </p:nvSpPr>
@@ -11503,7 +12083,7 @@
       </p:sp>
       <p:sp>
         <p:nvSpPr>
-          <p:cNvPr id="12" name="Text 9"/>
+          <p:cNvPr id="14" name="Text 11"/>
           <p:cNvSpPr txBox="1"/>
           <p:nvPr/>
         </p:nvSpPr>
@@ -11547,7 +12127,7 @@
       </p:sp>
       <p:sp>
         <p:nvSpPr>
-          <p:cNvPr id="13" name="Text 10"/>
+          <p:cNvPr id="15" name="Text 12"/>
           <p:cNvSpPr txBox="1"/>
           <p:nvPr/>
         </p:nvSpPr>
@@ -11591,7 +12171,7 @@
       </p:sp>
       <p:sp>
         <p:nvSpPr>
-          <p:cNvPr id="14" name="Shape 11"/>
+          <p:cNvPr id="16" name="Shape 13"/>
           <p:cNvSpPr/>
           <p:nvPr/>
         </p:nvSpPr>
@@ -11618,7 +12198,7 @@
       </p:sp>
       <p:sp>
         <p:nvSpPr>
-          <p:cNvPr id="15" name="Shape 12"/>
+          <p:cNvPr id="17" name="Shape 14"/>
           <p:cNvSpPr/>
           <p:nvPr/>
         </p:nvSpPr>
@@ -11645,7 +12225,7 @@
       </p:sp>
       <p:sp>
         <p:nvSpPr>
-          <p:cNvPr id="16" name="Text 13"/>
+          <p:cNvPr id="18" name="Text 15"/>
           <p:cNvSpPr txBox="1"/>
           <p:nvPr/>
         </p:nvSpPr>
@@ -11689,7 +12269,7 @@
       </p:sp>
       <p:sp>
         <p:nvSpPr>
-          <p:cNvPr id="17" name="Text 14"/>
+          <p:cNvPr id="19" name="Text 16"/>
           <p:cNvSpPr txBox="1"/>
           <p:nvPr/>
         </p:nvSpPr>
@@ -11733,7 +12313,7 @@
       </p:sp>
       <p:sp>
         <p:nvSpPr>
-          <p:cNvPr id="18" name="Shape 15"/>
+          <p:cNvPr id="20" name="Shape 17"/>
           <p:cNvSpPr/>
           <p:nvPr/>
         </p:nvSpPr>
@@ -11760,7 +12340,7 @@
       </p:sp>
       <p:sp>
         <p:nvSpPr>
-          <p:cNvPr id="19" name="Shape 16"/>
+          <p:cNvPr id="21" name="Shape 18"/>
           <p:cNvSpPr/>
           <p:nvPr/>
         </p:nvSpPr>
@@ -11787,7 +12367,7 @@
       </p:sp>
       <p:sp>
         <p:nvSpPr>
-          <p:cNvPr id="20" name="Text 17"/>
+          <p:cNvPr id="22" name="Text 19"/>
           <p:cNvSpPr txBox="1"/>
           <p:nvPr/>
         </p:nvSpPr>
@@ -11831,7 +12411,7 @@
       </p:sp>
       <p:sp>
         <p:nvSpPr>
-          <p:cNvPr id="21" name="Text 18"/>
+          <p:cNvPr id="23" name="Text 20"/>
           <p:cNvSpPr txBox="1"/>
           <p:nvPr/>
         </p:nvSpPr>
@@ -11875,7 +12455,7 @@
       </p:sp>
       <p:sp>
         <p:nvSpPr>
-          <p:cNvPr id="22" name="Shape 19"/>
+          <p:cNvPr id="24" name="Shape 21"/>
           <p:cNvSpPr/>
           <p:nvPr/>
         </p:nvSpPr>
@@ -11902,7 +12482,7 @@
       </p:sp>
       <p:sp>
         <p:nvSpPr>
-          <p:cNvPr id="23" name="Shape 20"/>
+          <p:cNvPr id="25" name="Shape 22"/>
           <p:cNvSpPr/>
           <p:nvPr/>
         </p:nvSpPr>
@@ -11929,7 +12509,7 @@
       </p:sp>
       <p:sp>
         <p:nvSpPr>
-          <p:cNvPr id="24" name="Text 21"/>
+          <p:cNvPr id="26" name="Text 23"/>
           <p:cNvSpPr txBox="1"/>
           <p:nvPr/>
         </p:nvSpPr>
@@ -11973,7 +12553,7 @@
       </p:sp>
       <p:sp>
         <p:nvSpPr>
-          <p:cNvPr id="25" name="Text 22"/>
+          <p:cNvPr id="27" name="Text 24"/>
           <p:cNvSpPr txBox="1"/>
           <p:nvPr/>
         </p:nvSpPr>
@@ -12017,7 +12597,7 @@
       </p:sp>
       <p:sp>
         <p:nvSpPr>
-          <p:cNvPr id="26" name="Shape 23"/>
+          <p:cNvPr id="28" name="Shape 25"/>
           <p:cNvSpPr/>
           <p:nvPr/>
         </p:nvSpPr>
@@ -12041,7 +12621,7 @@
       </p:sp>
       <p:sp>
         <p:nvSpPr>
-          <p:cNvPr id="27" name="Shape 24"/>
+          <p:cNvPr id="29" name="Shape 26"/>
           <p:cNvSpPr/>
           <p:nvPr/>
         </p:nvSpPr>
@@ -12065,7 +12645,7 @@
       </p:sp>
       <p:sp>
         <p:nvSpPr>
-          <p:cNvPr id="28" name="Shape 25"/>
+          <p:cNvPr id="30" name="Shape 27"/>
           <p:cNvSpPr/>
           <p:nvPr/>
         </p:nvSpPr>
@@ -12127,21 +12707,21 @@
         </p:nvSpPr>
         <p:spPr>
           <a:xfrm>
-            <a:off x="9859975" y="438912"/>
-            <a:ext cx="1024128" cy="1024128"/>
+            <a:off x="9768535" y="420624"/>
+            <a:ext cx="1078992" cy="1078992"/>
           </a:xfrm>
           <a:prstGeom prst="ellipse">
             <a:avLst/>
           </a:prstGeom>
           <a:solidFill>
             <a:srgbClr val="F43F5E">
-              <a:alpha val="82000"/>
+              <a:alpha val="86000"/>
             </a:srgbClr>
           </a:solidFill>
           <a:ln w="12700">
             <a:solidFill>
-              <a:srgbClr val="F43F5E">
-                <a:alpha val="0"/>
+              <a:srgbClr val="FFFFFF">
+                <a:alpha val="28000"/>
               </a:srgbClr>
             </a:solidFill>
             <a:prstDash val="solid"/>
@@ -12163,21 +12743,21 @@
         </p:nvSpPr>
         <p:spPr>
           <a:xfrm>
-            <a:off x="530352" y="5614416"/>
-            <a:ext cx="914400" cy="914400"/>
+            <a:off x="502920" y="5596128"/>
+            <a:ext cx="950976" cy="950976"/>
           </a:xfrm>
           <a:prstGeom prst="ellipse">
             <a:avLst/>
           </a:prstGeom>
           <a:solidFill>
             <a:srgbClr val="38BDF8">
-              <a:alpha val="84000"/>
+              <a:alpha val="86000"/>
             </a:srgbClr>
           </a:solidFill>
           <a:ln w="12700">
             <a:solidFill>
-              <a:srgbClr val="38BDF8">
-                <a:alpha val="0"/>
+              <a:srgbClr val="FFFFFF">
+                <a:alpha val="28000"/>
               </a:srgbClr>
             </a:solidFill>
             <a:prstDash val="solid"/>
@@ -12199,7 +12779,7 @@
         </p:nvSpPr>
         <p:spPr>
           <a:xfrm>
-            <a:off x="10746943" y="5760720"/>
+            <a:off x="10728655" y="5760720"/>
             <a:ext cx="658368" cy="658368"/>
           </a:xfrm>
           <a:prstGeom prst="ellipse">
@@ -12207,13 +12787,13 @@
           </a:prstGeom>
           <a:solidFill>
             <a:srgbClr val="FDE047">
-              <a:alpha val="80000"/>
+              <a:alpha val="82000"/>
             </a:srgbClr>
           </a:solidFill>
           <a:ln w="12700">
             <a:solidFill>
-              <a:srgbClr val="FDE047">
-                <a:alpha val="0"/>
+              <a:srgbClr val="FFFFFF">
+                <a:alpha val="28000"/>
               </a:srgbClr>
             </a:solidFill>
             <a:prstDash val="solid"/>
@@ -12235,6 +12815,64 @@
         </p:nvSpPr>
         <p:spPr>
           <a:xfrm>
+            <a:off x="11112703" y="164592"/>
+            <a:ext cx="713232" cy="128016"/>
+          </a:xfrm>
+          <a:prstGeom prst="roundRect">
+            <a:avLst>
+              <a:gd name="adj" fmla="val 28571"/>
+            </a:avLst>
+          </a:prstGeom>
+          <a:solidFill>
+            <a:srgbClr val="38BDF8"/>
+          </a:solidFill>
+          <a:ln w="12700">
+            <a:solidFill>
+              <a:srgbClr val="38BDF8">
+                <a:alpha val="0"/>
+              </a:srgbClr>
+            </a:solidFill>
+            <a:prstDash val="solid"/>
+          </a:ln>
+        </p:spPr>
+      </p:sp>
+      <p:sp>
+        <p:nvSpPr>
+          <p:cNvPr id="6" name="Shape 4"/>
+          <p:cNvSpPr/>
+          <p:nvPr/>
+        </p:nvSpPr>
+        <p:spPr>
+          <a:xfrm>
+            <a:off x="10198303" y="219456"/>
+            <a:ext cx="841248" cy="109728"/>
+          </a:xfrm>
+          <a:prstGeom prst="roundRect">
+            <a:avLst>
+              <a:gd name="adj" fmla="val 33333"/>
+            </a:avLst>
+          </a:prstGeom>
+          <a:solidFill>
+            <a:srgbClr val="F43F5E"/>
+          </a:solidFill>
+          <a:ln w="12700">
+            <a:solidFill>
+              <a:srgbClr val="FFFFFF">
+                <a:alpha val="0"/>
+              </a:srgbClr>
+            </a:solidFill>
+            <a:prstDash val="solid"/>
+          </a:ln>
+        </p:spPr>
+      </p:sp>
+      <p:sp>
+        <p:nvSpPr>
+          <p:cNvPr id="7" name="Shape 5"/>
+          <p:cNvSpPr/>
+          <p:nvPr/>
+        </p:nvSpPr>
+        <p:spPr>
+          <a:xfrm>
             <a:off x="10134295" y="0"/>
             <a:ext cx="2057400" cy="256032"/>
           </a:xfrm>
@@ -12256,7 +12894,7 @@
       </p:sp>
       <p:sp>
         <p:nvSpPr>
-          <p:cNvPr id="6" name="Shape 4"/>
+          <p:cNvPr id="8" name="Shape 6"/>
           <p:cNvSpPr/>
           <p:nvPr/>
         </p:nvSpPr>
@@ -12283,7 +12921,7 @@
       </p:sp>
       <p:pic>
         <p:nvPicPr>
-          <p:cNvPr id="7" name="Image 0" descr="preencoded.png">    </p:cNvPr>
+          <p:cNvPr id="9" name="Image 0" descr="preencoded.png">    </p:cNvPr>
           <p:cNvPicPr>
             <a:picLocks noChangeAspect="1"/>
           </p:cNvPicPr>
@@ -12313,7 +12951,7 @@
       </p:pic>
       <p:sp>
         <p:nvSpPr>
-          <p:cNvPr id="8" name="Shape 5"/>
+          <p:cNvPr id="10" name="Shape 7"/>
           <p:cNvSpPr/>
           <p:nvPr/>
         </p:nvSpPr>
@@ -12349,7 +12987,7 @@
       </p:sp>
       <p:pic>
         <p:nvPicPr>
-          <p:cNvPr id="9" name="Image 1" descr="preencoded.png">    </p:cNvPr>
+          <p:cNvPr id="11" name="Image 1" descr="preencoded.png">    </p:cNvPr>
           <p:cNvPicPr>
             <a:picLocks noChangeAspect="1"/>
           </p:cNvPicPr>
@@ -12379,7 +13017,7 @@
       </p:pic>
       <p:sp>
         <p:nvSpPr>
-          <p:cNvPr id="10" name="Shape 6"/>
+          <p:cNvPr id="12" name="Shape 8"/>
           <p:cNvSpPr/>
           <p:nvPr/>
         </p:nvSpPr>
@@ -12415,7 +13053,7 @@
       </p:sp>
       <p:pic>
         <p:nvPicPr>
-          <p:cNvPr id="11" name="Image 2" descr="preencoded.png">    </p:cNvPr>
+          <p:cNvPr id="13" name="Image 2" descr="preencoded.png">    </p:cNvPr>
           <p:cNvPicPr>
             <a:picLocks noChangeAspect="1"/>
           </p:cNvPicPr>
@@ -12445,7 +13083,7 @@
       </p:pic>
       <p:sp>
         <p:nvSpPr>
-          <p:cNvPr id="12" name="Shape 7"/>
+          <p:cNvPr id="14" name="Shape 9"/>
           <p:cNvSpPr/>
           <p:nvPr/>
         </p:nvSpPr>
@@ -12481,7 +13119,7 @@
       </p:sp>
       <p:sp>
         <p:nvSpPr>
-          <p:cNvPr id="13" name="Shape 8"/>
+          <p:cNvPr id="15" name="Shape 10"/>
           <p:cNvSpPr/>
           <p:nvPr/>
         </p:nvSpPr>
@@ -12510,7 +13148,7 @@
       </p:sp>
       <p:sp>
         <p:nvSpPr>
-          <p:cNvPr id="14" name="Shape 9"/>
+          <p:cNvPr id="16" name="Shape 11"/>
           <p:cNvSpPr/>
           <p:nvPr/>
         </p:nvSpPr>
@@ -12537,7 +13175,7 @@
       </p:sp>
       <p:sp>
         <p:nvSpPr>
-          <p:cNvPr id="15" name="Shape 10"/>
+          <p:cNvPr id="17" name="Shape 12"/>
           <p:cNvSpPr/>
           <p:nvPr/>
         </p:nvSpPr>
@@ -12564,7 +13202,7 @@
       </p:sp>
       <p:sp>
         <p:nvSpPr>
-          <p:cNvPr id="16" name="Shape 11"/>
+          <p:cNvPr id="18" name="Shape 13"/>
           <p:cNvSpPr/>
           <p:nvPr/>
         </p:nvSpPr>
@@ -12591,7 +13229,7 @@
       </p:sp>
       <p:sp>
         <p:nvSpPr>
-          <p:cNvPr id="17" name="mdpr:1-2-ea42c8:title:__title:1-2-ea42c8"/>
+          <p:cNvPr id="19" name="mdpr:1-2-ea42c8:title:__title:1-2-ea42c8"/>
           <p:cNvSpPr txBox="1"/>
           <p:nvPr/>
         </p:nvSpPr>
@@ -12633,7 +13271,7 @@
       </p:sp>
       <p:sp>
         <p:nvSpPr>
-          <p:cNvPr id="18" name="Shape 13"/>
+          <p:cNvPr id="20" name="Shape 15"/>
           <p:cNvSpPr/>
           <p:nvPr/>
         </p:nvSpPr>
@@ -12660,7 +13298,7 @@
       </p:sp>
       <p:pic>
         <p:nvPicPr>
-          <p:cNvPr id="19" name="Image 3" descr="article icon from tabler-icons (MIT)">    </p:cNvPr>
+          <p:cNvPr id="21" name="Image 3" descr="article icon from tabler-icons (MIT)">    </p:cNvPr>
           <p:cNvPicPr>
             <a:picLocks noChangeAspect="1"/>
           </p:cNvPicPr>
@@ -12690,7 +13328,7 @@
       </p:pic>
       <p:sp>
         <p:nvSpPr>
-          <p:cNvPr id="20" name="mdpr:1-2-ea42c8:item-1:block-27-chunk-1"/>
+          <p:cNvPr id="22" name="mdpr:1-2-ea42c8:item-1:block-27-chunk-1"/>
           <p:cNvSpPr txBox="1"/>
           <p:nvPr/>
         </p:nvSpPr>
@@ -12749,7 +13387,7 @@
       </p:sp>
       <p:sp>
         <p:nvSpPr>
-          <p:cNvPr id="21" name="Shape 15"/>
+          <p:cNvPr id="23" name="Shape 17"/>
           <p:cNvSpPr/>
           <p:nvPr/>
         </p:nvSpPr>
@@ -12776,7 +13414,7 @@
       </p:sp>
       <p:pic>
         <p:nvPicPr>
-          <p:cNvPr id="22" name="Image 4" descr="article icon from tabler-icons (MIT)">    </p:cNvPr>
+          <p:cNvPr id="24" name="Image 4" descr="article icon from tabler-icons (MIT)">    </p:cNvPr>
           <p:cNvPicPr>
             <a:picLocks noChangeAspect="1"/>
           </p:cNvPicPr>
@@ -12806,7 +13444,7 @@
       </p:pic>
       <p:sp>
         <p:nvSpPr>
-          <p:cNvPr id="23" name="mdpr:1-2-ea42c8:item-2:block-27-chunk-1"/>
+          <p:cNvPr id="25" name="mdpr:1-2-ea42c8:item-2:block-27-chunk-1"/>
           <p:cNvSpPr txBox="1"/>
           <p:nvPr/>
         </p:nvSpPr>
@@ -12865,7 +13503,7 @@
       </p:sp>
       <p:sp>
         <p:nvSpPr>
-          <p:cNvPr id="24" name="Shape 17"/>
+          <p:cNvPr id="26" name="Shape 19"/>
           <p:cNvSpPr/>
           <p:nvPr/>
         </p:nvSpPr>
@@ -12892,7 +13530,7 @@
       </p:sp>
       <p:pic>
         <p:nvPicPr>
-          <p:cNvPr id="25" name="Image 5" descr="article icon from tabler-icons (MIT)">    </p:cNvPr>
+          <p:cNvPr id="27" name="Image 5" descr="article icon from tabler-icons (MIT)">    </p:cNvPr>
           <p:cNvPicPr>
             <a:picLocks noChangeAspect="1"/>
           </p:cNvPicPr>
@@ -12922,7 +13560,7 @@
       </p:pic>
       <p:sp>
         <p:nvSpPr>
-          <p:cNvPr id="26" name="mdpr:1-2-ea42c8:item-3:block-27-chunk-1"/>
+          <p:cNvPr id="28" name="mdpr:1-2-ea42c8:item-3:block-27-chunk-1"/>
           <p:cNvSpPr txBox="1"/>
           <p:nvPr/>
         </p:nvSpPr>
@@ -13019,21 +13657,21 @@
         </p:nvSpPr>
         <p:spPr>
           <a:xfrm>
-            <a:off x="9859975" y="438912"/>
-            <a:ext cx="1024128" cy="1024128"/>
+            <a:off x="9768535" y="420624"/>
+            <a:ext cx="1078992" cy="1078992"/>
           </a:xfrm>
           <a:prstGeom prst="ellipse">
             <a:avLst/>
           </a:prstGeom>
           <a:solidFill>
             <a:srgbClr val="F43F5E">
-              <a:alpha val="82000"/>
+              <a:alpha val="86000"/>
             </a:srgbClr>
           </a:solidFill>
           <a:ln w="12700">
             <a:solidFill>
-              <a:srgbClr val="F43F5E">
-                <a:alpha val="0"/>
+              <a:srgbClr val="FFFFFF">
+                <a:alpha val="28000"/>
               </a:srgbClr>
             </a:solidFill>
             <a:prstDash val="solid"/>
@@ -13055,21 +13693,21 @@
         </p:nvSpPr>
         <p:spPr>
           <a:xfrm>
-            <a:off x="530352" y="5614416"/>
-            <a:ext cx="914400" cy="914400"/>
+            <a:off x="502920" y="5596128"/>
+            <a:ext cx="950976" cy="950976"/>
           </a:xfrm>
           <a:prstGeom prst="ellipse">
             <a:avLst/>
           </a:prstGeom>
           <a:solidFill>
             <a:srgbClr val="38BDF8">
-              <a:alpha val="84000"/>
+              <a:alpha val="86000"/>
             </a:srgbClr>
           </a:solidFill>
           <a:ln w="12700">
             <a:solidFill>
-              <a:srgbClr val="38BDF8">
-                <a:alpha val="0"/>
+              <a:srgbClr val="FFFFFF">
+                <a:alpha val="28000"/>
               </a:srgbClr>
             </a:solidFill>
             <a:prstDash val="solid"/>
@@ -13091,7 +13729,7 @@
         </p:nvSpPr>
         <p:spPr>
           <a:xfrm>
-            <a:off x="10746943" y="5760720"/>
+            <a:off x="10728655" y="5760720"/>
             <a:ext cx="658368" cy="658368"/>
           </a:xfrm>
           <a:prstGeom prst="ellipse">
@@ -13099,13 +13737,13 @@
           </a:prstGeom>
           <a:solidFill>
             <a:srgbClr val="FDE047">
-              <a:alpha val="80000"/>
+              <a:alpha val="82000"/>
             </a:srgbClr>
           </a:solidFill>
           <a:ln w="12700">
             <a:solidFill>
-              <a:srgbClr val="FDE047">
-                <a:alpha val="0"/>
+              <a:srgbClr val="FFFFFF">
+                <a:alpha val="28000"/>
               </a:srgbClr>
             </a:solidFill>
             <a:prstDash val="solid"/>
@@ -13127,6 +13765,64 @@
         </p:nvSpPr>
         <p:spPr>
           <a:xfrm>
+            <a:off x="11112703" y="164592"/>
+            <a:ext cx="713232" cy="128016"/>
+          </a:xfrm>
+          <a:prstGeom prst="roundRect">
+            <a:avLst>
+              <a:gd name="adj" fmla="val 28571"/>
+            </a:avLst>
+          </a:prstGeom>
+          <a:solidFill>
+            <a:srgbClr val="38BDF8"/>
+          </a:solidFill>
+          <a:ln w="12700">
+            <a:solidFill>
+              <a:srgbClr val="38BDF8">
+                <a:alpha val="0"/>
+              </a:srgbClr>
+            </a:solidFill>
+            <a:prstDash val="solid"/>
+          </a:ln>
+        </p:spPr>
+      </p:sp>
+      <p:sp>
+        <p:nvSpPr>
+          <p:cNvPr id="6" name="Shape 4"/>
+          <p:cNvSpPr/>
+          <p:nvPr/>
+        </p:nvSpPr>
+        <p:spPr>
+          <a:xfrm>
+            <a:off x="10198303" y="219456"/>
+            <a:ext cx="841248" cy="109728"/>
+          </a:xfrm>
+          <a:prstGeom prst="roundRect">
+            <a:avLst>
+              <a:gd name="adj" fmla="val 33333"/>
+            </a:avLst>
+          </a:prstGeom>
+          <a:solidFill>
+            <a:srgbClr val="F43F5E"/>
+          </a:solidFill>
+          <a:ln w="12700">
+            <a:solidFill>
+              <a:srgbClr val="FFFFFF">
+                <a:alpha val="0"/>
+              </a:srgbClr>
+            </a:solidFill>
+            <a:prstDash val="solid"/>
+          </a:ln>
+        </p:spPr>
+      </p:sp>
+      <p:sp>
+        <p:nvSpPr>
+          <p:cNvPr id="7" name="Shape 5"/>
+          <p:cNvSpPr/>
+          <p:nvPr/>
+        </p:nvSpPr>
+        <p:spPr>
+          <a:xfrm>
             <a:off x="10134295" y="0"/>
             <a:ext cx="2057400" cy="256032"/>
           </a:xfrm>
@@ -13148,7 +13844,7 @@
       </p:sp>
       <p:sp>
         <p:nvSpPr>
-          <p:cNvPr id="6" name="Shape 4"/>
+          <p:cNvPr id="8" name="Shape 6"/>
           <p:cNvSpPr/>
           <p:nvPr/>
         </p:nvSpPr>
@@ -13175,7 +13871,7 @@
       </p:sp>
       <p:sp>
         <p:nvSpPr>
-          <p:cNvPr id="7" name="Shape 5"/>
+          <p:cNvPr id="9" name="Shape 7"/>
           <p:cNvSpPr/>
           <p:nvPr/>
         </p:nvSpPr>
@@ -13202,7 +13898,7 @@
       </p:sp>
       <p:sp>
         <p:nvSpPr>
-          <p:cNvPr id="8" name="Shape 6"/>
+          <p:cNvPr id="10" name="Shape 8"/>
           <p:cNvSpPr/>
           <p:nvPr/>
         </p:nvSpPr>
@@ -13229,7 +13925,7 @@
       </p:sp>
       <p:sp>
         <p:nvSpPr>
-          <p:cNvPr id="9" name="Shape 7"/>
+          <p:cNvPr id="11" name="Shape 9"/>
           <p:cNvSpPr/>
           <p:nvPr/>
         </p:nvSpPr>
@@ -13258,7 +13954,7 @@
       </p:sp>
       <p:sp>
         <p:nvSpPr>
-          <p:cNvPr id="10" name="Shape 8"/>
+          <p:cNvPr id="12" name="Shape 10"/>
           <p:cNvSpPr/>
           <p:nvPr/>
         </p:nvSpPr>
@@ -13285,7 +13981,7 @@
       </p:sp>
       <p:sp>
         <p:nvSpPr>
-          <p:cNvPr id="11" name="Shape 9"/>
+          <p:cNvPr id="13" name="Shape 11"/>
           <p:cNvSpPr/>
           <p:nvPr/>
         </p:nvSpPr>
@@ -13312,7 +14008,7 @@
       </p:sp>
       <p:sp>
         <p:nvSpPr>
-          <p:cNvPr id="12" name="Shape 10"/>
+          <p:cNvPr id="14" name="Shape 12"/>
           <p:cNvSpPr/>
           <p:nvPr/>
         </p:nvSpPr>
@@ -13339,7 +14035,7 @@
       </p:sp>
       <p:sp>
         <p:nvSpPr>
-          <p:cNvPr id="13" name="Shape 11"/>
+          <p:cNvPr id="15" name="Shape 13"/>
           <p:cNvSpPr/>
           <p:nvPr/>
         </p:nvSpPr>
@@ -13366,7 +14062,7 @@
       </p:sp>
       <p:sp>
         <p:nvSpPr>
-          <p:cNvPr id="14" name="Shape 12"/>
+          <p:cNvPr id="16" name="Shape 14"/>
           <p:cNvSpPr/>
           <p:nvPr/>
         </p:nvSpPr>
@@ -13393,7 +14089,7 @@
       </p:sp>
       <p:sp>
         <p:nvSpPr>
-          <p:cNvPr id="15" name="Shape 13"/>
+          <p:cNvPr id="17" name="Shape 15"/>
           <p:cNvSpPr/>
           <p:nvPr/>
         </p:nvSpPr>
@@ -13420,7 +14116,7 @@
       </p:sp>
       <p:sp>
         <p:nvSpPr>
-          <p:cNvPr id="16" name="Shape 14"/>
+          <p:cNvPr id="18" name="Shape 16"/>
           <p:cNvSpPr/>
           <p:nvPr/>
         </p:nvSpPr>
@@ -13447,7 +14143,7 @@
       </p:sp>
       <p:sp>
         <p:nvSpPr>
-          <p:cNvPr id="17" name="Shape 15"/>
+          <p:cNvPr id="19" name="Shape 17"/>
           <p:cNvSpPr/>
           <p:nvPr/>
         </p:nvSpPr>
@@ -13474,7 +14170,7 @@
       </p:sp>
       <p:sp>
         <p:nvSpPr>
-          <p:cNvPr id="18" name="Shape 16"/>
+          <p:cNvPr id="20" name="Shape 18"/>
           <p:cNvSpPr/>
           <p:nvPr/>
         </p:nvSpPr>
@@ -13501,7 +14197,7 @@
       </p:sp>
       <p:sp>
         <p:nvSpPr>
-          <p:cNvPr id="19" name="Shape 17"/>
+          <p:cNvPr id="21" name="Shape 19"/>
           <p:cNvSpPr/>
           <p:nvPr/>
         </p:nvSpPr>
@@ -13528,7 +14224,7 @@
       </p:sp>
       <p:sp>
         <p:nvSpPr>
-          <p:cNvPr id="20" name="Shape 18"/>
+          <p:cNvPr id="22" name="Shape 20"/>
           <p:cNvSpPr/>
           <p:nvPr/>
         </p:nvSpPr>
@@ -13555,7 +14251,7 @@
       </p:sp>
       <p:sp>
         <p:nvSpPr>
-          <p:cNvPr id="21" name="Shape 19"/>
+          <p:cNvPr id="23" name="Shape 21"/>
           <p:cNvSpPr/>
           <p:nvPr/>
         </p:nvSpPr>
@@ -13582,7 +14278,7 @@
       </p:sp>
       <p:sp>
         <p:nvSpPr>
-          <p:cNvPr id="22" name="Shape 20"/>
+          <p:cNvPr id="24" name="Shape 22"/>
           <p:cNvSpPr/>
           <p:nvPr/>
         </p:nvSpPr>
@@ -13609,7 +14305,7 @@
       </p:sp>
       <p:sp>
         <p:nvSpPr>
-          <p:cNvPr id="23" name="Shape 21"/>
+          <p:cNvPr id="25" name="Shape 23"/>
           <p:cNvSpPr/>
           <p:nvPr/>
         </p:nvSpPr>
@@ -13636,7 +14332,7 @@
       </p:sp>
       <p:sp>
         <p:nvSpPr>
-          <p:cNvPr id="24" name="mdpr:1-2-0772f8:title:__title:1-2-0772f8"/>
+          <p:cNvPr id="26" name="mdpr:1-2-0772f8:title:__title:1-2-0772f8"/>
           <p:cNvSpPr txBox="1"/>
           <p:nvPr/>
         </p:nvSpPr>
@@ -13678,7 +14374,7 @@
       </p:sp>
       <p:sp>
         <p:nvSpPr>
-          <p:cNvPr id="25" name="mdpr:1-2-0772f8:toc-item-1:toc-item-1"/>
+          <p:cNvPr id="27" name="mdpr:1-2-0772f8:toc-item-1:toc-item-1"/>
           <p:cNvSpPr txBox="1"/>
           <p:nvPr/>
         </p:nvSpPr>
@@ -13720,7 +14416,7 @@
       </p:sp>
       <p:sp>
         <p:nvSpPr>
-          <p:cNvPr id="26" name="mdpr:1-2-0772f8:toc-item-2:toc-item-2"/>
+          <p:cNvPr id="28" name="mdpr:1-2-0772f8:toc-item-2:toc-item-2"/>
           <p:cNvSpPr txBox="1"/>
           <p:nvPr/>
         </p:nvSpPr>
@@ -13762,7 +14458,7 @@
       </p:sp>
       <p:sp>
         <p:nvSpPr>
-          <p:cNvPr id="27" name="mdpr:1-2-0772f8:toc-item-3:toc-item-3"/>
+          <p:cNvPr id="29" name="mdpr:1-2-0772f8:toc-item-3:toc-item-3"/>
           <p:cNvSpPr txBox="1"/>
           <p:nvPr/>
         </p:nvSpPr>
@@ -13804,7 +14500,7 @@
       </p:sp>
       <p:sp>
         <p:nvSpPr>
-          <p:cNvPr id="28" name="mdpr:1-2-0772f8:toc-item-4:toc-item-4"/>
+          <p:cNvPr id="30" name="mdpr:1-2-0772f8:toc-item-4:toc-item-4"/>
           <p:cNvSpPr txBox="1"/>
           <p:nvPr/>
         </p:nvSpPr>
@@ -13846,7 +14542,7 @@
       </p:sp>
       <p:sp>
         <p:nvSpPr>
-          <p:cNvPr id="29" name="mdpr:1-2-0772f8:toc-item-5:toc-item-5"/>
+          <p:cNvPr id="31" name="mdpr:1-2-0772f8:toc-item-5:toc-item-5"/>
           <p:cNvSpPr txBox="1"/>
           <p:nvPr/>
         </p:nvSpPr>
@@ -13888,7 +14584,7 @@
       </p:sp>
       <p:sp>
         <p:nvSpPr>
-          <p:cNvPr id="30" name="mdpr:1-2-0772f8:toc-item-6:toc-item-6"/>
+          <p:cNvPr id="32" name="mdpr:1-2-0772f8:toc-item-6:toc-item-6"/>
           <p:cNvSpPr txBox="1"/>
           <p:nvPr/>
         </p:nvSpPr>
@@ -13930,7 +14626,7 @@
       </p:sp>
       <p:sp>
         <p:nvSpPr>
-          <p:cNvPr id="31" name="mdpr:1-2-0772f8:toc-item-7:toc-item-7"/>
+          <p:cNvPr id="33" name="mdpr:1-2-0772f8:toc-item-7:toc-item-7"/>
           <p:cNvSpPr txBox="1"/>
           <p:nvPr/>
         </p:nvSpPr>
@@ -13972,7 +14668,7 @@
       </p:sp>
       <p:sp>
         <p:nvSpPr>
-          <p:cNvPr id="32" name="mdpr:1-2-0772f8:toc-item-8:toc-item-8"/>
+          <p:cNvPr id="34" name="mdpr:1-2-0772f8:toc-item-8:toc-item-8"/>
           <p:cNvSpPr txBox="1"/>
           <p:nvPr/>
         </p:nvSpPr>
@@ -14014,7 +14710,7 @@
       </p:sp>
       <p:sp>
         <p:nvSpPr>
-          <p:cNvPr id="33" name="mdpr:1-2-0772f8:toc-item-9:toc-item-9"/>
+          <p:cNvPr id="35" name="mdpr:1-2-0772f8:toc-item-9:toc-item-9"/>
           <p:cNvSpPr txBox="1"/>
           <p:nvPr/>
         </p:nvSpPr>
@@ -14056,7 +14752,7 @@
       </p:sp>
       <p:sp>
         <p:nvSpPr>
-          <p:cNvPr id="34" name="mdpr:1-2-0772f8:toc-item-10:toc-item-10"/>
+          <p:cNvPr id="36" name="mdpr:1-2-0772f8:toc-item-10:toc-item-10"/>
           <p:cNvSpPr txBox="1"/>
           <p:nvPr/>
         </p:nvSpPr>
@@ -14098,7 +14794,7 @@
       </p:sp>
       <p:sp>
         <p:nvSpPr>
-          <p:cNvPr id="35" name="mdpr:1-2-0772f8:toc-item-11:toc-item-11"/>
+          <p:cNvPr id="37" name="mdpr:1-2-0772f8:toc-item-11:toc-item-11"/>
           <p:cNvSpPr txBox="1"/>
           <p:nvPr/>
         </p:nvSpPr>
@@ -14140,7 +14836,7 @@
       </p:sp>
       <p:sp>
         <p:nvSpPr>
-          <p:cNvPr id="36" name="mdpr:1-2-0772f8:toc-item-12:toc-item-12"/>
+          <p:cNvPr id="38" name="mdpr:1-2-0772f8:toc-item-12:toc-item-12"/>
           <p:cNvSpPr txBox="1"/>
           <p:nvPr/>
         </p:nvSpPr>
@@ -14182,7 +14878,7 @@
       </p:sp>
       <p:sp>
         <p:nvSpPr>
-          <p:cNvPr id="37" name="mdpr:1-2-0772f8:toc-item-13:toc-item-13"/>
+          <p:cNvPr id="39" name="mdpr:1-2-0772f8:toc-item-13:toc-item-13"/>
           <p:cNvSpPr txBox="1"/>
           <p:nvPr/>
         </p:nvSpPr>
@@ -14224,7 +14920,7 @@
       </p:sp>
       <p:sp>
         <p:nvSpPr>
-          <p:cNvPr id="38" name="mdpr:1-2-0772f8:toc-item-14:toc-item-14"/>
+          <p:cNvPr id="40" name="mdpr:1-2-0772f8:toc-item-14:toc-item-14"/>
           <p:cNvSpPr txBox="1"/>
           <p:nvPr/>
         </p:nvSpPr>
@@ -14304,21 +15000,21 @@
         </p:nvSpPr>
         <p:spPr>
           <a:xfrm>
-            <a:off x="9859975" y="438912"/>
-            <a:ext cx="1024128" cy="1024128"/>
+            <a:off x="9768535" y="420624"/>
+            <a:ext cx="1078992" cy="1078992"/>
           </a:xfrm>
           <a:prstGeom prst="ellipse">
             <a:avLst/>
           </a:prstGeom>
           <a:solidFill>
             <a:srgbClr val="F43F5E">
-              <a:alpha val="82000"/>
+              <a:alpha val="86000"/>
             </a:srgbClr>
           </a:solidFill>
           <a:ln w="12700">
             <a:solidFill>
-              <a:srgbClr val="F43F5E">
-                <a:alpha val="0"/>
+              <a:srgbClr val="FFFFFF">
+                <a:alpha val="28000"/>
               </a:srgbClr>
             </a:solidFill>
             <a:prstDash val="solid"/>
@@ -14340,21 +15036,21 @@
         </p:nvSpPr>
         <p:spPr>
           <a:xfrm>
-            <a:off x="530352" y="5614416"/>
-            <a:ext cx="914400" cy="914400"/>
+            <a:off x="502920" y="5596128"/>
+            <a:ext cx="950976" cy="950976"/>
           </a:xfrm>
           <a:prstGeom prst="ellipse">
             <a:avLst/>
           </a:prstGeom>
           <a:solidFill>
             <a:srgbClr val="38BDF8">
-              <a:alpha val="84000"/>
+              <a:alpha val="86000"/>
             </a:srgbClr>
           </a:solidFill>
           <a:ln w="12700">
             <a:solidFill>
-              <a:srgbClr val="38BDF8">
-                <a:alpha val="0"/>
+              <a:srgbClr val="FFFFFF">
+                <a:alpha val="28000"/>
               </a:srgbClr>
             </a:solidFill>
             <a:prstDash val="solid"/>
@@ -14376,7 +15072,7 @@
         </p:nvSpPr>
         <p:spPr>
           <a:xfrm>
-            <a:off x="10746943" y="5760720"/>
+            <a:off x="10728655" y="5760720"/>
             <a:ext cx="658368" cy="658368"/>
           </a:xfrm>
           <a:prstGeom prst="ellipse">
@@ -14384,13 +15080,13 @@
           </a:prstGeom>
           <a:solidFill>
             <a:srgbClr val="FDE047">
-              <a:alpha val="80000"/>
+              <a:alpha val="82000"/>
             </a:srgbClr>
           </a:solidFill>
           <a:ln w="12700">
             <a:solidFill>
-              <a:srgbClr val="FDE047">
-                <a:alpha val="0"/>
+              <a:srgbClr val="FFFFFF">
+                <a:alpha val="28000"/>
               </a:srgbClr>
             </a:solidFill>
             <a:prstDash val="solid"/>
@@ -14412,6 +15108,64 @@
         </p:nvSpPr>
         <p:spPr>
           <a:xfrm>
+            <a:off x="11112703" y="164592"/>
+            <a:ext cx="713232" cy="128016"/>
+          </a:xfrm>
+          <a:prstGeom prst="roundRect">
+            <a:avLst>
+              <a:gd name="adj" fmla="val 28571"/>
+            </a:avLst>
+          </a:prstGeom>
+          <a:solidFill>
+            <a:srgbClr val="38BDF8"/>
+          </a:solidFill>
+          <a:ln w="12700">
+            <a:solidFill>
+              <a:srgbClr val="38BDF8">
+                <a:alpha val="0"/>
+              </a:srgbClr>
+            </a:solidFill>
+            <a:prstDash val="solid"/>
+          </a:ln>
+        </p:spPr>
+      </p:sp>
+      <p:sp>
+        <p:nvSpPr>
+          <p:cNvPr id="6" name="Shape 4"/>
+          <p:cNvSpPr/>
+          <p:nvPr/>
+        </p:nvSpPr>
+        <p:spPr>
+          <a:xfrm>
+            <a:off x="10198303" y="219456"/>
+            <a:ext cx="841248" cy="109728"/>
+          </a:xfrm>
+          <a:prstGeom prst="roundRect">
+            <a:avLst>
+              <a:gd name="adj" fmla="val 33333"/>
+            </a:avLst>
+          </a:prstGeom>
+          <a:solidFill>
+            <a:srgbClr val="F43F5E"/>
+          </a:solidFill>
+          <a:ln w="12700">
+            <a:solidFill>
+              <a:srgbClr val="FFFFFF">
+                <a:alpha val="0"/>
+              </a:srgbClr>
+            </a:solidFill>
+            <a:prstDash val="solid"/>
+          </a:ln>
+        </p:spPr>
+      </p:sp>
+      <p:sp>
+        <p:nvSpPr>
+          <p:cNvPr id="7" name="Shape 5"/>
+          <p:cNvSpPr/>
+          <p:nvPr/>
+        </p:nvSpPr>
+        <p:spPr>
+          <a:xfrm>
             <a:off x="10134295" y="0"/>
             <a:ext cx="2057400" cy="256032"/>
           </a:xfrm>
@@ -14433,7 +15187,7 @@
       </p:sp>
       <p:sp>
         <p:nvSpPr>
-          <p:cNvPr id="6" name="Shape 4"/>
+          <p:cNvPr id="8" name="Shape 6"/>
           <p:cNvSpPr/>
           <p:nvPr/>
         </p:nvSpPr>
@@ -14460,7 +15214,7 @@
       </p:sp>
       <p:sp>
         <p:nvSpPr>
-          <p:cNvPr id="7" name="Shape 5"/>
+          <p:cNvPr id="9" name="Shape 7"/>
           <p:cNvSpPr/>
           <p:nvPr/>
         </p:nvSpPr>
@@ -14487,7 +15241,7 @@
       </p:sp>
       <p:sp>
         <p:nvSpPr>
-          <p:cNvPr id="8" name="Shape 6"/>
+          <p:cNvPr id="10" name="Shape 8"/>
           <p:cNvSpPr/>
           <p:nvPr/>
         </p:nvSpPr>
@@ -14514,7 +15268,7 @@
       </p:sp>
       <p:sp>
         <p:nvSpPr>
-          <p:cNvPr id="9" name="mdpr:2-2-4f71ba:title:__title:2-2-4f71ba"/>
+          <p:cNvPr id="11" name="mdpr:2-2-4f71ba:title:__title:2-2-4f71ba"/>
           <p:cNvSpPr txBox="1"/>
           <p:nvPr/>
         </p:nvSpPr>
@@ -14556,7 +15310,7 @@
       </p:sp>
       <p:sp>
         <p:nvSpPr>
-          <p:cNvPr id="10" name="mdpr:2-2-4f71ba:left:block-27-chunk-2"/>
+          <p:cNvPr id="12" name="mdpr:2-2-4f71ba:left:block-27-chunk-2"/>
           <p:cNvSpPr txBox="1"/>
           <p:nvPr/>
         </p:nvSpPr>
@@ -14615,7 +15369,7 @@
       </p:sp>
       <p:sp>
         <p:nvSpPr>
-          <p:cNvPr id="11" name="mdpr:2-2-4f71ba:right:block-27-chunk-2"/>
+          <p:cNvPr id="13" name="mdpr:2-2-4f71ba:right:block-27-chunk-2"/>
           <p:cNvSpPr txBox="1"/>
           <p:nvPr/>
         </p:nvSpPr>
@@ -14712,21 +15466,21 @@
         </p:nvSpPr>
         <p:spPr>
           <a:xfrm>
-            <a:off x="9859975" y="438912"/>
-            <a:ext cx="1024128" cy="1024128"/>
+            <a:off x="9768535" y="420624"/>
+            <a:ext cx="1078992" cy="1078992"/>
           </a:xfrm>
           <a:prstGeom prst="ellipse">
             <a:avLst/>
           </a:prstGeom>
           <a:solidFill>
             <a:srgbClr val="F43F5E">
-              <a:alpha val="82000"/>
+              <a:alpha val="86000"/>
             </a:srgbClr>
           </a:solidFill>
           <a:ln w="12700">
             <a:solidFill>
-              <a:srgbClr val="F43F5E">
-                <a:alpha val="0"/>
+              <a:srgbClr val="FFFFFF">
+                <a:alpha val="28000"/>
               </a:srgbClr>
             </a:solidFill>
             <a:prstDash val="solid"/>
@@ -14748,21 +15502,21 @@
         </p:nvSpPr>
         <p:spPr>
           <a:xfrm>
-            <a:off x="530352" y="5614416"/>
-            <a:ext cx="914400" cy="914400"/>
+            <a:off x="502920" y="5596128"/>
+            <a:ext cx="950976" cy="950976"/>
           </a:xfrm>
           <a:prstGeom prst="ellipse">
             <a:avLst/>
           </a:prstGeom>
           <a:solidFill>
             <a:srgbClr val="38BDF8">
-              <a:alpha val="84000"/>
+              <a:alpha val="86000"/>
             </a:srgbClr>
           </a:solidFill>
           <a:ln w="12700">
             <a:solidFill>
-              <a:srgbClr val="38BDF8">
-                <a:alpha val="0"/>
+              <a:srgbClr val="FFFFFF">
+                <a:alpha val="28000"/>
               </a:srgbClr>
             </a:solidFill>
             <a:prstDash val="solid"/>
@@ -14784,7 +15538,7 @@
         </p:nvSpPr>
         <p:spPr>
           <a:xfrm>
-            <a:off x="10746943" y="5760720"/>
+            <a:off x="10728655" y="5760720"/>
             <a:ext cx="658368" cy="658368"/>
           </a:xfrm>
           <a:prstGeom prst="ellipse">
@@ -14792,13 +15546,13 @@
           </a:prstGeom>
           <a:solidFill>
             <a:srgbClr val="FDE047">
-              <a:alpha val="80000"/>
+              <a:alpha val="82000"/>
             </a:srgbClr>
           </a:solidFill>
           <a:ln w="12700">
             <a:solidFill>
-              <a:srgbClr val="FDE047">
-                <a:alpha val="0"/>
+              <a:srgbClr val="FFFFFF">
+                <a:alpha val="28000"/>
               </a:srgbClr>
             </a:solidFill>
             <a:prstDash val="solid"/>
@@ -14820,6 +15574,64 @@
         </p:nvSpPr>
         <p:spPr>
           <a:xfrm>
+            <a:off x="11112703" y="164592"/>
+            <a:ext cx="713232" cy="128016"/>
+          </a:xfrm>
+          <a:prstGeom prst="roundRect">
+            <a:avLst>
+              <a:gd name="adj" fmla="val 28571"/>
+            </a:avLst>
+          </a:prstGeom>
+          <a:solidFill>
+            <a:srgbClr val="38BDF8"/>
+          </a:solidFill>
+          <a:ln w="12700">
+            <a:solidFill>
+              <a:srgbClr val="38BDF8">
+                <a:alpha val="0"/>
+              </a:srgbClr>
+            </a:solidFill>
+            <a:prstDash val="solid"/>
+          </a:ln>
+        </p:spPr>
+      </p:sp>
+      <p:sp>
+        <p:nvSpPr>
+          <p:cNvPr id="6" name="Shape 4"/>
+          <p:cNvSpPr/>
+          <p:nvPr/>
+        </p:nvSpPr>
+        <p:spPr>
+          <a:xfrm>
+            <a:off x="10198303" y="219456"/>
+            <a:ext cx="841248" cy="109728"/>
+          </a:xfrm>
+          <a:prstGeom prst="roundRect">
+            <a:avLst>
+              <a:gd name="adj" fmla="val 33333"/>
+            </a:avLst>
+          </a:prstGeom>
+          <a:solidFill>
+            <a:srgbClr val="F43F5E"/>
+          </a:solidFill>
+          <a:ln w="12700">
+            <a:solidFill>
+              <a:srgbClr val="FFFFFF">
+                <a:alpha val="0"/>
+              </a:srgbClr>
+            </a:solidFill>
+            <a:prstDash val="solid"/>
+          </a:ln>
+        </p:spPr>
+      </p:sp>
+      <p:sp>
+        <p:nvSpPr>
+          <p:cNvPr id="7" name="Shape 5"/>
+          <p:cNvSpPr/>
+          <p:nvPr/>
+        </p:nvSpPr>
+        <p:spPr>
+          <a:xfrm>
             <a:off x="10134295" y="0"/>
             <a:ext cx="2057400" cy="256032"/>
           </a:xfrm>
@@ -14841,7 +15653,7 @@
       </p:sp>
       <p:sp>
         <p:nvSpPr>
-          <p:cNvPr id="6" name="Shape 4"/>
+          <p:cNvPr id="8" name="Shape 6"/>
           <p:cNvSpPr/>
           <p:nvPr/>
         </p:nvSpPr>
@@ -14868,7 +15680,7 @@
       </p:sp>
       <p:pic>
         <p:nvPicPr>
-          <p:cNvPr id="7" name="Image 0" descr="preencoded.png">    </p:cNvPr>
+          <p:cNvPr id="9" name="Image 0" descr="preencoded.png">    </p:cNvPr>
           <p:cNvPicPr>
             <a:picLocks noChangeAspect="1"/>
           </p:cNvPicPr>
@@ -14898,7 +15710,7 @@
       </p:pic>
       <p:sp>
         <p:nvSpPr>
-          <p:cNvPr id="8" name="Shape 5"/>
+          <p:cNvPr id="10" name="Shape 7"/>
           <p:cNvSpPr/>
           <p:nvPr/>
         </p:nvSpPr>
@@ -14934,7 +15746,7 @@
       </p:sp>
       <p:pic>
         <p:nvPicPr>
-          <p:cNvPr id="9" name="Image 1" descr="preencoded.png">    </p:cNvPr>
+          <p:cNvPr id="11" name="Image 1" descr="preencoded.png">    </p:cNvPr>
           <p:cNvPicPr>
             <a:picLocks noChangeAspect="1"/>
           </p:cNvPicPr>
@@ -14964,7 +15776,7 @@
       </p:pic>
       <p:sp>
         <p:nvSpPr>
-          <p:cNvPr id="10" name="Shape 6"/>
+          <p:cNvPr id="12" name="Shape 8"/>
           <p:cNvSpPr/>
           <p:nvPr/>
         </p:nvSpPr>
@@ -15000,7 +15812,7 @@
       </p:sp>
       <p:pic>
         <p:nvPicPr>
-          <p:cNvPr id="11" name="Image 2" descr="preencoded.png">    </p:cNvPr>
+          <p:cNvPr id="13" name="Image 2" descr="preencoded.png">    </p:cNvPr>
           <p:cNvPicPr>
             <a:picLocks noChangeAspect="1"/>
           </p:cNvPicPr>
@@ -15030,7 +15842,7 @@
       </p:pic>
       <p:sp>
         <p:nvSpPr>
-          <p:cNvPr id="12" name="Shape 7"/>
+          <p:cNvPr id="14" name="Shape 9"/>
           <p:cNvSpPr/>
           <p:nvPr/>
         </p:nvSpPr>
@@ -15066,7 +15878,7 @@
       </p:sp>
       <p:pic>
         <p:nvPicPr>
-          <p:cNvPr id="13" name="Image 3" descr="preencoded.png">    </p:cNvPr>
+          <p:cNvPr id="15" name="Image 3" descr="preencoded.png">    </p:cNvPr>
           <p:cNvPicPr>
             <a:picLocks noChangeAspect="1"/>
           </p:cNvPicPr>
@@ -15096,7 +15908,7 @@
       </p:pic>
       <p:sp>
         <p:nvSpPr>
-          <p:cNvPr id="14" name="Shape 8"/>
+          <p:cNvPr id="16" name="Shape 10"/>
           <p:cNvSpPr/>
           <p:nvPr/>
         </p:nvSpPr>
@@ -15132,7 +15944,7 @@
       </p:sp>
       <p:sp>
         <p:nvSpPr>
-          <p:cNvPr id="15" name="Shape 9"/>
+          <p:cNvPr id="17" name="Shape 11"/>
           <p:cNvSpPr/>
           <p:nvPr/>
         </p:nvSpPr>
@@ -15159,7 +15971,7 @@
       </p:sp>
       <p:sp>
         <p:nvSpPr>
-          <p:cNvPr id="16" name="Shape 10"/>
+          <p:cNvPr id="18" name="Shape 12"/>
           <p:cNvSpPr/>
           <p:nvPr/>
         </p:nvSpPr>
@@ -15186,7 +15998,7 @@
       </p:sp>
       <p:sp>
         <p:nvSpPr>
-          <p:cNvPr id="17" name="Shape 11"/>
+          <p:cNvPr id="19" name="Shape 13"/>
           <p:cNvSpPr/>
           <p:nvPr/>
         </p:nvSpPr>
@@ -15213,7 +16025,7 @@
       </p:sp>
       <p:sp>
         <p:nvSpPr>
-          <p:cNvPr id="18" name="Shape 12"/>
+          <p:cNvPr id="20" name="Shape 14"/>
           <p:cNvSpPr/>
           <p:nvPr/>
         </p:nvSpPr>
@@ -15240,7 +16052,7 @@
       </p:sp>
       <p:sp>
         <p:nvSpPr>
-          <p:cNvPr id="19" name="mdpr:icon-and-text-aside-8429fc:title:__title:icon-and-text-aside-8429fc"/>
+          <p:cNvPr id="21" name="mdpr:icon-and-text-aside-8429fc:title:__title:icon-and-text-aside-8429fc"/>
           <p:cNvSpPr txBox="1"/>
           <p:nvPr/>
         </p:nvSpPr>
@@ -15282,7 +16094,7 @@
       </p:sp>
       <p:sp>
         <p:nvSpPr>
-          <p:cNvPr id="20" name="Shape 14"/>
+          <p:cNvPr id="22" name="Shape 16"/>
           <p:cNvSpPr/>
           <p:nvPr/>
         </p:nvSpPr>
@@ -15309,7 +16121,7 @@
       </p:sp>
       <p:pic>
         <p:nvPicPr>
-          <p:cNvPr id="21" name="Image 4" descr="article icon from tabler-icons (MIT)">    </p:cNvPr>
+          <p:cNvPr id="23" name="Image 4" descr="article icon from tabler-icons (MIT)">    </p:cNvPr>
           <p:cNvPicPr>
             <a:picLocks noChangeAspect="1"/>
           </p:cNvPicPr>
@@ -15339,7 +16151,7 @@
       </p:pic>
       <p:sp>
         <p:nvSpPr>
-          <p:cNvPr id="22" name="mdpr:icon-and-text-aside-8429fc:item-1:block-29"/>
+          <p:cNvPr id="24" name="mdpr:icon-and-text-aside-8429fc:item-1:block-29"/>
           <p:cNvSpPr txBox="1"/>
           <p:nvPr/>
         </p:nvSpPr>
@@ -15398,7 +16210,7 @@
       </p:sp>
       <p:sp>
         <p:nvSpPr>
-          <p:cNvPr id="23" name="Shape 16"/>
+          <p:cNvPr id="25" name="Shape 18"/>
           <p:cNvSpPr/>
           <p:nvPr/>
         </p:nvSpPr>
@@ -15425,7 +16237,7 @@
       </p:sp>
       <p:pic>
         <p:nvPicPr>
-          <p:cNvPr id="24" name="Image 5" descr="article icon from tabler-icons (MIT)">    </p:cNvPr>
+          <p:cNvPr id="26" name="Image 5" descr="article icon from tabler-icons (MIT)">    </p:cNvPr>
           <p:cNvPicPr>
             <a:picLocks noChangeAspect="1"/>
           </p:cNvPicPr>
@@ -15455,7 +16267,7 @@
       </p:pic>
       <p:sp>
         <p:nvSpPr>
-          <p:cNvPr id="25" name="mdpr:icon-and-text-aside-8429fc:item-2:block-29"/>
+          <p:cNvPr id="27" name="mdpr:icon-and-text-aside-8429fc:item-2:block-29"/>
           <p:cNvSpPr txBox="1"/>
           <p:nvPr/>
         </p:nvSpPr>
@@ -15514,7 +16326,7 @@
       </p:sp>
       <p:sp>
         <p:nvSpPr>
-          <p:cNvPr id="26" name="Shape 18"/>
+          <p:cNvPr id="28" name="Shape 20"/>
           <p:cNvSpPr/>
           <p:nvPr/>
         </p:nvSpPr>
@@ -15541,7 +16353,7 @@
       </p:sp>
       <p:pic>
         <p:nvPicPr>
-          <p:cNvPr id="27" name="Image 6" descr="article icon from tabler-icons (MIT)">    </p:cNvPr>
+          <p:cNvPr id="29" name="Image 6" descr="article icon from tabler-icons (MIT)">    </p:cNvPr>
           <p:cNvPicPr>
             <a:picLocks noChangeAspect="1"/>
           </p:cNvPicPr>
@@ -15571,7 +16383,7 @@
       </p:pic>
       <p:sp>
         <p:nvSpPr>
-          <p:cNvPr id="28" name="mdpr:icon-and-text-aside-8429fc:item-3:block-29"/>
+          <p:cNvPr id="30" name="mdpr:icon-and-text-aside-8429fc:item-3:block-29"/>
           <p:cNvSpPr txBox="1"/>
           <p:nvPr/>
         </p:nvSpPr>
@@ -15630,7 +16442,7 @@
       </p:sp>
       <p:sp>
         <p:nvSpPr>
-          <p:cNvPr id="29" name="Shape 20"/>
+          <p:cNvPr id="31" name="Shape 22"/>
           <p:cNvSpPr/>
           <p:nvPr/>
         </p:nvSpPr>
@@ -15657,7 +16469,7 @@
       </p:sp>
       <p:pic>
         <p:nvPicPr>
-          <p:cNvPr id="30" name="Image 7" descr="table icon from tabler-icons (MIT)">    </p:cNvPr>
+          <p:cNvPr id="32" name="Image 7" descr="table icon from tabler-icons (MIT)">    </p:cNvPr>
           <p:cNvPicPr>
             <a:picLocks noChangeAspect="1"/>
           </p:cNvPicPr>
@@ -15687,7 +16499,7 @@
       </p:pic>
       <p:sp>
         <p:nvSpPr>
-          <p:cNvPr id="31" name="mdpr:icon-and-text-aside-8429fc:item-4:block-29"/>
+          <p:cNvPr id="33" name="mdpr:icon-and-text-aside-8429fc:item-4:block-29"/>
           <p:cNvSpPr txBox="1"/>
           <p:nvPr/>
         </p:nvSpPr>
@@ -15784,21 +16596,21 @@
         </p:nvSpPr>
         <p:spPr>
           <a:xfrm>
-            <a:off x="9859975" y="438912"/>
-            <a:ext cx="1024128" cy="1024128"/>
+            <a:off x="9768535" y="420624"/>
+            <a:ext cx="1078992" cy="1078992"/>
           </a:xfrm>
           <a:prstGeom prst="ellipse">
             <a:avLst/>
           </a:prstGeom>
           <a:solidFill>
             <a:srgbClr val="F43F5E">
-              <a:alpha val="82000"/>
+              <a:alpha val="86000"/>
             </a:srgbClr>
           </a:solidFill>
           <a:ln w="12700">
             <a:solidFill>
-              <a:srgbClr val="F43F5E">
-                <a:alpha val="0"/>
+              <a:srgbClr val="FFFFFF">
+                <a:alpha val="28000"/>
               </a:srgbClr>
             </a:solidFill>
             <a:prstDash val="solid"/>
@@ -15820,21 +16632,21 @@
         </p:nvSpPr>
         <p:spPr>
           <a:xfrm>
-            <a:off x="530352" y="5614416"/>
-            <a:ext cx="914400" cy="914400"/>
+            <a:off x="502920" y="5596128"/>
+            <a:ext cx="950976" cy="950976"/>
           </a:xfrm>
           <a:prstGeom prst="ellipse">
             <a:avLst/>
           </a:prstGeom>
           <a:solidFill>
             <a:srgbClr val="38BDF8">
-              <a:alpha val="84000"/>
+              <a:alpha val="86000"/>
             </a:srgbClr>
           </a:solidFill>
           <a:ln w="12700">
             <a:solidFill>
-              <a:srgbClr val="38BDF8">
-                <a:alpha val="0"/>
+              <a:srgbClr val="FFFFFF">
+                <a:alpha val="28000"/>
               </a:srgbClr>
             </a:solidFill>
             <a:prstDash val="solid"/>
@@ -15856,7 +16668,7 @@
         </p:nvSpPr>
         <p:spPr>
           <a:xfrm>
-            <a:off x="10746943" y="5760720"/>
+            <a:off x="10728655" y="5760720"/>
             <a:ext cx="658368" cy="658368"/>
           </a:xfrm>
           <a:prstGeom prst="ellipse">
@@ -15864,13 +16676,13 @@
           </a:prstGeom>
           <a:solidFill>
             <a:srgbClr val="FDE047">
-              <a:alpha val="80000"/>
+              <a:alpha val="82000"/>
             </a:srgbClr>
           </a:solidFill>
           <a:ln w="12700">
             <a:solidFill>
-              <a:srgbClr val="FDE047">
-                <a:alpha val="0"/>
+              <a:srgbClr val="FFFFFF">
+                <a:alpha val="28000"/>
               </a:srgbClr>
             </a:solidFill>
             <a:prstDash val="solid"/>
@@ -15892,6 +16704,64 @@
         </p:nvSpPr>
         <p:spPr>
           <a:xfrm>
+            <a:off x="11112703" y="164592"/>
+            <a:ext cx="713232" cy="128016"/>
+          </a:xfrm>
+          <a:prstGeom prst="roundRect">
+            <a:avLst>
+              <a:gd name="adj" fmla="val 28571"/>
+            </a:avLst>
+          </a:prstGeom>
+          <a:solidFill>
+            <a:srgbClr val="38BDF8"/>
+          </a:solidFill>
+          <a:ln w="12700">
+            <a:solidFill>
+              <a:srgbClr val="38BDF8">
+                <a:alpha val="0"/>
+              </a:srgbClr>
+            </a:solidFill>
+            <a:prstDash val="solid"/>
+          </a:ln>
+        </p:spPr>
+      </p:sp>
+      <p:sp>
+        <p:nvSpPr>
+          <p:cNvPr id="6" name="Shape 4"/>
+          <p:cNvSpPr/>
+          <p:nvPr/>
+        </p:nvSpPr>
+        <p:spPr>
+          <a:xfrm>
+            <a:off x="10198303" y="219456"/>
+            <a:ext cx="841248" cy="109728"/>
+          </a:xfrm>
+          <a:prstGeom prst="roundRect">
+            <a:avLst>
+              <a:gd name="adj" fmla="val 33333"/>
+            </a:avLst>
+          </a:prstGeom>
+          <a:solidFill>
+            <a:srgbClr val="F43F5E"/>
+          </a:solidFill>
+          <a:ln w="12700">
+            <a:solidFill>
+              <a:srgbClr val="FFFFFF">
+                <a:alpha val="0"/>
+              </a:srgbClr>
+            </a:solidFill>
+            <a:prstDash val="solid"/>
+          </a:ln>
+        </p:spPr>
+      </p:sp>
+      <p:sp>
+        <p:nvSpPr>
+          <p:cNvPr id="7" name="Shape 5"/>
+          <p:cNvSpPr/>
+          <p:nvPr/>
+        </p:nvSpPr>
+        <p:spPr>
+          <a:xfrm>
             <a:off x="10134295" y="0"/>
             <a:ext cx="2057400" cy="256032"/>
           </a:xfrm>
@@ -15913,7 +16783,7 @@
       </p:sp>
       <p:sp>
         <p:nvSpPr>
-          <p:cNvPr id="6" name="Shape 4"/>
+          <p:cNvPr id="8" name="Shape 6"/>
           <p:cNvSpPr/>
           <p:nvPr/>
         </p:nvSpPr>
@@ -15940,7 +16810,7 @@
       </p:sp>
       <p:pic>
         <p:nvPicPr>
-          <p:cNvPr id="7" name="Image 0" descr="preencoded.png">    </p:cNvPr>
+          <p:cNvPr id="9" name="Image 0" descr="preencoded.png">    </p:cNvPr>
           <p:cNvPicPr>
             <a:picLocks noChangeAspect="1"/>
           </p:cNvPicPr>
@@ -15970,7 +16840,7 @@
       </p:pic>
       <p:sp>
         <p:nvSpPr>
-          <p:cNvPr id="8" name="Shape 5"/>
+          <p:cNvPr id="10" name="Shape 7"/>
           <p:cNvSpPr/>
           <p:nvPr/>
         </p:nvSpPr>
@@ -16006,7 +16876,7 @@
       </p:sp>
       <p:pic>
         <p:nvPicPr>
-          <p:cNvPr id="9" name="Image 1" descr="preencoded.png">    </p:cNvPr>
+          <p:cNvPr id="11" name="Image 1" descr="preencoded.png">    </p:cNvPr>
           <p:cNvPicPr>
             <a:picLocks noChangeAspect="1"/>
           </p:cNvPicPr>
@@ -16036,7 +16906,7 @@
       </p:pic>
       <p:sp>
         <p:nvSpPr>
-          <p:cNvPr id="10" name="Shape 6"/>
+          <p:cNvPr id="12" name="Shape 8"/>
           <p:cNvSpPr/>
           <p:nvPr/>
         </p:nvSpPr>
@@ -16072,7 +16942,7 @@
       </p:sp>
       <p:pic>
         <p:nvPicPr>
-          <p:cNvPr id="11" name="Image 2" descr="preencoded.png">    </p:cNvPr>
+          <p:cNvPr id="13" name="Image 2" descr="preencoded.png">    </p:cNvPr>
           <p:cNvPicPr>
             <a:picLocks noChangeAspect="1"/>
           </p:cNvPicPr>
@@ -16102,7 +16972,7 @@
       </p:pic>
       <p:sp>
         <p:nvSpPr>
-          <p:cNvPr id="12" name="Shape 7"/>
+          <p:cNvPr id="14" name="Shape 9"/>
           <p:cNvSpPr/>
           <p:nvPr/>
         </p:nvSpPr>
@@ -16138,7 +17008,7 @@
       </p:sp>
       <p:pic>
         <p:nvPicPr>
-          <p:cNvPr id="13" name="Image 3" descr="preencoded.png">    </p:cNvPr>
+          <p:cNvPr id="15" name="Image 3" descr="preencoded.png">    </p:cNvPr>
           <p:cNvPicPr>
             <a:picLocks noChangeAspect="1"/>
           </p:cNvPicPr>
@@ -16168,7 +17038,7 @@
       </p:pic>
       <p:sp>
         <p:nvSpPr>
-          <p:cNvPr id="14" name="Shape 8"/>
+          <p:cNvPr id="16" name="Shape 10"/>
           <p:cNvSpPr/>
           <p:nvPr/>
         </p:nvSpPr>
@@ -16204,7 +17074,7 @@
       </p:sp>
       <p:sp>
         <p:nvSpPr>
-          <p:cNvPr id="15" name="Shape 9"/>
+          <p:cNvPr id="17" name="Shape 11"/>
           <p:cNvSpPr/>
           <p:nvPr/>
         </p:nvSpPr>
@@ -16231,7 +17101,7 @@
       </p:sp>
       <p:sp>
         <p:nvSpPr>
-          <p:cNvPr id="16" name="Shape 10"/>
+          <p:cNvPr id="18" name="Shape 12"/>
           <p:cNvSpPr/>
           <p:nvPr/>
         </p:nvSpPr>
@@ -16258,7 +17128,7 @@
       </p:sp>
       <p:sp>
         <p:nvSpPr>
-          <p:cNvPr id="17" name="Shape 11"/>
+          <p:cNvPr id="19" name="Shape 13"/>
           <p:cNvSpPr/>
           <p:nvPr/>
         </p:nvSpPr>
@@ -16285,7 +17155,7 @@
       </p:sp>
       <p:sp>
         <p:nvSpPr>
-          <p:cNvPr id="18" name="Shape 12"/>
+          <p:cNvPr id="20" name="Shape 14"/>
           <p:cNvSpPr/>
           <p:nvPr/>
         </p:nvSpPr>
@@ -16312,7 +17182,7 @@
       </p:sp>
       <p:sp>
         <p:nvSpPr>
-          <p:cNvPr id="19" name="mdpr:overflow-guard-f8d03e:title:__title:overflow-guard-f8d03e"/>
+          <p:cNvPr id="21" name="mdpr:overflow-guard-f8d03e:title:__title:overflow-guard-f8d03e"/>
           <p:cNvSpPr txBox="1"/>
           <p:nvPr/>
         </p:nvSpPr>
@@ -16354,7 +17224,7 @@
       </p:sp>
       <p:sp>
         <p:nvSpPr>
-          <p:cNvPr id="20" name="Shape 14"/>
+          <p:cNvPr id="22" name="Shape 16"/>
           <p:cNvSpPr/>
           <p:nvPr/>
         </p:nvSpPr>
@@ -16381,7 +17251,7 @@
       </p:sp>
       <p:pic>
         <p:nvPicPr>
-          <p:cNvPr id="21" name="Image 4" descr="verified icon from tabler-icons (MIT)">    </p:cNvPr>
+          <p:cNvPr id="23" name="Image 4" descr="verified icon from tabler-icons (MIT)">    </p:cNvPr>
           <p:cNvPicPr>
             <a:picLocks noChangeAspect="1"/>
           </p:cNvPicPr>
@@ -16411,7 +17281,7 @@
       </p:pic>
       <p:sp>
         <p:nvSpPr>
-          <p:cNvPr id="22" name="mdpr:overflow-guard-f8d03e:item-1:block-31"/>
+          <p:cNvPr id="24" name="mdpr:overflow-guard-f8d03e:item-1:block-31"/>
           <p:cNvSpPr txBox="1"/>
           <p:nvPr/>
         </p:nvSpPr>
@@ -16470,7 +17340,7 @@
       </p:sp>
       <p:sp>
         <p:nvSpPr>
-          <p:cNvPr id="23" name="Shape 16"/>
+          <p:cNvPr id="25" name="Shape 18"/>
           <p:cNvSpPr/>
           <p:nvPr/>
         </p:nvSpPr>
@@ -16497,7 +17367,7 @@
       </p:sp>
       <p:pic>
         <p:nvPicPr>
-          <p:cNvPr id="24" name="Image 5" descr="table icon from tabler-icons (MIT)">    </p:cNvPr>
+          <p:cNvPr id="26" name="Image 5" descr="table icon from tabler-icons (MIT)">    </p:cNvPr>
           <p:cNvPicPr>
             <a:picLocks noChangeAspect="1"/>
           </p:cNvPicPr>
@@ -16527,7 +17397,7 @@
       </p:pic>
       <p:sp>
         <p:nvSpPr>
-          <p:cNvPr id="25" name="mdpr:overflow-guard-f8d03e:item-2:block-31"/>
+          <p:cNvPr id="27" name="mdpr:overflow-guard-f8d03e:item-2:block-31"/>
           <p:cNvSpPr txBox="1"/>
           <p:nvPr/>
         </p:nvSpPr>
@@ -16586,7 +17456,7 @@
       </p:sp>
       <p:sp>
         <p:nvSpPr>
-          <p:cNvPr id="26" name="Shape 18"/>
+          <p:cNvPr id="28" name="Shape 20"/>
           <p:cNvSpPr/>
           <p:nvPr/>
         </p:nvSpPr>
@@ -16613,7 +17483,7 @@
       </p:sp>
       <p:pic>
         <p:nvPicPr>
-          <p:cNvPr id="27" name="Image 6" descr="article icon from tabler-icons (MIT)">    </p:cNvPr>
+          <p:cNvPr id="29" name="Image 6" descr="article icon from tabler-icons (MIT)">    </p:cNvPr>
           <p:cNvPicPr>
             <a:picLocks noChangeAspect="1"/>
           </p:cNvPicPr>
@@ -16643,7 +17513,7 @@
       </p:pic>
       <p:sp>
         <p:nvSpPr>
-          <p:cNvPr id="28" name="mdpr:overflow-guard-f8d03e:item-3:block-31"/>
+          <p:cNvPr id="30" name="mdpr:overflow-guard-f8d03e:item-3:block-31"/>
           <p:cNvSpPr txBox="1"/>
           <p:nvPr/>
         </p:nvSpPr>
@@ -16702,7 +17572,7 @@
       </p:sp>
       <p:sp>
         <p:nvSpPr>
-          <p:cNvPr id="29" name="Shape 20"/>
+          <p:cNvPr id="31" name="Shape 22"/>
           <p:cNvSpPr/>
           <p:nvPr/>
         </p:nvSpPr>
@@ -16729,7 +17599,7 @@
       </p:sp>
       <p:pic>
         <p:nvPicPr>
-          <p:cNvPr id="30" name="Image 7" descr="article icon from tabler-icons (MIT)">    </p:cNvPr>
+          <p:cNvPr id="32" name="Image 7" descr="article icon from tabler-icons (MIT)">    </p:cNvPr>
           <p:cNvPicPr>
             <a:picLocks noChangeAspect="1"/>
           </p:cNvPicPr>
@@ -16759,7 +17629,7 @@
       </p:pic>
       <p:sp>
         <p:nvSpPr>
-          <p:cNvPr id="31" name="mdpr:overflow-guard-f8d03e:item-4:block-31"/>
+          <p:cNvPr id="33" name="mdpr:overflow-guard-f8d03e:item-4:block-31"/>
           <p:cNvSpPr txBox="1"/>
           <p:nvPr/>
         </p:nvSpPr>
@@ -16856,21 +17726,21 @@
         </p:nvSpPr>
         <p:spPr>
           <a:xfrm>
-            <a:off x="9859975" y="438912"/>
-            <a:ext cx="1024128" cy="1024128"/>
+            <a:off x="9768535" y="420624"/>
+            <a:ext cx="1078992" cy="1078992"/>
           </a:xfrm>
           <a:prstGeom prst="ellipse">
             <a:avLst/>
           </a:prstGeom>
           <a:solidFill>
             <a:srgbClr val="F43F5E">
-              <a:alpha val="82000"/>
+              <a:alpha val="86000"/>
             </a:srgbClr>
           </a:solidFill>
           <a:ln w="12700">
             <a:solidFill>
-              <a:srgbClr val="F43F5E">
-                <a:alpha val="0"/>
+              <a:srgbClr val="FFFFFF">
+                <a:alpha val="28000"/>
               </a:srgbClr>
             </a:solidFill>
             <a:prstDash val="solid"/>
@@ -16892,21 +17762,21 @@
         </p:nvSpPr>
         <p:spPr>
           <a:xfrm>
-            <a:off x="530352" y="5614416"/>
-            <a:ext cx="914400" cy="914400"/>
+            <a:off x="502920" y="5596128"/>
+            <a:ext cx="950976" cy="950976"/>
           </a:xfrm>
           <a:prstGeom prst="ellipse">
             <a:avLst/>
           </a:prstGeom>
           <a:solidFill>
             <a:srgbClr val="38BDF8">
-              <a:alpha val="84000"/>
+              <a:alpha val="86000"/>
             </a:srgbClr>
           </a:solidFill>
           <a:ln w="12700">
             <a:solidFill>
-              <a:srgbClr val="38BDF8">
-                <a:alpha val="0"/>
+              <a:srgbClr val="FFFFFF">
+                <a:alpha val="28000"/>
               </a:srgbClr>
             </a:solidFill>
             <a:prstDash val="solid"/>
@@ -16928,7 +17798,7 @@
         </p:nvSpPr>
         <p:spPr>
           <a:xfrm>
-            <a:off x="10746943" y="5760720"/>
+            <a:off x="10728655" y="5760720"/>
             <a:ext cx="658368" cy="658368"/>
           </a:xfrm>
           <a:prstGeom prst="ellipse">
@@ -16936,13 +17806,13 @@
           </a:prstGeom>
           <a:solidFill>
             <a:srgbClr val="FDE047">
-              <a:alpha val="80000"/>
+              <a:alpha val="82000"/>
             </a:srgbClr>
           </a:solidFill>
           <a:ln w="12700">
             <a:solidFill>
-              <a:srgbClr val="FDE047">
-                <a:alpha val="0"/>
+              <a:srgbClr val="FFFFFF">
+                <a:alpha val="28000"/>
               </a:srgbClr>
             </a:solidFill>
             <a:prstDash val="solid"/>
@@ -16964,6 +17834,64 @@
         </p:nvSpPr>
         <p:spPr>
           <a:xfrm>
+            <a:off x="11112703" y="164592"/>
+            <a:ext cx="713232" cy="128016"/>
+          </a:xfrm>
+          <a:prstGeom prst="roundRect">
+            <a:avLst>
+              <a:gd name="adj" fmla="val 28571"/>
+            </a:avLst>
+          </a:prstGeom>
+          <a:solidFill>
+            <a:srgbClr val="38BDF8"/>
+          </a:solidFill>
+          <a:ln w="12700">
+            <a:solidFill>
+              <a:srgbClr val="38BDF8">
+                <a:alpha val="0"/>
+              </a:srgbClr>
+            </a:solidFill>
+            <a:prstDash val="solid"/>
+          </a:ln>
+        </p:spPr>
+      </p:sp>
+      <p:sp>
+        <p:nvSpPr>
+          <p:cNvPr id="6" name="Shape 4"/>
+          <p:cNvSpPr/>
+          <p:nvPr/>
+        </p:nvSpPr>
+        <p:spPr>
+          <a:xfrm>
+            <a:off x="10198303" y="219456"/>
+            <a:ext cx="841248" cy="109728"/>
+          </a:xfrm>
+          <a:prstGeom prst="roundRect">
+            <a:avLst>
+              <a:gd name="adj" fmla="val 33333"/>
+            </a:avLst>
+          </a:prstGeom>
+          <a:solidFill>
+            <a:srgbClr val="F43F5E"/>
+          </a:solidFill>
+          <a:ln w="12700">
+            <a:solidFill>
+              <a:srgbClr val="FFFFFF">
+                <a:alpha val="0"/>
+              </a:srgbClr>
+            </a:solidFill>
+            <a:prstDash val="solid"/>
+          </a:ln>
+        </p:spPr>
+      </p:sp>
+      <p:sp>
+        <p:nvSpPr>
+          <p:cNvPr id="7" name="Shape 5"/>
+          <p:cNvSpPr/>
+          <p:nvPr/>
+        </p:nvSpPr>
+        <p:spPr>
+          <a:xfrm>
             <a:off x="10134295" y="0"/>
             <a:ext cx="2057400" cy="256032"/>
           </a:xfrm>
@@ -16985,7 +17913,7 @@
       </p:sp>
       <p:sp>
         <p:nvSpPr>
-          <p:cNvPr id="6" name="Shape 4"/>
+          <p:cNvPr id="8" name="Shape 6"/>
           <p:cNvSpPr/>
           <p:nvPr/>
         </p:nvSpPr>
@@ -17012,7 +17940,7 @@
       </p:sp>
       <p:pic>
         <p:nvPicPr>
-          <p:cNvPr id="7" name="Image 0" descr="preencoded.png">    </p:cNvPr>
+          <p:cNvPr id="9" name="Image 0" descr="preencoded.png">    </p:cNvPr>
           <p:cNvPicPr>
             <a:picLocks noChangeAspect="1"/>
           </p:cNvPicPr>
@@ -17042,7 +17970,7 @@
       </p:pic>
       <p:sp>
         <p:nvSpPr>
-          <p:cNvPr id="8" name="Shape 5"/>
+          <p:cNvPr id="10" name="Shape 7"/>
           <p:cNvSpPr/>
           <p:nvPr/>
         </p:nvSpPr>
@@ -17078,7 +18006,7 @@
       </p:sp>
       <p:sp>
         <p:nvSpPr>
-          <p:cNvPr id="9" name="Shape 6"/>
+          <p:cNvPr id="11" name="Shape 8"/>
           <p:cNvSpPr/>
           <p:nvPr/>
         </p:nvSpPr>
@@ -17105,7 +18033,7 @@
       </p:sp>
       <p:sp>
         <p:nvSpPr>
-          <p:cNvPr id="10" name="mdpr:image-safe-frame-d4d6a4:title:__title:image-safe-frame-d4d6a4"/>
+          <p:cNvPr id="12" name="mdpr:image-safe-frame-d4d6a4:title:__title:image-safe-frame-d4d6a4"/>
           <p:cNvSpPr txBox="1"/>
           <p:nvPr/>
         </p:nvSpPr>
@@ -17147,7 +18075,7 @@
       </p:sp>
       <p:sp>
         <p:nvSpPr>
-          <p:cNvPr id="11" name="mdpr:image-safe-frame-d4d6a4:body:block-33-block-33-block-33"/>
+          <p:cNvPr id="13" name="mdpr:image-safe-frame-d4d6a4:body:block-33-block-33-block-33"/>
           <p:cNvSpPr txBox="1"/>
           <p:nvPr/>
         </p:nvSpPr>
@@ -17286,7 +18214,7 @@
       </p:sp>
       <p:pic>
         <p:nvPicPr>
-          <p:cNvPr id="12" name="mdpr:image-safe-frame-d4d6a4:image-1:block-34" descr="{&quot;mdpr&quot;:{&quot;slideId&quot;:&quot;image-safe-frame-d4d6a4&quot;,&quot;layoutSlideId&quot;:&quot;layout-image-safe-frame-d4d6a4&quot;,&quot;regionId&quot;:&quot;image-1&quot;,&quot;blockIds&quot;:[&quot;block-34&quot;],&quot;objectKind&quot;:&quot;native-image&quot;,&quot;role&quot;:&quot;image&quot;,&quot;editable&quot;:false}}">    </p:cNvPr>
+          <p:cNvPr id="14" name="mdpr:image-safe-frame-d4d6a4:image-1:block-34" descr="{&quot;mdpr&quot;:{&quot;slideId&quot;:&quot;image-safe-frame-d4d6a4&quot;,&quot;layoutSlideId&quot;:&quot;layout-image-safe-frame-d4d6a4&quot;,&quot;regionId&quot;:&quot;image-1&quot;,&quot;blockIds&quot;:[&quot;block-34&quot;],&quot;objectKind&quot;:&quot;native-image&quot;,&quot;role&quot;:&quot;image&quot;,&quot;editable&quot;:false}}">    </p:cNvPr>
           <p:cNvPicPr>
             <a:picLocks noChangeAspect="1"/>
           </p:cNvPicPr>
@@ -17354,21 +18282,21 @@
         </p:nvSpPr>
         <p:spPr>
           <a:xfrm>
-            <a:off x="9859975" y="438912"/>
-            <a:ext cx="1024128" cy="1024128"/>
+            <a:off x="9768535" y="420624"/>
+            <a:ext cx="1078992" cy="1078992"/>
           </a:xfrm>
           <a:prstGeom prst="ellipse">
             <a:avLst/>
           </a:prstGeom>
           <a:solidFill>
             <a:srgbClr val="F43F5E">
-              <a:alpha val="82000"/>
+              <a:alpha val="86000"/>
             </a:srgbClr>
           </a:solidFill>
           <a:ln w="12700">
             <a:solidFill>
-              <a:srgbClr val="F43F5E">
-                <a:alpha val="0"/>
+              <a:srgbClr val="FFFFFF">
+                <a:alpha val="28000"/>
               </a:srgbClr>
             </a:solidFill>
             <a:prstDash val="solid"/>
@@ -17390,21 +18318,21 @@
         </p:nvSpPr>
         <p:spPr>
           <a:xfrm>
-            <a:off x="530352" y="5614416"/>
-            <a:ext cx="914400" cy="914400"/>
+            <a:off x="502920" y="5596128"/>
+            <a:ext cx="950976" cy="950976"/>
           </a:xfrm>
           <a:prstGeom prst="ellipse">
             <a:avLst/>
           </a:prstGeom>
           <a:solidFill>
             <a:srgbClr val="38BDF8">
-              <a:alpha val="84000"/>
+              <a:alpha val="86000"/>
             </a:srgbClr>
           </a:solidFill>
           <a:ln w="12700">
             <a:solidFill>
-              <a:srgbClr val="38BDF8">
-                <a:alpha val="0"/>
+              <a:srgbClr val="FFFFFF">
+                <a:alpha val="28000"/>
               </a:srgbClr>
             </a:solidFill>
             <a:prstDash val="solid"/>
@@ -17426,7 +18354,7 @@
         </p:nvSpPr>
         <p:spPr>
           <a:xfrm>
-            <a:off x="10746943" y="5760720"/>
+            <a:off x="10728655" y="5760720"/>
             <a:ext cx="658368" cy="658368"/>
           </a:xfrm>
           <a:prstGeom prst="ellipse">
@@ -17434,13 +18362,13 @@
           </a:prstGeom>
           <a:solidFill>
             <a:srgbClr val="FDE047">
-              <a:alpha val="80000"/>
+              <a:alpha val="82000"/>
             </a:srgbClr>
           </a:solidFill>
           <a:ln w="12700">
             <a:solidFill>
-              <a:srgbClr val="FDE047">
-                <a:alpha val="0"/>
+              <a:srgbClr val="FFFFFF">
+                <a:alpha val="28000"/>
               </a:srgbClr>
             </a:solidFill>
             <a:prstDash val="solid"/>
@@ -17462,6 +18390,64 @@
         </p:nvSpPr>
         <p:spPr>
           <a:xfrm>
+            <a:off x="11112703" y="164592"/>
+            <a:ext cx="713232" cy="128016"/>
+          </a:xfrm>
+          <a:prstGeom prst="roundRect">
+            <a:avLst>
+              <a:gd name="adj" fmla="val 28571"/>
+            </a:avLst>
+          </a:prstGeom>
+          <a:solidFill>
+            <a:srgbClr val="38BDF8"/>
+          </a:solidFill>
+          <a:ln w="12700">
+            <a:solidFill>
+              <a:srgbClr val="38BDF8">
+                <a:alpha val="0"/>
+              </a:srgbClr>
+            </a:solidFill>
+            <a:prstDash val="solid"/>
+          </a:ln>
+        </p:spPr>
+      </p:sp>
+      <p:sp>
+        <p:nvSpPr>
+          <p:cNvPr id="6" name="Shape 4"/>
+          <p:cNvSpPr/>
+          <p:nvPr/>
+        </p:nvSpPr>
+        <p:spPr>
+          <a:xfrm>
+            <a:off x="10198303" y="219456"/>
+            <a:ext cx="841248" cy="109728"/>
+          </a:xfrm>
+          <a:prstGeom prst="roundRect">
+            <a:avLst>
+              <a:gd name="adj" fmla="val 33333"/>
+            </a:avLst>
+          </a:prstGeom>
+          <a:solidFill>
+            <a:srgbClr val="F43F5E"/>
+          </a:solidFill>
+          <a:ln w="12700">
+            <a:solidFill>
+              <a:srgbClr val="FFFFFF">
+                <a:alpha val="0"/>
+              </a:srgbClr>
+            </a:solidFill>
+            <a:prstDash val="solid"/>
+          </a:ln>
+        </p:spPr>
+      </p:sp>
+      <p:sp>
+        <p:nvSpPr>
+          <p:cNvPr id="7" name="Shape 5"/>
+          <p:cNvSpPr/>
+          <p:nvPr/>
+        </p:nvSpPr>
+        <p:spPr>
+          <a:xfrm>
             <a:off x="10134295" y="0"/>
             <a:ext cx="2057400" cy="256032"/>
           </a:xfrm>
@@ -17483,7 +18469,7 @@
       </p:sp>
       <p:sp>
         <p:nvSpPr>
-          <p:cNvPr id="6" name="Shape 4"/>
+          <p:cNvPr id="8" name="Shape 6"/>
           <p:cNvSpPr/>
           <p:nvPr/>
         </p:nvSpPr>
@@ -17510,7 +18496,7 @@
       </p:sp>
       <p:pic>
         <p:nvPicPr>
-          <p:cNvPr id="7" name="Image 0" descr="preencoded.png">    </p:cNvPr>
+          <p:cNvPr id="9" name="Image 0" descr="preencoded.png">    </p:cNvPr>
           <p:cNvPicPr>
             <a:picLocks noChangeAspect="1"/>
           </p:cNvPicPr>
@@ -17540,7 +18526,7 @@
       </p:pic>
       <p:sp>
         <p:nvSpPr>
-          <p:cNvPr id="8" name="Shape 5"/>
+          <p:cNvPr id="10" name="Shape 7"/>
           <p:cNvSpPr/>
           <p:nvPr/>
         </p:nvSpPr>
@@ -17576,7 +18562,7 @@
       </p:sp>
       <p:pic>
         <p:nvPicPr>
-          <p:cNvPr id="9" name="Image 1" descr="preencoded.png">    </p:cNvPr>
+          <p:cNvPr id="11" name="Image 1" descr="preencoded.png">    </p:cNvPr>
           <p:cNvPicPr>
             <a:picLocks noChangeAspect="1"/>
           </p:cNvPicPr>
@@ -17606,7 +18592,7 @@
       </p:pic>
       <p:sp>
         <p:nvSpPr>
-          <p:cNvPr id="10" name="Shape 6"/>
+          <p:cNvPr id="12" name="Shape 8"/>
           <p:cNvSpPr/>
           <p:nvPr/>
         </p:nvSpPr>
@@ -17642,7 +18628,7 @@
       </p:sp>
       <p:pic>
         <p:nvPicPr>
-          <p:cNvPr id="11" name="Image 2" descr="preencoded.png">    </p:cNvPr>
+          <p:cNvPr id="13" name="Image 2" descr="preencoded.png">    </p:cNvPr>
           <p:cNvPicPr>
             <a:picLocks noChangeAspect="1"/>
           </p:cNvPicPr>
@@ -17672,7 +18658,7 @@
       </p:pic>
       <p:sp>
         <p:nvSpPr>
-          <p:cNvPr id="12" name="Shape 7"/>
+          <p:cNvPr id="14" name="Shape 9"/>
           <p:cNvSpPr/>
           <p:nvPr/>
         </p:nvSpPr>
@@ -17708,7 +18694,7 @@
       </p:sp>
       <p:sp>
         <p:nvSpPr>
-          <p:cNvPr id="13" name="Shape 8"/>
+          <p:cNvPr id="15" name="Shape 10"/>
           <p:cNvSpPr/>
           <p:nvPr/>
         </p:nvSpPr>
@@ -17735,7 +18721,7 @@
       </p:sp>
       <p:sp>
         <p:nvSpPr>
-          <p:cNvPr id="14" name="mdpr:mixed-object-packing-438299:title:__title:mixed-object-packing-438299"/>
+          <p:cNvPr id="16" name="mdpr:mixed-object-packing-438299:title:__title:mixed-object-packing-438299"/>
           <p:cNvSpPr txBox="1"/>
           <p:nvPr/>
         </p:nvSpPr>
@@ -17777,7 +18763,7 @@
       </p:sp>
       <p:graphicFrame>
         <p:nvGraphicFramePr>
-          <p:cNvPr id="15" name="Chart 0" descr=""/>
+          <p:cNvPr id="17" name="Chart 0" descr=""/>
           <p:cNvGraphicFramePr/>
           <p:nvPr/>
         </p:nvGraphicFramePr>
@@ -18235,7 +19221,7 @@
       </p:graphicFrame>
       <p:sp>
         <p:nvSpPr>
-          <p:cNvPr id="17" name="mdpr:mixed-object-packing-438299:body:block-36"/>
+          <p:cNvPr id="19" name="mdpr:mixed-object-packing-438299:body:block-36"/>
           <p:cNvSpPr txBox="1"/>
           <p:nvPr/>
         </p:nvSpPr>
@@ -18334,7 +19320,7 @@
       </p:sp>
       <p:pic>
         <p:nvPicPr>
-          <p:cNvPr id="18" name="mdpr:mixed-object-packing-438299:image-1:block-39" descr="{&quot;mdpr&quot;:{&quot;slideId&quot;:&quot;mixed-object-packing-438299&quot;,&quot;layoutSlideId&quot;:&quot;layout-mixed-object-packing-438299&quot;,&quot;regionId&quot;:&quot;image-1&quot;,&quot;blockIds&quot;:[&quot;block-39&quot;],&quot;objectKind&quot;:&quot;native-image&quot;,&quot;role&quot;:&quot;image&quot;,&quot;editable&quot;:false}}">    </p:cNvPr>
+          <p:cNvPr id="20" name="mdpr:mixed-object-packing-438299:image-1:block-39" descr="{&quot;mdpr&quot;:{&quot;slideId&quot;:&quot;mixed-object-packing-438299&quot;,&quot;layoutSlideId&quot;:&quot;layout-mixed-object-packing-438299&quot;,&quot;regionId&quot;:&quot;image-1&quot;,&quot;blockIds&quot;:[&quot;block-39&quot;],&quot;objectKind&quot;:&quot;native-image&quot;,&quot;role&quot;:&quot;image&quot;,&quot;editable&quot;:false}}">    </p:cNvPr>
           <p:cNvPicPr>
             <a:picLocks noChangeAspect="1"/>
           </p:cNvPicPr>
@@ -18402,21 +19388,21 @@
         </p:nvSpPr>
         <p:spPr>
           <a:xfrm>
-            <a:off x="9859975" y="438912"/>
-            <a:ext cx="1024128" cy="1024128"/>
+            <a:off x="9768535" y="420624"/>
+            <a:ext cx="1078992" cy="1078992"/>
           </a:xfrm>
           <a:prstGeom prst="ellipse">
             <a:avLst/>
           </a:prstGeom>
           <a:solidFill>
             <a:srgbClr val="F43F5E">
-              <a:alpha val="82000"/>
+              <a:alpha val="86000"/>
             </a:srgbClr>
           </a:solidFill>
           <a:ln w="12700">
             <a:solidFill>
-              <a:srgbClr val="F43F5E">
-                <a:alpha val="0"/>
+              <a:srgbClr val="FFFFFF">
+                <a:alpha val="28000"/>
               </a:srgbClr>
             </a:solidFill>
             <a:prstDash val="solid"/>
@@ -18438,21 +19424,21 @@
         </p:nvSpPr>
         <p:spPr>
           <a:xfrm>
-            <a:off x="530352" y="5614416"/>
-            <a:ext cx="914400" cy="914400"/>
+            <a:off x="502920" y="5596128"/>
+            <a:ext cx="950976" cy="950976"/>
           </a:xfrm>
           <a:prstGeom prst="ellipse">
             <a:avLst/>
           </a:prstGeom>
           <a:solidFill>
             <a:srgbClr val="38BDF8">
-              <a:alpha val="84000"/>
+              <a:alpha val="86000"/>
             </a:srgbClr>
           </a:solidFill>
           <a:ln w="12700">
             <a:solidFill>
-              <a:srgbClr val="38BDF8">
-                <a:alpha val="0"/>
+              <a:srgbClr val="FFFFFF">
+                <a:alpha val="28000"/>
               </a:srgbClr>
             </a:solidFill>
             <a:prstDash val="solid"/>
@@ -18474,7 +19460,7 @@
         </p:nvSpPr>
         <p:spPr>
           <a:xfrm>
-            <a:off x="10746943" y="5760720"/>
+            <a:off x="10728655" y="5760720"/>
             <a:ext cx="658368" cy="658368"/>
           </a:xfrm>
           <a:prstGeom prst="ellipse">
@@ -18482,13 +19468,13 @@
           </a:prstGeom>
           <a:solidFill>
             <a:srgbClr val="FDE047">
-              <a:alpha val="80000"/>
+              <a:alpha val="82000"/>
             </a:srgbClr>
           </a:solidFill>
           <a:ln w="12700">
             <a:solidFill>
-              <a:srgbClr val="FDE047">
-                <a:alpha val="0"/>
+              <a:srgbClr val="FFFFFF">
+                <a:alpha val="28000"/>
               </a:srgbClr>
             </a:solidFill>
             <a:prstDash val="solid"/>
@@ -18510,6 +19496,64 @@
         </p:nvSpPr>
         <p:spPr>
           <a:xfrm>
+            <a:off x="11112703" y="164592"/>
+            <a:ext cx="713232" cy="128016"/>
+          </a:xfrm>
+          <a:prstGeom prst="roundRect">
+            <a:avLst>
+              <a:gd name="adj" fmla="val 28571"/>
+            </a:avLst>
+          </a:prstGeom>
+          <a:solidFill>
+            <a:srgbClr val="38BDF8"/>
+          </a:solidFill>
+          <a:ln w="12700">
+            <a:solidFill>
+              <a:srgbClr val="38BDF8">
+                <a:alpha val="0"/>
+              </a:srgbClr>
+            </a:solidFill>
+            <a:prstDash val="solid"/>
+          </a:ln>
+        </p:spPr>
+      </p:sp>
+      <p:sp>
+        <p:nvSpPr>
+          <p:cNvPr id="6" name="Shape 4"/>
+          <p:cNvSpPr/>
+          <p:nvPr/>
+        </p:nvSpPr>
+        <p:spPr>
+          <a:xfrm>
+            <a:off x="10198303" y="219456"/>
+            <a:ext cx="841248" cy="109728"/>
+          </a:xfrm>
+          <a:prstGeom prst="roundRect">
+            <a:avLst>
+              <a:gd name="adj" fmla="val 33333"/>
+            </a:avLst>
+          </a:prstGeom>
+          <a:solidFill>
+            <a:srgbClr val="F43F5E"/>
+          </a:solidFill>
+          <a:ln w="12700">
+            <a:solidFill>
+              <a:srgbClr val="FFFFFF">
+                <a:alpha val="0"/>
+              </a:srgbClr>
+            </a:solidFill>
+            <a:prstDash val="solid"/>
+          </a:ln>
+        </p:spPr>
+      </p:sp>
+      <p:sp>
+        <p:nvSpPr>
+          <p:cNvPr id="7" name="Shape 5"/>
+          <p:cNvSpPr/>
+          <p:nvPr/>
+        </p:nvSpPr>
+        <p:spPr>
+          <a:xfrm>
             <a:off x="10134295" y="0"/>
             <a:ext cx="2057400" cy="256032"/>
           </a:xfrm>
@@ -18531,7 +19575,7 @@
       </p:sp>
       <p:sp>
         <p:nvSpPr>
-          <p:cNvPr id="6" name="Shape 4"/>
+          <p:cNvPr id="8" name="Shape 6"/>
           <p:cNvSpPr/>
           <p:nvPr/>
         </p:nvSpPr>
@@ -18558,7 +19602,7 @@
       </p:sp>
       <p:pic>
         <p:nvPicPr>
-          <p:cNvPr id="7" name="Image 0" descr="preencoded.png">    </p:cNvPr>
+          <p:cNvPr id="9" name="Image 0" descr="preencoded.png">    </p:cNvPr>
           <p:cNvPicPr>
             <a:picLocks noChangeAspect="1"/>
           </p:cNvPicPr>
@@ -18588,7 +19632,7 @@
       </p:pic>
       <p:sp>
         <p:nvSpPr>
-          <p:cNvPr id="8" name="Shape 5"/>
+          <p:cNvPr id="10" name="Shape 7"/>
           <p:cNvSpPr/>
           <p:nvPr/>
         </p:nvSpPr>
@@ -18624,7 +19668,7 @@
       </p:sp>
       <p:pic>
         <p:nvPicPr>
-          <p:cNvPr id="9" name="Image 1" descr="preencoded.png">    </p:cNvPr>
+          <p:cNvPr id="11" name="Image 1" descr="preencoded.png">    </p:cNvPr>
           <p:cNvPicPr>
             <a:picLocks noChangeAspect="1"/>
           </p:cNvPicPr>
@@ -18654,7 +19698,7 @@
       </p:pic>
       <p:sp>
         <p:nvSpPr>
-          <p:cNvPr id="10" name="Shape 6"/>
+          <p:cNvPr id="12" name="Shape 8"/>
           <p:cNvSpPr/>
           <p:nvPr/>
         </p:nvSpPr>
@@ -18690,7 +19734,7 @@
       </p:sp>
       <p:pic>
         <p:nvPicPr>
-          <p:cNvPr id="11" name="Image 2" descr="preencoded.png">    </p:cNvPr>
+          <p:cNvPr id="13" name="Image 2" descr="preencoded.png">    </p:cNvPr>
           <p:cNvPicPr>
             <a:picLocks noChangeAspect="1"/>
           </p:cNvPicPr>
@@ -18720,7 +19764,7 @@
       </p:pic>
       <p:sp>
         <p:nvSpPr>
-          <p:cNvPr id="12" name="Shape 7"/>
+          <p:cNvPr id="14" name="Shape 9"/>
           <p:cNvSpPr/>
           <p:nvPr/>
         </p:nvSpPr>
@@ -18756,7 +19800,7 @@
       </p:sp>
       <p:sp>
         <p:nvSpPr>
-          <p:cNvPr id="13" name="Shape 8"/>
+          <p:cNvPr id="15" name="Shape 10"/>
           <p:cNvSpPr/>
           <p:nvPr/>
         </p:nvSpPr>
@@ -18785,7 +19829,7 @@
       </p:sp>
       <p:sp>
         <p:nvSpPr>
-          <p:cNvPr id="14" name="Shape 9"/>
+          <p:cNvPr id="16" name="Shape 11"/>
           <p:cNvSpPr/>
           <p:nvPr/>
         </p:nvSpPr>
@@ -18812,7 +19856,7 @@
       </p:sp>
       <p:sp>
         <p:nvSpPr>
-          <p:cNvPr id="15" name="Shape 10"/>
+          <p:cNvPr id="17" name="Shape 12"/>
           <p:cNvSpPr/>
           <p:nvPr/>
         </p:nvSpPr>
@@ -18839,7 +19883,7 @@
       </p:sp>
       <p:sp>
         <p:nvSpPr>
-          <p:cNvPr id="16" name="Shape 11"/>
+          <p:cNvPr id="18" name="Shape 13"/>
           <p:cNvSpPr/>
           <p:nvPr/>
         </p:nvSpPr>
@@ -18866,7 +19910,7 @@
       </p:sp>
       <p:sp>
         <p:nvSpPr>
-          <p:cNvPr id="17" name="mdpr:actions-output-review-326e07:title:__title:actions-output-review-326e07"/>
+          <p:cNvPr id="19" name="mdpr:actions-output-review-326e07:title:__title:actions-output-review-326e07"/>
           <p:cNvSpPr txBox="1"/>
           <p:nvPr/>
         </p:nvSpPr>
@@ -18908,7 +19952,7 @@
       </p:sp>
       <p:sp>
         <p:nvSpPr>
-          <p:cNvPr id="18" name="Shape 13"/>
+          <p:cNvPr id="20" name="Shape 15"/>
           <p:cNvSpPr/>
           <p:nvPr/>
         </p:nvSpPr>
@@ -18935,7 +19979,7 @@
       </p:sp>
       <p:pic>
         <p:nvPicPr>
-          <p:cNvPr id="19" name="Image 3" descr="flow icon from tabler-icons (MIT)">    </p:cNvPr>
+          <p:cNvPr id="21" name="Image 3" descr="flow icon from tabler-icons (MIT)">    </p:cNvPr>
           <p:cNvPicPr>
             <a:picLocks noChangeAspect="1"/>
           </p:cNvPicPr>
@@ -18965,7 +20009,7 @@
       </p:pic>
       <p:sp>
         <p:nvSpPr>
-          <p:cNvPr id="20" name="mdpr:actions-output-review-326e07:item-1:block-41"/>
+          <p:cNvPr id="22" name="mdpr:actions-output-review-326e07:item-1:block-41"/>
           <p:cNvSpPr txBox="1"/>
           <p:nvPr/>
         </p:nvSpPr>
@@ -19024,7 +20068,7 @@
       </p:sp>
       <p:sp>
         <p:nvSpPr>
-          <p:cNvPr id="21" name="Shape 15"/>
+          <p:cNvPr id="23" name="Shape 17"/>
           <p:cNvSpPr/>
           <p:nvPr/>
         </p:nvSpPr>
@@ -19051,7 +20095,7 @@
       </p:sp>
       <p:pic>
         <p:nvPicPr>
-          <p:cNvPr id="22" name="Image 4" descr="verified icon from tabler-icons (MIT)">    </p:cNvPr>
+          <p:cNvPr id="24" name="Image 4" descr="verified icon from tabler-icons (MIT)">    </p:cNvPr>
           <p:cNvPicPr>
             <a:picLocks noChangeAspect="1"/>
           </p:cNvPicPr>
@@ -19081,7 +20125,7 @@
       </p:pic>
       <p:sp>
         <p:nvSpPr>
-          <p:cNvPr id="23" name="mdpr:actions-output-review-326e07:item-2:block-41"/>
+          <p:cNvPr id="25" name="mdpr:actions-output-review-326e07:item-2:block-41"/>
           <p:cNvSpPr txBox="1"/>
           <p:nvPr/>
         </p:nvSpPr>
@@ -19140,7 +20184,7 @@
       </p:sp>
       <p:sp>
         <p:nvSpPr>
-          <p:cNvPr id="24" name="Shape 17"/>
+          <p:cNvPr id="26" name="Shape 19"/>
           <p:cNvSpPr/>
           <p:nvPr/>
         </p:nvSpPr>
@@ -19167,7 +20211,7 @@
       </p:sp>
       <p:pic>
         <p:nvPicPr>
-          <p:cNvPr id="25" name="Image 5" descr="spark icon from tabler-icons (MIT)">    </p:cNvPr>
+          <p:cNvPr id="27" name="Image 5" descr="spark icon from tabler-icons (MIT)">    </p:cNvPr>
           <p:cNvPicPr>
             <a:picLocks noChangeAspect="1"/>
           </p:cNvPicPr>
@@ -19197,7 +20241,7 @@
       </p:pic>
       <p:sp>
         <p:nvSpPr>
-          <p:cNvPr id="26" name="mdpr:actions-output-review-326e07:item-3:block-41"/>
+          <p:cNvPr id="28" name="mdpr:actions-output-review-326e07:item-3:block-41"/>
           <p:cNvSpPr txBox="1"/>
           <p:nvPr/>
         </p:nvSpPr>
@@ -19294,21 +20338,21 @@
         </p:nvSpPr>
         <p:spPr>
           <a:xfrm>
-            <a:off x="9859975" y="438912"/>
-            <a:ext cx="1024128" cy="1024128"/>
+            <a:off x="9768535" y="420624"/>
+            <a:ext cx="1078992" cy="1078992"/>
           </a:xfrm>
           <a:prstGeom prst="ellipse">
             <a:avLst/>
           </a:prstGeom>
           <a:solidFill>
             <a:srgbClr val="F43F5E">
-              <a:alpha val="82000"/>
+              <a:alpha val="86000"/>
             </a:srgbClr>
           </a:solidFill>
           <a:ln w="12700">
             <a:solidFill>
-              <a:srgbClr val="F43F5E">
-                <a:alpha val="0"/>
+              <a:srgbClr val="FFFFFF">
+                <a:alpha val="28000"/>
               </a:srgbClr>
             </a:solidFill>
             <a:prstDash val="solid"/>
@@ -19330,21 +20374,21 @@
         </p:nvSpPr>
         <p:spPr>
           <a:xfrm>
-            <a:off x="530352" y="5614416"/>
-            <a:ext cx="914400" cy="914400"/>
+            <a:off x="502920" y="5596128"/>
+            <a:ext cx="950976" cy="950976"/>
           </a:xfrm>
           <a:prstGeom prst="ellipse">
             <a:avLst/>
           </a:prstGeom>
           <a:solidFill>
             <a:srgbClr val="38BDF8">
-              <a:alpha val="84000"/>
+              <a:alpha val="86000"/>
             </a:srgbClr>
           </a:solidFill>
           <a:ln w="12700">
             <a:solidFill>
-              <a:srgbClr val="38BDF8">
-                <a:alpha val="0"/>
+              <a:srgbClr val="FFFFFF">
+                <a:alpha val="28000"/>
               </a:srgbClr>
             </a:solidFill>
             <a:prstDash val="solid"/>
@@ -19366,7 +20410,7 @@
         </p:nvSpPr>
         <p:spPr>
           <a:xfrm>
-            <a:off x="10746943" y="5760720"/>
+            <a:off x="10728655" y="5760720"/>
             <a:ext cx="658368" cy="658368"/>
           </a:xfrm>
           <a:prstGeom prst="ellipse">
@@ -19374,13 +20418,13 @@
           </a:prstGeom>
           <a:solidFill>
             <a:srgbClr val="FDE047">
-              <a:alpha val="80000"/>
+              <a:alpha val="82000"/>
             </a:srgbClr>
           </a:solidFill>
           <a:ln w="12700">
             <a:solidFill>
-              <a:srgbClr val="FDE047">
-                <a:alpha val="0"/>
+              <a:srgbClr val="FFFFFF">
+                <a:alpha val="28000"/>
               </a:srgbClr>
             </a:solidFill>
             <a:prstDash val="solid"/>
@@ -19402,6 +20446,64 @@
         </p:nvSpPr>
         <p:spPr>
           <a:xfrm>
+            <a:off x="11112703" y="164592"/>
+            <a:ext cx="713232" cy="128016"/>
+          </a:xfrm>
+          <a:prstGeom prst="roundRect">
+            <a:avLst>
+              <a:gd name="adj" fmla="val 28571"/>
+            </a:avLst>
+          </a:prstGeom>
+          <a:solidFill>
+            <a:srgbClr val="38BDF8"/>
+          </a:solidFill>
+          <a:ln w="12700">
+            <a:solidFill>
+              <a:srgbClr val="38BDF8">
+                <a:alpha val="0"/>
+              </a:srgbClr>
+            </a:solidFill>
+            <a:prstDash val="solid"/>
+          </a:ln>
+        </p:spPr>
+      </p:sp>
+      <p:sp>
+        <p:nvSpPr>
+          <p:cNvPr id="6" name="Shape 4"/>
+          <p:cNvSpPr/>
+          <p:nvPr/>
+        </p:nvSpPr>
+        <p:spPr>
+          <a:xfrm>
+            <a:off x="10198303" y="219456"/>
+            <a:ext cx="841248" cy="109728"/>
+          </a:xfrm>
+          <a:prstGeom prst="roundRect">
+            <a:avLst>
+              <a:gd name="adj" fmla="val 33333"/>
+            </a:avLst>
+          </a:prstGeom>
+          <a:solidFill>
+            <a:srgbClr val="F43F5E"/>
+          </a:solidFill>
+          <a:ln w="12700">
+            <a:solidFill>
+              <a:srgbClr val="FFFFFF">
+                <a:alpha val="0"/>
+              </a:srgbClr>
+            </a:solidFill>
+            <a:prstDash val="solid"/>
+          </a:ln>
+        </p:spPr>
+      </p:sp>
+      <p:sp>
+        <p:nvSpPr>
+          <p:cNvPr id="7" name="Shape 5"/>
+          <p:cNvSpPr/>
+          <p:nvPr/>
+        </p:nvSpPr>
+        <p:spPr>
+          <a:xfrm>
             <a:off x="10134295" y="0"/>
             <a:ext cx="2057400" cy="256032"/>
           </a:xfrm>
@@ -19423,7 +20525,7 @@
       </p:sp>
       <p:sp>
         <p:nvSpPr>
-          <p:cNvPr id="6" name="Shape 4"/>
+          <p:cNvPr id="8" name="Shape 6"/>
           <p:cNvSpPr/>
           <p:nvPr/>
         </p:nvSpPr>
@@ -19450,7 +20552,7 @@
       </p:sp>
       <p:sp>
         <p:nvSpPr>
-          <p:cNvPr id="7" name="Shape 5"/>
+          <p:cNvPr id="9" name="Shape 7"/>
           <p:cNvSpPr/>
           <p:nvPr/>
         </p:nvSpPr>
@@ -19477,7 +20579,7 @@
       </p:sp>
       <p:sp>
         <p:nvSpPr>
-          <p:cNvPr id="8" name="Shape 6"/>
+          <p:cNvPr id="10" name="Shape 8"/>
           <p:cNvSpPr/>
           <p:nvPr/>
         </p:nvSpPr>
@@ -19504,7 +20606,7 @@
       </p:sp>
       <p:sp>
         <p:nvSpPr>
-          <p:cNvPr id="9" name="Shape 7"/>
+          <p:cNvPr id="11" name="Shape 9"/>
           <p:cNvSpPr/>
           <p:nvPr/>
         </p:nvSpPr>
@@ -19531,7 +20633,7 @@
       </p:sp>
       <p:sp>
         <p:nvSpPr>
-          <p:cNvPr id="10" name="mdpr:2-2-7bfb60:title:__title:2-2-7bfb60"/>
+          <p:cNvPr id="12" name="mdpr:2-2-7bfb60:title:__title:2-2-7bfb60"/>
           <p:cNvSpPr txBox="1"/>
           <p:nvPr/>
         </p:nvSpPr>
@@ -19573,7 +20675,7 @@
       </p:sp>
       <p:sp>
         <p:nvSpPr>
-          <p:cNvPr id="11" name="mdpr:2-2-7bfb60:toc-item-1:toc-item-15"/>
+          <p:cNvPr id="13" name="mdpr:2-2-7bfb60:toc-item-1:toc-item-15"/>
           <p:cNvSpPr txBox="1"/>
           <p:nvPr/>
         </p:nvSpPr>
@@ -19653,21 +20755,21 @@
         </p:nvSpPr>
         <p:spPr>
           <a:xfrm>
-            <a:off x="9859975" y="438912"/>
-            <a:ext cx="1024128" cy="1024128"/>
+            <a:off x="9768535" y="420624"/>
+            <a:ext cx="1078992" cy="1078992"/>
           </a:xfrm>
           <a:prstGeom prst="ellipse">
             <a:avLst/>
           </a:prstGeom>
           <a:solidFill>
             <a:srgbClr val="F43F5E">
-              <a:alpha val="82000"/>
+              <a:alpha val="86000"/>
             </a:srgbClr>
           </a:solidFill>
           <a:ln w="12700">
             <a:solidFill>
-              <a:srgbClr val="F43F5E">
-                <a:alpha val="0"/>
+              <a:srgbClr val="FFFFFF">
+                <a:alpha val="28000"/>
               </a:srgbClr>
             </a:solidFill>
             <a:prstDash val="solid"/>
@@ -19689,21 +20791,21 @@
         </p:nvSpPr>
         <p:spPr>
           <a:xfrm>
-            <a:off x="530352" y="5614416"/>
-            <a:ext cx="914400" cy="914400"/>
+            <a:off x="502920" y="5596128"/>
+            <a:ext cx="950976" cy="950976"/>
           </a:xfrm>
           <a:prstGeom prst="ellipse">
             <a:avLst/>
           </a:prstGeom>
           <a:solidFill>
             <a:srgbClr val="38BDF8">
-              <a:alpha val="84000"/>
+              <a:alpha val="86000"/>
             </a:srgbClr>
           </a:solidFill>
           <a:ln w="12700">
             <a:solidFill>
-              <a:srgbClr val="38BDF8">
-                <a:alpha val="0"/>
+              <a:srgbClr val="FFFFFF">
+                <a:alpha val="28000"/>
               </a:srgbClr>
             </a:solidFill>
             <a:prstDash val="solid"/>
@@ -19725,7 +20827,7 @@
         </p:nvSpPr>
         <p:spPr>
           <a:xfrm>
-            <a:off x="10746943" y="5760720"/>
+            <a:off x="10728655" y="5760720"/>
             <a:ext cx="658368" cy="658368"/>
           </a:xfrm>
           <a:prstGeom prst="ellipse">
@@ -19733,13 +20835,13 @@
           </a:prstGeom>
           <a:solidFill>
             <a:srgbClr val="FDE047">
-              <a:alpha val="80000"/>
+              <a:alpha val="82000"/>
             </a:srgbClr>
           </a:solidFill>
           <a:ln w="12700">
             <a:solidFill>
-              <a:srgbClr val="FDE047">
-                <a:alpha val="0"/>
+              <a:srgbClr val="FFFFFF">
+                <a:alpha val="28000"/>
               </a:srgbClr>
             </a:solidFill>
             <a:prstDash val="solid"/>
@@ -19761,6 +20863,64 @@
         </p:nvSpPr>
         <p:spPr>
           <a:xfrm>
+            <a:off x="11112703" y="164592"/>
+            <a:ext cx="713232" cy="128016"/>
+          </a:xfrm>
+          <a:prstGeom prst="roundRect">
+            <a:avLst>
+              <a:gd name="adj" fmla="val 28571"/>
+            </a:avLst>
+          </a:prstGeom>
+          <a:solidFill>
+            <a:srgbClr val="38BDF8"/>
+          </a:solidFill>
+          <a:ln w="12700">
+            <a:solidFill>
+              <a:srgbClr val="38BDF8">
+                <a:alpha val="0"/>
+              </a:srgbClr>
+            </a:solidFill>
+            <a:prstDash val="solid"/>
+          </a:ln>
+        </p:spPr>
+      </p:sp>
+      <p:sp>
+        <p:nvSpPr>
+          <p:cNvPr id="6" name="Shape 4"/>
+          <p:cNvSpPr/>
+          <p:nvPr/>
+        </p:nvSpPr>
+        <p:spPr>
+          <a:xfrm>
+            <a:off x="10198303" y="219456"/>
+            <a:ext cx="841248" cy="109728"/>
+          </a:xfrm>
+          <a:prstGeom prst="roundRect">
+            <a:avLst>
+              <a:gd name="adj" fmla="val 33333"/>
+            </a:avLst>
+          </a:prstGeom>
+          <a:solidFill>
+            <a:srgbClr val="F43F5E"/>
+          </a:solidFill>
+          <a:ln w="12700">
+            <a:solidFill>
+              <a:srgbClr val="FFFFFF">
+                <a:alpha val="0"/>
+              </a:srgbClr>
+            </a:solidFill>
+            <a:prstDash val="solid"/>
+          </a:ln>
+        </p:spPr>
+      </p:sp>
+      <p:sp>
+        <p:nvSpPr>
+          <p:cNvPr id="7" name="Shape 5"/>
+          <p:cNvSpPr/>
+          <p:nvPr/>
+        </p:nvSpPr>
+        <p:spPr>
+          <a:xfrm>
             <a:off x="10134295" y="0"/>
             <a:ext cx="2057400" cy="256032"/>
           </a:xfrm>
@@ -19782,7 +20942,7 @@
       </p:sp>
       <p:sp>
         <p:nvSpPr>
-          <p:cNvPr id="6" name="Shape 4"/>
+          <p:cNvPr id="8" name="Shape 6"/>
           <p:cNvSpPr/>
           <p:nvPr/>
         </p:nvSpPr>
@@ -19809,7 +20969,7 @@
       </p:sp>
       <p:pic>
         <p:nvPicPr>
-          <p:cNvPr id="7" name="Image 0" descr="preencoded.png">    </p:cNvPr>
+          <p:cNvPr id="9" name="Image 0" descr="preencoded.png">    </p:cNvPr>
           <p:cNvPicPr>
             <a:picLocks noChangeAspect="1"/>
           </p:cNvPicPr>
@@ -19839,7 +20999,7 @@
       </p:pic>
       <p:sp>
         <p:nvSpPr>
-          <p:cNvPr id="8" name="Shape 5"/>
+          <p:cNvPr id="10" name="Shape 7"/>
           <p:cNvSpPr/>
           <p:nvPr/>
         </p:nvSpPr>
@@ -19875,7 +21035,7 @@
       </p:sp>
       <p:sp>
         <p:nvSpPr>
-          <p:cNvPr id="9" name="Shape 6"/>
+          <p:cNvPr id="11" name="Shape 8"/>
           <p:cNvSpPr/>
           <p:nvPr/>
         </p:nvSpPr>
@@ -19904,7 +21064,7 @@
       </p:sp>
       <p:sp>
         <p:nvSpPr>
-          <p:cNvPr id="10" name="Shape 7"/>
+          <p:cNvPr id="12" name="Shape 9"/>
           <p:cNvSpPr/>
           <p:nvPr/>
         </p:nvSpPr>
@@ -19931,7 +21091,7 @@
       </p:sp>
       <p:sp>
         <p:nvSpPr>
-          <p:cNvPr id="11" name="mdpr:teaser-summary-7731dc:title:__title:teaser-summary-7731dc"/>
+          <p:cNvPr id="13" name="mdpr:teaser-summary-7731dc:title:__title:teaser-summary-7731dc"/>
           <p:cNvSpPr txBox="1"/>
           <p:nvPr/>
         </p:nvSpPr>
@@ -19973,7 +21133,7 @@
       </p:sp>
       <p:sp>
         <p:nvSpPr>
-          <p:cNvPr id="12" name="mdpr:teaser-summary-7731dc:key-message:block-3"/>
+          <p:cNvPr id="14" name="mdpr:teaser-summary-7731dc:key-message:block-3"/>
           <p:cNvSpPr txBox="1"/>
           <p:nvPr/>
         </p:nvSpPr>
@@ -20015,7 +21175,7 @@
       </p:sp>
       <p:sp>
         <p:nvSpPr>
-          <p:cNvPr id="13" name="mdpr:teaser-summary-7731dc:body:block-4"/>
+          <p:cNvPr id="15" name="mdpr:teaser-summary-7731dc:body:block-4"/>
           <p:cNvSpPr txBox="1"/>
           <p:nvPr/>
         </p:nvSpPr>
@@ -20232,21 +21392,21 @@
         </p:nvSpPr>
         <p:spPr>
           <a:xfrm>
-            <a:off x="9859975" y="438912"/>
-            <a:ext cx="1024128" cy="1024128"/>
+            <a:off x="9768535" y="420624"/>
+            <a:ext cx="1078992" cy="1078992"/>
           </a:xfrm>
           <a:prstGeom prst="ellipse">
             <a:avLst/>
           </a:prstGeom>
           <a:solidFill>
             <a:srgbClr val="F43F5E">
-              <a:alpha val="82000"/>
+              <a:alpha val="86000"/>
             </a:srgbClr>
           </a:solidFill>
           <a:ln w="12700">
             <a:solidFill>
-              <a:srgbClr val="F43F5E">
-                <a:alpha val="0"/>
+              <a:srgbClr val="FFFFFF">
+                <a:alpha val="28000"/>
               </a:srgbClr>
             </a:solidFill>
             <a:prstDash val="solid"/>
@@ -20268,21 +21428,21 @@
         </p:nvSpPr>
         <p:spPr>
           <a:xfrm>
-            <a:off x="530352" y="5614416"/>
-            <a:ext cx="914400" cy="914400"/>
+            <a:off x="502920" y="5596128"/>
+            <a:ext cx="950976" cy="950976"/>
           </a:xfrm>
           <a:prstGeom prst="ellipse">
             <a:avLst/>
           </a:prstGeom>
           <a:solidFill>
             <a:srgbClr val="38BDF8">
-              <a:alpha val="84000"/>
+              <a:alpha val="86000"/>
             </a:srgbClr>
           </a:solidFill>
           <a:ln w="12700">
             <a:solidFill>
-              <a:srgbClr val="38BDF8">
-                <a:alpha val="0"/>
+              <a:srgbClr val="FFFFFF">
+                <a:alpha val="28000"/>
               </a:srgbClr>
             </a:solidFill>
             <a:prstDash val="solid"/>
@@ -20304,7 +21464,7 @@
         </p:nvSpPr>
         <p:spPr>
           <a:xfrm>
-            <a:off x="10746943" y="5760720"/>
+            <a:off x="10728655" y="5760720"/>
             <a:ext cx="658368" cy="658368"/>
           </a:xfrm>
           <a:prstGeom prst="ellipse">
@@ -20312,13 +21472,13 @@
           </a:prstGeom>
           <a:solidFill>
             <a:srgbClr val="FDE047">
-              <a:alpha val="80000"/>
+              <a:alpha val="82000"/>
             </a:srgbClr>
           </a:solidFill>
           <a:ln w="12700">
             <a:solidFill>
-              <a:srgbClr val="FDE047">
-                <a:alpha val="0"/>
+              <a:srgbClr val="FFFFFF">
+                <a:alpha val="28000"/>
               </a:srgbClr>
             </a:solidFill>
             <a:prstDash val="solid"/>
@@ -20340,6 +21500,64 @@
         </p:nvSpPr>
         <p:spPr>
           <a:xfrm>
+            <a:off x="11112703" y="164592"/>
+            <a:ext cx="713232" cy="128016"/>
+          </a:xfrm>
+          <a:prstGeom prst="roundRect">
+            <a:avLst>
+              <a:gd name="adj" fmla="val 28571"/>
+            </a:avLst>
+          </a:prstGeom>
+          <a:solidFill>
+            <a:srgbClr val="38BDF8"/>
+          </a:solidFill>
+          <a:ln w="12700">
+            <a:solidFill>
+              <a:srgbClr val="38BDF8">
+                <a:alpha val="0"/>
+              </a:srgbClr>
+            </a:solidFill>
+            <a:prstDash val="solid"/>
+          </a:ln>
+        </p:spPr>
+      </p:sp>
+      <p:sp>
+        <p:nvSpPr>
+          <p:cNvPr id="6" name="Shape 4"/>
+          <p:cNvSpPr/>
+          <p:nvPr/>
+        </p:nvSpPr>
+        <p:spPr>
+          <a:xfrm>
+            <a:off x="10198303" y="219456"/>
+            <a:ext cx="841248" cy="109728"/>
+          </a:xfrm>
+          <a:prstGeom prst="roundRect">
+            <a:avLst>
+              <a:gd name="adj" fmla="val 33333"/>
+            </a:avLst>
+          </a:prstGeom>
+          <a:solidFill>
+            <a:srgbClr val="F43F5E"/>
+          </a:solidFill>
+          <a:ln w="12700">
+            <a:solidFill>
+              <a:srgbClr val="FFFFFF">
+                <a:alpha val="0"/>
+              </a:srgbClr>
+            </a:solidFill>
+            <a:prstDash val="solid"/>
+          </a:ln>
+        </p:spPr>
+      </p:sp>
+      <p:sp>
+        <p:nvSpPr>
+          <p:cNvPr id="7" name="Shape 5"/>
+          <p:cNvSpPr/>
+          <p:nvPr/>
+        </p:nvSpPr>
+        <p:spPr>
+          <a:xfrm>
             <a:off x="10134295" y="0"/>
             <a:ext cx="2057400" cy="256032"/>
           </a:xfrm>
@@ -20361,7 +21579,7 @@
       </p:sp>
       <p:sp>
         <p:nvSpPr>
-          <p:cNvPr id="6" name="Shape 4"/>
+          <p:cNvPr id="8" name="Shape 6"/>
           <p:cNvSpPr/>
           <p:nvPr/>
         </p:nvSpPr>
@@ -20388,7 +21606,7 @@
       </p:sp>
       <p:pic>
         <p:nvPicPr>
-          <p:cNvPr id="7" name="Image 0" descr="preencoded.png">    </p:cNvPr>
+          <p:cNvPr id="9" name="Image 0" descr="preencoded.png">    </p:cNvPr>
           <p:cNvPicPr>
             <a:picLocks noChangeAspect="1"/>
           </p:cNvPicPr>
@@ -20418,7 +21636,7 @@
       </p:pic>
       <p:sp>
         <p:nvSpPr>
-          <p:cNvPr id="8" name="Shape 5"/>
+          <p:cNvPr id="10" name="Shape 7"/>
           <p:cNvSpPr/>
           <p:nvPr/>
         </p:nvSpPr>
@@ -20454,7 +21672,7 @@
       </p:sp>
       <p:pic>
         <p:nvPicPr>
-          <p:cNvPr id="9" name="Image 1" descr="preencoded.png">    </p:cNvPr>
+          <p:cNvPr id="11" name="Image 1" descr="preencoded.png">    </p:cNvPr>
           <p:cNvPicPr>
             <a:picLocks noChangeAspect="1"/>
           </p:cNvPicPr>
@@ -20484,7 +21702,7 @@
       </p:pic>
       <p:sp>
         <p:nvSpPr>
-          <p:cNvPr id="10" name="Shape 6"/>
+          <p:cNvPr id="12" name="Shape 8"/>
           <p:cNvSpPr/>
           <p:nvPr/>
         </p:nvSpPr>
@@ -20520,7 +21738,7 @@
       </p:sp>
       <p:pic>
         <p:nvPicPr>
-          <p:cNvPr id="11" name="Image 2" descr="preencoded.png">    </p:cNvPr>
+          <p:cNvPr id="13" name="Image 2" descr="preencoded.png">    </p:cNvPr>
           <p:cNvPicPr>
             <a:picLocks noChangeAspect="1"/>
           </p:cNvPicPr>
@@ -20550,7 +21768,7 @@
       </p:pic>
       <p:sp>
         <p:nvSpPr>
-          <p:cNvPr id="12" name="Shape 7"/>
+          <p:cNvPr id="14" name="Shape 9"/>
           <p:cNvSpPr/>
           <p:nvPr/>
         </p:nvSpPr>
@@ -20586,7 +21804,7 @@
       </p:sp>
       <p:sp>
         <p:nvSpPr>
-          <p:cNvPr id="13" name="Shape 8"/>
+          <p:cNvPr id="15" name="Shape 10"/>
           <p:cNvSpPr/>
           <p:nvPr/>
         </p:nvSpPr>
@@ -20615,7 +21833,7 @@
       </p:sp>
       <p:sp>
         <p:nvSpPr>
-          <p:cNvPr id="14" name="Shape 9"/>
+          <p:cNvPr id="16" name="Shape 11"/>
           <p:cNvSpPr/>
           <p:nvPr/>
         </p:nvSpPr>
@@ -20642,7 +21860,7 @@
       </p:sp>
       <p:sp>
         <p:nvSpPr>
-          <p:cNvPr id="15" name="Shape 10"/>
+          <p:cNvPr id="17" name="Shape 12"/>
           <p:cNvSpPr/>
           <p:nvPr/>
         </p:nvSpPr>
@@ -20669,7 +21887,7 @@
       </p:sp>
       <p:sp>
         <p:nvSpPr>
-          <p:cNvPr id="16" name="Shape 11"/>
+          <p:cNvPr id="18" name="Shape 13"/>
           <p:cNvSpPr/>
           <p:nvPr/>
         </p:nvSpPr>
@@ -20696,7 +21914,7 @@
       </p:sp>
       <p:sp>
         <p:nvSpPr>
-          <p:cNvPr id="17" name="mdpr:1-2-32ac08:title:__title:1-2-32ac08"/>
+          <p:cNvPr id="19" name="mdpr:1-2-32ac08:title:__title:1-2-32ac08"/>
           <p:cNvSpPr txBox="1"/>
           <p:nvPr/>
         </p:nvSpPr>
@@ -20738,7 +21956,7 @@
       </p:sp>
       <p:sp>
         <p:nvSpPr>
-          <p:cNvPr id="18" name="Shape 13"/>
+          <p:cNvPr id="20" name="Shape 15"/>
           <p:cNvSpPr/>
           <p:nvPr/>
         </p:nvSpPr>
@@ -20765,7 +21983,7 @@
       </p:sp>
       <p:pic>
         <p:nvPicPr>
-          <p:cNvPr id="19" name="Image 3" descr="article icon from tabler-icons (MIT)">    </p:cNvPr>
+          <p:cNvPr id="21" name="Image 3" descr="article icon from tabler-icons (MIT)">    </p:cNvPr>
           <p:cNvPicPr>
             <a:picLocks noChangeAspect="1"/>
           </p:cNvPicPr>
@@ -20795,7 +22013,7 @@
       </p:pic>
       <p:sp>
         <p:nvSpPr>
-          <p:cNvPr id="20" name="mdpr:1-2-32ac08:item-1:block-6-chunk-1"/>
+          <p:cNvPr id="22" name="mdpr:1-2-32ac08:item-1:block-6-chunk-1"/>
           <p:cNvSpPr txBox="1"/>
           <p:nvPr/>
         </p:nvSpPr>
@@ -20854,7 +22072,7 @@
       </p:sp>
       <p:sp>
         <p:nvSpPr>
-          <p:cNvPr id="21" name="Shape 15"/>
+          <p:cNvPr id="23" name="Shape 17"/>
           <p:cNvSpPr/>
           <p:nvPr/>
         </p:nvSpPr>
@@ -20881,7 +22099,7 @@
       </p:sp>
       <p:pic>
         <p:nvPicPr>
-          <p:cNvPr id="22" name="Image 4" descr="chart icon from tabler-icons (MIT)">    </p:cNvPr>
+          <p:cNvPr id="24" name="Image 4" descr="chart icon from tabler-icons (MIT)">    </p:cNvPr>
           <p:cNvPicPr>
             <a:picLocks noChangeAspect="1"/>
           </p:cNvPicPr>
@@ -20911,7 +22129,7 @@
       </p:pic>
       <p:sp>
         <p:nvSpPr>
-          <p:cNvPr id="23" name="mdpr:1-2-32ac08:item-2:block-6-chunk-1"/>
+          <p:cNvPr id="25" name="mdpr:1-2-32ac08:item-2:block-6-chunk-1"/>
           <p:cNvSpPr txBox="1"/>
           <p:nvPr/>
         </p:nvSpPr>
@@ -20970,7 +22188,7 @@
       </p:sp>
       <p:sp>
         <p:nvSpPr>
-          <p:cNvPr id="24" name="Shape 17"/>
+          <p:cNvPr id="26" name="Shape 19"/>
           <p:cNvSpPr/>
           <p:nvPr/>
         </p:nvSpPr>
@@ -20997,7 +22215,7 @@
       </p:sp>
       <p:pic>
         <p:nvPicPr>
-          <p:cNvPr id="25" name="Image 5" descr="article icon from tabler-icons (MIT)">    </p:cNvPr>
+          <p:cNvPr id="27" name="Image 5" descr="article icon from tabler-icons (MIT)">    </p:cNvPr>
           <p:cNvPicPr>
             <a:picLocks noChangeAspect="1"/>
           </p:cNvPicPr>
@@ -21027,7 +22245,7 @@
       </p:pic>
       <p:sp>
         <p:nvSpPr>
-          <p:cNvPr id="26" name="mdpr:1-2-32ac08:item-3:block-6-chunk-1"/>
+          <p:cNvPr id="28" name="mdpr:1-2-32ac08:item-3:block-6-chunk-1"/>
           <p:cNvSpPr txBox="1"/>
           <p:nvPr/>
         </p:nvSpPr>
@@ -21124,21 +22342,21 @@
         </p:nvSpPr>
         <p:spPr>
           <a:xfrm>
-            <a:off x="9859975" y="438912"/>
-            <a:ext cx="1024128" cy="1024128"/>
+            <a:off x="9768535" y="420624"/>
+            <a:ext cx="1078992" cy="1078992"/>
           </a:xfrm>
           <a:prstGeom prst="ellipse">
             <a:avLst/>
           </a:prstGeom>
           <a:solidFill>
             <a:srgbClr val="F43F5E">
-              <a:alpha val="82000"/>
+              <a:alpha val="86000"/>
             </a:srgbClr>
           </a:solidFill>
           <a:ln w="12700">
             <a:solidFill>
-              <a:srgbClr val="F43F5E">
-                <a:alpha val="0"/>
+              <a:srgbClr val="FFFFFF">
+                <a:alpha val="28000"/>
               </a:srgbClr>
             </a:solidFill>
             <a:prstDash val="solid"/>
@@ -21160,21 +22378,21 @@
         </p:nvSpPr>
         <p:spPr>
           <a:xfrm>
-            <a:off x="530352" y="5614416"/>
-            <a:ext cx="914400" cy="914400"/>
+            <a:off x="502920" y="5596128"/>
+            <a:ext cx="950976" cy="950976"/>
           </a:xfrm>
           <a:prstGeom prst="ellipse">
             <a:avLst/>
           </a:prstGeom>
           <a:solidFill>
             <a:srgbClr val="38BDF8">
-              <a:alpha val="84000"/>
+              <a:alpha val="86000"/>
             </a:srgbClr>
           </a:solidFill>
           <a:ln w="12700">
             <a:solidFill>
-              <a:srgbClr val="38BDF8">
-                <a:alpha val="0"/>
+              <a:srgbClr val="FFFFFF">
+                <a:alpha val="28000"/>
               </a:srgbClr>
             </a:solidFill>
             <a:prstDash val="solid"/>
@@ -21196,7 +22414,7 @@
         </p:nvSpPr>
         <p:spPr>
           <a:xfrm>
-            <a:off x="10746943" y="5760720"/>
+            <a:off x="10728655" y="5760720"/>
             <a:ext cx="658368" cy="658368"/>
           </a:xfrm>
           <a:prstGeom prst="ellipse">
@@ -21204,13 +22422,13 @@
           </a:prstGeom>
           <a:solidFill>
             <a:srgbClr val="FDE047">
-              <a:alpha val="80000"/>
+              <a:alpha val="82000"/>
             </a:srgbClr>
           </a:solidFill>
           <a:ln w="12700">
             <a:solidFill>
-              <a:srgbClr val="FDE047">
-                <a:alpha val="0"/>
+              <a:srgbClr val="FFFFFF">
+                <a:alpha val="28000"/>
               </a:srgbClr>
             </a:solidFill>
             <a:prstDash val="solid"/>
@@ -21232,6 +22450,64 @@
         </p:nvSpPr>
         <p:spPr>
           <a:xfrm>
+            <a:off x="11112703" y="164592"/>
+            <a:ext cx="713232" cy="128016"/>
+          </a:xfrm>
+          <a:prstGeom prst="roundRect">
+            <a:avLst>
+              <a:gd name="adj" fmla="val 28571"/>
+            </a:avLst>
+          </a:prstGeom>
+          <a:solidFill>
+            <a:srgbClr val="38BDF8"/>
+          </a:solidFill>
+          <a:ln w="12700">
+            <a:solidFill>
+              <a:srgbClr val="38BDF8">
+                <a:alpha val="0"/>
+              </a:srgbClr>
+            </a:solidFill>
+            <a:prstDash val="solid"/>
+          </a:ln>
+        </p:spPr>
+      </p:sp>
+      <p:sp>
+        <p:nvSpPr>
+          <p:cNvPr id="6" name="Shape 4"/>
+          <p:cNvSpPr/>
+          <p:nvPr/>
+        </p:nvSpPr>
+        <p:spPr>
+          <a:xfrm>
+            <a:off x="10198303" y="219456"/>
+            <a:ext cx="841248" cy="109728"/>
+          </a:xfrm>
+          <a:prstGeom prst="roundRect">
+            <a:avLst>
+              <a:gd name="adj" fmla="val 33333"/>
+            </a:avLst>
+          </a:prstGeom>
+          <a:solidFill>
+            <a:srgbClr val="F43F5E"/>
+          </a:solidFill>
+          <a:ln w="12700">
+            <a:solidFill>
+              <a:srgbClr val="FFFFFF">
+                <a:alpha val="0"/>
+              </a:srgbClr>
+            </a:solidFill>
+            <a:prstDash val="solid"/>
+          </a:ln>
+        </p:spPr>
+      </p:sp>
+      <p:sp>
+        <p:nvSpPr>
+          <p:cNvPr id="7" name="Shape 5"/>
+          <p:cNvSpPr/>
+          <p:nvPr/>
+        </p:nvSpPr>
+        <p:spPr>
+          <a:xfrm>
             <a:off x="10134295" y="0"/>
             <a:ext cx="2057400" cy="256032"/>
           </a:xfrm>
@@ -21253,7 +22529,7 @@
       </p:sp>
       <p:sp>
         <p:nvSpPr>
-          <p:cNvPr id="6" name="Shape 4"/>
+          <p:cNvPr id="8" name="Shape 6"/>
           <p:cNvSpPr/>
           <p:nvPr/>
         </p:nvSpPr>
@@ -21280,7 +22556,7 @@
       </p:sp>
       <p:sp>
         <p:nvSpPr>
-          <p:cNvPr id="7" name="Shape 5"/>
+          <p:cNvPr id="9" name="Shape 7"/>
           <p:cNvSpPr/>
           <p:nvPr/>
         </p:nvSpPr>
@@ -21307,7 +22583,7 @@
       </p:sp>
       <p:sp>
         <p:nvSpPr>
-          <p:cNvPr id="8" name="Shape 6"/>
+          <p:cNvPr id="10" name="Shape 8"/>
           <p:cNvSpPr/>
           <p:nvPr/>
         </p:nvSpPr>
@@ -21334,7 +22610,7 @@
       </p:sp>
       <p:sp>
         <p:nvSpPr>
-          <p:cNvPr id="9" name="mdpr:2-2-14f8eb:title:__title:2-2-14f8eb"/>
+          <p:cNvPr id="11" name="mdpr:2-2-14f8eb:title:__title:2-2-14f8eb"/>
           <p:cNvSpPr txBox="1"/>
           <p:nvPr/>
         </p:nvSpPr>
@@ -21376,7 +22652,7 @@
       </p:sp>
       <p:sp>
         <p:nvSpPr>
-          <p:cNvPr id="10" name="mdpr:2-2-14f8eb:left:block-6-chunk-2"/>
+          <p:cNvPr id="12" name="mdpr:2-2-14f8eb:left:block-6-chunk-2"/>
           <p:cNvSpPr txBox="1"/>
           <p:nvPr/>
         </p:nvSpPr>
@@ -21435,7 +22711,7 @@
       </p:sp>
       <p:sp>
         <p:nvSpPr>
-          <p:cNvPr id="11" name="mdpr:2-2-14f8eb:right:block-6-chunk-2"/>
+          <p:cNvPr id="13" name="mdpr:2-2-14f8eb:right:block-6-chunk-2"/>
           <p:cNvSpPr txBox="1"/>
           <p:nvPr/>
         </p:nvSpPr>
@@ -21532,21 +22808,21 @@
         </p:nvSpPr>
         <p:spPr>
           <a:xfrm>
-            <a:off x="9859975" y="438912"/>
-            <a:ext cx="1024128" cy="1024128"/>
+            <a:off x="9768535" y="420624"/>
+            <a:ext cx="1078992" cy="1078992"/>
           </a:xfrm>
           <a:prstGeom prst="ellipse">
             <a:avLst/>
           </a:prstGeom>
           <a:solidFill>
             <a:srgbClr val="F43F5E">
-              <a:alpha val="82000"/>
+              <a:alpha val="86000"/>
             </a:srgbClr>
           </a:solidFill>
           <a:ln w="12700">
             <a:solidFill>
-              <a:srgbClr val="F43F5E">
-                <a:alpha val="0"/>
+              <a:srgbClr val="FFFFFF">
+                <a:alpha val="28000"/>
               </a:srgbClr>
             </a:solidFill>
             <a:prstDash val="solid"/>
@@ -21568,21 +22844,21 @@
         </p:nvSpPr>
         <p:spPr>
           <a:xfrm>
-            <a:off x="530352" y="5614416"/>
-            <a:ext cx="914400" cy="914400"/>
+            <a:off x="502920" y="5596128"/>
+            <a:ext cx="950976" cy="950976"/>
           </a:xfrm>
           <a:prstGeom prst="ellipse">
             <a:avLst/>
           </a:prstGeom>
           <a:solidFill>
             <a:srgbClr val="38BDF8">
-              <a:alpha val="84000"/>
+              <a:alpha val="86000"/>
             </a:srgbClr>
           </a:solidFill>
           <a:ln w="12700">
             <a:solidFill>
-              <a:srgbClr val="38BDF8">
-                <a:alpha val="0"/>
+              <a:srgbClr val="FFFFFF">
+                <a:alpha val="28000"/>
               </a:srgbClr>
             </a:solidFill>
             <a:prstDash val="solid"/>
@@ -21604,7 +22880,7 @@
         </p:nvSpPr>
         <p:spPr>
           <a:xfrm>
-            <a:off x="10746943" y="5760720"/>
+            <a:off x="10728655" y="5760720"/>
             <a:ext cx="658368" cy="658368"/>
           </a:xfrm>
           <a:prstGeom prst="ellipse">
@@ -21612,13 +22888,13 @@
           </a:prstGeom>
           <a:solidFill>
             <a:srgbClr val="FDE047">
-              <a:alpha val="80000"/>
+              <a:alpha val="82000"/>
             </a:srgbClr>
           </a:solidFill>
           <a:ln w="12700">
             <a:solidFill>
-              <a:srgbClr val="FDE047">
-                <a:alpha val="0"/>
+              <a:srgbClr val="FFFFFF">
+                <a:alpha val="28000"/>
               </a:srgbClr>
             </a:solidFill>
             <a:prstDash val="solid"/>
@@ -21640,6 +22916,64 @@
         </p:nvSpPr>
         <p:spPr>
           <a:xfrm>
+            <a:off x="11112703" y="164592"/>
+            <a:ext cx="713232" cy="128016"/>
+          </a:xfrm>
+          <a:prstGeom prst="roundRect">
+            <a:avLst>
+              <a:gd name="adj" fmla="val 28571"/>
+            </a:avLst>
+          </a:prstGeom>
+          <a:solidFill>
+            <a:srgbClr val="38BDF8"/>
+          </a:solidFill>
+          <a:ln w="12700">
+            <a:solidFill>
+              <a:srgbClr val="38BDF8">
+                <a:alpha val="0"/>
+              </a:srgbClr>
+            </a:solidFill>
+            <a:prstDash val="solid"/>
+          </a:ln>
+        </p:spPr>
+      </p:sp>
+      <p:sp>
+        <p:nvSpPr>
+          <p:cNvPr id="6" name="Shape 4"/>
+          <p:cNvSpPr/>
+          <p:nvPr/>
+        </p:nvSpPr>
+        <p:spPr>
+          <a:xfrm>
+            <a:off x="10198303" y="219456"/>
+            <a:ext cx="841248" cy="109728"/>
+          </a:xfrm>
+          <a:prstGeom prst="roundRect">
+            <a:avLst>
+              <a:gd name="adj" fmla="val 33333"/>
+            </a:avLst>
+          </a:prstGeom>
+          <a:solidFill>
+            <a:srgbClr val="F43F5E"/>
+          </a:solidFill>
+          <a:ln w="12700">
+            <a:solidFill>
+              <a:srgbClr val="FFFFFF">
+                <a:alpha val="0"/>
+              </a:srgbClr>
+            </a:solidFill>
+            <a:prstDash val="solid"/>
+          </a:ln>
+        </p:spPr>
+      </p:sp>
+      <p:sp>
+        <p:nvSpPr>
+          <p:cNvPr id="7" name="Shape 5"/>
+          <p:cNvSpPr/>
+          <p:nvPr/>
+        </p:nvSpPr>
+        <p:spPr>
+          <a:xfrm>
             <a:off x="10134295" y="0"/>
             <a:ext cx="2057400" cy="256032"/>
           </a:xfrm>
@@ -21661,7 +22995,7 @@
       </p:sp>
       <p:sp>
         <p:nvSpPr>
-          <p:cNvPr id="6" name="Shape 4"/>
+          <p:cNvPr id="8" name="Shape 6"/>
           <p:cNvSpPr/>
           <p:nvPr/>
         </p:nvSpPr>
@@ -21688,7 +23022,7 @@
       </p:sp>
       <p:pic>
         <p:nvPicPr>
-          <p:cNvPr id="7" name="Image 0" descr="preencoded.png">    </p:cNvPr>
+          <p:cNvPr id="9" name="Image 0" descr="preencoded.png">    </p:cNvPr>
           <p:cNvPicPr>
             <a:picLocks noChangeAspect="1"/>
           </p:cNvPicPr>
@@ -21718,7 +23052,7 @@
       </p:pic>
       <p:sp>
         <p:nvSpPr>
-          <p:cNvPr id="8" name="Shape 5"/>
+          <p:cNvPr id="10" name="Shape 7"/>
           <p:cNvSpPr/>
           <p:nvPr/>
         </p:nvSpPr>
@@ -21754,7 +23088,7 @@
       </p:sp>
       <p:pic>
         <p:nvPicPr>
-          <p:cNvPr id="9" name="Image 1" descr="preencoded.png">    </p:cNvPr>
+          <p:cNvPr id="11" name="Image 1" descr="preencoded.png">    </p:cNvPr>
           <p:cNvPicPr>
             <a:picLocks noChangeAspect="1"/>
           </p:cNvPicPr>
@@ -21784,7 +23118,7 @@
       </p:pic>
       <p:sp>
         <p:nvSpPr>
-          <p:cNvPr id="10" name="Shape 6"/>
+          <p:cNvPr id="12" name="Shape 8"/>
           <p:cNvSpPr/>
           <p:nvPr/>
         </p:nvSpPr>
@@ -21820,7 +23154,7 @@
       </p:sp>
       <p:pic>
         <p:nvPicPr>
-          <p:cNvPr id="11" name="Image 2" descr="preencoded.png">    </p:cNvPr>
+          <p:cNvPr id="13" name="Image 2" descr="preencoded.png">    </p:cNvPr>
           <p:cNvPicPr>
             <a:picLocks noChangeAspect="1"/>
           </p:cNvPicPr>
@@ -21850,7 +23184,7 @@
       </p:pic>
       <p:sp>
         <p:nvSpPr>
-          <p:cNvPr id="12" name="Shape 7"/>
+          <p:cNvPr id="14" name="Shape 9"/>
           <p:cNvSpPr/>
           <p:nvPr/>
         </p:nvSpPr>
@@ -21886,7 +23220,7 @@
       </p:sp>
       <p:sp>
         <p:nvSpPr>
-          <p:cNvPr id="13" name="Shape 8"/>
+          <p:cNvPr id="15" name="Shape 10"/>
           <p:cNvSpPr/>
           <p:nvPr/>
         </p:nvSpPr>
@@ -21915,7 +23249,7 @@
       </p:sp>
       <p:sp>
         <p:nvSpPr>
-          <p:cNvPr id="14" name="Shape 9"/>
+          <p:cNvPr id="16" name="Shape 11"/>
           <p:cNvSpPr/>
           <p:nvPr/>
         </p:nvSpPr>
@@ -21942,7 +23276,7 @@
       </p:sp>
       <p:sp>
         <p:nvSpPr>
-          <p:cNvPr id="15" name="Shape 10"/>
+          <p:cNvPr id="17" name="Shape 12"/>
           <p:cNvSpPr/>
           <p:nvPr/>
         </p:nvSpPr>
@@ -21969,7 +23303,7 @@
       </p:sp>
       <p:sp>
         <p:nvSpPr>
-          <p:cNvPr id="16" name="Shape 11"/>
+          <p:cNvPr id="18" name="Shape 13"/>
           <p:cNvSpPr/>
           <p:nvPr/>
         </p:nvSpPr>
@@ -21996,7 +23330,7 @@
       </p:sp>
       <p:sp>
         <p:nvSpPr>
-          <p:cNvPr id="17" name="mdpr:1-2-dfa474:title:__title:1-2-dfa474"/>
+          <p:cNvPr id="19" name="mdpr:1-2-dfa474:title:__title:1-2-dfa474"/>
           <p:cNvSpPr txBox="1"/>
           <p:nvPr/>
         </p:nvSpPr>
@@ -22038,7 +23372,7 @@
       </p:sp>
       <p:sp>
         <p:nvSpPr>
-          <p:cNvPr id="18" name="Shape 13"/>
+          <p:cNvPr id="20" name="Shape 15"/>
           <p:cNvSpPr/>
           <p:nvPr/>
         </p:nvSpPr>
@@ -22065,7 +23399,7 @@
       </p:sp>
       <p:pic>
         <p:nvPicPr>
-          <p:cNvPr id="19" name="Image 3" descr="article icon from tabler-icons (MIT)">    </p:cNvPr>
+          <p:cNvPr id="21" name="Image 3" descr="article icon from tabler-icons (MIT)">    </p:cNvPr>
           <p:cNvPicPr>
             <a:picLocks noChangeAspect="1"/>
           </p:cNvPicPr>
@@ -22095,7 +23429,7 @@
       </p:pic>
       <p:sp>
         <p:nvSpPr>
-          <p:cNvPr id="20" name="mdpr:1-2-dfa474:item-1:block-8-chunk-1"/>
+          <p:cNvPr id="22" name="mdpr:1-2-dfa474:item-1:block-8-chunk-1"/>
           <p:cNvSpPr txBox="1"/>
           <p:nvPr/>
         </p:nvSpPr>
@@ -22154,7 +23488,7 @@
       </p:sp>
       <p:sp>
         <p:nvSpPr>
-          <p:cNvPr id="21" name="Shape 15"/>
+          <p:cNvPr id="23" name="Shape 17"/>
           <p:cNvSpPr/>
           <p:nvPr/>
         </p:nvSpPr>
@@ -22181,7 +23515,7 @@
       </p:sp>
       <p:pic>
         <p:nvPicPr>
-          <p:cNvPr id="22" name="Image 4" descr="article icon from tabler-icons (MIT)">    </p:cNvPr>
+          <p:cNvPr id="24" name="Image 4" descr="article icon from tabler-icons (MIT)">    </p:cNvPr>
           <p:cNvPicPr>
             <a:picLocks noChangeAspect="1"/>
           </p:cNvPicPr>
@@ -22211,7 +23545,7 @@
       </p:pic>
       <p:sp>
         <p:nvSpPr>
-          <p:cNvPr id="23" name="mdpr:1-2-dfa474:item-2:block-8-chunk-1"/>
+          <p:cNvPr id="25" name="mdpr:1-2-dfa474:item-2:block-8-chunk-1"/>
           <p:cNvSpPr txBox="1"/>
           <p:nvPr/>
         </p:nvSpPr>
@@ -22270,7 +23604,7 @@
       </p:sp>
       <p:sp>
         <p:nvSpPr>
-          <p:cNvPr id="24" name="Shape 17"/>
+          <p:cNvPr id="26" name="Shape 19"/>
           <p:cNvSpPr/>
           <p:nvPr/>
         </p:nvSpPr>
@@ -22297,7 +23631,7 @@
       </p:sp>
       <p:pic>
         <p:nvPicPr>
-          <p:cNvPr id="25" name="Image 5" descr="article icon from tabler-icons (MIT)">    </p:cNvPr>
+          <p:cNvPr id="27" name="Image 5" descr="article icon from tabler-icons (MIT)">    </p:cNvPr>
           <p:cNvPicPr>
             <a:picLocks noChangeAspect="1"/>
           </p:cNvPicPr>
@@ -22327,7 +23661,7 @@
       </p:pic>
       <p:sp>
         <p:nvSpPr>
-          <p:cNvPr id="26" name="mdpr:1-2-dfa474:item-3:block-8-chunk-1"/>
+          <p:cNvPr id="28" name="mdpr:1-2-dfa474:item-3:block-8-chunk-1"/>
           <p:cNvSpPr txBox="1"/>
           <p:nvPr/>
         </p:nvSpPr>
@@ -22424,21 +23758,21 @@
         </p:nvSpPr>
         <p:spPr>
           <a:xfrm>
-            <a:off x="9859975" y="438912"/>
-            <a:ext cx="1024128" cy="1024128"/>
+            <a:off x="9768535" y="420624"/>
+            <a:ext cx="1078992" cy="1078992"/>
           </a:xfrm>
           <a:prstGeom prst="ellipse">
             <a:avLst/>
           </a:prstGeom>
           <a:solidFill>
             <a:srgbClr val="F43F5E">
-              <a:alpha val="82000"/>
+              <a:alpha val="86000"/>
             </a:srgbClr>
           </a:solidFill>
           <a:ln w="12700">
             <a:solidFill>
-              <a:srgbClr val="F43F5E">
-                <a:alpha val="0"/>
+              <a:srgbClr val="FFFFFF">
+                <a:alpha val="28000"/>
               </a:srgbClr>
             </a:solidFill>
             <a:prstDash val="solid"/>
@@ -22460,21 +23794,21 @@
         </p:nvSpPr>
         <p:spPr>
           <a:xfrm>
-            <a:off x="530352" y="5614416"/>
-            <a:ext cx="914400" cy="914400"/>
+            <a:off x="502920" y="5596128"/>
+            <a:ext cx="950976" cy="950976"/>
           </a:xfrm>
           <a:prstGeom prst="ellipse">
             <a:avLst/>
           </a:prstGeom>
           <a:solidFill>
             <a:srgbClr val="38BDF8">
-              <a:alpha val="84000"/>
+              <a:alpha val="86000"/>
             </a:srgbClr>
           </a:solidFill>
           <a:ln w="12700">
             <a:solidFill>
-              <a:srgbClr val="38BDF8">
-                <a:alpha val="0"/>
+              <a:srgbClr val="FFFFFF">
+                <a:alpha val="28000"/>
               </a:srgbClr>
             </a:solidFill>
             <a:prstDash val="solid"/>
@@ -22496,7 +23830,7 @@
         </p:nvSpPr>
         <p:spPr>
           <a:xfrm>
-            <a:off x="10746943" y="5760720"/>
+            <a:off x="10728655" y="5760720"/>
             <a:ext cx="658368" cy="658368"/>
           </a:xfrm>
           <a:prstGeom prst="ellipse">
@@ -22504,13 +23838,13 @@
           </a:prstGeom>
           <a:solidFill>
             <a:srgbClr val="FDE047">
-              <a:alpha val="80000"/>
+              <a:alpha val="82000"/>
             </a:srgbClr>
           </a:solidFill>
           <a:ln w="12700">
             <a:solidFill>
-              <a:srgbClr val="FDE047">
-                <a:alpha val="0"/>
+              <a:srgbClr val="FFFFFF">
+                <a:alpha val="28000"/>
               </a:srgbClr>
             </a:solidFill>
             <a:prstDash val="solid"/>
@@ -22532,6 +23866,64 @@
         </p:nvSpPr>
         <p:spPr>
           <a:xfrm>
+            <a:off x="11112703" y="164592"/>
+            <a:ext cx="713232" cy="128016"/>
+          </a:xfrm>
+          <a:prstGeom prst="roundRect">
+            <a:avLst>
+              <a:gd name="adj" fmla="val 28571"/>
+            </a:avLst>
+          </a:prstGeom>
+          <a:solidFill>
+            <a:srgbClr val="38BDF8"/>
+          </a:solidFill>
+          <a:ln w="12700">
+            <a:solidFill>
+              <a:srgbClr val="38BDF8">
+                <a:alpha val="0"/>
+              </a:srgbClr>
+            </a:solidFill>
+            <a:prstDash val="solid"/>
+          </a:ln>
+        </p:spPr>
+      </p:sp>
+      <p:sp>
+        <p:nvSpPr>
+          <p:cNvPr id="6" name="Shape 4"/>
+          <p:cNvSpPr/>
+          <p:nvPr/>
+        </p:nvSpPr>
+        <p:spPr>
+          <a:xfrm>
+            <a:off x="10198303" y="219456"/>
+            <a:ext cx="841248" cy="109728"/>
+          </a:xfrm>
+          <a:prstGeom prst="roundRect">
+            <a:avLst>
+              <a:gd name="adj" fmla="val 33333"/>
+            </a:avLst>
+          </a:prstGeom>
+          <a:solidFill>
+            <a:srgbClr val="F43F5E"/>
+          </a:solidFill>
+          <a:ln w="12700">
+            <a:solidFill>
+              <a:srgbClr val="FFFFFF">
+                <a:alpha val="0"/>
+              </a:srgbClr>
+            </a:solidFill>
+            <a:prstDash val="solid"/>
+          </a:ln>
+        </p:spPr>
+      </p:sp>
+      <p:sp>
+        <p:nvSpPr>
+          <p:cNvPr id="7" name="Shape 5"/>
+          <p:cNvSpPr/>
+          <p:nvPr/>
+        </p:nvSpPr>
+        <p:spPr>
+          <a:xfrm>
             <a:off x="10134295" y="0"/>
             <a:ext cx="2057400" cy="256032"/>
           </a:xfrm>
@@ -22553,7 +23945,7 @@
       </p:sp>
       <p:sp>
         <p:nvSpPr>
-          <p:cNvPr id="6" name="Shape 4"/>
+          <p:cNvPr id="8" name="Shape 6"/>
           <p:cNvSpPr/>
           <p:nvPr/>
         </p:nvSpPr>
@@ -22580,7 +23972,7 @@
       </p:sp>
       <p:sp>
         <p:nvSpPr>
-          <p:cNvPr id="7" name="Shape 5"/>
+          <p:cNvPr id="9" name="Shape 7"/>
           <p:cNvSpPr/>
           <p:nvPr/>
         </p:nvSpPr>
@@ -22607,7 +23999,7 @@
       </p:sp>
       <p:sp>
         <p:nvSpPr>
-          <p:cNvPr id="8" name="Shape 6"/>
+          <p:cNvPr id="10" name="Shape 8"/>
           <p:cNvSpPr/>
           <p:nvPr/>
         </p:nvSpPr>
@@ -22634,7 +24026,7 @@
       </p:sp>
       <p:sp>
         <p:nvSpPr>
-          <p:cNvPr id="9" name="mdpr:2-2-149bde:title:__title:2-2-149bde"/>
+          <p:cNvPr id="11" name="mdpr:2-2-149bde:title:__title:2-2-149bde"/>
           <p:cNvSpPr txBox="1"/>
           <p:nvPr/>
         </p:nvSpPr>
@@ -22676,7 +24068,7 @@
       </p:sp>
       <p:sp>
         <p:nvSpPr>
-          <p:cNvPr id="10" name="mdpr:2-2-149bde:left:block-8-chunk-2"/>
+          <p:cNvPr id="12" name="mdpr:2-2-149bde:left:block-8-chunk-2"/>
           <p:cNvSpPr txBox="1"/>
           <p:nvPr/>
         </p:nvSpPr>
@@ -22735,7 +24127,7 @@
       </p:sp>
       <p:sp>
         <p:nvSpPr>
-          <p:cNvPr id="11" name="mdpr:2-2-149bde:right:block-8-chunk-2"/>
+          <p:cNvPr id="13" name="mdpr:2-2-149bde:right:block-8-chunk-2"/>
           <p:cNvSpPr txBox="1"/>
           <p:nvPr/>
         </p:nvSpPr>
@@ -22832,21 +24224,21 @@
         </p:nvSpPr>
         <p:spPr>
           <a:xfrm>
-            <a:off x="9859975" y="438912"/>
-            <a:ext cx="1024128" cy="1024128"/>
+            <a:off x="9768535" y="420624"/>
+            <a:ext cx="1078992" cy="1078992"/>
           </a:xfrm>
           <a:prstGeom prst="ellipse">
             <a:avLst/>
           </a:prstGeom>
           <a:solidFill>
             <a:srgbClr val="F43F5E">
-              <a:alpha val="82000"/>
+              <a:alpha val="86000"/>
             </a:srgbClr>
           </a:solidFill>
           <a:ln w="12700">
             <a:solidFill>
-              <a:srgbClr val="F43F5E">
-                <a:alpha val="0"/>
+              <a:srgbClr val="FFFFFF">
+                <a:alpha val="28000"/>
               </a:srgbClr>
             </a:solidFill>
             <a:prstDash val="solid"/>
@@ -22868,21 +24260,21 @@
         </p:nvSpPr>
         <p:spPr>
           <a:xfrm>
-            <a:off x="530352" y="5614416"/>
-            <a:ext cx="914400" cy="914400"/>
+            <a:off x="502920" y="5596128"/>
+            <a:ext cx="950976" cy="950976"/>
           </a:xfrm>
           <a:prstGeom prst="ellipse">
             <a:avLst/>
           </a:prstGeom>
           <a:solidFill>
             <a:srgbClr val="38BDF8">
-              <a:alpha val="84000"/>
+              <a:alpha val="86000"/>
             </a:srgbClr>
           </a:solidFill>
           <a:ln w="12700">
             <a:solidFill>
-              <a:srgbClr val="38BDF8">
-                <a:alpha val="0"/>
+              <a:srgbClr val="FFFFFF">
+                <a:alpha val="28000"/>
               </a:srgbClr>
             </a:solidFill>
             <a:prstDash val="solid"/>
@@ -22904,7 +24296,7 @@
         </p:nvSpPr>
         <p:spPr>
           <a:xfrm>
-            <a:off x="10746943" y="5760720"/>
+            <a:off x="10728655" y="5760720"/>
             <a:ext cx="658368" cy="658368"/>
           </a:xfrm>
           <a:prstGeom prst="ellipse">
@@ -22912,13 +24304,13 @@
           </a:prstGeom>
           <a:solidFill>
             <a:srgbClr val="FDE047">
-              <a:alpha val="80000"/>
+              <a:alpha val="82000"/>
             </a:srgbClr>
           </a:solidFill>
           <a:ln w="12700">
             <a:solidFill>
-              <a:srgbClr val="FDE047">
-                <a:alpha val="0"/>
+              <a:srgbClr val="FFFFFF">
+                <a:alpha val="28000"/>
               </a:srgbClr>
             </a:solidFill>
             <a:prstDash val="solid"/>
@@ -22940,6 +24332,64 @@
         </p:nvSpPr>
         <p:spPr>
           <a:xfrm>
+            <a:off x="11112703" y="164592"/>
+            <a:ext cx="713232" cy="128016"/>
+          </a:xfrm>
+          <a:prstGeom prst="roundRect">
+            <a:avLst>
+              <a:gd name="adj" fmla="val 28571"/>
+            </a:avLst>
+          </a:prstGeom>
+          <a:solidFill>
+            <a:srgbClr val="38BDF8"/>
+          </a:solidFill>
+          <a:ln w="12700">
+            <a:solidFill>
+              <a:srgbClr val="38BDF8">
+                <a:alpha val="0"/>
+              </a:srgbClr>
+            </a:solidFill>
+            <a:prstDash val="solid"/>
+          </a:ln>
+        </p:spPr>
+      </p:sp>
+      <p:sp>
+        <p:nvSpPr>
+          <p:cNvPr id="6" name="Shape 4"/>
+          <p:cNvSpPr/>
+          <p:nvPr/>
+        </p:nvSpPr>
+        <p:spPr>
+          <a:xfrm>
+            <a:off x="10198303" y="219456"/>
+            <a:ext cx="841248" cy="109728"/>
+          </a:xfrm>
+          <a:prstGeom prst="roundRect">
+            <a:avLst>
+              <a:gd name="adj" fmla="val 33333"/>
+            </a:avLst>
+          </a:prstGeom>
+          <a:solidFill>
+            <a:srgbClr val="F43F5E"/>
+          </a:solidFill>
+          <a:ln w="12700">
+            <a:solidFill>
+              <a:srgbClr val="FFFFFF">
+                <a:alpha val="0"/>
+              </a:srgbClr>
+            </a:solidFill>
+            <a:prstDash val="solid"/>
+          </a:ln>
+        </p:spPr>
+      </p:sp>
+      <p:sp>
+        <p:nvSpPr>
+          <p:cNvPr id="7" name="Shape 5"/>
+          <p:cNvSpPr/>
+          <p:nvPr/>
+        </p:nvSpPr>
+        <p:spPr>
+          <a:xfrm>
             <a:off x="10134295" y="0"/>
             <a:ext cx="2057400" cy="256032"/>
           </a:xfrm>
@@ -22961,7 +24411,7 @@
       </p:sp>
       <p:sp>
         <p:nvSpPr>
-          <p:cNvPr id="6" name="Shape 4"/>
+          <p:cNvPr id="8" name="Shape 6"/>
           <p:cNvSpPr/>
           <p:nvPr/>
         </p:nvSpPr>
@@ -22988,7 +24438,7 @@
       </p:sp>
       <p:sp>
         <p:nvSpPr>
-          <p:cNvPr id="7" name="Shape 5"/>
+          <p:cNvPr id="9" name="Shape 7"/>
           <p:cNvSpPr/>
           <p:nvPr/>
         </p:nvSpPr>
@@ -23015,7 +24465,7 @@
       </p:sp>
       <p:sp>
         <p:nvSpPr>
-          <p:cNvPr id="8" name="Shape 6"/>
+          <p:cNvPr id="10" name="Shape 8"/>
           <p:cNvSpPr/>
           <p:nvPr/>
         </p:nvSpPr>
@@ -23042,7 +24492,7 @@
       </p:sp>
       <p:sp>
         <p:nvSpPr>
-          <p:cNvPr id="9" name="mdpr:1-2-5a84f1:title:__title:1-2-5a84f1"/>
+          <p:cNvPr id="11" name="mdpr:1-2-5a84f1:title:__title:1-2-5a84f1"/>
           <p:cNvSpPr txBox="1"/>
           <p:nvPr/>
         </p:nvSpPr>
@@ -23084,7 +24534,7 @@
       </p:sp>
       <p:sp>
         <p:nvSpPr>
-          <p:cNvPr id="10" name="mdpr:1-2-5a84f1:left:block-10-chunk-1"/>
+          <p:cNvPr id="12" name="mdpr:1-2-5a84f1:left:block-10-chunk-1"/>
           <p:cNvSpPr txBox="1"/>
           <p:nvPr/>
         </p:nvSpPr>
@@ -23143,7 +24593,7 @@
       </p:sp>
       <p:sp>
         <p:nvSpPr>
-          <p:cNvPr id="11" name="mdpr:1-2-5a84f1:right:block-10-chunk-1"/>
+          <p:cNvPr id="13" name="mdpr:1-2-5a84f1:right:block-10-chunk-1"/>
           <p:cNvSpPr txBox="1"/>
           <p:nvPr/>
         </p:nvSpPr>

--- a/docs/theme-preview/pptx/claymorphism.pptx
+++ b/docs/theme-preview/pptx/claymorphism.pptx
@@ -6100,280 +6100,16 @@
           </a:ln>
         </p:spPr>
       </p:sp>
-      <p:pic>
-        <p:nvPicPr>
-          <p:cNvPr id="9" name="Image 0" descr="preencoded.png">    </p:cNvPr>
-          <p:cNvPicPr>
-            <a:picLocks noChangeAspect="1"/>
-          </p:cNvPicPr>
-          <p:nvPr/>
-        </p:nvPicPr>
-        <p:blipFill>
-          <a:blip r:embed="rId1">
-            <a:extLst>
-              <a:ext uri="{96DAC541-7B7A-43D3-8B79-37D633B846F1}">
-                <asvg:svgBlip xmlns:asvg="http://schemas.microsoft.com/office/drawing/2016/SVG/main" r:embed="rId2"/>
-              </a:ext>
-            </a:extLst>
-          </a:blip>
-          <a:stretch>
-            <a:fillRect/>
-          </a:stretch>
-        </p:blipFill>
-        <p:spPr>
-          <a:xfrm>
-            <a:off x="822960" y="1463040"/>
-            <a:ext cx="5029200" cy="1920240"/>
-          </a:xfrm>
-          <a:prstGeom prst="rect">
-            <a:avLst/>
-          </a:prstGeom>
-        </p:spPr>
-      </p:pic>
-      <p:sp>
-        <p:nvSpPr>
-          <p:cNvPr id="10" name="Shape 7"/>
-          <p:cNvSpPr/>
-          <p:nvPr/>
-        </p:nvSpPr>
-        <p:spPr>
-          <a:xfrm>
-            <a:off x="822960" y="1463040"/>
-            <a:ext cx="5029200" cy="1920240"/>
-          </a:xfrm>
-          <a:prstGeom prst="rect">
-            <a:avLst/>
-          </a:prstGeom>
-          <a:solidFill>
-            <a:srgbClr val="FFFFFF">
-              <a:alpha val="0"/>
-            </a:srgbClr>
-          </a:solidFill>
-          <a:ln w="12700">
-            <a:solidFill>
-              <a:srgbClr val="E5E7EB">
-                <a:alpha val="0"/>
-              </a:srgbClr>
-            </a:solidFill>
-            <a:prstDash val="solid"/>
-          </a:ln>
-          <a:effectLst>
-            <a:outerShdw sx="100000" sy="100000" kx="0" ky="0" algn="bl" rotWithShape="0" blurRad="12700" dist="50800" dir="2700000">
-              <a:srgbClr val="000000">
-                <a:alpha val="8000"/>
-              </a:srgbClr>
-            </a:outerShdw>
-          </a:effectLst>
-        </p:spPr>
-      </p:sp>
-      <p:pic>
-        <p:nvPicPr>
-          <p:cNvPr id="11" name="Image 1" descr="preencoded.png">    </p:cNvPr>
-          <p:cNvPicPr>
-            <a:picLocks noChangeAspect="1"/>
-          </p:cNvPicPr>
-          <p:nvPr/>
-        </p:nvPicPr>
-        <p:blipFill>
-          <a:blip r:embed="rId3">
-            <a:extLst>
-              <a:ext uri="{96DAC541-7B7A-43D3-8B79-37D633B846F1}">
-                <asvg:svgBlip xmlns:asvg="http://schemas.microsoft.com/office/drawing/2016/SVG/main" r:embed="rId4"/>
-              </a:ext>
-            </a:extLst>
-          </a:blip>
-          <a:stretch>
-            <a:fillRect/>
-          </a:stretch>
-        </p:blipFill>
-        <p:spPr>
-          <a:xfrm>
-            <a:off x="6309360" y="1463040"/>
-            <a:ext cx="5029200" cy="1920240"/>
-          </a:xfrm>
-          <a:prstGeom prst="rect">
-            <a:avLst/>
-          </a:prstGeom>
-        </p:spPr>
-      </p:pic>
-      <p:sp>
-        <p:nvSpPr>
-          <p:cNvPr id="12" name="Shape 8"/>
-          <p:cNvSpPr/>
-          <p:nvPr/>
-        </p:nvSpPr>
-        <p:spPr>
-          <a:xfrm>
-            <a:off x="6309360" y="1463040"/>
-            <a:ext cx="5029200" cy="1920240"/>
-          </a:xfrm>
-          <a:prstGeom prst="rect">
-            <a:avLst/>
-          </a:prstGeom>
-          <a:solidFill>
-            <a:srgbClr val="FFFFFF">
-              <a:alpha val="0"/>
-            </a:srgbClr>
-          </a:solidFill>
-          <a:ln w="12700">
-            <a:solidFill>
-              <a:srgbClr val="E5E7EB">
-                <a:alpha val="0"/>
-              </a:srgbClr>
-            </a:solidFill>
-            <a:prstDash val="solid"/>
-          </a:ln>
-          <a:effectLst>
-            <a:outerShdw sx="100000" sy="100000" kx="0" ky="0" algn="bl" rotWithShape="0" blurRad="12700" dist="50800" dir="2700000">
-              <a:srgbClr val="000000">
-                <a:alpha val="8000"/>
-              </a:srgbClr>
-            </a:outerShdw>
-          </a:effectLst>
-        </p:spPr>
-      </p:sp>
-      <p:pic>
-        <p:nvPicPr>
-          <p:cNvPr id="13" name="Image 2" descr="preencoded.png">    </p:cNvPr>
-          <p:cNvPicPr>
-            <a:picLocks noChangeAspect="1"/>
-          </p:cNvPicPr>
-          <p:nvPr/>
-        </p:nvPicPr>
-        <p:blipFill>
-          <a:blip r:embed="rId5">
-            <a:extLst>
-              <a:ext uri="{96DAC541-7B7A-43D3-8B79-37D633B846F1}">
-                <asvg:svgBlip xmlns:asvg="http://schemas.microsoft.com/office/drawing/2016/SVG/main" r:embed="rId6"/>
-              </a:ext>
-            </a:extLst>
-          </a:blip>
-          <a:stretch>
-            <a:fillRect/>
-          </a:stretch>
-        </p:blipFill>
-        <p:spPr>
-          <a:xfrm>
-            <a:off x="822960" y="3749040"/>
-            <a:ext cx="5029200" cy="1920240"/>
-          </a:xfrm>
-          <a:prstGeom prst="rect">
-            <a:avLst/>
-          </a:prstGeom>
-        </p:spPr>
-      </p:pic>
-      <p:sp>
-        <p:nvSpPr>
-          <p:cNvPr id="14" name="Shape 9"/>
-          <p:cNvSpPr/>
-          <p:nvPr/>
-        </p:nvSpPr>
-        <p:spPr>
-          <a:xfrm>
-            <a:off x="822960" y="3749040"/>
-            <a:ext cx="5029200" cy="1920240"/>
-          </a:xfrm>
-          <a:prstGeom prst="rect">
-            <a:avLst/>
-          </a:prstGeom>
-          <a:solidFill>
-            <a:srgbClr val="FFFFFF">
-              <a:alpha val="0"/>
-            </a:srgbClr>
-          </a:solidFill>
-          <a:ln w="12700">
-            <a:solidFill>
-              <a:srgbClr val="E5E7EB">
-                <a:alpha val="0"/>
-              </a:srgbClr>
-            </a:solidFill>
-            <a:prstDash val="solid"/>
-          </a:ln>
-          <a:effectLst>
-            <a:outerShdw sx="100000" sy="100000" kx="0" ky="0" algn="bl" rotWithShape="0" blurRad="12700" dist="50800" dir="2700000">
-              <a:srgbClr val="000000">
-                <a:alpha val="8000"/>
-              </a:srgbClr>
-            </a:outerShdw>
-          </a:effectLst>
-        </p:spPr>
-      </p:sp>
-      <p:pic>
-        <p:nvPicPr>
-          <p:cNvPr id="15" name="Image 3" descr="preencoded.png">    </p:cNvPr>
-          <p:cNvPicPr>
-            <a:picLocks noChangeAspect="1"/>
-          </p:cNvPicPr>
-          <p:nvPr/>
-        </p:nvPicPr>
-        <p:blipFill>
-          <a:blip r:embed="rId7">
-            <a:extLst>
-              <a:ext uri="{96DAC541-7B7A-43D3-8B79-37D633B846F1}">
-                <asvg:svgBlip xmlns:asvg="http://schemas.microsoft.com/office/drawing/2016/SVG/main" r:embed="rId8"/>
-              </a:ext>
-            </a:extLst>
-          </a:blip>
-          <a:stretch>
-            <a:fillRect/>
-          </a:stretch>
-        </p:blipFill>
-        <p:spPr>
-          <a:xfrm>
-            <a:off x="6309360" y="3749040"/>
-            <a:ext cx="5029200" cy="1920240"/>
-          </a:xfrm>
-          <a:prstGeom prst="rect">
-            <a:avLst/>
-          </a:prstGeom>
-        </p:spPr>
-      </p:pic>
-      <p:sp>
-        <p:nvSpPr>
-          <p:cNvPr id="16" name="Shape 10"/>
-          <p:cNvSpPr/>
-          <p:nvPr/>
-        </p:nvSpPr>
-        <p:spPr>
-          <a:xfrm>
-            <a:off x="6309360" y="3749040"/>
-            <a:ext cx="5029200" cy="1920240"/>
-          </a:xfrm>
-          <a:prstGeom prst="rect">
-            <a:avLst/>
-          </a:prstGeom>
-          <a:solidFill>
-            <a:srgbClr val="FFFFFF">
-              <a:alpha val="0"/>
-            </a:srgbClr>
-          </a:solidFill>
-          <a:ln w="12700">
-            <a:solidFill>
-              <a:srgbClr val="E5E7EB">
-                <a:alpha val="0"/>
-              </a:srgbClr>
-            </a:solidFill>
-            <a:prstDash val="solid"/>
-          </a:ln>
-          <a:effectLst>
-            <a:outerShdw sx="100000" sy="100000" kx="0" ky="0" algn="bl" rotWithShape="0" blurRad="12700" dist="50800" dir="2700000">
-              <a:srgbClr val="000000">
-                <a:alpha val="8000"/>
-              </a:srgbClr>
-            </a:outerShdw>
-          </a:effectLst>
-        </p:spPr>
-      </p:sp>
-      <p:sp>
-        <p:nvSpPr>
-          <p:cNvPr id="17" name="Shape 11"/>
-          <p:cNvSpPr/>
-          <p:nvPr/>
-        </p:nvSpPr>
-        <p:spPr>
-          <a:xfrm>
-            <a:off x="822960" y="1463040"/>
-            <a:ext cx="73152" cy="1920240"/>
+      <p:sp>
+        <p:nvSpPr>
+          <p:cNvPr id="9" name="Shape 7"/>
+          <p:cNvSpPr/>
+          <p:nvPr/>
+        </p:nvSpPr>
+        <p:spPr>
+          <a:xfrm>
+            <a:off x="822960" y="1389888"/>
+            <a:ext cx="4937760" cy="73152"/>
           </a:xfrm>
           <a:prstGeom prst="rect">
             <a:avLst/>
@@ -6393,41 +6129,14 @@
       </p:sp>
       <p:sp>
         <p:nvSpPr>
-          <p:cNvPr id="18" name="Shape 12"/>
-          <p:cNvSpPr/>
-          <p:nvPr/>
-        </p:nvSpPr>
-        <p:spPr>
-          <a:xfrm>
-            <a:off x="6309360" y="1463040"/>
-            <a:ext cx="73152" cy="1920240"/>
-          </a:xfrm>
-          <a:prstGeom prst="rect">
-            <a:avLst/>
-          </a:prstGeom>
-          <a:solidFill>
-            <a:srgbClr val="38BDF8"/>
-          </a:solidFill>
-          <a:ln w="12700">
-            <a:solidFill>
-              <a:srgbClr val="38BDF8">
-                <a:alpha val="0"/>
-              </a:srgbClr>
-            </a:solidFill>
-            <a:prstDash val="solid"/>
-          </a:ln>
-        </p:spPr>
-      </p:sp>
-      <p:sp>
-        <p:nvSpPr>
-          <p:cNvPr id="19" name="Shape 13"/>
-          <p:cNvSpPr/>
-          <p:nvPr/>
-        </p:nvSpPr>
-        <p:spPr>
-          <a:xfrm>
-            <a:off x="822960" y="3749040"/>
-            <a:ext cx="73152" cy="1920240"/>
+          <p:cNvPr id="10" name="Shape 8"/>
+          <p:cNvSpPr/>
+          <p:nvPr/>
+        </p:nvSpPr>
+        <p:spPr>
+          <a:xfrm>
+            <a:off x="6400800" y="1389888"/>
+            <a:ext cx="4937760" cy="73152"/>
           </a:xfrm>
           <a:prstGeom prst="rect">
             <a:avLst/>
@@ -6447,34 +6156,7 @@
       </p:sp>
       <p:sp>
         <p:nvSpPr>
-          <p:cNvPr id="20" name="Shape 14"/>
-          <p:cNvSpPr/>
-          <p:nvPr/>
-        </p:nvSpPr>
-        <p:spPr>
-          <a:xfrm>
-            <a:off x="6309360" y="3749040"/>
-            <a:ext cx="73152" cy="1920240"/>
-          </a:xfrm>
-          <a:prstGeom prst="rect">
-            <a:avLst/>
-          </a:prstGeom>
-          <a:solidFill>
-            <a:srgbClr val="38BDF8"/>
-          </a:solidFill>
-          <a:ln w="12700">
-            <a:solidFill>
-              <a:srgbClr val="38BDF8">
-                <a:alpha val="0"/>
-              </a:srgbClr>
-            </a:solidFill>
-            <a:prstDash val="solid"/>
-          </a:ln>
-        </p:spPr>
-      </p:sp>
-      <p:sp>
-        <p:nvSpPr>
-          <p:cNvPr id="21" name="mdpr:1-2-e3669a:title:__title:1-2-e3669a"/>
+          <p:cNvPr id="11" name="mdpr:1-2-e3669a:title:__title:1-2-e3669a"/>
           <p:cNvSpPr txBox="1"/>
           <p:nvPr/>
         </p:nvSpPr>
@@ -6516,71 +6198,14 @@
       </p:sp>
       <p:sp>
         <p:nvSpPr>
-          <p:cNvPr id="22" name="Shape 16"/>
-          <p:cNvSpPr/>
-          <p:nvPr/>
-        </p:nvSpPr>
-        <p:spPr>
-          <a:xfrm>
-            <a:off x="976122" y="2130552"/>
-            <a:ext cx="585216" cy="585216"/>
-          </a:xfrm>
-          <a:prstGeom prst="roundRect">
-            <a:avLst>
-              <a:gd name="adj" fmla="val 6250"/>
-            </a:avLst>
-          </a:prstGeom>
-          <a:solidFill>
-            <a:srgbClr val="F6F7FB"/>
-          </a:solidFill>
-          <a:ln w="12700">
-            <a:solidFill>
-              <a:srgbClr val="E5E7EB"/>
-            </a:solidFill>
-            <a:prstDash val="solid"/>
-          </a:ln>
-        </p:spPr>
-      </p:sp>
-      <p:pic>
-        <p:nvPicPr>
-          <p:cNvPr id="23" name="Image 4" descr="article icon from tabler-icons (MIT)">    </p:cNvPr>
-          <p:cNvPicPr>
-            <a:picLocks noChangeAspect="1"/>
-          </p:cNvPicPr>
-          <p:nvPr/>
-        </p:nvPicPr>
-        <p:blipFill>
-          <a:blip r:embed="rId9">
-            <a:extLst>
-              <a:ext uri="{96DAC541-7B7A-43D3-8B79-37D633B846F1}">
-                <asvg:svgBlip xmlns:asvg="http://schemas.microsoft.com/office/drawing/2016/SVG/main" r:embed="rId10"/>
-              </a:ext>
-            </a:extLst>
-          </a:blip>
-          <a:stretch>
-            <a:fillRect/>
-          </a:stretch>
-        </p:blipFill>
-        <p:spPr>
-          <a:xfrm>
-            <a:off x="1049274" y="2203704"/>
-            <a:ext cx="438912" cy="438912"/>
-          </a:xfrm>
-          <a:prstGeom prst="rect">
-            <a:avLst/>
-          </a:prstGeom>
-        </p:spPr>
-      </p:pic>
-      <p:sp>
-        <p:nvSpPr>
-          <p:cNvPr id="24" name="mdpr:1-2-e3669a:item-1:block-15-chunk-1"/>
+          <p:cNvPr id="12" name="mdpr:1-2-e3669a:left:block-15-chunk-1-block-15-chunk-1"/>
           <p:cNvSpPr txBox="1"/>
           <p:nvPr/>
         </p:nvSpPr>
         <p:spPr>
           <a:xfrm>
-            <a:off x="1689354" y="1627632"/>
-            <a:ext cx="3961638" cy="1591056"/>
+            <a:off x="896112" y="1499616"/>
+            <a:ext cx="4791456" cy="4398264"/>
           </a:xfrm>
           <a:prstGeom prst="rect">
             <a:avLst/>
@@ -6589,7 +6214,7 @@
           <a:ln/>
         </p:spPr>
         <p:txBody>
-          <a:bodyPr wrap="square" lIns="0" tIns="25400" rIns="25400" bIns="0" rtlCol="0" anchor="ctr"/>
+          <a:bodyPr wrap="square" lIns="0" tIns="25400" rIns="25400" bIns="0" rtlCol="0" anchor="t"/>
           <a:lstStyle/>
           <a:p>
             <a:pPr algn="l" indent="0" marL="0">
@@ -6599,7 +6224,7 @@
               <a:buNone/>
             </a:pPr>
             <a:r>
-              <a:rPr lang="en-US" sz="2200" b="1" dirty="0">
+              <a:rPr lang="en-US" sz="1800" b="1" dirty="0">
                 <a:solidFill>
                   <a:srgbClr val="F43F5E"/>
                 </a:solidFill>
@@ -6607,7 +6232,7 @@
                 <a:ea typeface="Pretendard" pitchFamily="34" charset="-122"/>
                 <a:cs typeface="Pretendard" pitchFamily="34" charset="-120"/>
               </a:rPr>
-              <a:t>Surfaces</a:t>
+              <a:t>- Surfaces</a:t>
             </a:r>
             <a:pPr algn="l" indent="0" marL="0">
               <a:lnSpc>
@@ -6616,7 +6241,7 @@
               <a:buNone/>
             </a:pPr>
             <a:r>
-              <a:rPr lang="en-US" sz="2200" dirty="0">
+              <a:rPr lang="en-US" sz="1800" dirty="0">
                 <a:solidFill>
                   <a:srgbClr val="111111"/>
                 </a:solidFill>
@@ -6626,77 +6251,60 @@
               </a:rPr>
               <a:t>  rounded-card, two-corner-card, flag-drop, ticket-panel, notched-panel, circle-vine.</a:t>
             </a:r>
-            <a:endParaRPr lang="en-US" sz="2200" dirty="0"/>
+            <a:endParaRPr lang="en-US" sz="1800" dirty="0"/>
+          </a:p>
+          <a:p>
+            <a:pPr algn="l" indent="0" marL="0">
+              <a:lnSpc>
+                <a:spcPct val="120000"/>
+              </a:lnSpc>
+              <a:buNone/>
+            </a:pPr>
+            <a:r>
+              <a:rPr lang="en-US" sz="1800" b="1" dirty="0">
+                <a:solidFill>
+                  <a:srgbClr val="F43F5E"/>
+                </a:solidFill>
+                <a:latin typeface="Pretendard" pitchFamily="34" charset="0"/>
+                <a:ea typeface="Pretendard" pitchFamily="34" charset="-122"/>
+                <a:cs typeface="Pretendard" pitchFamily="34" charset="-120"/>
+              </a:rPr>
+              <a:t>- Layouts</a:t>
+            </a:r>
+            <a:endParaRPr lang="en-US" sz="1800" dirty="0"/>
+          </a:p>
+          <a:p>
+            <a:pPr algn="l" indent="0" marL="0">
+              <a:lnSpc>
+                <a:spcPct val="120000"/>
+              </a:lnSpc>
+              <a:buNone/>
+            </a:pPr>
+            <a:r>
+              <a:rPr lang="en-US" sz="1800" dirty="0">
+                <a:solidFill>
+                  <a:srgbClr val="111111"/>
+                </a:solidFill>
+                <a:latin typeface="Pretendard" pitchFamily="34" charset="0"/>
+                <a:ea typeface="Pretendard" pitchFamily="34" charset="-122"/>
+                <a:cs typeface="Pretendard" pitchFamily="34" charset="-120"/>
+              </a:rPr>
+              <a:t>  toc-strips, two-column-compare, three-card-grid, six-tile-grid, timeline-rail, pipeline-chain.</a:t>
+            </a:r>
+            <a:endParaRPr lang="en-US" sz="1800" dirty="0"/>
           </a:p>
         </p:txBody>
       </p:sp>
       <p:sp>
         <p:nvSpPr>
-          <p:cNvPr id="25" name="Shape 18"/>
-          <p:cNvSpPr/>
-          <p:nvPr/>
-        </p:nvSpPr>
-        <p:spPr>
-          <a:xfrm>
-            <a:off x="6462522" y="2130552"/>
-            <a:ext cx="585216" cy="585216"/>
-          </a:xfrm>
-          <a:prstGeom prst="roundRect">
-            <a:avLst>
-              <a:gd name="adj" fmla="val 6250"/>
-            </a:avLst>
-          </a:prstGeom>
-          <a:solidFill>
-            <a:srgbClr val="F6F7FB"/>
-          </a:solidFill>
-          <a:ln w="12700">
-            <a:solidFill>
-              <a:srgbClr val="E5E7EB"/>
-            </a:solidFill>
-            <a:prstDash val="solid"/>
-          </a:ln>
-        </p:spPr>
-      </p:sp>
-      <p:pic>
-        <p:nvPicPr>
-          <p:cNvPr id="26" name="Image 5" descr="table icon from tabler-icons (MIT)">    </p:cNvPr>
-          <p:cNvPicPr>
-            <a:picLocks noChangeAspect="1"/>
-          </p:cNvPicPr>
-          <p:nvPr/>
-        </p:nvPicPr>
-        <p:blipFill>
-          <a:blip r:embed="rId11">
-            <a:extLst>
-              <a:ext uri="{96DAC541-7B7A-43D3-8B79-37D633B846F1}">
-                <asvg:svgBlip xmlns:asvg="http://schemas.microsoft.com/office/drawing/2016/SVG/main" r:embed="rId12"/>
-              </a:ext>
-            </a:extLst>
-          </a:blip>
-          <a:stretch>
-            <a:fillRect/>
-          </a:stretch>
-        </p:blipFill>
-        <p:spPr>
-          <a:xfrm>
-            <a:off x="6535674" y="2203704"/>
-            <a:ext cx="438912" cy="438912"/>
-          </a:xfrm>
-          <a:prstGeom prst="rect">
-            <a:avLst/>
-          </a:prstGeom>
-        </p:spPr>
-      </p:pic>
-      <p:sp>
-        <p:nvSpPr>
-          <p:cNvPr id="27" name="mdpr:1-2-e3669a:item-2:block-15-chunk-1"/>
+          <p:cNvPr id="13" name="mdpr:1-2-e3669a:right:block-15-chunk-1-block-15-chunk-1"/>
           <p:cNvSpPr txBox="1"/>
           <p:nvPr/>
         </p:nvSpPr>
         <p:spPr>
           <a:xfrm>
-            <a:off x="7175754" y="1627632"/>
-            <a:ext cx="3961638" cy="1591056"/>
+            <a:off x="6473952" y="1499616"/>
+            <a:ext cx="4791456" cy="4398264"/>
           </a:xfrm>
           <a:prstGeom prst="rect">
             <a:avLst/>
@@ -6705,7 +6313,7 @@
           <a:ln/>
         </p:spPr>
         <p:txBody>
-          <a:bodyPr wrap="square" lIns="0" tIns="25400" rIns="25400" bIns="0" rtlCol="0" anchor="ctr"/>
+          <a:bodyPr wrap="square" lIns="0" tIns="25400" rIns="25400" bIns="0" rtlCol="0" anchor="t"/>
           <a:lstStyle/>
           <a:p>
             <a:pPr algn="l" indent="0" marL="0">
@@ -6715,7 +6323,7 @@
               <a:buNone/>
             </a:pPr>
             <a:r>
-              <a:rPr lang="en-US" sz="2200" b="1" dirty="0">
+              <a:rPr lang="en-US" sz="1800" b="1" dirty="0">
                 <a:solidFill>
                   <a:srgbClr val="F43F5E"/>
                 </a:solidFill>
@@ -6723,7 +6331,7 @@
                 <a:ea typeface="Pretendard" pitchFamily="34" charset="-122"/>
                 <a:cs typeface="Pretendard" pitchFamily="34" charset="-120"/>
               </a:rPr>
-              <a:t>Layouts</a:t>
+              <a:t>- Evidence</a:t>
             </a:r>
             <a:pPr algn="l" indent="0" marL="0">
               <a:lnSpc>
@@ -6732,123 +6340,7 @@
               <a:buNone/>
             </a:pPr>
             <a:r>
-              <a:rPr lang="en-US" sz="2200" dirty="0">
-                <a:solidFill>
-                  <a:srgbClr val="111111"/>
-                </a:solidFill>
-                <a:latin typeface="Pretendard" pitchFamily="34" charset="0"/>
-                <a:ea typeface="Pretendard" pitchFamily="34" charset="-122"/>
-                <a:cs typeface="Pretendard" pitchFamily="34" charset="-120"/>
-              </a:rPr>
-              <a:t>  toc-strips, two-column-compare, three-card-grid, six-tile-grid, timeline-rail, pipeline-chain.</a:t>
-            </a:r>
-            <a:endParaRPr lang="en-US" sz="2200" dirty="0"/>
-          </a:p>
-        </p:txBody>
-      </p:sp>
-      <p:sp>
-        <p:nvSpPr>
-          <p:cNvPr id="28" name="Shape 20"/>
-          <p:cNvSpPr/>
-          <p:nvPr/>
-        </p:nvSpPr>
-        <p:spPr>
-          <a:xfrm>
-            <a:off x="976122" y="4416552"/>
-            <a:ext cx="585216" cy="585216"/>
-          </a:xfrm>
-          <a:prstGeom prst="roundRect">
-            <a:avLst>
-              <a:gd name="adj" fmla="val 6250"/>
-            </a:avLst>
-          </a:prstGeom>
-          <a:solidFill>
-            <a:srgbClr val="F6F7FB"/>
-          </a:solidFill>
-          <a:ln w="12700">
-            <a:solidFill>
-              <a:srgbClr val="E5E7EB"/>
-            </a:solidFill>
-            <a:prstDash val="solid"/>
-          </a:ln>
-        </p:spPr>
-      </p:sp>
-      <p:pic>
-        <p:nvPicPr>
-          <p:cNvPr id="29" name="Image 6" descr="chart icon from tabler-icons (MIT)">    </p:cNvPr>
-          <p:cNvPicPr>
-            <a:picLocks noChangeAspect="1"/>
-          </p:cNvPicPr>
-          <p:nvPr/>
-        </p:nvPicPr>
-        <p:blipFill>
-          <a:blip r:embed="rId13">
-            <a:extLst>
-              <a:ext uri="{96DAC541-7B7A-43D3-8B79-37D633B846F1}">
-                <asvg:svgBlip xmlns:asvg="http://schemas.microsoft.com/office/drawing/2016/SVG/main" r:embed="rId14"/>
-              </a:ext>
-            </a:extLst>
-          </a:blip>
-          <a:stretch>
-            <a:fillRect/>
-          </a:stretch>
-        </p:blipFill>
-        <p:spPr>
-          <a:xfrm>
-            <a:off x="1049274" y="4489704"/>
-            <a:ext cx="438912" cy="438912"/>
-          </a:xfrm>
-          <a:prstGeom prst="rect">
-            <a:avLst/>
-          </a:prstGeom>
-        </p:spPr>
-      </p:pic>
-      <p:sp>
-        <p:nvSpPr>
-          <p:cNvPr id="30" name="mdpr:1-2-e3669a:item-3:block-15-chunk-1"/>
-          <p:cNvSpPr txBox="1"/>
-          <p:nvPr/>
-        </p:nvSpPr>
-        <p:spPr>
-          <a:xfrm>
-            <a:off x="1689354" y="3913632"/>
-            <a:ext cx="3961638" cy="1591056"/>
-          </a:xfrm>
-          <a:prstGeom prst="rect">
-            <a:avLst/>
-          </a:prstGeom>
-          <a:noFill/>
-          <a:ln/>
-        </p:spPr>
-        <p:txBody>
-          <a:bodyPr wrap="square" lIns="0" tIns="25400" rIns="25400" bIns="0" rtlCol="0" anchor="ctr"/>
-          <a:lstStyle/>
-          <a:p>
-            <a:pPr algn="l" indent="0" marL="0">
-              <a:lnSpc>
-                <a:spcPct val="120000"/>
-              </a:lnSpc>
-              <a:buNone/>
-            </a:pPr>
-            <a:r>
-              <a:rPr lang="en-US" sz="2200" b="1" dirty="0">
-                <a:solidFill>
-                  <a:srgbClr val="F43F5E"/>
-                </a:solidFill>
-                <a:latin typeface="Pretendard" pitchFamily="34" charset="0"/>
-                <a:ea typeface="Pretendard" pitchFamily="34" charset="-122"/>
-                <a:cs typeface="Pretendard" pitchFamily="34" charset="-120"/>
-              </a:rPr>
-              <a:t>Evidence</a:t>
-            </a:r>
-            <a:pPr algn="l" indent="0" marL="0">
-              <a:lnSpc>
-                <a:spcPct val="120000"/>
-              </a:lnSpc>
-              <a:buNone/>
-            </a:pPr>
-            <a:r>
-              <a:rPr lang="en-US" sz="2200" dirty="0">
+              <a:rPr lang="en-US" sz="1800" dirty="0">
                 <a:solidFill>
                   <a:srgbClr val="111111"/>
                 </a:solidFill>
@@ -6858,87 +6350,8 @@
               </a:rPr>
               <a:t>  chart-table-pair, metric-proof, arc-ring-proof, gauge-proof, connected-strip, mixed-object-pack.</a:t>
             </a:r>
-            <a:endParaRPr lang="en-US" sz="2200" dirty="0"/>
+            <a:endParaRPr lang="en-US" sz="1800" dirty="0"/>
           </a:p>
-        </p:txBody>
-      </p:sp>
-      <p:sp>
-        <p:nvSpPr>
-          <p:cNvPr id="31" name="Shape 22"/>
-          <p:cNvSpPr/>
-          <p:nvPr/>
-        </p:nvSpPr>
-        <p:spPr>
-          <a:xfrm>
-            <a:off x="6462522" y="4416552"/>
-            <a:ext cx="585216" cy="585216"/>
-          </a:xfrm>
-          <a:prstGeom prst="roundRect">
-            <a:avLst>
-              <a:gd name="adj" fmla="val 6250"/>
-            </a:avLst>
-          </a:prstGeom>
-          <a:solidFill>
-            <a:srgbClr val="F6F7FB"/>
-          </a:solidFill>
-          <a:ln w="12700">
-            <a:solidFill>
-              <a:srgbClr val="E5E7EB"/>
-            </a:solidFill>
-            <a:prstDash val="solid"/>
-          </a:ln>
-        </p:spPr>
-      </p:sp>
-      <p:pic>
-        <p:nvPicPr>
-          <p:cNvPr id="32" name="Image 7" descr="flow icon from tabler-icons (MIT)">    </p:cNvPr>
-          <p:cNvPicPr>
-            <a:picLocks noChangeAspect="1"/>
-          </p:cNvPicPr>
-          <p:nvPr/>
-        </p:nvPicPr>
-        <p:blipFill>
-          <a:blip r:embed="rId15">
-            <a:extLst>
-              <a:ext uri="{96DAC541-7B7A-43D3-8B79-37D633B846F1}">
-                <asvg:svgBlip xmlns:asvg="http://schemas.microsoft.com/office/drawing/2016/SVG/main" r:embed="rId16"/>
-              </a:ext>
-            </a:extLst>
-          </a:blip>
-          <a:stretch>
-            <a:fillRect/>
-          </a:stretch>
-        </p:blipFill>
-        <p:spPr>
-          <a:xfrm>
-            <a:off x="6535674" y="4489704"/>
-            <a:ext cx="438912" cy="438912"/>
-          </a:xfrm>
-          <a:prstGeom prst="rect">
-            <a:avLst/>
-          </a:prstGeom>
-        </p:spPr>
-      </p:pic>
-      <p:sp>
-        <p:nvSpPr>
-          <p:cNvPr id="33" name="mdpr:1-2-e3669a:item-4:block-15-chunk-1"/>
-          <p:cNvSpPr txBox="1"/>
-          <p:nvPr/>
-        </p:nvSpPr>
-        <p:spPr>
-          <a:xfrm>
-            <a:off x="7175754" y="3913632"/>
-            <a:ext cx="3961638" cy="1591056"/>
-          </a:xfrm>
-          <a:prstGeom prst="rect">
-            <a:avLst/>
-          </a:prstGeom>
-          <a:noFill/>
-          <a:ln/>
-        </p:spPr>
-        <p:txBody>
-          <a:bodyPr wrap="square" lIns="0" tIns="25400" rIns="25400" bIns="0" rtlCol="0" anchor="ctr"/>
-          <a:lstStyle/>
           <a:p>
             <a:pPr algn="l" indent="0" marL="0">
               <a:lnSpc>
@@ -6947,7 +6360,7 @@
               <a:buNone/>
             </a:pPr>
             <a:r>
-              <a:rPr lang="en-US" sz="2200" b="1" dirty="0">
+              <a:rPr lang="en-US" sz="1800" b="1" dirty="0">
                 <a:solidFill>
                   <a:srgbClr val="F43F5E"/>
                 </a:solidFill>
@@ -6955,8 +6368,11 @@
                 <a:ea typeface="Pretendard" pitchFamily="34" charset="-122"/>
                 <a:cs typeface="Pretendard" pitchFamily="34" charset="-120"/>
               </a:rPr>
-              <a:t>Connectors</a:t>
+              <a:t>- Connectors</a:t>
             </a:r>
+            <a:endParaRPr lang="en-US" sz="1800" dirty="0"/>
+          </a:p>
+          <a:p>
             <a:pPr algn="l" indent="0" marL="0">
               <a:lnSpc>
                 <a:spcPct val="120000"/>
@@ -6964,7 +6380,7 @@
               <a:buNone/>
             </a:pPr>
             <a:r>
-              <a:rPr lang="en-US" sz="2200" dirty="0">
+              <a:rPr lang="en-US" sz="1800" dirty="0">
                 <a:solidFill>
                   <a:srgbClr val="111111"/>
                 </a:solidFill>
@@ -6974,7 +6390,7 @@
               </a:rPr>
               <a:t>  straight-arrow, elbow-arrow, boundary-attach, overlap-joint, parallel-flow, contrast-flow.</a:t>
             </a:r>
-            <a:endParaRPr lang="en-US" sz="2200" dirty="0"/>
+            <a:endParaRPr lang="en-US" sz="1800" dirty="0"/>
           </a:p>
         </p:txBody>
       </p:sp>
@@ -13271,71 +12687,14 @@
       </p:sp>
       <p:sp>
         <p:nvSpPr>
-          <p:cNvPr id="20" name="Shape 15"/>
-          <p:cNvSpPr/>
-          <p:nvPr/>
-        </p:nvSpPr>
-        <p:spPr>
-          <a:xfrm>
-            <a:off x="1097280" y="2140428"/>
-            <a:ext cx="474025" cy="474025"/>
-          </a:xfrm>
-          <a:prstGeom prst="roundRect">
-            <a:avLst>
-              <a:gd name="adj" fmla="val 7716"/>
-            </a:avLst>
-          </a:prstGeom>
-          <a:solidFill>
-            <a:srgbClr val="F6F7FB"/>
-          </a:solidFill>
-          <a:ln w="12700">
-            <a:solidFill>
-              <a:srgbClr val="E5E7EB"/>
-            </a:solidFill>
-            <a:prstDash val="solid"/>
-          </a:ln>
-        </p:spPr>
-      </p:sp>
-      <p:pic>
-        <p:nvPicPr>
-          <p:cNvPr id="21" name="Image 3" descr="article icon from tabler-icons (MIT)">    </p:cNvPr>
-          <p:cNvPicPr>
-            <a:picLocks noChangeAspect="1"/>
-          </p:cNvPicPr>
-          <p:nvPr/>
-        </p:nvPicPr>
-        <p:blipFill>
-          <a:blip r:embed="rId7">
-            <a:extLst>
-              <a:ext uri="{96DAC541-7B7A-43D3-8B79-37D633B846F1}">
-                <asvg:svgBlip xmlns:asvg="http://schemas.microsoft.com/office/drawing/2016/SVG/main" r:embed="rId8"/>
-              </a:ext>
-            </a:extLst>
-          </a:blip>
-          <a:stretch>
-            <a:fillRect/>
-          </a:stretch>
-        </p:blipFill>
-        <p:spPr>
-          <a:xfrm>
-            <a:off x="1170432" y="2213580"/>
-            <a:ext cx="327721" cy="327721"/>
-          </a:xfrm>
-          <a:prstGeom prst="rect">
-            <a:avLst/>
-          </a:prstGeom>
-        </p:spPr>
-      </p:pic>
-      <p:sp>
-        <p:nvSpPr>
-          <p:cNvPr id="22" name="mdpr:1-2-ea42c8:item-1:block-27-chunk-1"/>
+          <p:cNvPr id="20" name="mdpr:1-2-ea42c8:item-1:block-27-chunk-1"/>
           <p:cNvSpPr txBox="1"/>
           <p:nvPr/>
         </p:nvSpPr>
         <p:spPr>
           <a:xfrm>
-            <a:off x="1699321" y="1987296"/>
-            <a:ext cx="9255191" cy="780288"/>
+            <a:off x="1133856" y="1957548"/>
+            <a:ext cx="9820656" cy="839785"/>
           </a:xfrm>
           <a:prstGeom prst="rect">
             <a:avLst/>
@@ -13387,71 +12746,14 @@
       </p:sp>
       <p:sp>
         <p:nvSpPr>
-          <p:cNvPr id="23" name="Shape 17"/>
-          <p:cNvSpPr/>
-          <p:nvPr/>
-        </p:nvSpPr>
-        <p:spPr>
-          <a:xfrm>
-            <a:off x="1097280" y="3466308"/>
-            <a:ext cx="474025" cy="474025"/>
-          </a:xfrm>
-          <a:prstGeom prst="roundRect">
-            <a:avLst>
-              <a:gd name="adj" fmla="val 7716"/>
-            </a:avLst>
-          </a:prstGeom>
-          <a:solidFill>
-            <a:srgbClr val="F6F7FB"/>
-          </a:solidFill>
-          <a:ln w="12700">
-            <a:solidFill>
-              <a:srgbClr val="E5E7EB"/>
-            </a:solidFill>
-            <a:prstDash val="solid"/>
-          </a:ln>
-        </p:spPr>
-      </p:sp>
-      <p:pic>
-        <p:nvPicPr>
-          <p:cNvPr id="24" name="Image 4" descr="article icon from tabler-icons (MIT)">    </p:cNvPr>
-          <p:cNvPicPr>
-            <a:picLocks noChangeAspect="1"/>
-          </p:cNvPicPr>
-          <p:nvPr/>
-        </p:nvPicPr>
-        <p:blipFill>
-          <a:blip r:embed="rId9">
-            <a:extLst>
-              <a:ext uri="{96DAC541-7B7A-43D3-8B79-37D633B846F1}">
-                <asvg:svgBlip xmlns:asvg="http://schemas.microsoft.com/office/drawing/2016/SVG/main" r:embed="rId10"/>
-              </a:ext>
-            </a:extLst>
-          </a:blip>
-          <a:stretch>
-            <a:fillRect/>
-          </a:stretch>
-        </p:blipFill>
-        <p:spPr>
-          <a:xfrm>
-            <a:off x="1170432" y="3539460"/>
-            <a:ext cx="327721" cy="327721"/>
-          </a:xfrm>
-          <a:prstGeom prst="rect">
-            <a:avLst/>
-          </a:prstGeom>
-        </p:spPr>
-      </p:pic>
-      <p:sp>
-        <p:nvSpPr>
-          <p:cNvPr id="25" name="mdpr:1-2-ea42c8:item-2:block-27-chunk-1"/>
+          <p:cNvPr id="21" name="mdpr:1-2-ea42c8:item-2:block-27-chunk-1"/>
           <p:cNvSpPr txBox="1"/>
           <p:nvPr/>
         </p:nvSpPr>
         <p:spPr>
           <a:xfrm>
-            <a:off x="1699321" y="3313176"/>
-            <a:ext cx="9255191" cy="780288"/>
+            <a:off x="1133856" y="3283428"/>
+            <a:ext cx="9820656" cy="839785"/>
           </a:xfrm>
           <a:prstGeom prst="rect">
             <a:avLst/>
@@ -13503,71 +12805,14 @@
       </p:sp>
       <p:sp>
         <p:nvSpPr>
-          <p:cNvPr id="26" name="Shape 19"/>
-          <p:cNvSpPr/>
-          <p:nvPr/>
-        </p:nvSpPr>
-        <p:spPr>
-          <a:xfrm>
-            <a:off x="1097280" y="4783044"/>
-            <a:ext cx="474025" cy="474025"/>
-          </a:xfrm>
-          <a:prstGeom prst="roundRect">
-            <a:avLst>
-              <a:gd name="adj" fmla="val 7716"/>
-            </a:avLst>
-          </a:prstGeom>
-          <a:solidFill>
-            <a:srgbClr val="F6F7FB"/>
-          </a:solidFill>
-          <a:ln w="12700">
-            <a:solidFill>
-              <a:srgbClr val="E5E7EB"/>
-            </a:solidFill>
-            <a:prstDash val="solid"/>
-          </a:ln>
-        </p:spPr>
-      </p:sp>
-      <p:pic>
-        <p:nvPicPr>
-          <p:cNvPr id="27" name="Image 5" descr="article icon from tabler-icons (MIT)">    </p:cNvPr>
-          <p:cNvPicPr>
-            <a:picLocks noChangeAspect="1"/>
-          </p:cNvPicPr>
-          <p:nvPr/>
-        </p:nvPicPr>
-        <p:blipFill>
-          <a:blip r:embed="rId11">
-            <a:extLst>
-              <a:ext uri="{96DAC541-7B7A-43D3-8B79-37D633B846F1}">
-                <asvg:svgBlip xmlns:asvg="http://schemas.microsoft.com/office/drawing/2016/SVG/main" r:embed="rId12"/>
-              </a:ext>
-            </a:extLst>
-          </a:blip>
-          <a:stretch>
-            <a:fillRect/>
-          </a:stretch>
-        </p:blipFill>
-        <p:spPr>
-          <a:xfrm>
-            <a:off x="1170432" y="4856196"/>
-            <a:ext cx="327721" cy="327721"/>
-          </a:xfrm>
-          <a:prstGeom prst="rect">
-            <a:avLst/>
-          </a:prstGeom>
-        </p:spPr>
-      </p:pic>
-      <p:sp>
-        <p:nvSpPr>
-          <p:cNvPr id="28" name="mdpr:1-2-ea42c8:item-3:block-27-chunk-1"/>
+          <p:cNvPr id="22" name="mdpr:1-2-ea42c8:item-3:block-27-chunk-1"/>
           <p:cNvSpPr txBox="1"/>
           <p:nvPr/>
         </p:nvSpPr>
         <p:spPr>
           <a:xfrm>
-            <a:off x="1699321" y="4629912"/>
-            <a:ext cx="9255191" cy="780288"/>
+            <a:off x="1133856" y="4600164"/>
+            <a:ext cx="9820656" cy="839785"/>
           </a:xfrm>
           <a:prstGeom prst="rect">
             <a:avLst/>
@@ -16094,71 +15339,14 @@
       </p:sp>
       <p:sp>
         <p:nvSpPr>
-          <p:cNvPr id="22" name="Shape 16"/>
-          <p:cNvSpPr/>
-          <p:nvPr/>
-        </p:nvSpPr>
-        <p:spPr>
-          <a:xfrm>
-            <a:off x="976122" y="2130552"/>
-            <a:ext cx="585216" cy="585216"/>
-          </a:xfrm>
-          <a:prstGeom prst="roundRect">
-            <a:avLst>
-              <a:gd name="adj" fmla="val 6250"/>
-            </a:avLst>
-          </a:prstGeom>
-          <a:solidFill>
-            <a:srgbClr val="F6F7FB"/>
-          </a:solidFill>
-          <a:ln w="12700">
-            <a:solidFill>
-              <a:srgbClr val="E5E7EB"/>
-            </a:solidFill>
-            <a:prstDash val="solid"/>
-          </a:ln>
-        </p:spPr>
-      </p:sp>
-      <p:pic>
-        <p:nvPicPr>
-          <p:cNvPr id="23" name="Image 4" descr="article icon from tabler-icons (MIT)">    </p:cNvPr>
-          <p:cNvPicPr>
-            <a:picLocks noChangeAspect="1"/>
-          </p:cNvPicPr>
-          <p:nvPr/>
-        </p:nvPicPr>
-        <p:blipFill>
-          <a:blip r:embed="rId9">
-            <a:extLst>
-              <a:ext uri="{96DAC541-7B7A-43D3-8B79-37D633B846F1}">
-                <asvg:svgBlip xmlns:asvg="http://schemas.microsoft.com/office/drawing/2016/SVG/main" r:embed="rId10"/>
-              </a:ext>
-            </a:extLst>
-          </a:blip>
-          <a:stretch>
-            <a:fillRect/>
-          </a:stretch>
-        </p:blipFill>
-        <p:spPr>
-          <a:xfrm>
-            <a:off x="1049274" y="2203704"/>
-            <a:ext cx="438912" cy="438912"/>
-          </a:xfrm>
-          <a:prstGeom prst="rect">
-            <a:avLst/>
-          </a:prstGeom>
-        </p:spPr>
-      </p:pic>
-      <p:sp>
-        <p:nvSpPr>
-          <p:cNvPr id="24" name="mdpr:icon-and-text-aside-8429fc:item-1:block-29"/>
+          <p:cNvPr id="22" name="mdpr:icon-and-text-aside-8429fc:item-1:block-29"/>
           <p:cNvSpPr txBox="1"/>
           <p:nvPr/>
         </p:nvSpPr>
         <p:spPr>
           <a:xfrm>
-            <a:off x="1689354" y="2033016"/>
-            <a:ext cx="3961638" cy="780288"/>
+            <a:off x="1042416" y="1627632"/>
+            <a:ext cx="4608576" cy="1591056"/>
           </a:xfrm>
           <a:prstGeom prst="rect">
             <a:avLst/>
@@ -16210,71 +15398,14 @@
       </p:sp>
       <p:sp>
         <p:nvSpPr>
-          <p:cNvPr id="25" name="Shape 18"/>
-          <p:cNvSpPr/>
-          <p:nvPr/>
-        </p:nvSpPr>
-        <p:spPr>
-          <a:xfrm>
-            <a:off x="6462522" y="2130552"/>
-            <a:ext cx="585216" cy="585216"/>
-          </a:xfrm>
-          <a:prstGeom prst="roundRect">
-            <a:avLst>
-              <a:gd name="adj" fmla="val 6250"/>
-            </a:avLst>
-          </a:prstGeom>
-          <a:solidFill>
-            <a:srgbClr val="F6F7FB"/>
-          </a:solidFill>
-          <a:ln w="12700">
-            <a:solidFill>
-              <a:srgbClr val="E5E7EB"/>
-            </a:solidFill>
-            <a:prstDash val="solid"/>
-          </a:ln>
-        </p:spPr>
-      </p:sp>
-      <p:pic>
-        <p:nvPicPr>
-          <p:cNvPr id="26" name="Image 5" descr="article icon from tabler-icons (MIT)">    </p:cNvPr>
-          <p:cNvPicPr>
-            <a:picLocks noChangeAspect="1"/>
-          </p:cNvPicPr>
-          <p:nvPr/>
-        </p:nvPicPr>
-        <p:blipFill>
-          <a:blip r:embed="rId11">
-            <a:extLst>
-              <a:ext uri="{96DAC541-7B7A-43D3-8B79-37D633B846F1}">
-                <asvg:svgBlip xmlns:asvg="http://schemas.microsoft.com/office/drawing/2016/SVG/main" r:embed="rId12"/>
-              </a:ext>
-            </a:extLst>
-          </a:blip>
-          <a:stretch>
-            <a:fillRect/>
-          </a:stretch>
-        </p:blipFill>
-        <p:spPr>
-          <a:xfrm>
-            <a:off x="6535674" y="2203704"/>
-            <a:ext cx="438912" cy="438912"/>
-          </a:xfrm>
-          <a:prstGeom prst="rect">
-            <a:avLst/>
-          </a:prstGeom>
-        </p:spPr>
-      </p:pic>
-      <p:sp>
-        <p:nvSpPr>
-          <p:cNvPr id="27" name="mdpr:icon-and-text-aside-8429fc:item-2:block-29"/>
+          <p:cNvPr id="23" name="mdpr:icon-and-text-aside-8429fc:item-2:block-29"/>
           <p:cNvSpPr txBox="1"/>
           <p:nvPr/>
         </p:nvSpPr>
         <p:spPr>
           <a:xfrm>
-            <a:off x="7175754" y="1865376"/>
-            <a:ext cx="3961638" cy="1115568"/>
+            <a:off x="6528816" y="1627632"/>
+            <a:ext cx="4608576" cy="1591056"/>
           </a:xfrm>
           <a:prstGeom prst="rect">
             <a:avLst/>
@@ -16326,71 +15457,14 @@
       </p:sp>
       <p:sp>
         <p:nvSpPr>
-          <p:cNvPr id="28" name="Shape 20"/>
-          <p:cNvSpPr/>
-          <p:nvPr/>
-        </p:nvSpPr>
-        <p:spPr>
-          <a:xfrm>
-            <a:off x="976122" y="4416552"/>
-            <a:ext cx="585216" cy="585216"/>
-          </a:xfrm>
-          <a:prstGeom prst="roundRect">
-            <a:avLst>
-              <a:gd name="adj" fmla="val 6250"/>
-            </a:avLst>
-          </a:prstGeom>
-          <a:solidFill>
-            <a:srgbClr val="F6F7FB"/>
-          </a:solidFill>
-          <a:ln w="12700">
-            <a:solidFill>
-              <a:srgbClr val="E5E7EB"/>
-            </a:solidFill>
-            <a:prstDash val="solid"/>
-          </a:ln>
-        </p:spPr>
-      </p:sp>
-      <p:pic>
-        <p:nvPicPr>
-          <p:cNvPr id="29" name="Image 6" descr="article icon from tabler-icons (MIT)">    </p:cNvPr>
-          <p:cNvPicPr>
-            <a:picLocks noChangeAspect="1"/>
-          </p:cNvPicPr>
-          <p:nvPr/>
-        </p:nvPicPr>
-        <p:blipFill>
-          <a:blip r:embed="rId13">
-            <a:extLst>
-              <a:ext uri="{96DAC541-7B7A-43D3-8B79-37D633B846F1}">
-                <asvg:svgBlip xmlns:asvg="http://schemas.microsoft.com/office/drawing/2016/SVG/main" r:embed="rId14"/>
-              </a:ext>
-            </a:extLst>
-          </a:blip>
-          <a:stretch>
-            <a:fillRect/>
-          </a:stretch>
-        </p:blipFill>
-        <p:spPr>
-          <a:xfrm>
-            <a:off x="1049274" y="4489704"/>
-            <a:ext cx="438912" cy="438912"/>
-          </a:xfrm>
-          <a:prstGeom prst="rect">
-            <a:avLst/>
-          </a:prstGeom>
-        </p:spPr>
-      </p:pic>
-      <p:sp>
-        <p:nvSpPr>
-          <p:cNvPr id="30" name="mdpr:icon-and-text-aside-8429fc:item-3:block-29"/>
+          <p:cNvPr id="24" name="mdpr:icon-and-text-aside-8429fc:item-3:block-29"/>
           <p:cNvSpPr txBox="1"/>
           <p:nvPr/>
         </p:nvSpPr>
         <p:spPr>
           <a:xfrm>
-            <a:off x="1689354" y="4151376"/>
-            <a:ext cx="3961638" cy="1115568"/>
+            <a:off x="1042416" y="3913632"/>
+            <a:ext cx="4608576" cy="1591056"/>
           </a:xfrm>
           <a:prstGeom prst="rect">
             <a:avLst/>
@@ -16442,71 +15516,14 @@
       </p:sp>
       <p:sp>
         <p:nvSpPr>
-          <p:cNvPr id="31" name="Shape 22"/>
-          <p:cNvSpPr/>
-          <p:nvPr/>
-        </p:nvSpPr>
-        <p:spPr>
-          <a:xfrm>
-            <a:off x="6462522" y="4416552"/>
-            <a:ext cx="585216" cy="585216"/>
-          </a:xfrm>
-          <a:prstGeom prst="roundRect">
-            <a:avLst>
-              <a:gd name="adj" fmla="val 6250"/>
-            </a:avLst>
-          </a:prstGeom>
-          <a:solidFill>
-            <a:srgbClr val="F6F7FB"/>
-          </a:solidFill>
-          <a:ln w="12700">
-            <a:solidFill>
-              <a:srgbClr val="E5E7EB"/>
-            </a:solidFill>
-            <a:prstDash val="solid"/>
-          </a:ln>
-        </p:spPr>
-      </p:sp>
-      <p:pic>
-        <p:nvPicPr>
-          <p:cNvPr id="32" name="Image 7" descr="table icon from tabler-icons (MIT)">    </p:cNvPr>
-          <p:cNvPicPr>
-            <a:picLocks noChangeAspect="1"/>
-          </p:cNvPicPr>
-          <p:nvPr/>
-        </p:nvPicPr>
-        <p:blipFill>
-          <a:blip r:embed="rId15">
-            <a:extLst>
-              <a:ext uri="{96DAC541-7B7A-43D3-8B79-37D633B846F1}">
-                <asvg:svgBlip xmlns:asvg="http://schemas.microsoft.com/office/drawing/2016/SVG/main" r:embed="rId16"/>
-              </a:ext>
-            </a:extLst>
-          </a:blip>
-          <a:stretch>
-            <a:fillRect/>
-          </a:stretch>
-        </p:blipFill>
-        <p:spPr>
-          <a:xfrm>
-            <a:off x="6535674" y="4489704"/>
-            <a:ext cx="438912" cy="438912"/>
-          </a:xfrm>
-          <a:prstGeom prst="rect">
-            <a:avLst/>
-          </a:prstGeom>
-        </p:spPr>
-      </p:pic>
-      <p:sp>
-        <p:nvSpPr>
-          <p:cNvPr id="33" name="mdpr:icon-and-text-aside-8429fc:item-4:block-29"/>
+          <p:cNvPr id="25" name="mdpr:icon-and-text-aside-8429fc:item-4:block-29"/>
           <p:cNvSpPr txBox="1"/>
           <p:nvPr/>
         </p:nvSpPr>
         <p:spPr>
           <a:xfrm>
-            <a:off x="7175754" y="4151376"/>
-            <a:ext cx="3961638" cy="1115568"/>
+            <a:off x="6528816" y="3913632"/>
+            <a:ext cx="4608576" cy="1591056"/>
           </a:xfrm>
           <a:prstGeom prst="rect">
             <a:avLst/>
@@ -17224,71 +16241,14 @@
       </p:sp>
       <p:sp>
         <p:nvSpPr>
-          <p:cNvPr id="22" name="Shape 16"/>
-          <p:cNvSpPr/>
-          <p:nvPr/>
-        </p:nvSpPr>
-        <p:spPr>
-          <a:xfrm>
-            <a:off x="976122" y="2130552"/>
-            <a:ext cx="585216" cy="585216"/>
-          </a:xfrm>
-          <a:prstGeom prst="roundRect">
-            <a:avLst>
-              <a:gd name="adj" fmla="val 6250"/>
-            </a:avLst>
-          </a:prstGeom>
-          <a:solidFill>
-            <a:srgbClr val="F6F7FB"/>
-          </a:solidFill>
-          <a:ln w="12700">
-            <a:solidFill>
-              <a:srgbClr val="E5E7EB"/>
-            </a:solidFill>
-            <a:prstDash val="solid"/>
-          </a:ln>
-        </p:spPr>
-      </p:sp>
-      <p:pic>
-        <p:nvPicPr>
-          <p:cNvPr id="23" name="Image 4" descr="verified icon from tabler-icons (MIT)">    </p:cNvPr>
-          <p:cNvPicPr>
-            <a:picLocks noChangeAspect="1"/>
-          </p:cNvPicPr>
-          <p:nvPr/>
-        </p:nvPicPr>
-        <p:blipFill>
-          <a:blip r:embed="rId9">
-            <a:extLst>
-              <a:ext uri="{96DAC541-7B7A-43D3-8B79-37D633B846F1}">
-                <asvg:svgBlip xmlns:asvg="http://schemas.microsoft.com/office/drawing/2016/SVG/main" r:embed="rId10"/>
-              </a:ext>
-            </a:extLst>
-          </a:blip>
-          <a:stretch>
-            <a:fillRect/>
-          </a:stretch>
-        </p:blipFill>
-        <p:spPr>
-          <a:xfrm>
-            <a:off x="1049274" y="2203704"/>
-            <a:ext cx="438912" cy="438912"/>
-          </a:xfrm>
-          <a:prstGeom prst="rect">
-            <a:avLst/>
-          </a:prstGeom>
-        </p:spPr>
-      </p:pic>
-      <p:sp>
-        <p:nvSpPr>
-          <p:cNvPr id="24" name="mdpr:overflow-guard-f8d03e:item-1:block-31"/>
+          <p:cNvPr id="22" name="mdpr:overflow-guard-f8d03e:item-1:block-31"/>
           <p:cNvSpPr txBox="1"/>
           <p:nvPr/>
         </p:nvSpPr>
         <p:spPr>
           <a:xfrm>
-            <a:off x="1689354" y="1865376"/>
-            <a:ext cx="3961638" cy="1115568"/>
+            <a:off x="1042416" y="1627632"/>
+            <a:ext cx="4608576" cy="1591056"/>
           </a:xfrm>
           <a:prstGeom prst="rect">
             <a:avLst/>
@@ -17340,71 +16300,14 @@
       </p:sp>
       <p:sp>
         <p:nvSpPr>
-          <p:cNvPr id="25" name="Shape 18"/>
-          <p:cNvSpPr/>
-          <p:nvPr/>
-        </p:nvSpPr>
-        <p:spPr>
-          <a:xfrm>
-            <a:off x="6462522" y="2130552"/>
-            <a:ext cx="585216" cy="585216"/>
-          </a:xfrm>
-          <a:prstGeom prst="roundRect">
-            <a:avLst>
-              <a:gd name="adj" fmla="val 6250"/>
-            </a:avLst>
-          </a:prstGeom>
-          <a:solidFill>
-            <a:srgbClr val="F6F7FB"/>
-          </a:solidFill>
-          <a:ln w="12700">
-            <a:solidFill>
-              <a:srgbClr val="E5E7EB"/>
-            </a:solidFill>
-            <a:prstDash val="solid"/>
-          </a:ln>
-        </p:spPr>
-      </p:sp>
-      <p:pic>
-        <p:nvPicPr>
-          <p:cNvPr id="26" name="Image 5" descr="table icon from tabler-icons (MIT)">    </p:cNvPr>
-          <p:cNvPicPr>
-            <a:picLocks noChangeAspect="1"/>
-          </p:cNvPicPr>
-          <p:nvPr/>
-        </p:nvPicPr>
-        <p:blipFill>
-          <a:blip r:embed="rId11">
-            <a:extLst>
-              <a:ext uri="{96DAC541-7B7A-43D3-8B79-37D633B846F1}">
-                <asvg:svgBlip xmlns:asvg="http://schemas.microsoft.com/office/drawing/2016/SVG/main" r:embed="rId12"/>
-              </a:ext>
-            </a:extLst>
-          </a:blip>
-          <a:stretch>
-            <a:fillRect/>
-          </a:stretch>
-        </p:blipFill>
-        <p:spPr>
-          <a:xfrm>
-            <a:off x="6535674" y="2203704"/>
-            <a:ext cx="438912" cy="438912"/>
-          </a:xfrm>
-          <a:prstGeom prst="rect">
-            <a:avLst/>
-          </a:prstGeom>
-        </p:spPr>
-      </p:pic>
-      <p:sp>
-        <p:nvSpPr>
-          <p:cNvPr id="27" name="mdpr:overflow-guard-f8d03e:item-2:block-31"/>
+          <p:cNvPr id="23" name="mdpr:overflow-guard-f8d03e:item-2:block-31"/>
           <p:cNvSpPr txBox="1"/>
           <p:nvPr/>
         </p:nvSpPr>
         <p:spPr>
           <a:xfrm>
-            <a:off x="7175754" y="1697736"/>
-            <a:ext cx="3961638" cy="1450848"/>
+            <a:off x="6528816" y="1627632"/>
+            <a:ext cx="4608576" cy="1591056"/>
           </a:xfrm>
           <a:prstGeom prst="rect">
             <a:avLst/>
@@ -17456,71 +16359,14 @@
       </p:sp>
       <p:sp>
         <p:nvSpPr>
-          <p:cNvPr id="28" name="Shape 20"/>
-          <p:cNvSpPr/>
-          <p:nvPr/>
-        </p:nvSpPr>
-        <p:spPr>
-          <a:xfrm>
-            <a:off x="976122" y="4416552"/>
-            <a:ext cx="585216" cy="585216"/>
-          </a:xfrm>
-          <a:prstGeom prst="roundRect">
-            <a:avLst>
-              <a:gd name="adj" fmla="val 6250"/>
-            </a:avLst>
-          </a:prstGeom>
-          <a:solidFill>
-            <a:srgbClr val="F6F7FB"/>
-          </a:solidFill>
-          <a:ln w="12700">
-            <a:solidFill>
-              <a:srgbClr val="E5E7EB"/>
-            </a:solidFill>
-            <a:prstDash val="solid"/>
-          </a:ln>
-        </p:spPr>
-      </p:sp>
-      <p:pic>
-        <p:nvPicPr>
-          <p:cNvPr id="29" name="Image 6" descr="article icon from tabler-icons (MIT)">    </p:cNvPr>
-          <p:cNvPicPr>
-            <a:picLocks noChangeAspect="1"/>
-          </p:cNvPicPr>
-          <p:nvPr/>
-        </p:nvPicPr>
-        <p:blipFill>
-          <a:blip r:embed="rId13">
-            <a:extLst>
-              <a:ext uri="{96DAC541-7B7A-43D3-8B79-37D633B846F1}">
-                <asvg:svgBlip xmlns:asvg="http://schemas.microsoft.com/office/drawing/2016/SVG/main" r:embed="rId14"/>
-              </a:ext>
-            </a:extLst>
-          </a:blip>
-          <a:stretch>
-            <a:fillRect/>
-          </a:stretch>
-        </p:blipFill>
-        <p:spPr>
-          <a:xfrm>
-            <a:off x="1049274" y="4489704"/>
-            <a:ext cx="438912" cy="438912"/>
-          </a:xfrm>
-          <a:prstGeom prst="rect">
-            <a:avLst/>
-          </a:prstGeom>
-        </p:spPr>
-      </p:pic>
-      <p:sp>
-        <p:nvSpPr>
-          <p:cNvPr id="30" name="mdpr:overflow-guard-f8d03e:item-3:block-31"/>
+          <p:cNvPr id="24" name="mdpr:overflow-guard-f8d03e:item-3:block-31"/>
           <p:cNvSpPr txBox="1"/>
           <p:nvPr/>
         </p:nvSpPr>
         <p:spPr>
           <a:xfrm>
-            <a:off x="1689354" y="4151376"/>
-            <a:ext cx="3961638" cy="1115568"/>
+            <a:off x="1042416" y="3913632"/>
+            <a:ext cx="4608576" cy="1591056"/>
           </a:xfrm>
           <a:prstGeom prst="rect">
             <a:avLst/>
@@ -17572,71 +16418,14 @@
       </p:sp>
       <p:sp>
         <p:nvSpPr>
-          <p:cNvPr id="31" name="Shape 22"/>
-          <p:cNvSpPr/>
-          <p:nvPr/>
-        </p:nvSpPr>
-        <p:spPr>
-          <a:xfrm>
-            <a:off x="6462522" y="4416552"/>
-            <a:ext cx="585216" cy="585216"/>
-          </a:xfrm>
-          <a:prstGeom prst="roundRect">
-            <a:avLst>
-              <a:gd name="adj" fmla="val 6250"/>
-            </a:avLst>
-          </a:prstGeom>
-          <a:solidFill>
-            <a:srgbClr val="F6F7FB"/>
-          </a:solidFill>
-          <a:ln w="12700">
-            <a:solidFill>
-              <a:srgbClr val="E5E7EB"/>
-            </a:solidFill>
-            <a:prstDash val="solid"/>
-          </a:ln>
-        </p:spPr>
-      </p:sp>
-      <p:pic>
-        <p:nvPicPr>
-          <p:cNvPr id="32" name="Image 7" descr="article icon from tabler-icons (MIT)">    </p:cNvPr>
-          <p:cNvPicPr>
-            <a:picLocks noChangeAspect="1"/>
-          </p:cNvPicPr>
-          <p:nvPr/>
-        </p:nvPicPr>
-        <p:blipFill>
-          <a:blip r:embed="rId15">
-            <a:extLst>
-              <a:ext uri="{96DAC541-7B7A-43D3-8B79-37D633B846F1}">
-                <asvg:svgBlip xmlns:asvg="http://schemas.microsoft.com/office/drawing/2016/SVG/main" r:embed="rId16"/>
-              </a:ext>
-            </a:extLst>
-          </a:blip>
-          <a:stretch>
-            <a:fillRect/>
-          </a:stretch>
-        </p:blipFill>
-        <p:spPr>
-          <a:xfrm>
-            <a:off x="6535674" y="4489704"/>
-            <a:ext cx="438912" cy="438912"/>
-          </a:xfrm>
-          <a:prstGeom prst="rect">
-            <a:avLst/>
-          </a:prstGeom>
-        </p:spPr>
-      </p:pic>
-      <p:sp>
-        <p:nvSpPr>
-          <p:cNvPr id="33" name="mdpr:overflow-guard-f8d03e:item-4:block-31"/>
+          <p:cNvPr id="25" name="mdpr:overflow-guard-f8d03e:item-4:block-31"/>
           <p:cNvSpPr txBox="1"/>
           <p:nvPr/>
         </p:nvSpPr>
         <p:spPr>
           <a:xfrm>
-            <a:off x="7175754" y="4151376"/>
-            <a:ext cx="3961638" cy="1115568"/>
+            <a:off x="6528816" y="3913632"/>
+            <a:ext cx="4608576" cy="1591056"/>
           </a:xfrm>
           <a:prstGeom prst="rect">
             <a:avLst/>
@@ -19952,71 +18741,14 @@
       </p:sp>
       <p:sp>
         <p:nvSpPr>
-          <p:cNvPr id="20" name="Shape 15"/>
-          <p:cNvSpPr/>
-          <p:nvPr/>
-        </p:nvSpPr>
-        <p:spPr>
-          <a:xfrm>
-            <a:off x="1097280" y="2140428"/>
-            <a:ext cx="474025" cy="474025"/>
-          </a:xfrm>
-          <a:prstGeom prst="roundRect">
-            <a:avLst>
-              <a:gd name="adj" fmla="val 7716"/>
-            </a:avLst>
-          </a:prstGeom>
-          <a:solidFill>
-            <a:srgbClr val="F6F7FB"/>
-          </a:solidFill>
-          <a:ln w="12700">
-            <a:solidFill>
-              <a:srgbClr val="E5E7EB"/>
-            </a:solidFill>
-            <a:prstDash val="solid"/>
-          </a:ln>
-        </p:spPr>
-      </p:sp>
-      <p:pic>
-        <p:nvPicPr>
-          <p:cNvPr id="21" name="Image 3" descr="flow icon from tabler-icons (MIT)">    </p:cNvPr>
-          <p:cNvPicPr>
-            <a:picLocks noChangeAspect="1"/>
-          </p:cNvPicPr>
-          <p:nvPr/>
-        </p:nvPicPr>
-        <p:blipFill>
-          <a:blip r:embed="rId7">
-            <a:extLst>
-              <a:ext uri="{96DAC541-7B7A-43D3-8B79-37D633B846F1}">
-                <asvg:svgBlip xmlns:asvg="http://schemas.microsoft.com/office/drawing/2016/SVG/main" r:embed="rId8"/>
-              </a:ext>
-            </a:extLst>
-          </a:blip>
-          <a:stretch>
-            <a:fillRect/>
-          </a:stretch>
-        </p:blipFill>
-        <p:spPr>
-          <a:xfrm>
-            <a:off x="1170432" y="2213580"/>
-            <a:ext cx="327721" cy="327721"/>
-          </a:xfrm>
-          <a:prstGeom prst="rect">
-            <a:avLst/>
-          </a:prstGeom>
-        </p:spPr>
-      </p:pic>
-      <p:sp>
-        <p:nvSpPr>
-          <p:cNvPr id="22" name="mdpr:actions-output-review-326e07:item-1:block-41"/>
+          <p:cNvPr id="20" name="mdpr:actions-output-review-326e07:item-1:block-41"/>
           <p:cNvSpPr txBox="1"/>
           <p:nvPr/>
         </p:nvSpPr>
         <p:spPr>
           <a:xfrm>
-            <a:off x="1699321" y="1987296"/>
-            <a:ext cx="9255191" cy="780288"/>
+            <a:off x="1133856" y="1957548"/>
+            <a:ext cx="9820656" cy="839785"/>
           </a:xfrm>
           <a:prstGeom prst="rect">
             <a:avLst/>
@@ -20068,71 +18800,14 @@
       </p:sp>
       <p:sp>
         <p:nvSpPr>
-          <p:cNvPr id="23" name="Shape 17"/>
-          <p:cNvSpPr/>
-          <p:nvPr/>
-        </p:nvSpPr>
-        <p:spPr>
-          <a:xfrm>
-            <a:off x="1097280" y="3466308"/>
-            <a:ext cx="474025" cy="474025"/>
-          </a:xfrm>
-          <a:prstGeom prst="roundRect">
-            <a:avLst>
-              <a:gd name="adj" fmla="val 7716"/>
-            </a:avLst>
-          </a:prstGeom>
-          <a:solidFill>
-            <a:srgbClr val="F6F7FB"/>
-          </a:solidFill>
-          <a:ln w="12700">
-            <a:solidFill>
-              <a:srgbClr val="E5E7EB"/>
-            </a:solidFill>
-            <a:prstDash val="solid"/>
-          </a:ln>
-        </p:spPr>
-      </p:sp>
-      <p:pic>
-        <p:nvPicPr>
-          <p:cNvPr id="24" name="Image 4" descr="verified icon from tabler-icons (MIT)">    </p:cNvPr>
-          <p:cNvPicPr>
-            <a:picLocks noChangeAspect="1"/>
-          </p:cNvPicPr>
-          <p:nvPr/>
-        </p:nvPicPr>
-        <p:blipFill>
-          <a:blip r:embed="rId9">
-            <a:extLst>
-              <a:ext uri="{96DAC541-7B7A-43D3-8B79-37D633B846F1}">
-                <asvg:svgBlip xmlns:asvg="http://schemas.microsoft.com/office/drawing/2016/SVG/main" r:embed="rId10"/>
-              </a:ext>
-            </a:extLst>
-          </a:blip>
-          <a:stretch>
-            <a:fillRect/>
-          </a:stretch>
-        </p:blipFill>
-        <p:spPr>
-          <a:xfrm>
-            <a:off x="1170432" y="3539460"/>
-            <a:ext cx="327721" cy="327721"/>
-          </a:xfrm>
-          <a:prstGeom prst="rect">
-            <a:avLst/>
-          </a:prstGeom>
-        </p:spPr>
-      </p:pic>
-      <p:sp>
-        <p:nvSpPr>
-          <p:cNvPr id="25" name="mdpr:actions-output-review-326e07:item-2:block-41"/>
+          <p:cNvPr id="21" name="mdpr:actions-output-review-326e07:item-2:block-41"/>
           <p:cNvSpPr txBox="1"/>
           <p:nvPr/>
         </p:nvSpPr>
         <p:spPr>
           <a:xfrm>
-            <a:off x="1699321" y="3313176"/>
-            <a:ext cx="9255191" cy="780288"/>
+            <a:off x="1133856" y="3283428"/>
+            <a:ext cx="9820656" cy="839785"/>
           </a:xfrm>
           <a:prstGeom prst="rect">
             <a:avLst/>
@@ -20184,71 +18859,14 @@
       </p:sp>
       <p:sp>
         <p:nvSpPr>
-          <p:cNvPr id="26" name="Shape 19"/>
-          <p:cNvSpPr/>
-          <p:nvPr/>
-        </p:nvSpPr>
-        <p:spPr>
-          <a:xfrm>
-            <a:off x="1097280" y="4783044"/>
-            <a:ext cx="474025" cy="474025"/>
-          </a:xfrm>
-          <a:prstGeom prst="roundRect">
-            <a:avLst>
-              <a:gd name="adj" fmla="val 7716"/>
-            </a:avLst>
-          </a:prstGeom>
-          <a:solidFill>
-            <a:srgbClr val="F6F7FB"/>
-          </a:solidFill>
-          <a:ln w="12700">
-            <a:solidFill>
-              <a:srgbClr val="E5E7EB"/>
-            </a:solidFill>
-            <a:prstDash val="solid"/>
-          </a:ln>
-        </p:spPr>
-      </p:sp>
-      <p:pic>
-        <p:nvPicPr>
-          <p:cNvPr id="27" name="Image 5" descr="spark icon from tabler-icons (MIT)">    </p:cNvPr>
-          <p:cNvPicPr>
-            <a:picLocks noChangeAspect="1"/>
-          </p:cNvPicPr>
-          <p:nvPr/>
-        </p:nvPicPr>
-        <p:blipFill>
-          <a:blip r:embed="rId11">
-            <a:extLst>
-              <a:ext uri="{96DAC541-7B7A-43D3-8B79-37D633B846F1}">
-                <asvg:svgBlip xmlns:asvg="http://schemas.microsoft.com/office/drawing/2016/SVG/main" r:embed="rId12"/>
-              </a:ext>
-            </a:extLst>
-          </a:blip>
-          <a:stretch>
-            <a:fillRect/>
-          </a:stretch>
-        </p:blipFill>
-        <p:spPr>
-          <a:xfrm>
-            <a:off x="1170432" y="4856196"/>
-            <a:ext cx="327721" cy="327721"/>
-          </a:xfrm>
-          <a:prstGeom prst="rect">
-            <a:avLst/>
-          </a:prstGeom>
-        </p:spPr>
-      </p:pic>
-      <p:sp>
-        <p:nvSpPr>
-          <p:cNvPr id="28" name="mdpr:actions-output-review-326e07:item-3:block-41"/>
+          <p:cNvPr id="22" name="mdpr:actions-output-review-326e07:item-3:block-41"/>
           <p:cNvSpPr txBox="1"/>
           <p:nvPr/>
         </p:nvSpPr>
         <p:spPr>
           <a:xfrm>
-            <a:off x="1699321" y="4629912"/>
-            <a:ext cx="9255191" cy="780288"/>
+            <a:off x="1133856" y="4600164"/>
+            <a:ext cx="9820656" cy="839785"/>
           </a:xfrm>
           <a:prstGeom prst="rect">
             <a:avLst/>
@@ -21956,71 +20574,14 @@
       </p:sp>
       <p:sp>
         <p:nvSpPr>
-          <p:cNvPr id="20" name="Shape 15"/>
-          <p:cNvSpPr/>
-          <p:nvPr/>
-        </p:nvSpPr>
-        <p:spPr>
-          <a:xfrm>
-            <a:off x="1097280" y="2140428"/>
-            <a:ext cx="474025" cy="474025"/>
-          </a:xfrm>
-          <a:prstGeom prst="roundRect">
-            <a:avLst>
-              <a:gd name="adj" fmla="val 7716"/>
-            </a:avLst>
-          </a:prstGeom>
-          <a:solidFill>
-            <a:srgbClr val="F6F7FB"/>
-          </a:solidFill>
-          <a:ln w="12700">
-            <a:solidFill>
-              <a:srgbClr val="E5E7EB"/>
-            </a:solidFill>
-            <a:prstDash val="solid"/>
-          </a:ln>
-        </p:spPr>
-      </p:sp>
-      <p:pic>
-        <p:nvPicPr>
-          <p:cNvPr id="21" name="Image 3" descr="article icon from tabler-icons (MIT)">    </p:cNvPr>
-          <p:cNvPicPr>
-            <a:picLocks noChangeAspect="1"/>
-          </p:cNvPicPr>
-          <p:nvPr/>
-        </p:nvPicPr>
-        <p:blipFill>
-          <a:blip r:embed="rId7">
-            <a:extLst>
-              <a:ext uri="{96DAC541-7B7A-43D3-8B79-37D633B846F1}">
-                <asvg:svgBlip xmlns:asvg="http://schemas.microsoft.com/office/drawing/2016/SVG/main" r:embed="rId8"/>
-              </a:ext>
-            </a:extLst>
-          </a:blip>
-          <a:stretch>
-            <a:fillRect/>
-          </a:stretch>
-        </p:blipFill>
-        <p:spPr>
-          <a:xfrm>
-            <a:off x="1170432" y="2213580"/>
-            <a:ext cx="327721" cy="327721"/>
-          </a:xfrm>
-          <a:prstGeom prst="rect">
-            <a:avLst/>
-          </a:prstGeom>
-        </p:spPr>
-      </p:pic>
-      <p:sp>
-        <p:nvSpPr>
-          <p:cNvPr id="22" name="mdpr:1-2-32ac08:item-1:block-6-chunk-1"/>
+          <p:cNvPr id="20" name="mdpr:1-2-32ac08:item-1:block-6-chunk-1"/>
           <p:cNvSpPr txBox="1"/>
           <p:nvPr/>
         </p:nvSpPr>
         <p:spPr>
           <a:xfrm>
-            <a:off x="1699321" y="1987296"/>
-            <a:ext cx="9255191" cy="780288"/>
+            <a:off x="1133856" y="1957548"/>
+            <a:ext cx="9820656" cy="839785"/>
           </a:xfrm>
           <a:prstGeom prst="rect">
             <a:avLst/>
@@ -22072,71 +20633,14 @@
       </p:sp>
       <p:sp>
         <p:nvSpPr>
-          <p:cNvPr id="23" name="Shape 17"/>
-          <p:cNvSpPr/>
-          <p:nvPr/>
-        </p:nvSpPr>
-        <p:spPr>
-          <a:xfrm>
-            <a:off x="1097280" y="3466308"/>
-            <a:ext cx="474025" cy="474025"/>
-          </a:xfrm>
-          <a:prstGeom prst="roundRect">
-            <a:avLst>
-              <a:gd name="adj" fmla="val 7716"/>
-            </a:avLst>
-          </a:prstGeom>
-          <a:solidFill>
-            <a:srgbClr val="F6F7FB"/>
-          </a:solidFill>
-          <a:ln w="12700">
-            <a:solidFill>
-              <a:srgbClr val="E5E7EB"/>
-            </a:solidFill>
-            <a:prstDash val="solid"/>
-          </a:ln>
-        </p:spPr>
-      </p:sp>
-      <p:pic>
-        <p:nvPicPr>
-          <p:cNvPr id="24" name="Image 4" descr="chart icon from tabler-icons (MIT)">    </p:cNvPr>
-          <p:cNvPicPr>
-            <a:picLocks noChangeAspect="1"/>
-          </p:cNvPicPr>
-          <p:nvPr/>
-        </p:nvPicPr>
-        <p:blipFill>
-          <a:blip r:embed="rId9">
-            <a:extLst>
-              <a:ext uri="{96DAC541-7B7A-43D3-8B79-37D633B846F1}">
-                <asvg:svgBlip xmlns:asvg="http://schemas.microsoft.com/office/drawing/2016/SVG/main" r:embed="rId10"/>
-              </a:ext>
-            </a:extLst>
-          </a:blip>
-          <a:stretch>
-            <a:fillRect/>
-          </a:stretch>
-        </p:blipFill>
-        <p:spPr>
-          <a:xfrm>
-            <a:off x="1170432" y="3539460"/>
-            <a:ext cx="327721" cy="327721"/>
-          </a:xfrm>
-          <a:prstGeom prst="rect">
-            <a:avLst/>
-          </a:prstGeom>
-        </p:spPr>
-      </p:pic>
-      <p:sp>
-        <p:nvSpPr>
-          <p:cNvPr id="25" name="mdpr:1-2-32ac08:item-2:block-6-chunk-1"/>
+          <p:cNvPr id="21" name="mdpr:1-2-32ac08:item-2:block-6-chunk-1"/>
           <p:cNvSpPr txBox="1"/>
           <p:nvPr/>
         </p:nvSpPr>
         <p:spPr>
           <a:xfrm>
-            <a:off x="1699321" y="3313176"/>
-            <a:ext cx="9255191" cy="780288"/>
+            <a:off x="1133856" y="3283428"/>
+            <a:ext cx="9820656" cy="839785"/>
           </a:xfrm>
           <a:prstGeom prst="rect">
             <a:avLst/>
@@ -22188,71 +20692,14 @@
       </p:sp>
       <p:sp>
         <p:nvSpPr>
-          <p:cNvPr id="26" name="Shape 19"/>
-          <p:cNvSpPr/>
-          <p:nvPr/>
-        </p:nvSpPr>
-        <p:spPr>
-          <a:xfrm>
-            <a:off x="1097280" y="4783044"/>
-            <a:ext cx="474025" cy="474025"/>
-          </a:xfrm>
-          <a:prstGeom prst="roundRect">
-            <a:avLst>
-              <a:gd name="adj" fmla="val 7716"/>
-            </a:avLst>
-          </a:prstGeom>
-          <a:solidFill>
-            <a:srgbClr val="F6F7FB"/>
-          </a:solidFill>
-          <a:ln w="12700">
-            <a:solidFill>
-              <a:srgbClr val="E5E7EB"/>
-            </a:solidFill>
-            <a:prstDash val="solid"/>
-          </a:ln>
-        </p:spPr>
-      </p:sp>
-      <p:pic>
-        <p:nvPicPr>
-          <p:cNvPr id="27" name="Image 5" descr="article icon from tabler-icons (MIT)">    </p:cNvPr>
-          <p:cNvPicPr>
-            <a:picLocks noChangeAspect="1"/>
-          </p:cNvPicPr>
-          <p:nvPr/>
-        </p:nvPicPr>
-        <p:blipFill>
-          <a:blip r:embed="rId11">
-            <a:extLst>
-              <a:ext uri="{96DAC541-7B7A-43D3-8B79-37D633B846F1}">
-                <asvg:svgBlip xmlns:asvg="http://schemas.microsoft.com/office/drawing/2016/SVG/main" r:embed="rId12"/>
-              </a:ext>
-            </a:extLst>
-          </a:blip>
-          <a:stretch>
-            <a:fillRect/>
-          </a:stretch>
-        </p:blipFill>
-        <p:spPr>
-          <a:xfrm>
-            <a:off x="1170432" y="4856196"/>
-            <a:ext cx="327721" cy="327721"/>
-          </a:xfrm>
-          <a:prstGeom prst="rect">
-            <a:avLst/>
-          </a:prstGeom>
-        </p:spPr>
-      </p:pic>
-      <p:sp>
-        <p:nvSpPr>
-          <p:cNvPr id="28" name="mdpr:1-2-32ac08:item-3:block-6-chunk-1"/>
+          <p:cNvPr id="22" name="mdpr:1-2-32ac08:item-3:block-6-chunk-1"/>
           <p:cNvSpPr txBox="1"/>
           <p:nvPr/>
         </p:nvSpPr>
         <p:spPr>
           <a:xfrm>
-            <a:off x="1699321" y="4629912"/>
-            <a:ext cx="9255191" cy="780288"/>
+            <a:off x="1133856" y="4600164"/>
+            <a:ext cx="9820656" cy="839785"/>
           </a:xfrm>
           <a:prstGeom prst="rect">
             <a:avLst/>
@@ -23372,71 +21819,14 @@
       </p:sp>
       <p:sp>
         <p:nvSpPr>
-          <p:cNvPr id="20" name="Shape 15"/>
-          <p:cNvSpPr/>
-          <p:nvPr/>
-        </p:nvSpPr>
-        <p:spPr>
-          <a:xfrm>
-            <a:off x="1097280" y="2140428"/>
-            <a:ext cx="474025" cy="474025"/>
-          </a:xfrm>
-          <a:prstGeom prst="roundRect">
-            <a:avLst>
-              <a:gd name="adj" fmla="val 7716"/>
-            </a:avLst>
-          </a:prstGeom>
-          <a:solidFill>
-            <a:srgbClr val="F6F7FB"/>
-          </a:solidFill>
-          <a:ln w="12700">
-            <a:solidFill>
-              <a:srgbClr val="E5E7EB"/>
-            </a:solidFill>
-            <a:prstDash val="solid"/>
-          </a:ln>
-        </p:spPr>
-      </p:sp>
-      <p:pic>
-        <p:nvPicPr>
-          <p:cNvPr id="21" name="Image 3" descr="article icon from tabler-icons (MIT)">    </p:cNvPr>
-          <p:cNvPicPr>
-            <a:picLocks noChangeAspect="1"/>
-          </p:cNvPicPr>
-          <p:nvPr/>
-        </p:nvPicPr>
-        <p:blipFill>
-          <a:blip r:embed="rId7">
-            <a:extLst>
-              <a:ext uri="{96DAC541-7B7A-43D3-8B79-37D633B846F1}">
-                <asvg:svgBlip xmlns:asvg="http://schemas.microsoft.com/office/drawing/2016/SVG/main" r:embed="rId8"/>
-              </a:ext>
-            </a:extLst>
-          </a:blip>
-          <a:stretch>
-            <a:fillRect/>
-          </a:stretch>
-        </p:blipFill>
-        <p:spPr>
-          <a:xfrm>
-            <a:off x="1170432" y="2213580"/>
-            <a:ext cx="327721" cy="327721"/>
-          </a:xfrm>
-          <a:prstGeom prst="rect">
-            <a:avLst/>
-          </a:prstGeom>
-        </p:spPr>
-      </p:pic>
-      <p:sp>
-        <p:nvSpPr>
-          <p:cNvPr id="22" name="mdpr:1-2-dfa474:item-1:block-8-chunk-1"/>
+          <p:cNvPr id="20" name="mdpr:1-2-dfa474:item-1:block-8-chunk-1"/>
           <p:cNvSpPr txBox="1"/>
           <p:nvPr/>
         </p:nvSpPr>
         <p:spPr>
           <a:xfrm>
-            <a:off x="1699321" y="1987296"/>
-            <a:ext cx="9255191" cy="780288"/>
+            <a:off x="1133856" y="1957548"/>
+            <a:ext cx="9820656" cy="839785"/>
           </a:xfrm>
           <a:prstGeom prst="rect">
             <a:avLst/>
@@ -23488,71 +21878,14 @@
       </p:sp>
       <p:sp>
         <p:nvSpPr>
-          <p:cNvPr id="23" name="Shape 17"/>
-          <p:cNvSpPr/>
-          <p:nvPr/>
-        </p:nvSpPr>
-        <p:spPr>
-          <a:xfrm>
-            <a:off x="1097280" y="3466308"/>
-            <a:ext cx="474025" cy="474025"/>
-          </a:xfrm>
-          <a:prstGeom prst="roundRect">
-            <a:avLst>
-              <a:gd name="adj" fmla="val 7716"/>
-            </a:avLst>
-          </a:prstGeom>
-          <a:solidFill>
-            <a:srgbClr val="F6F7FB"/>
-          </a:solidFill>
-          <a:ln w="12700">
-            <a:solidFill>
-              <a:srgbClr val="E5E7EB"/>
-            </a:solidFill>
-            <a:prstDash val="solid"/>
-          </a:ln>
-        </p:spPr>
-      </p:sp>
-      <p:pic>
-        <p:nvPicPr>
-          <p:cNvPr id="24" name="Image 4" descr="article icon from tabler-icons (MIT)">    </p:cNvPr>
-          <p:cNvPicPr>
-            <a:picLocks noChangeAspect="1"/>
-          </p:cNvPicPr>
-          <p:nvPr/>
-        </p:nvPicPr>
-        <p:blipFill>
-          <a:blip r:embed="rId9">
-            <a:extLst>
-              <a:ext uri="{96DAC541-7B7A-43D3-8B79-37D633B846F1}">
-                <asvg:svgBlip xmlns:asvg="http://schemas.microsoft.com/office/drawing/2016/SVG/main" r:embed="rId10"/>
-              </a:ext>
-            </a:extLst>
-          </a:blip>
-          <a:stretch>
-            <a:fillRect/>
-          </a:stretch>
-        </p:blipFill>
-        <p:spPr>
-          <a:xfrm>
-            <a:off x="1170432" y="3539460"/>
-            <a:ext cx="327721" cy="327721"/>
-          </a:xfrm>
-          <a:prstGeom prst="rect">
-            <a:avLst/>
-          </a:prstGeom>
-        </p:spPr>
-      </p:pic>
-      <p:sp>
-        <p:nvSpPr>
-          <p:cNvPr id="25" name="mdpr:1-2-dfa474:item-2:block-8-chunk-1"/>
+          <p:cNvPr id="21" name="mdpr:1-2-dfa474:item-2:block-8-chunk-1"/>
           <p:cNvSpPr txBox="1"/>
           <p:nvPr/>
         </p:nvSpPr>
         <p:spPr>
           <a:xfrm>
-            <a:off x="1699321" y="3313176"/>
-            <a:ext cx="9255191" cy="780288"/>
+            <a:off x="1133856" y="3283428"/>
+            <a:ext cx="9820656" cy="839785"/>
           </a:xfrm>
           <a:prstGeom prst="rect">
             <a:avLst/>
@@ -23604,71 +21937,14 @@
       </p:sp>
       <p:sp>
         <p:nvSpPr>
-          <p:cNvPr id="26" name="Shape 19"/>
-          <p:cNvSpPr/>
-          <p:nvPr/>
-        </p:nvSpPr>
-        <p:spPr>
-          <a:xfrm>
-            <a:off x="1097280" y="4783044"/>
-            <a:ext cx="474025" cy="474025"/>
-          </a:xfrm>
-          <a:prstGeom prst="roundRect">
-            <a:avLst>
-              <a:gd name="adj" fmla="val 7716"/>
-            </a:avLst>
-          </a:prstGeom>
-          <a:solidFill>
-            <a:srgbClr val="F6F7FB"/>
-          </a:solidFill>
-          <a:ln w="12700">
-            <a:solidFill>
-              <a:srgbClr val="E5E7EB"/>
-            </a:solidFill>
-            <a:prstDash val="solid"/>
-          </a:ln>
-        </p:spPr>
-      </p:sp>
-      <p:pic>
-        <p:nvPicPr>
-          <p:cNvPr id="27" name="Image 5" descr="article icon from tabler-icons (MIT)">    </p:cNvPr>
-          <p:cNvPicPr>
-            <a:picLocks noChangeAspect="1"/>
-          </p:cNvPicPr>
-          <p:nvPr/>
-        </p:nvPicPr>
-        <p:blipFill>
-          <a:blip r:embed="rId11">
-            <a:extLst>
-              <a:ext uri="{96DAC541-7B7A-43D3-8B79-37D633B846F1}">
-                <asvg:svgBlip xmlns:asvg="http://schemas.microsoft.com/office/drawing/2016/SVG/main" r:embed="rId12"/>
-              </a:ext>
-            </a:extLst>
-          </a:blip>
-          <a:stretch>
-            <a:fillRect/>
-          </a:stretch>
-        </p:blipFill>
-        <p:spPr>
-          <a:xfrm>
-            <a:off x="1170432" y="4856196"/>
-            <a:ext cx="327721" cy="327721"/>
-          </a:xfrm>
-          <a:prstGeom prst="rect">
-            <a:avLst/>
-          </a:prstGeom>
-        </p:spPr>
-      </p:pic>
-      <p:sp>
-        <p:nvSpPr>
-          <p:cNvPr id="28" name="mdpr:1-2-dfa474:item-3:block-8-chunk-1"/>
+          <p:cNvPr id="22" name="mdpr:1-2-dfa474:item-3:block-8-chunk-1"/>
           <p:cNvSpPr txBox="1"/>
           <p:nvPr/>
         </p:nvSpPr>
         <p:spPr>
           <a:xfrm>
-            <a:off x="1699321" y="4629912"/>
-            <a:ext cx="9255191" cy="780288"/>
+            <a:off x="1133856" y="4600164"/>
+            <a:ext cx="9820656" cy="839785"/>
           </a:xfrm>
           <a:prstGeom prst="rect">
             <a:avLst/>

--- a/docs/theme-preview/pptx/claymorphism.pptx
+++ b/docs/theme-preview/pptx/claymorphism.pptx
@@ -3843,36 +3843,7 @@
       </p:sp>
       <p:sp>
         <p:nvSpPr>
-          <p:cNvPr id="10" name="Shape 8"/>
-          <p:cNvSpPr/>
-          <p:nvPr/>
-        </p:nvSpPr>
-        <p:spPr>
-          <a:xfrm>
-            <a:off x="9357055" y="6528816"/>
-            <a:ext cx="2148840" cy="73152"/>
-          </a:xfrm>
-          <a:prstGeom prst="rect">
-            <a:avLst/>
-          </a:prstGeom>
-          <a:solidFill>
-            <a:srgbClr val="FFFFFF">
-              <a:alpha val="90000"/>
-            </a:srgbClr>
-          </a:solidFill>
-          <a:ln w="12700">
-            <a:solidFill>
-              <a:srgbClr val="FFFFFF">
-                <a:alpha val="0"/>
-              </a:srgbClr>
-            </a:solidFill>
-            <a:prstDash val="solid"/>
-          </a:ln>
-        </p:spPr>
-      </p:sp>
-      <p:sp>
-        <p:nvSpPr>
-          <p:cNvPr id="11" name="mdpr:mdpr-design-grammar-b3a462:title:__title:mdpr-design-grammar-b3a462"/>
+          <p:cNvPr id="10" name="mdpr:mdpr-design-grammar-b3a462:title:__title:mdpr-design-grammar-b3a462"/>
           <p:cNvSpPr txBox="1"/>
           <p:nvPr/>
         </p:nvSpPr>
@@ -4164,16 +4135,148 @@
           </a:ln>
         </p:spPr>
       </p:sp>
-      <p:sp>
-        <p:nvSpPr>
-          <p:cNvPr id="9" name="Shape 7"/>
-          <p:cNvSpPr/>
-          <p:nvPr/>
-        </p:nvSpPr>
-        <p:spPr>
-          <a:xfrm>
-            <a:off x="822960" y="1554480"/>
-            <a:ext cx="4937760" cy="73152"/>
+      <p:pic>
+        <p:nvPicPr>
+          <p:cNvPr id="9" name="Image 0" descr="preencoded.png">    </p:cNvPr>
+          <p:cNvPicPr>
+            <a:picLocks noChangeAspect="1"/>
+          </p:cNvPicPr>
+          <p:nvPr/>
+        </p:nvPicPr>
+        <p:blipFill>
+          <a:blip r:embed="rId1">
+            <a:extLst>
+              <a:ext uri="{96DAC541-7B7A-43D3-8B79-37D633B846F1}">
+                <asvg:svgBlip xmlns:asvg="http://schemas.microsoft.com/office/drawing/2016/SVG/main" r:embed="rId2"/>
+              </a:ext>
+            </a:extLst>
+          </a:blip>
+          <a:stretch>
+            <a:fillRect/>
+          </a:stretch>
+        </p:blipFill>
+        <p:spPr>
+          <a:xfrm>
+            <a:off x="914400" y="2523744"/>
+            <a:ext cx="10241280" cy="1024128"/>
+          </a:xfrm>
+          <a:prstGeom prst="rect">
+            <a:avLst/>
+          </a:prstGeom>
+        </p:spPr>
+      </p:pic>
+      <p:sp>
+        <p:nvSpPr>
+          <p:cNvPr id="10" name="Shape 7"/>
+          <p:cNvSpPr/>
+          <p:nvPr/>
+        </p:nvSpPr>
+        <p:spPr>
+          <a:xfrm>
+            <a:off x="914400" y="2523744"/>
+            <a:ext cx="10241280" cy="1024128"/>
+          </a:xfrm>
+          <a:prstGeom prst="rect">
+            <a:avLst/>
+          </a:prstGeom>
+          <a:solidFill>
+            <a:srgbClr val="FFFFFF">
+              <a:alpha val="0"/>
+            </a:srgbClr>
+          </a:solidFill>
+          <a:ln w="12700">
+            <a:solidFill>
+              <a:srgbClr val="E5E7EB">
+                <a:alpha val="0"/>
+              </a:srgbClr>
+            </a:solidFill>
+            <a:prstDash val="solid"/>
+          </a:ln>
+          <a:effectLst>
+            <a:outerShdw sx="100000" sy="100000" kx="0" ky="0" algn="bl" rotWithShape="0" blurRad="12700" dist="50800" dir="2700000">
+              <a:srgbClr val="000000">
+                <a:alpha val="8000"/>
+              </a:srgbClr>
+            </a:outerShdw>
+          </a:effectLst>
+        </p:spPr>
+      </p:sp>
+      <p:pic>
+        <p:nvPicPr>
+          <p:cNvPr id="11" name="Image 1" descr="preencoded.png">    </p:cNvPr>
+          <p:cNvPicPr>
+            <a:picLocks noChangeAspect="1"/>
+          </p:cNvPicPr>
+          <p:nvPr/>
+        </p:nvPicPr>
+        <p:blipFill>
+          <a:blip r:embed="rId3">
+            <a:extLst>
+              <a:ext uri="{96DAC541-7B7A-43D3-8B79-37D633B846F1}">
+                <asvg:svgBlip xmlns:asvg="http://schemas.microsoft.com/office/drawing/2016/SVG/main" r:embed="rId4"/>
+              </a:ext>
+            </a:extLst>
+          </a:blip>
+          <a:stretch>
+            <a:fillRect/>
+          </a:stretch>
+        </p:blipFill>
+        <p:spPr>
+          <a:xfrm>
+            <a:off x="914400" y="3849624"/>
+            <a:ext cx="10241280" cy="1024128"/>
+          </a:xfrm>
+          <a:prstGeom prst="rect">
+            <a:avLst/>
+          </a:prstGeom>
+        </p:spPr>
+      </p:pic>
+      <p:sp>
+        <p:nvSpPr>
+          <p:cNvPr id="12" name="Shape 8"/>
+          <p:cNvSpPr/>
+          <p:nvPr/>
+        </p:nvSpPr>
+        <p:spPr>
+          <a:xfrm>
+            <a:off x="914400" y="3849624"/>
+            <a:ext cx="10241280" cy="1024128"/>
+          </a:xfrm>
+          <a:prstGeom prst="rect">
+            <a:avLst/>
+          </a:prstGeom>
+          <a:solidFill>
+            <a:srgbClr val="FFFFFF">
+              <a:alpha val="0"/>
+            </a:srgbClr>
+          </a:solidFill>
+          <a:ln w="12700">
+            <a:solidFill>
+              <a:srgbClr val="E5E7EB">
+                <a:alpha val="0"/>
+              </a:srgbClr>
+            </a:solidFill>
+            <a:prstDash val="solid"/>
+          </a:ln>
+          <a:effectLst>
+            <a:outerShdw sx="100000" sy="100000" kx="0" ky="0" algn="bl" rotWithShape="0" blurRad="12700" dist="50800" dir="2700000">
+              <a:srgbClr val="000000">
+                <a:alpha val="8000"/>
+              </a:srgbClr>
+            </a:outerShdw>
+          </a:effectLst>
+        </p:spPr>
+      </p:sp>
+      <p:sp>
+        <p:nvSpPr>
+          <p:cNvPr id="13" name="Shape 9"/>
+          <p:cNvSpPr/>
+          <p:nvPr/>
+        </p:nvSpPr>
+        <p:spPr>
+          <a:xfrm>
+            <a:off x="914400" y="2523744"/>
+            <a:ext cx="73152" cy="1024128"/>
           </a:xfrm>
           <a:prstGeom prst="rect">
             <a:avLst/>
@@ -4193,24 +4296,24 @@
       </p:sp>
       <p:sp>
         <p:nvSpPr>
-          <p:cNvPr id="10" name="Shape 8"/>
-          <p:cNvSpPr/>
-          <p:nvPr/>
-        </p:nvSpPr>
-        <p:spPr>
-          <a:xfrm>
-            <a:off x="6400800" y="1554480"/>
-            <a:ext cx="4937760" cy="73152"/>
-          </a:xfrm>
-          <a:prstGeom prst="rect">
-            <a:avLst/>
-          </a:prstGeom>
-          <a:solidFill>
-            <a:srgbClr val="F43F5E"/>
-          </a:solidFill>
-          <a:ln w="12700">
-            <a:solidFill>
-              <a:srgbClr val="F43F5E">
+          <p:cNvPr id="14" name="Shape 10"/>
+          <p:cNvSpPr/>
+          <p:nvPr/>
+        </p:nvSpPr>
+        <p:spPr>
+          <a:xfrm>
+            <a:off x="914400" y="3849624"/>
+            <a:ext cx="73152" cy="1024128"/>
+          </a:xfrm>
+          <a:prstGeom prst="rect">
+            <a:avLst/>
+          </a:prstGeom>
+          <a:solidFill>
+            <a:srgbClr val="38BDF8"/>
+          </a:solidFill>
+          <a:ln w="12700">
+            <a:solidFill>
+              <a:srgbClr val="38BDF8">
                 <a:alpha val="0"/>
               </a:srgbClr>
             </a:solidFill>
@@ -4220,7 +4323,7 @@
       </p:sp>
       <p:sp>
         <p:nvSpPr>
-          <p:cNvPr id="11" name="mdpr:2-2-a9df10:title:__title:2-2-a9df10"/>
+          <p:cNvPr id="15" name="mdpr:2-2-a9df10:title:__title:2-2-a9df10"/>
           <p:cNvSpPr txBox="1"/>
           <p:nvPr/>
         </p:nvSpPr>
@@ -4254,7 +4357,24 @@
                 <a:ea typeface="Pretendard" pitchFamily="34" charset="-122"/>
                 <a:cs typeface="Pretendard" pitchFamily="34" charset="-120"/>
               </a:rPr>
-              <a:t>Semantic Blocks (Cont. 2/2)</a:t>
+              <a:t>Semantic Blocks</a:t>
+            </a:r>
+            <a:pPr algn="ctr" indent="0" marL="0">
+              <a:lnSpc>
+                <a:spcPct val="120000"/>
+              </a:lnSpc>
+              <a:buNone/>
+            </a:pPr>
+            <a:r>
+              <a:rPr lang="en-US" sz="2000" dirty="0">
+                <a:solidFill>
+                  <a:srgbClr val="8F8F8F"/>
+                </a:solidFill>
+                <a:latin typeface="Pretendard" pitchFamily="34" charset="0"/>
+                <a:ea typeface="Pretendard" pitchFamily="34" charset="-122"/>
+                <a:cs typeface="Pretendard" pitchFamily="34" charset="-120"/>
+              </a:rPr>
+              <a:t> (Cont. 2/2)</a:t>
             </a:r>
             <a:endParaRPr lang="en-US" sz="3400" dirty="0"/>
           </a:p>
@@ -4262,14 +4382,14 @@
       </p:sp>
       <p:sp>
         <p:nvSpPr>
-          <p:cNvPr id="12" name="mdpr:2-2-a9df10:left:block-10-chunk-2"/>
+          <p:cNvPr id="16" name="mdpr:2-2-a9df10:item-1:block-10-chunk-2"/>
           <p:cNvSpPr txBox="1"/>
           <p:nvPr/>
         </p:nvSpPr>
         <p:spPr>
           <a:xfrm>
-            <a:off x="896112" y="1664208"/>
-            <a:ext cx="4791456" cy="4169664"/>
+            <a:off x="1133856" y="2615916"/>
+            <a:ext cx="9820656" cy="839785"/>
           </a:xfrm>
           <a:prstGeom prst="rect">
             <a:avLst/>
@@ -4278,7 +4398,7 @@
           <a:ln/>
         </p:spPr>
         <p:txBody>
-          <a:bodyPr wrap="square" lIns="0" tIns="25400" rIns="25400" bIns="0" rtlCol="0" anchor="t"/>
+          <a:bodyPr wrap="square" lIns="0" tIns="25400" rIns="25400" bIns="0" rtlCol="0" anchor="ctr"/>
           <a:lstStyle/>
           <a:p>
             <a:pPr algn="l" indent="0" marL="0">
@@ -4296,7 +4416,7 @@
                 <a:ea typeface="Pretendard" pitchFamily="34" charset="-122"/>
                 <a:cs typeface="Pretendard" pitchFamily="34" charset="-120"/>
               </a:rPr>
-              <a:t>- Constraint:</a:t>
+              <a:t>Constraint:</a:t>
             </a:r>
             <a:pPr algn="l" indent="0" marL="0">
               <a:lnSpc>
@@ -4321,14 +4441,14 @@
       </p:sp>
       <p:sp>
         <p:nvSpPr>
-          <p:cNvPr id="13" name="mdpr:2-2-a9df10:right:block-10-chunk-2"/>
+          <p:cNvPr id="17" name="mdpr:2-2-a9df10:item-2:block-10-chunk-2"/>
           <p:cNvSpPr txBox="1"/>
           <p:nvPr/>
         </p:nvSpPr>
         <p:spPr>
           <a:xfrm>
-            <a:off x="6473952" y="1664208"/>
-            <a:ext cx="4791456" cy="4169664"/>
+            <a:off x="1133856" y="3941796"/>
+            <a:ext cx="9820656" cy="839785"/>
           </a:xfrm>
           <a:prstGeom prst="rect">
             <a:avLst/>
@@ -4337,7 +4457,7 @@
           <a:ln/>
         </p:spPr>
         <p:txBody>
-          <a:bodyPr wrap="square" lIns="0" tIns="25400" rIns="25400" bIns="0" rtlCol="0" anchor="t"/>
+          <a:bodyPr wrap="square" lIns="0" tIns="25400" rIns="25400" bIns="0" rtlCol="0" anchor="ctr"/>
           <a:lstStyle/>
           <a:p>
             <a:pPr algn="l" indent="0" marL="0">
@@ -4355,7 +4475,7 @@
                 <a:ea typeface="Pretendard" pitchFamily="34" charset="-122"/>
                 <a:cs typeface="Pretendard" pitchFamily="34" charset="-120"/>
               </a:rPr>
-              <a:t>- Emphasis</a:t>
+              <a:t>Emphasis</a:t>
             </a:r>
             <a:pPr algn="l" indent="0" marL="0">
               <a:lnSpc>
@@ -4910,7 +5030,7 @@
               <a:buNone/>
             </a:pPr>
             <a:r>
-              <a:rPr lang="en-US" sz="1500" b="1" dirty="0">
+              <a:rPr lang="en-US" sz="1600" b="1" dirty="0">
                 <a:solidFill>
                   <a:srgbClr val="F6F7FB"/>
                 </a:solidFill>
@@ -4920,7 +5040,7 @@
               </a:rPr>
               <a:t>1</a:t>
             </a:r>
-            <a:endParaRPr lang="en-US" sz="1500" dirty="0"/>
+            <a:endParaRPr lang="en-US" sz="1600" dirty="0"/>
           </a:p>
         </p:txBody>
       </p:sp>
@@ -5086,7 +5206,7 @@
               <a:buNone/>
             </a:pPr>
             <a:r>
-              <a:rPr lang="en-US" sz="1500" b="1" dirty="0">
+              <a:rPr lang="en-US" sz="1600" b="1" dirty="0">
                 <a:solidFill>
                   <a:srgbClr val="F6F7FB"/>
                 </a:solidFill>
@@ -5096,7 +5216,7 @@
               </a:rPr>
               <a:t>2</a:t>
             </a:r>
-            <a:endParaRPr lang="en-US" sz="1500" dirty="0"/>
+            <a:endParaRPr lang="en-US" sz="1600" dirty="0"/>
           </a:p>
         </p:txBody>
       </p:sp>
@@ -5262,7 +5382,7 @@
               <a:buNone/>
             </a:pPr>
             <a:r>
-              <a:rPr lang="en-US" sz="1500" b="1" dirty="0">
+              <a:rPr lang="en-US" sz="1600" b="1" dirty="0">
                 <a:solidFill>
                   <a:srgbClr val="F6F7FB"/>
                 </a:solidFill>
@@ -5272,7 +5392,7 @@
               </a:rPr>
               <a:t>3</a:t>
             </a:r>
-            <a:endParaRPr lang="en-US" sz="1500" dirty="0"/>
+            <a:endParaRPr lang="en-US" sz="1600" dirty="0"/>
           </a:p>
         </p:txBody>
       </p:sp>
@@ -5438,7 +5558,7 @@
               <a:buNone/>
             </a:pPr>
             <a:r>
-              <a:rPr lang="en-US" sz="1500" b="1" dirty="0">
+              <a:rPr lang="en-US" sz="1600" b="1" dirty="0">
                 <a:solidFill>
                   <a:srgbClr val="F6F7FB"/>
                 </a:solidFill>
@@ -5448,7 +5568,7 @@
               </a:rPr>
               <a:t>4</a:t>
             </a:r>
-            <a:endParaRPr lang="en-US" sz="1500" dirty="0"/>
+            <a:endParaRPr lang="en-US" sz="1600" dirty="0"/>
           </a:p>
         </p:txBody>
       </p:sp>
@@ -5614,7 +5734,7 @@
               <a:buNone/>
             </a:pPr>
             <a:r>
-              <a:rPr lang="en-US" sz="1500" b="1" dirty="0">
+              <a:rPr lang="en-US" sz="1600" b="1" dirty="0">
                 <a:solidFill>
                   <a:srgbClr val="F6F7FB"/>
                 </a:solidFill>
@@ -5624,7 +5744,7 @@
               </a:rPr>
               <a:t>5</a:t>
             </a:r>
-            <a:endParaRPr lang="en-US" sz="1500" dirty="0"/>
+            <a:endParaRPr lang="en-US" sz="1600" dirty="0"/>
           </a:p>
         </p:txBody>
       </p:sp>
@@ -5790,7 +5910,7 @@
               <a:buNone/>
             </a:pPr>
             <a:r>
-              <a:rPr lang="en-US" sz="1500" b="1" dirty="0">
+              <a:rPr lang="en-US" sz="1600" b="1" dirty="0">
                 <a:solidFill>
                   <a:srgbClr val="F6F7FB"/>
                 </a:solidFill>
@@ -5800,7 +5920,7 @@
               </a:rPr>
               <a:t>6</a:t>
             </a:r>
-            <a:endParaRPr lang="en-US" sz="1500" dirty="0"/>
+            <a:endParaRPr lang="en-US" sz="1600" dirty="0"/>
           </a:p>
         </p:txBody>
       </p:sp>
@@ -6102,61 +6222,7 @@
       </p:sp>
       <p:sp>
         <p:nvSpPr>
-          <p:cNvPr id="9" name="Shape 7"/>
-          <p:cNvSpPr/>
-          <p:nvPr/>
-        </p:nvSpPr>
-        <p:spPr>
-          <a:xfrm>
-            <a:off x="822960" y="1389888"/>
-            <a:ext cx="4937760" cy="73152"/>
-          </a:xfrm>
-          <a:prstGeom prst="rect">
-            <a:avLst/>
-          </a:prstGeom>
-          <a:solidFill>
-            <a:srgbClr val="F43F5E"/>
-          </a:solidFill>
-          <a:ln w="12700">
-            <a:solidFill>
-              <a:srgbClr val="F43F5E">
-                <a:alpha val="0"/>
-              </a:srgbClr>
-            </a:solidFill>
-            <a:prstDash val="solid"/>
-          </a:ln>
-        </p:spPr>
-      </p:sp>
-      <p:sp>
-        <p:nvSpPr>
-          <p:cNvPr id="10" name="Shape 8"/>
-          <p:cNvSpPr/>
-          <p:nvPr/>
-        </p:nvSpPr>
-        <p:spPr>
-          <a:xfrm>
-            <a:off x="6400800" y="1389888"/>
-            <a:ext cx="4937760" cy="73152"/>
-          </a:xfrm>
-          <a:prstGeom prst="rect">
-            <a:avLst/>
-          </a:prstGeom>
-          <a:solidFill>
-            <a:srgbClr val="F43F5E"/>
-          </a:solidFill>
-          <a:ln w="12700">
-            <a:solidFill>
-              <a:srgbClr val="F43F5E">
-                <a:alpha val="0"/>
-              </a:srgbClr>
-            </a:solidFill>
-            <a:prstDash val="solid"/>
-          </a:ln>
-        </p:spPr>
-      </p:sp>
-      <p:sp>
-        <p:nvSpPr>
-          <p:cNvPr id="11" name="mdpr:1-2-e3669a:title:__title:1-2-e3669a"/>
+          <p:cNvPr id="9" name="mdpr:1-2-e3669a:title:__title:1-2-e3669a"/>
           <p:cNvSpPr txBox="1"/>
           <p:nvPr/>
         </p:nvSpPr>
@@ -6198,14 +6264,14 @@
       </p:sp>
       <p:sp>
         <p:nvSpPr>
-          <p:cNvPr id="12" name="mdpr:1-2-e3669a:left:block-15-chunk-1-block-15-chunk-1"/>
+          <p:cNvPr id="10" name="mdpr:1-2-e3669a:left:block-15-chunk-1-block-15-chunk-1"/>
           <p:cNvSpPr txBox="1"/>
           <p:nvPr/>
         </p:nvSpPr>
         <p:spPr>
           <a:xfrm>
-            <a:off x="896112" y="1499616"/>
-            <a:ext cx="4791456" cy="4398264"/>
+            <a:off x="896112" y="1463040"/>
+            <a:ext cx="4791456" cy="4261104"/>
           </a:xfrm>
           <a:prstGeom prst="rect">
             <a:avLst/>
@@ -6297,14 +6363,14 @@
       </p:sp>
       <p:sp>
         <p:nvSpPr>
-          <p:cNvPr id="13" name="mdpr:1-2-e3669a:right:block-15-chunk-1-block-15-chunk-1"/>
+          <p:cNvPr id="11" name="mdpr:1-2-e3669a:right:block-15-chunk-1"/>
           <p:cNvSpPr txBox="1"/>
           <p:nvPr/>
         </p:nvSpPr>
         <p:spPr>
           <a:xfrm>
-            <a:off x="6473952" y="1499616"/>
-            <a:ext cx="4791456" cy="4398264"/>
+            <a:off x="6473952" y="1463040"/>
+            <a:ext cx="4791456" cy="4261104"/>
           </a:xfrm>
           <a:prstGeom prst="rect">
             <a:avLst/>
@@ -6352,46 +6418,6 @@
             </a:r>
             <a:endParaRPr lang="en-US" sz="1800" dirty="0"/>
           </a:p>
-          <a:p>
-            <a:pPr algn="l" indent="0" marL="0">
-              <a:lnSpc>
-                <a:spcPct val="120000"/>
-              </a:lnSpc>
-              <a:buNone/>
-            </a:pPr>
-            <a:r>
-              <a:rPr lang="en-US" sz="1800" b="1" dirty="0">
-                <a:solidFill>
-                  <a:srgbClr val="F43F5E"/>
-                </a:solidFill>
-                <a:latin typeface="Pretendard" pitchFamily="34" charset="0"/>
-                <a:ea typeface="Pretendard" pitchFamily="34" charset="-122"/>
-                <a:cs typeface="Pretendard" pitchFamily="34" charset="-120"/>
-              </a:rPr>
-              <a:t>- Connectors</a:t>
-            </a:r>
-            <a:endParaRPr lang="en-US" sz="1800" dirty="0"/>
-          </a:p>
-          <a:p>
-            <a:pPr algn="l" indent="0" marL="0">
-              <a:lnSpc>
-                <a:spcPct val="120000"/>
-              </a:lnSpc>
-              <a:buNone/>
-            </a:pPr>
-            <a:r>
-              <a:rPr lang="en-US" sz="1800" dirty="0">
-                <a:solidFill>
-                  <a:srgbClr val="111111"/>
-                </a:solidFill>
-                <a:latin typeface="Pretendard" pitchFamily="34" charset="0"/>
-                <a:ea typeface="Pretendard" pitchFamily="34" charset="-122"/>
-                <a:cs typeface="Pretendard" pitchFamily="34" charset="-120"/>
-              </a:rPr>
-              <a:t>  straight-arrow, elbow-arrow, boundary-attach, overlap-joint, parallel-flow, contrast-flow.</a:t>
-            </a:r>
-            <a:endParaRPr lang="en-US" sz="1800" dirty="0"/>
-          </a:p>
         </p:txBody>
       </p:sp>
     </p:spTree>
@@ -6648,61 +6674,7 @@
       </p:sp>
       <p:sp>
         <p:nvSpPr>
-          <p:cNvPr id="9" name="Shape 7"/>
-          <p:cNvSpPr/>
-          <p:nvPr/>
-        </p:nvSpPr>
-        <p:spPr>
-          <a:xfrm>
-            <a:off x="822960" y="1554480"/>
-            <a:ext cx="4937760" cy="73152"/>
-          </a:xfrm>
-          <a:prstGeom prst="rect">
-            <a:avLst/>
-          </a:prstGeom>
-          <a:solidFill>
-            <a:srgbClr val="F43F5E"/>
-          </a:solidFill>
-          <a:ln w="12700">
-            <a:solidFill>
-              <a:srgbClr val="F43F5E">
-                <a:alpha val="0"/>
-              </a:srgbClr>
-            </a:solidFill>
-            <a:prstDash val="solid"/>
-          </a:ln>
-        </p:spPr>
-      </p:sp>
-      <p:sp>
-        <p:nvSpPr>
-          <p:cNvPr id="10" name="Shape 8"/>
-          <p:cNvSpPr/>
-          <p:nvPr/>
-        </p:nvSpPr>
-        <p:spPr>
-          <a:xfrm>
-            <a:off x="6400800" y="1554480"/>
-            <a:ext cx="4937760" cy="73152"/>
-          </a:xfrm>
-          <a:prstGeom prst="rect">
-            <a:avLst/>
-          </a:prstGeom>
-          <a:solidFill>
-            <a:srgbClr val="F43F5E"/>
-          </a:solidFill>
-          <a:ln w="12700">
-            <a:solidFill>
-              <a:srgbClr val="F43F5E">
-                <a:alpha val="0"/>
-              </a:srgbClr>
-            </a:solidFill>
-            <a:prstDash val="solid"/>
-          </a:ln>
-        </p:spPr>
-      </p:sp>
-      <p:sp>
-        <p:nvSpPr>
-          <p:cNvPr id="11" name="mdpr:2-2-c23e9b:title:__title:2-2-c23e9b"/>
+          <p:cNvPr id="9" name="mdpr:2-2-c23e9b:title:__title:2-2-c23e9b"/>
           <p:cNvSpPr txBox="1"/>
           <p:nvPr/>
         </p:nvSpPr>
@@ -6736,7 +6708,24 @@
                 <a:ea typeface="Pretendard" pitchFamily="34" charset="-122"/>
                 <a:cs typeface="Pretendard" pitchFamily="34" charset="-120"/>
               </a:rPr>
-              <a:t>Decoration Pattern Catalog (Cont. 2/2)</a:t>
+              <a:t>Decoration Pattern Catalog</a:t>
+            </a:r>
+            <a:pPr algn="ctr" indent="0" marL="0">
+              <a:lnSpc>
+                <a:spcPct val="120000"/>
+              </a:lnSpc>
+              <a:buNone/>
+            </a:pPr>
+            <a:r>
+              <a:rPr lang="en-US" sz="2000" dirty="0">
+                <a:solidFill>
+                  <a:srgbClr val="8F8F8F"/>
+                </a:solidFill>
+                <a:latin typeface="Pretendard" pitchFamily="34" charset="0"/>
+                <a:ea typeface="Pretendard" pitchFamily="34" charset="-122"/>
+                <a:cs typeface="Pretendard" pitchFamily="34" charset="-120"/>
+              </a:rPr>
+              <a:t> (Cont. 2/2)</a:t>
             </a:r>
             <a:endParaRPr lang="en-US" sz="3400" dirty="0"/>
           </a:p>
@@ -6744,14 +6733,14 @@
       </p:sp>
       <p:sp>
         <p:nvSpPr>
-          <p:cNvPr id="12" name="mdpr:2-2-c23e9b:left:block-15-chunk-2"/>
+          <p:cNvPr id="10" name="mdpr:2-2-c23e9b:left:block-15-chunk-2-block-15-chunk-2"/>
           <p:cNvSpPr txBox="1"/>
           <p:nvPr/>
         </p:nvSpPr>
         <p:spPr>
           <a:xfrm>
-            <a:off x="896112" y="1664208"/>
-            <a:ext cx="4791456" cy="4169664"/>
+            <a:off x="896112" y="1463040"/>
+            <a:ext cx="4791456" cy="4261104"/>
           </a:xfrm>
           <a:prstGeom prst="rect">
             <a:avLst/>
@@ -6770,7 +6759,44 @@
               <a:buNone/>
             </a:pPr>
             <a:r>
-              <a:rPr lang="en-US" sz="2200" b="1" dirty="0">
+              <a:rPr lang="en-US" sz="1800" b="1" dirty="0">
+                <a:solidFill>
+                  <a:srgbClr val="F43F5E"/>
+                </a:solidFill>
+                <a:latin typeface="Pretendard" pitchFamily="34" charset="0"/>
+                <a:ea typeface="Pretendard" pitchFamily="34" charset="-122"/>
+                <a:cs typeface="Pretendard" pitchFamily="34" charset="-120"/>
+              </a:rPr>
+              <a:t>- Connectors</a:t>
+            </a:r>
+            <a:pPr algn="l" indent="0" marL="0">
+              <a:lnSpc>
+                <a:spcPct val="120000"/>
+              </a:lnSpc>
+              <a:buNone/>
+            </a:pPr>
+            <a:r>
+              <a:rPr lang="en-US" sz="1800" dirty="0">
+                <a:solidFill>
+                  <a:srgbClr val="111111"/>
+                </a:solidFill>
+                <a:latin typeface="Pretendard" pitchFamily="34" charset="0"/>
+                <a:ea typeface="Pretendard" pitchFamily="34" charset="-122"/>
+                <a:cs typeface="Pretendard" pitchFamily="34" charset="-120"/>
+              </a:rPr>
+              <a:t>  straight-arrow, elbow-arrow, boundary-attach, overlap-joint, parallel-flow, contrast-flow.</a:t>
+            </a:r>
+            <a:endParaRPr lang="en-US" sz="1800" dirty="0"/>
+          </a:p>
+          <a:p>
+            <a:pPr algn="l" indent="0" marL="0">
+              <a:lnSpc>
+                <a:spcPct val="120000"/>
+              </a:lnSpc>
+              <a:buNone/>
+            </a:pPr>
+            <a:r>
+              <a:rPr lang="en-US" sz="1800" b="1" dirty="0">
                 <a:solidFill>
                   <a:srgbClr val="F43F5E"/>
                 </a:solidFill>
@@ -6780,6 +6806,9 @@
               </a:rPr>
               <a:t>- Icons</a:t>
             </a:r>
+            <a:endParaRPr lang="en-US" sz="1800" dirty="0"/>
+          </a:p>
+          <a:p>
             <a:pPr algn="l" indent="0" marL="0">
               <a:lnSpc>
                 <a:spcPct val="120000"/>
@@ -6787,7 +6816,7 @@
               <a:buNone/>
             </a:pPr>
             <a:r>
-              <a:rPr lang="en-US" sz="2200" dirty="0">
+              <a:rPr lang="en-US" sz="1800" dirty="0">
                 <a:solidFill>
                   <a:srgbClr val="111111"/>
                 </a:solidFill>
@@ -6797,20 +6826,20 @@
               </a:rPr>
               <a:t>  number-badge, mono-icon-slot, letter-disc, quiet-aside, image-safe-frame, brand-glyph.</a:t>
             </a:r>
-            <a:endParaRPr lang="en-US" sz="2200" dirty="0"/>
+            <a:endParaRPr lang="en-US" sz="1800" dirty="0"/>
           </a:p>
         </p:txBody>
       </p:sp>
       <p:sp>
         <p:nvSpPr>
-          <p:cNvPr id="13" name="mdpr:2-2-c23e9b:right:block-15-chunk-2"/>
+          <p:cNvPr id="11" name="mdpr:2-2-c23e9b:right:block-15-chunk-2"/>
           <p:cNvSpPr txBox="1"/>
           <p:nvPr/>
         </p:nvSpPr>
         <p:spPr>
           <a:xfrm>
-            <a:off x="6473952" y="1664208"/>
-            <a:ext cx="4791456" cy="4169664"/>
+            <a:off x="6473952" y="1463040"/>
+            <a:ext cx="4791456" cy="4261104"/>
           </a:xfrm>
           <a:prstGeom prst="rect">
             <a:avLst/>
@@ -6829,7 +6858,7 @@
               <a:buNone/>
             </a:pPr>
             <a:r>
-              <a:rPr lang="en-US" sz="2200" b="1" dirty="0">
+              <a:rPr lang="en-US" sz="1800" b="1" dirty="0">
                 <a:solidFill>
                   <a:srgbClr val="F43F5E"/>
                 </a:solidFill>
@@ -6846,7 +6875,7 @@
               <a:buNone/>
             </a:pPr>
             <a:r>
-              <a:rPr lang="en-US" sz="2200" dirty="0">
+              <a:rPr lang="en-US" sz="1800" dirty="0">
                 <a:solidFill>
                   <a:srgbClr val="111111"/>
                 </a:solidFill>
@@ -6856,7 +6885,7 @@
               </a:rPr>
               <a:t>  skeuomorphic-bevel, glassmorphism-surface, newmorphic-panel, clay-blob, bento-tile, liquid-lens.</a:t>
             </a:r>
-            <a:endParaRPr lang="en-US" sz="2200" dirty="0"/>
+            <a:endParaRPr lang="en-US" sz="1800" dirty="0"/>
           </a:p>
         </p:txBody>
       </p:sp>
@@ -9171,7 +9200,24 @@
                 <a:ea typeface="Pretendard" pitchFamily="34" charset="-122"/>
                 <a:cs typeface="Pretendard" pitchFamily="34" charset="-120"/>
               </a:rPr>
-              <a:t>Chart and Table Pair (Cont. 2/2)</a:t>
+              <a:t>Chart and Table Pair</a:t>
+            </a:r>
+            <a:pPr algn="ctr" indent="0" marL="0">
+              <a:lnSpc>
+                <a:spcPct val="120000"/>
+              </a:lnSpc>
+              <a:buNone/>
+            </a:pPr>
+            <a:r>
+              <a:rPr lang="en-US" sz="2000" dirty="0">
+                <a:solidFill>
+                  <a:srgbClr val="8F8F8F"/>
+                </a:solidFill>
+                <a:latin typeface="Pretendard" pitchFamily="34" charset="0"/>
+                <a:ea typeface="Pretendard" pitchFamily="34" charset="-122"/>
+                <a:cs typeface="Pretendard" pitchFamily="34" charset="-120"/>
+              </a:rPr>
+              <a:t> (Cont. 2/2)</a:t>
             </a:r>
             <a:endParaRPr lang="en-US" sz="3400" dirty="0"/>
           </a:p>
@@ -11437,7 +11483,24 @@
                 <a:ea typeface="Pretendard" pitchFamily="34" charset="-122"/>
                 <a:cs typeface="Pretendard" pitchFamily="34" charset="-120"/>
               </a:rPr>
-              <a:t>Editable Proof Objects (Cont. 2/2)</a:t>
+              <a:t>Editable Proof Objects</a:t>
+            </a:r>
+            <a:pPr algn="ctr" indent="0" marL="0">
+              <a:lnSpc>
+                <a:spcPct val="120000"/>
+              </a:lnSpc>
+              <a:buNone/>
+            </a:pPr>
+            <a:r>
+              <a:rPr lang="en-US" sz="2000" dirty="0">
+                <a:solidFill>
+                  <a:srgbClr val="8F8F8F"/>
+                </a:solidFill>
+                <a:latin typeface="Pretendard" pitchFamily="34" charset="0"/>
+                <a:ea typeface="Pretendard" pitchFamily="34" charset="-122"/>
+                <a:cs typeface="Pretendard" pitchFamily="34" charset="-120"/>
+              </a:rPr>
+              <a:t> (Cont. 2/2)</a:t>
             </a:r>
             <a:endParaRPr lang="en-US" sz="3400" dirty="0"/>
           </a:p>
@@ -12335,222 +12398,49 @@
           </a:ln>
         </p:spPr>
       </p:sp>
-      <p:pic>
-        <p:nvPicPr>
-          <p:cNvPr id="9" name="Image 0" descr="preencoded.png">    </p:cNvPr>
-          <p:cNvPicPr>
-            <a:picLocks noChangeAspect="1"/>
-          </p:cNvPicPr>
-          <p:nvPr/>
-        </p:nvPicPr>
-        <p:blipFill>
-          <a:blip r:embed="rId1">
-            <a:extLst>
-              <a:ext uri="{96DAC541-7B7A-43D3-8B79-37D633B846F1}">
-                <asvg:svgBlip xmlns:asvg="http://schemas.microsoft.com/office/drawing/2016/SVG/main" r:embed="rId2"/>
-              </a:ext>
-            </a:extLst>
-          </a:blip>
-          <a:stretch>
-            <a:fillRect/>
-          </a:stretch>
-        </p:blipFill>
-        <p:spPr>
-          <a:xfrm>
-            <a:off x="914400" y="1865376"/>
-            <a:ext cx="10241280" cy="1024128"/>
-          </a:xfrm>
-          <a:prstGeom prst="rect">
-            <a:avLst/>
-          </a:prstGeom>
-        </p:spPr>
-      </p:pic>
-      <p:sp>
-        <p:nvSpPr>
-          <p:cNvPr id="10" name="Shape 7"/>
-          <p:cNvSpPr/>
-          <p:nvPr/>
-        </p:nvSpPr>
-        <p:spPr>
-          <a:xfrm>
-            <a:off x="914400" y="1865376"/>
-            <a:ext cx="10241280" cy="1024128"/>
-          </a:xfrm>
-          <a:prstGeom prst="rect">
-            <a:avLst/>
-          </a:prstGeom>
-          <a:solidFill>
-            <a:srgbClr val="FFFFFF">
-              <a:alpha val="0"/>
-            </a:srgbClr>
-          </a:solidFill>
-          <a:ln w="12700">
-            <a:solidFill>
-              <a:srgbClr val="E5E7EB">
+      <p:sp>
+        <p:nvSpPr>
+          <p:cNvPr id="9" name="Shape 7"/>
+          <p:cNvSpPr/>
+          <p:nvPr/>
+        </p:nvSpPr>
+        <p:spPr>
+          <a:xfrm>
+            <a:off x="822960" y="1938528"/>
+            <a:ext cx="73152" cy="2514600"/>
+          </a:xfrm>
+          <a:prstGeom prst="rect">
+            <a:avLst/>
+          </a:prstGeom>
+          <a:solidFill>
+            <a:srgbClr val="F43F5E"/>
+          </a:solidFill>
+          <a:ln w="12700">
+            <a:solidFill>
+              <a:srgbClr val="F43F5E">
                 <a:alpha val="0"/>
               </a:srgbClr>
             </a:solidFill>
             <a:prstDash val="solid"/>
           </a:ln>
-          <a:effectLst>
-            <a:outerShdw sx="100000" sy="100000" kx="0" ky="0" algn="bl" rotWithShape="0" blurRad="12700" dist="50800" dir="2700000">
-              <a:srgbClr val="000000">
-                <a:alpha val="8000"/>
-              </a:srgbClr>
-            </a:outerShdw>
-          </a:effectLst>
-        </p:spPr>
-      </p:sp>
-      <p:pic>
-        <p:nvPicPr>
-          <p:cNvPr id="11" name="Image 1" descr="preencoded.png">    </p:cNvPr>
-          <p:cNvPicPr>
-            <a:picLocks noChangeAspect="1"/>
-          </p:cNvPicPr>
-          <p:nvPr/>
-        </p:nvPicPr>
-        <p:blipFill>
-          <a:blip r:embed="rId3">
-            <a:extLst>
-              <a:ext uri="{96DAC541-7B7A-43D3-8B79-37D633B846F1}">
-                <asvg:svgBlip xmlns:asvg="http://schemas.microsoft.com/office/drawing/2016/SVG/main" r:embed="rId4"/>
-              </a:ext>
-            </a:extLst>
-          </a:blip>
-          <a:stretch>
-            <a:fillRect/>
-          </a:stretch>
-        </p:blipFill>
-        <p:spPr>
-          <a:xfrm>
-            <a:off x="914400" y="3191256"/>
-            <a:ext cx="10241280" cy="1024128"/>
-          </a:xfrm>
-          <a:prstGeom prst="rect">
-            <a:avLst/>
-          </a:prstGeom>
-        </p:spPr>
-      </p:pic>
-      <p:sp>
-        <p:nvSpPr>
-          <p:cNvPr id="12" name="Shape 8"/>
-          <p:cNvSpPr/>
-          <p:nvPr/>
-        </p:nvSpPr>
-        <p:spPr>
-          <a:xfrm>
-            <a:off x="914400" y="3191256"/>
-            <a:ext cx="10241280" cy="1024128"/>
-          </a:xfrm>
-          <a:prstGeom prst="rect">
-            <a:avLst/>
-          </a:prstGeom>
-          <a:solidFill>
-            <a:srgbClr val="FFFFFF">
-              <a:alpha val="0"/>
-            </a:srgbClr>
-          </a:solidFill>
-          <a:ln w="12700">
-            <a:solidFill>
-              <a:srgbClr val="E5E7EB">
-                <a:alpha val="0"/>
-              </a:srgbClr>
-            </a:solidFill>
-            <a:prstDash val="solid"/>
-          </a:ln>
-          <a:effectLst>
-            <a:outerShdw sx="100000" sy="100000" kx="0" ky="0" algn="bl" rotWithShape="0" blurRad="12700" dist="50800" dir="2700000">
-              <a:srgbClr val="000000">
-                <a:alpha val="8000"/>
-              </a:srgbClr>
-            </a:outerShdw>
-          </a:effectLst>
-        </p:spPr>
-      </p:sp>
-      <p:pic>
-        <p:nvPicPr>
-          <p:cNvPr id="13" name="Image 2" descr="preencoded.png">    </p:cNvPr>
-          <p:cNvPicPr>
-            <a:picLocks noChangeAspect="1"/>
-          </p:cNvPicPr>
-          <p:nvPr/>
-        </p:nvPicPr>
-        <p:blipFill>
-          <a:blip r:embed="rId5">
-            <a:extLst>
-              <a:ext uri="{96DAC541-7B7A-43D3-8B79-37D633B846F1}">
-                <asvg:svgBlip xmlns:asvg="http://schemas.microsoft.com/office/drawing/2016/SVG/main" r:embed="rId6"/>
-              </a:ext>
-            </a:extLst>
-          </a:blip>
-          <a:stretch>
-            <a:fillRect/>
-          </a:stretch>
-        </p:blipFill>
-        <p:spPr>
-          <a:xfrm>
-            <a:off x="914400" y="4507992"/>
-            <a:ext cx="10241280" cy="1024128"/>
-          </a:xfrm>
-          <a:prstGeom prst="rect">
-            <a:avLst/>
-          </a:prstGeom>
-        </p:spPr>
-      </p:pic>
-      <p:sp>
-        <p:nvSpPr>
-          <p:cNvPr id="14" name="Shape 9"/>
-          <p:cNvSpPr/>
-          <p:nvPr/>
-        </p:nvSpPr>
-        <p:spPr>
-          <a:xfrm>
-            <a:off x="914400" y="4507992"/>
-            <a:ext cx="10241280" cy="1024128"/>
-          </a:xfrm>
-          <a:prstGeom prst="rect">
-            <a:avLst/>
-          </a:prstGeom>
-          <a:solidFill>
-            <a:srgbClr val="FFFFFF">
-              <a:alpha val="0"/>
-            </a:srgbClr>
-          </a:solidFill>
-          <a:ln w="12700">
-            <a:solidFill>
-              <a:srgbClr val="E5E7EB">
-                <a:alpha val="0"/>
-              </a:srgbClr>
-            </a:solidFill>
-            <a:prstDash val="solid"/>
-          </a:ln>
-          <a:effectLst>
-            <a:outerShdw sx="100000" sy="100000" kx="0" ky="0" algn="bl" rotWithShape="0" blurRad="12700" dist="50800" dir="2700000">
-              <a:srgbClr val="000000">
-                <a:alpha val="8000"/>
-              </a:srgbClr>
-            </a:outerShdw>
-          </a:effectLst>
-        </p:spPr>
-      </p:sp>
-      <p:sp>
-        <p:nvSpPr>
-          <p:cNvPr id="15" name="Shape 10"/>
-          <p:cNvSpPr/>
-          <p:nvPr/>
-        </p:nvSpPr>
-        <p:spPr>
-          <a:xfrm>
-            <a:off x="786384" y="1956816"/>
-            <a:ext cx="32004" cy="3483864"/>
-          </a:xfrm>
-          <a:prstGeom prst="rect">
-            <a:avLst/>
-          </a:prstGeom>
-          <a:solidFill>
-            <a:srgbClr val="38BDF8">
-              <a:alpha val="80000"/>
-            </a:srgbClr>
+        </p:spPr>
+      </p:sp>
+      <p:sp>
+        <p:nvSpPr>
+          <p:cNvPr id="10" name="Shape 8"/>
+          <p:cNvSpPr/>
+          <p:nvPr/>
+        </p:nvSpPr>
+        <p:spPr>
+          <a:xfrm>
+            <a:off x="4343400" y="1938528"/>
+            <a:ext cx="73152" cy="2514600"/>
+          </a:xfrm>
+          <a:prstGeom prst="rect">
+            <a:avLst/>
+          </a:prstGeom>
+          <a:solidFill>
+            <a:srgbClr val="38BDF8"/>
           </a:solidFill>
           <a:ln w="12700">
             <a:solidFill>
@@ -12564,14 +12454,14 @@
       </p:sp>
       <p:sp>
         <p:nvSpPr>
-          <p:cNvPr id="16" name="Shape 11"/>
-          <p:cNvSpPr/>
-          <p:nvPr/>
-        </p:nvSpPr>
-        <p:spPr>
-          <a:xfrm>
-            <a:off x="914400" y="1865376"/>
-            <a:ext cx="73152" cy="1024128"/>
+          <p:cNvPr id="11" name="Shape 9"/>
+          <p:cNvSpPr/>
+          <p:nvPr/>
+        </p:nvSpPr>
+        <p:spPr>
+          <a:xfrm>
+            <a:off x="7863840" y="1938528"/>
+            <a:ext cx="73152" cy="2514600"/>
           </a:xfrm>
           <a:prstGeom prst="rect">
             <a:avLst/>
@@ -12591,61 +12481,7 @@
       </p:sp>
       <p:sp>
         <p:nvSpPr>
-          <p:cNvPr id="17" name="Shape 12"/>
-          <p:cNvSpPr/>
-          <p:nvPr/>
-        </p:nvSpPr>
-        <p:spPr>
-          <a:xfrm>
-            <a:off x="914400" y="3191256"/>
-            <a:ext cx="73152" cy="1024128"/>
-          </a:xfrm>
-          <a:prstGeom prst="rect">
-            <a:avLst/>
-          </a:prstGeom>
-          <a:solidFill>
-            <a:srgbClr val="38BDF8"/>
-          </a:solidFill>
-          <a:ln w="12700">
-            <a:solidFill>
-              <a:srgbClr val="38BDF8">
-                <a:alpha val="0"/>
-              </a:srgbClr>
-            </a:solidFill>
-            <a:prstDash val="solid"/>
-          </a:ln>
-        </p:spPr>
-      </p:sp>
-      <p:sp>
-        <p:nvSpPr>
-          <p:cNvPr id="18" name="Shape 13"/>
-          <p:cNvSpPr/>
-          <p:nvPr/>
-        </p:nvSpPr>
-        <p:spPr>
-          <a:xfrm>
-            <a:off x="914400" y="4507992"/>
-            <a:ext cx="73152" cy="1024128"/>
-          </a:xfrm>
-          <a:prstGeom prst="rect">
-            <a:avLst/>
-          </a:prstGeom>
-          <a:solidFill>
-            <a:srgbClr val="F43F5E"/>
-          </a:solidFill>
-          <a:ln w="12700">
-            <a:solidFill>
-              <a:srgbClr val="F43F5E">
-                <a:alpha val="0"/>
-              </a:srgbClr>
-            </a:solidFill>
-            <a:prstDash val="solid"/>
-          </a:ln>
-        </p:spPr>
-      </p:sp>
-      <p:sp>
-        <p:nvSpPr>
-          <p:cNvPr id="19" name="mdpr:1-2-ea42c8:title:__title:1-2-ea42c8"/>
+          <p:cNvPr id="12" name="mdpr:1-2-ea42c8:title:__title:1-2-ea42c8"/>
           <p:cNvSpPr txBox="1"/>
           <p:nvPr/>
         </p:nvSpPr>
@@ -12687,14 +12523,14 @@
       </p:sp>
       <p:sp>
         <p:nvSpPr>
-          <p:cNvPr id="20" name="mdpr:1-2-ea42c8:item-1:block-27-chunk-1"/>
+          <p:cNvPr id="13" name="mdpr:1-2-ea42c8:item-1:block-27-chunk-1"/>
           <p:cNvSpPr txBox="1"/>
           <p:nvPr/>
         </p:nvSpPr>
         <p:spPr>
           <a:xfrm>
-            <a:off x="1133856" y="1957548"/>
-            <a:ext cx="9820656" cy="839785"/>
+            <a:off x="1042416" y="2103120"/>
+            <a:ext cx="2825496" cy="2185416"/>
           </a:xfrm>
           <a:prstGeom prst="rect">
             <a:avLst/>
@@ -12746,14 +12582,14 @@
       </p:sp>
       <p:sp>
         <p:nvSpPr>
-          <p:cNvPr id="21" name="mdpr:1-2-ea42c8:item-2:block-27-chunk-1"/>
+          <p:cNvPr id="14" name="mdpr:1-2-ea42c8:item-2:block-27-chunk-1"/>
           <p:cNvSpPr txBox="1"/>
           <p:nvPr/>
         </p:nvSpPr>
         <p:spPr>
           <a:xfrm>
-            <a:off x="1133856" y="3283428"/>
-            <a:ext cx="9820656" cy="839785"/>
+            <a:off x="4562856" y="2103120"/>
+            <a:ext cx="2825496" cy="2185416"/>
           </a:xfrm>
           <a:prstGeom prst="rect">
             <a:avLst/>
@@ -12805,14 +12641,14 @@
       </p:sp>
       <p:sp>
         <p:nvSpPr>
-          <p:cNvPr id="22" name="mdpr:1-2-ea42c8:item-3:block-27-chunk-1"/>
+          <p:cNvPr id="15" name="mdpr:1-2-ea42c8:item-3:block-27-chunk-1"/>
           <p:cNvSpPr txBox="1"/>
           <p:nvPr/>
         </p:nvSpPr>
         <p:spPr>
           <a:xfrm>
-            <a:off x="1133856" y="4600164"/>
-            <a:ext cx="9820656" cy="839785"/>
+            <a:off x="8083296" y="2103120"/>
+            <a:ext cx="2825496" cy="2185416"/>
           </a:xfrm>
           <a:prstGeom prst="rect">
             <a:avLst/>
@@ -13122,8 +12958,8 @@
         </p:nvSpPr>
         <p:spPr>
           <a:xfrm>
-            <a:off x="822960" y="1188720"/>
-            <a:ext cx="10515600" cy="45720"/>
+            <a:off x="822960" y="1737360"/>
+            <a:ext cx="73152" cy="841248"/>
           </a:xfrm>
           <a:prstGeom prst="rect">
             <a:avLst/>
@@ -13149,8 +12985,8 @@
         </p:nvSpPr>
         <p:spPr>
           <a:xfrm>
-            <a:off x="822960" y="6382512"/>
-            <a:ext cx="2011680" cy="45720"/>
+            <a:off x="822960" y="2779776"/>
+            <a:ext cx="73152" cy="841248"/>
           </a:xfrm>
           <a:prstGeom prst="rect">
             <a:avLst/>
@@ -13176,37 +13012,8 @@
         </p:nvSpPr>
         <p:spPr>
           <a:xfrm>
-            <a:off x="6080760" y="1389888"/>
-            <a:ext cx="22860" cy="4846320"/>
-          </a:xfrm>
-          <a:prstGeom prst="rect">
-            <a:avLst/>
-          </a:prstGeom>
-          <a:solidFill>
-            <a:srgbClr val="E5E7EB">
-              <a:alpha val="90000"/>
-            </a:srgbClr>
-          </a:solidFill>
-          <a:ln w="12700">
-            <a:solidFill>
-              <a:srgbClr val="E5E7EB">
-                <a:alpha val="0"/>
-              </a:srgbClr>
-            </a:solidFill>
-            <a:prstDash val="solid"/>
-          </a:ln>
-        </p:spPr>
-      </p:sp>
-      <p:sp>
-        <p:nvSpPr>
-          <p:cNvPr id="12" name="Shape 10"/>
-          <p:cNvSpPr/>
-          <p:nvPr/>
-        </p:nvSpPr>
-        <p:spPr>
-          <a:xfrm>
-            <a:off x="822960" y="1389888"/>
-            <a:ext cx="73152" cy="566928"/>
+            <a:off x="822960" y="3822192"/>
+            <a:ext cx="73152" cy="841248"/>
           </a:xfrm>
           <a:prstGeom prst="rect">
             <a:avLst/>
@@ -13226,14 +13033,14 @@
       </p:sp>
       <p:sp>
         <p:nvSpPr>
-          <p:cNvPr id="13" name="Shape 11"/>
-          <p:cNvSpPr/>
-          <p:nvPr/>
-        </p:nvSpPr>
-        <p:spPr>
-          <a:xfrm>
-            <a:off x="822960" y="2103120"/>
-            <a:ext cx="73152" cy="566928"/>
+          <p:cNvPr id="12" name="Shape 10"/>
+          <p:cNvSpPr/>
+          <p:nvPr/>
+        </p:nvSpPr>
+        <p:spPr>
+          <a:xfrm>
+            <a:off x="822960" y="4864608"/>
+            <a:ext cx="73152" cy="841248"/>
           </a:xfrm>
           <a:prstGeom prst="rect">
             <a:avLst/>
@@ -13253,14 +13060,14 @@
       </p:sp>
       <p:sp>
         <p:nvSpPr>
-          <p:cNvPr id="14" name="Shape 12"/>
-          <p:cNvSpPr/>
-          <p:nvPr/>
-        </p:nvSpPr>
-        <p:spPr>
-          <a:xfrm>
-            <a:off x="822960" y="2816352"/>
-            <a:ext cx="73152" cy="566928"/>
+          <p:cNvPr id="13" name="Shape 11"/>
+          <p:cNvSpPr/>
+          <p:nvPr/>
+        </p:nvSpPr>
+        <p:spPr>
+          <a:xfrm>
+            <a:off x="6272784" y="1737360"/>
+            <a:ext cx="73152" cy="841248"/>
           </a:xfrm>
           <a:prstGeom prst="rect">
             <a:avLst/>
@@ -13280,14 +13087,14 @@
       </p:sp>
       <p:sp>
         <p:nvSpPr>
-          <p:cNvPr id="15" name="Shape 13"/>
-          <p:cNvSpPr/>
-          <p:nvPr/>
-        </p:nvSpPr>
-        <p:spPr>
-          <a:xfrm>
-            <a:off x="822960" y="3529584"/>
-            <a:ext cx="73152" cy="566928"/>
+          <p:cNvPr id="14" name="Shape 12"/>
+          <p:cNvSpPr/>
+          <p:nvPr/>
+        </p:nvSpPr>
+        <p:spPr>
+          <a:xfrm>
+            <a:off x="6272784" y="2779776"/>
+            <a:ext cx="73152" cy="841248"/>
           </a:xfrm>
           <a:prstGeom prst="rect">
             <a:avLst/>
@@ -13307,14 +13114,14 @@
       </p:sp>
       <p:sp>
         <p:nvSpPr>
-          <p:cNvPr id="16" name="Shape 14"/>
-          <p:cNvSpPr/>
-          <p:nvPr/>
-        </p:nvSpPr>
-        <p:spPr>
-          <a:xfrm>
-            <a:off x="822960" y="4242816"/>
-            <a:ext cx="73152" cy="566928"/>
+          <p:cNvPr id="15" name="Shape 13"/>
+          <p:cNvSpPr/>
+          <p:nvPr/>
+        </p:nvSpPr>
+        <p:spPr>
+          <a:xfrm>
+            <a:off x="6272784" y="3822192"/>
+            <a:ext cx="73152" cy="841248"/>
           </a:xfrm>
           <a:prstGeom prst="rect">
             <a:avLst/>
@@ -13334,14 +13141,14 @@
       </p:sp>
       <p:sp>
         <p:nvSpPr>
-          <p:cNvPr id="17" name="Shape 15"/>
-          <p:cNvSpPr/>
-          <p:nvPr/>
-        </p:nvSpPr>
-        <p:spPr>
-          <a:xfrm>
-            <a:off x="822960" y="4956048"/>
-            <a:ext cx="73152" cy="566928"/>
+          <p:cNvPr id="16" name="Shape 14"/>
+          <p:cNvSpPr/>
+          <p:nvPr/>
+        </p:nvSpPr>
+        <p:spPr>
+          <a:xfrm>
+            <a:off x="6272784" y="4864608"/>
+            <a:ext cx="73152" cy="841248"/>
           </a:xfrm>
           <a:prstGeom prst="rect">
             <a:avLst/>
@@ -13361,223 +13168,7 @@
       </p:sp>
       <p:sp>
         <p:nvSpPr>
-          <p:cNvPr id="18" name="Shape 16"/>
-          <p:cNvSpPr/>
-          <p:nvPr/>
-        </p:nvSpPr>
-        <p:spPr>
-          <a:xfrm>
-            <a:off x="822960" y="5669280"/>
-            <a:ext cx="73152" cy="566928"/>
-          </a:xfrm>
-          <a:prstGeom prst="rect">
-            <a:avLst/>
-          </a:prstGeom>
-          <a:solidFill>
-            <a:srgbClr val="F43F5E"/>
-          </a:solidFill>
-          <a:ln w="12700">
-            <a:solidFill>
-              <a:srgbClr val="F43F5E">
-                <a:alpha val="0"/>
-              </a:srgbClr>
-            </a:solidFill>
-            <a:prstDash val="solid"/>
-          </a:ln>
-        </p:spPr>
-      </p:sp>
-      <p:sp>
-        <p:nvSpPr>
-          <p:cNvPr id="19" name="Shape 17"/>
-          <p:cNvSpPr/>
-          <p:nvPr/>
-        </p:nvSpPr>
-        <p:spPr>
-          <a:xfrm>
-            <a:off x="6272784" y="1389888"/>
-            <a:ext cx="73152" cy="566928"/>
-          </a:xfrm>
-          <a:prstGeom prst="rect">
-            <a:avLst/>
-          </a:prstGeom>
-          <a:solidFill>
-            <a:srgbClr val="38BDF8"/>
-          </a:solidFill>
-          <a:ln w="12700">
-            <a:solidFill>
-              <a:srgbClr val="38BDF8">
-                <a:alpha val="0"/>
-              </a:srgbClr>
-            </a:solidFill>
-            <a:prstDash val="solid"/>
-          </a:ln>
-        </p:spPr>
-      </p:sp>
-      <p:sp>
-        <p:nvSpPr>
-          <p:cNvPr id="20" name="Shape 18"/>
-          <p:cNvSpPr/>
-          <p:nvPr/>
-        </p:nvSpPr>
-        <p:spPr>
-          <a:xfrm>
-            <a:off x="6272784" y="2103120"/>
-            <a:ext cx="73152" cy="566928"/>
-          </a:xfrm>
-          <a:prstGeom prst="rect">
-            <a:avLst/>
-          </a:prstGeom>
-          <a:solidFill>
-            <a:srgbClr val="F43F5E"/>
-          </a:solidFill>
-          <a:ln w="12700">
-            <a:solidFill>
-              <a:srgbClr val="F43F5E">
-                <a:alpha val="0"/>
-              </a:srgbClr>
-            </a:solidFill>
-            <a:prstDash val="solid"/>
-          </a:ln>
-        </p:spPr>
-      </p:sp>
-      <p:sp>
-        <p:nvSpPr>
-          <p:cNvPr id="21" name="Shape 19"/>
-          <p:cNvSpPr/>
-          <p:nvPr/>
-        </p:nvSpPr>
-        <p:spPr>
-          <a:xfrm>
-            <a:off x="6272784" y="2816352"/>
-            <a:ext cx="73152" cy="566928"/>
-          </a:xfrm>
-          <a:prstGeom prst="rect">
-            <a:avLst/>
-          </a:prstGeom>
-          <a:solidFill>
-            <a:srgbClr val="38BDF8"/>
-          </a:solidFill>
-          <a:ln w="12700">
-            <a:solidFill>
-              <a:srgbClr val="38BDF8">
-                <a:alpha val="0"/>
-              </a:srgbClr>
-            </a:solidFill>
-            <a:prstDash val="solid"/>
-          </a:ln>
-        </p:spPr>
-      </p:sp>
-      <p:sp>
-        <p:nvSpPr>
-          <p:cNvPr id="22" name="Shape 20"/>
-          <p:cNvSpPr/>
-          <p:nvPr/>
-        </p:nvSpPr>
-        <p:spPr>
-          <a:xfrm>
-            <a:off x="6272784" y="3529584"/>
-            <a:ext cx="73152" cy="566928"/>
-          </a:xfrm>
-          <a:prstGeom prst="rect">
-            <a:avLst/>
-          </a:prstGeom>
-          <a:solidFill>
-            <a:srgbClr val="F43F5E"/>
-          </a:solidFill>
-          <a:ln w="12700">
-            <a:solidFill>
-              <a:srgbClr val="F43F5E">
-                <a:alpha val="0"/>
-              </a:srgbClr>
-            </a:solidFill>
-            <a:prstDash val="solid"/>
-          </a:ln>
-        </p:spPr>
-      </p:sp>
-      <p:sp>
-        <p:nvSpPr>
-          <p:cNvPr id="23" name="Shape 21"/>
-          <p:cNvSpPr/>
-          <p:nvPr/>
-        </p:nvSpPr>
-        <p:spPr>
-          <a:xfrm>
-            <a:off x="6272784" y="4242816"/>
-            <a:ext cx="73152" cy="566928"/>
-          </a:xfrm>
-          <a:prstGeom prst="rect">
-            <a:avLst/>
-          </a:prstGeom>
-          <a:solidFill>
-            <a:srgbClr val="38BDF8"/>
-          </a:solidFill>
-          <a:ln w="12700">
-            <a:solidFill>
-              <a:srgbClr val="38BDF8">
-                <a:alpha val="0"/>
-              </a:srgbClr>
-            </a:solidFill>
-            <a:prstDash val="solid"/>
-          </a:ln>
-        </p:spPr>
-      </p:sp>
-      <p:sp>
-        <p:nvSpPr>
-          <p:cNvPr id="24" name="Shape 22"/>
-          <p:cNvSpPr/>
-          <p:nvPr/>
-        </p:nvSpPr>
-        <p:spPr>
-          <a:xfrm>
-            <a:off x="6272784" y="4956048"/>
-            <a:ext cx="73152" cy="566928"/>
-          </a:xfrm>
-          <a:prstGeom prst="rect">
-            <a:avLst/>
-          </a:prstGeom>
-          <a:solidFill>
-            <a:srgbClr val="F43F5E"/>
-          </a:solidFill>
-          <a:ln w="12700">
-            <a:solidFill>
-              <a:srgbClr val="F43F5E">
-                <a:alpha val="0"/>
-              </a:srgbClr>
-            </a:solidFill>
-            <a:prstDash val="solid"/>
-          </a:ln>
-        </p:spPr>
-      </p:sp>
-      <p:sp>
-        <p:nvSpPr>
-          <p:cNvPr id="25" name="Shape 23"/>
-          <p:cNvSpPr/>
-          <p:nvPr/>
-        </p:nvSpPr>
-        <p:spPr>
-          <a:xfrm>
-            <a:off x="6272784" y="5669280"/>
-            <a:ext cx="73152" cy="566928"/>
-          </a:xfrm>
-          <a:prstGeom prst="rect">
-            <a:avLst/>
-          </a:prstGeom>
-          <a:solidFill>
-            <a:srgbClr val="38BDF8"/>
-          </a:solidFill>
-          <a:ln w="12700">
-            <a:solidFill>
-              <a:srgbClr val="38BDF8">
-                <a:alpha val="0"/>
-              </a:srgbClr>
-            </a:solidFill>
-            <a:prstDash val="solid"/>
-          </a:ln>
-        </p:spPr>
-      </p:sp>
-      <p:sp>
-        <p:nvSpPr>
-          <p:cNvPr id="26" name="mdpr:1-2-0772f8:title:__title:1-2-0772f8"/>
+          <p:cNvPr id="17" name="mdpr:1-2-0772f8:title:__title:1-2-0772f8"/>
           <p:cNvSpPr txBox="1"/>
           <p:nvPr/>
         </p:nvSpPr>
@@ -13619,14 +13210,14 @@
       </p:sp>
       <p:sp>
         <p:nvSpPr>
-          <p:cNvPr id="27" name="mdpr:1-2-0772f8:toc-item-1:toc-item-1"/>
+          <p:cNvPr id="18" name="mdpr:1-2-0772f8:toc-item-1:toc-item-1"/>
           <p:cNvSpPr txBox="1"/>
           <p:nvPr/>
         </p:nvSpPr>
         <p:spPr>
           <a:xfrm>
-            <a:off x="1042416" y="1481328"/>
-            <a:ext cx="4645152" cy="384048"/>
+            <a:off x="1042416" y="1828800"/>
+            <a:ext cx="4645152" cy="658368"/>
           </a:xfrm>
           <a:prstGeom prst="rect">
             <a:avLst/>
@@ -13661,14 +13252,14 @@
       </p:sp>
       <p:sp>
         <p:nvSpPr>
-          <p:cNvPr id="28" name="mdpr:1-2-0772f8:toc-item-2:toc-item-2"/>
+          <p:cNvPr id="19" name="mdpr:1-2-0772f8:toc-item-2:toc-item-2"/>
           <p:cNvSpPr txBox="1"/>
           <p:nvPr/>
         </p:nvSpPr>
         <p:spPr>
           <a:xfrm>
-            <a:off x="1042416" y="2194560"/>
-            <a:ext cx="4645152" cy="384048"/>
+            <a:off x="1042416" y="2871216"/>
+            <a:ext cx="4645152" cy="658368"/>
           </a:xfrm>
           <a:prstGeom prst="rect">
             <a:avLst/>
@@ -13703,14 +13294,14 @@
       </p:sp>
       <p:sp>
         <p:nvSpPr>
-          <p:cNvPr id="29" name="mdpr:1-2-0772f8:toc-item-3:toc-item-3"/>
+          <p:cNvPr id="20" name="mdpr:1-2-0772f8:toc-item-3:toc-item-3"/>
           <p:cNvSpPr txBox="1"/>
           <p:nvPr/>
         </p:nvSpPr>
         <p:spPr>
           <a:xfrm>
-            <a:off x="1042416" y="2907792"/>
-            <a:ext cx="4645152" cy="384048"/>
+            <a:off x="1042416" y="3913632"/>
+            <a:ext cx="4645152" cy="658368"/>
           </a:xfrm>
           <a:prstGeom prst="rect">
             <a:avLst/>
@@ -13745,14 +13336,14 @@
       </p:sp>
       <p:sp>
         <p:nvSpPr>
-          <p:cNvPr id="30" name="mdpr:1-2-0772f8:toc-item-4:toc-item-4"/>
+          <p:cNvPr id="21" name="mdpr:1-2-0772f8:toc-item-4:toc-item-4"/>
           <p:cNvSpPr txBox="1"/>
           <p:nvPr/>
         </p:nvSpPr>
         <p:spPr>
           <a:xfrm>
-            <a:off x="1042416" y="3621024"/>
-            <a:ext cx="4645152" cy="384048"/>
+            <a:off x="1042416" y="4956048"/>
+            <a:ext cx="4645152" cy="658368"/>
           </a:xfrm>
           <a:prstGeom prst="rect">
             <a:avLst/>
@@ -13787,14 +13378,14 @@
       </p:sp>
       <p:sp>
         <p:nvSpPr>
-          <p:cNvPr id="31" name="mdpr:1-2-0772f8:toc-item-5:toc-item-5"/>
+          <p:cNvPr id="22" name="mdpr:1-2-0772f8:toc-item-5:toc-item-5"/>
           <p:cNvSpPr txBox="1"/>
           <p:nvPr/>
         </p:nvSpPr>
         <p:spPr>
           <a:xfrm>
-            <a:off x="1042416" y="4334256"/>
-            <a:ext cx="4645152" cy="384048"/>
+            <a:off x="6492240" y="1828800"/>
+            <a:ext cx="4645152" cy="658368"/>
           </a:xfrm>
           <a:prstGeom prst="rect">
             <a:avLst/>
@@ -13829,14 +13420,14 @@
       </p:sp>
       <p:sp>
         <p:nvSpPr>
-          <p:cNvPr id="32" name="mdpr:1-2-0772f8:toc-item-6:toc-item-6"/>
+          <p:cNvPr id="23" name="mdpr:1-2-0772f8:toc-item-6:toc-item-6"/>
           <p:cNvSpPr txBox="1"/>
           <p:nvPr/>
         </p:nvSpPr>
         <p:spPr>
           <a:xfrm>
-            <a:off x="1042416" y="5047488"/>
-            <a:ext cx="4645152" cy="384048"/>
+            <a:off x="6492240" y="2871216"/>
+            <a:ext cx="4645152" cy="658368"/>
           </a:xfrm>
           <a:prstGeom prst="rect">
             <a:avLst/>
@@ -13871,14 +13462,14 @@
       </p:sp>
       <p:sp>
         <p:nvSpPr>
-          <p:cNvPr id="33" name="mdpr:1-2-0772f8:toc-item-7:toc-item-7"/>
+          <p:cNvPr id="24" name="mdpr:1-2-0772f8:toc-item-7:toc-item-7"/>
           <p:cNvSpPr txBox="1"/>
           <p:nvPr/>
         </p:nvSpPr>
         <p:spPr>
           <a:xfrm>
-            <a:off x="1042416" y="5760720"/>
-            <a:ext cx="4645152" cy="384048"/>
+            <a:off x="6492240" y="3913632"/>
+            <a:ext cx="4645152" cy="658368"/>
           </a:xfrm>
           <a:prstGeom prst="rect">
             <a:avLst/>
@@ -13913,14 +13504,14 @@
       </p:sp>
       <p:sp>
         <p:nvSpPr>
-          <p:cNvPr id="34" name="mdpr:1-2-0772f8:toc-item-8:toc-item-8"/>
+          <p:cNvPr id="25" name="mdpr:1-2-0772f8:toc-item-8:toc-item-8"/>
           <p:cNvSpPr txBox="1"/>
           <p:nvPr/>
         </p:nvSpPr>
         <p:spPr>
           <a:xfrm>
-            <a:off x="6492240" y="1481328"/>
-            <a:ext cx="4645152" cy="384048"/>
+            <a:off x="6492240" y="4956048"/>
+            <a:ext cx="4645152" cy="658368"/>
           </a:xfrm>
           <a:prstGeom prst="rect">
             <a:avLst/>
@@ -13948,258 +13539,6 @@
                 <a:cs typeface="Pretendard" pitchFamily="34" charset="-120"/>
               </a:rPr>
               <a:t>08  Chart and Table Pair</a:t>
-            </a:r>
-            <a:endParaRPr lang="en-US" sz="1800" dirty="0"/>
-          </a:p>
-        </p:txBody>
-      </p:sp>
-      <p:sp>
-        <p:nvSpPr>
-          <p:cNvPr id="35" name="mdpr:1-2-0772f8:toc-item-9:toc-item-9"/>
-          <p:cNvSpPr txBox="1"/>
-          <p:nvPr/>
-        </p:nvSpPr>
-        <p:spPr>
-          <a:xfrm>
-            <a:off x="6492240" y="2194560"/>
-            <a:ext cx="4645152" cy="384048"/>
-          </a:xfrm>
-          <a:prstGeom prst="rect">
-            <a:avLst/>
-          </a:prstGeom>
-          <a:noFill/>
-          <a:ln/>
-        </p:spPr>
-        <p:txBody>
-          <a:bodyPr wrap="square" lIns="0" tIns="25400" rIns="25400" bIns="0" rtlCol="0" anchor="ctr"/>
-          <a:lstStyle/>
-          <a:p>
-            <a:pPr algn="ctr" indent="0" marL="0">
-              <a:lnSpc>
-                <a:spcPct val="120000"/>
-              </a:lnSpc>
-              <a:buNone/>
-            </a:pPr>
-            <a:r>
-              <a:rPr lang="en-US" sz="1800" dirty="0">
-                <a:solidFill>
-                  <a:srgbClr val="111111"/>
-                </a:solidFill>
-                <a:latin typeface="Pretendard" pitchFamily="34" charset="0"/>
-                <a:ea typeface="Pretendard" pitchFamily="34" charset="-122"/>
-                <a:cs typeface="Pretendard" pitchFamily="34" charset="-120"/>
-              </a:rPr>
-              <a:t>09  Editable Proof Objects</a:t>
-            </a:r>
-            <a:endParaRPr lang="en-US" sz="1800" dirty="0"/>
-          </a:p>
-        </p:txBody>
-      </p:sp>
-      <p:sp>
-        <p:nvSpPr>
-          <p:cNvPr id="36" name="mdpr:1-2-0772f8:toc-item-10:toc-item-10"/>
-          <p:cNvSpPr txBox="1"/>
-          <p:nvPr/>
-        </p:nvSpPr>
-        <p:spPr>
-          <a:xfrm>
-            <a:off x="6492240" y="2907792"/>
-            <a:ext cx="4645152" cy="384048"/>
-          </a:xfrm>
-          <a:prstGeom prst="rect">
-            <a:avLst/>
-          </a:prstGeom>
-          <a:noFill/>
-          <a:ln/>
-        </p:spPr>
-        <p:txBody>
-          <a:bodyPr wrap="square" lIns="0" tIns="25400" rIns="25400" bIns="0" rtlCol="0" anchor="ctr"/>
-          <a:lstStyle/>
-          <a:p>
-            <a:pPr algn="ctr" indent="0" marL="0">
-              <a:lnSpc>
-                <a:spcPct val="120000"/>
-              </a:lnSpc>
-              <a:buNone/>
-            </a:pPr>
-            <a:r>
-              <a:rPr lang="en-US" sz="1800" dirty="0">
-                <a:solidFill>
-                  <a:srgbClr val="111111"/>
-                </a:solidFill>
-                <a:latin typeface="Pretendard" pitchFamily="34" charset="0"/>
-                <a:ea typeface="Pretendard" pitchFamily="34" charset="-122"/>
-                <a:cs typeface="Pretendard" pitchFamily="34" charset="-120"/>
-              </a:rPr>
-              <a:t>10  Object Shape Grammar</a:t>
-            </a:r>
-            <a:endParaRPr lang="en-US" sz="1800" dirty="0"/>
-          </a:p>
-        </p:txBody>
-      </p:sp>
-      <p:sp>
-        <p:nvSpPr>
-          <p:cNvPr id="37" name="mdpr:1-2-0772f8:toc-item-11:toc-item-11"/>
-          <p:cNvSpPr txBox="1"/>
-          <p:nvPr/>
-        </p:nvSpPr>
-        <p:spPr>
-          <a:xfrm>
-            <a:off x="6492240" y="3621024"/>
-            <a:ext cx="4645152" cy="384048"/>
-          </a:xfrm>
-          <a:prstGeom prst="rect">
-            <a:avLst/>
-          </a:prstGeom>
-          <a:noFill/>
-          <a:ln/>
-        </p:spPr>
-        <p:txBody>
-          <a:bodyPr wrap="square" lIns="0" tIns="25400" rIns="25400" bIns="0" rtlCol="0" anchor="ctr"/>
-          <a:lstStyle/>
-          <a:p>
-            <a:pPr algn="ctr" indent="0" marL="0">
-              <a:lnSpc>
-                <a:spcPct val="120000"/>
-              </a:lnSpc>
-              <a:buNone/>
-            </a:pPr>
-            <a:r>
-              <a:rPr lang="en-US" sz="1800" dirty="0">
-                <a:solidFill>
-                  <a:srgbClr val="111111"/>
-                </a:solidFill>
-                <a:latin typeface="Pretendard" pitchFamily="34" charset="0"/>
-                <a:ea typeface="Pretendard" pitchFamily="34" charset="-122"/>
-                <a:cs typeface="Pretendard" pitchFamily="34" charset="-120"/>
-              </a:rPr>
-              <a:t>11  Icon and Text Aside</a:t>
-            </a:r>
-            <a:endParaRPr lang="en-US" sz="1800" dirty="0"/>
-          </a:p>
-        </p:txBody>
-      </p:sp>
-      <p:sp>
-        <p:nvSpPr>
-          <p:cNvPr id="38" name="mdpr:1-2-0772f8:toc-item-12:toc-item-12"/>
-          <p:cNvSpPr txBox="1"/>
-          <p:nvPr/>
-        </p:nvSpPr>
-        <p:spPr>
-          <a:xfrm>
-            <a:off x="6492240" y="4334256"/>
-            <a:ext cx="4645152" cy="384048"/>
-          </a:xfrm>
-          <a:prstGeom prst="rect">
-            <a:avLst/>
-          </a:prstGeom>
-          <a:noFill/>
-          <a:ln/>
-        </p:spPr>
-        <p:txBody>
-          <a:bodyPr wrap="square" lIns="0" tIns="25400" rIns="25400" bIns="0" rtlCol="0" anchor="ctr"/>
-          <a:lstStyle/>
-          <a:p>
-            <a:pPr algn="ctr" indent="0" marL="0">
-              <a:lnSpc>
-                <a:spcPct val="120000"/>
-              </a:lnSpc>
-              <a:buNone/>
-            </a:pPr>
-            <a:r>
-              <a:rPr lang="en-US" sz="1800" dirty="0">
-                <a:solidFill>
-                  <a:srgbClr val="111111"/>
-                </a:solidFill>
-                <a:latin typeface="Pretendard" pitchFamily="34" charset="0"/>
-                <a:ea typeface="Pretendard" pitchFamily="34" charset="-122"/>
-                <a:cs typeface="Pretendard" pitchFamily="34" charset="-120"/>
-              </a:rPr>
-              <a:t>12  Overflow Guard</a:t>
-            </a:r>
-            <a:endParaRPr lang="en-US" sz="1800" dirty="0"/>
-          </a:p>
-        </p:txBody>
-      </p:sp>
-      <p:sp>
-        <p:nvSpPr>
-          <p:cNvPr id="39" name="mdpr:1-2-0772f8:toc-item-13:toc-item-13"/>
-          <p:cNvSpPr txBox="1"/>
-          <p:nvPr/>
-        </p:nvSpPr>
-        <p:spPr>
-          <a:xfrm>
-            <a:off x="6492240" y="5047488"/>
-            <a:ext cx="4645152" cy="384048"/>
-          </a:xfrm>
-          <a:prstGeom prst="rect">
-            <a:avLst/>
-          </a:prstGeom>
-          <a:noFill/>
-          <a:ln/>
-        </p:spPr>
-        <p:txBody>
-          <a:bodyPr wrap="square" lIns="0" tIns="25400" rIns="25400" bIns="0" rtlCol="0" anchor="ctr"/>
-          <a:lstStyle/>
-          <a:p>
-            <a:pPr algn="ctr" indent="0" marL="0">
-              <a:lnSpc>
-                <a:spcPct val="120000"/>
-              </a:lnSpc>
-              <a:buNone/>
-            </a:pPr>
-            <a:r>
-              <a:rPr lang="en-US" sz="1800" dirty="0">
-                <a:solidFill>
-                  <a:srgbClr val="111111"/>
-                </a:solidFill>
-                <a:latin typeface="Pretendard" pitchFamily="34" charset="0"/>
-                <a:ea typeface="Pretendard" pitchFamily="34" charset="-122"/>
-                <a:cs typeface="Pretendard" pitchFamily="34" charset="-120"/>
-              </a:rPr>
-              <a:t>13  Image Safe Frame</a:t>
-            </a:r>
-            <a:endParaRPr lang="en-US" sz="1800" dirty="0"/>
-          </a:p>
-        </p:txBody>
-      </p:sp>
-      <p:sp>
-        <p:nvSpPr>
-          <p:cNvPr id="40" name="mdpr:1-2-0772f8:toc-item-14:toc-item-14"/>
-          <p:cNvSpPr txBox="1"/>
-          <p:nvPr/>
-        </p:nvSpPr>
-        <p:spPr>
-          <a:xfrm>
-            <a:off x="6492240" y="5760720"/>
-            <a:ext cx="4645152" cy="384048"/>
-          </a:xfrm>
-          <a:prstGeom prst="rect">
-            <a:avLst/>
-          </a:prstGeom>
-          <a:noFill/>
-          <a:ln/>
-        </p:spPr>
-        <p:txBody>
-          <a:bodyPr wrap="square" lIns="0" tIns="25400" rIns="25400" bIns="0" rtlCol="0" anchor="ctr"/>
-          <a:lstStyle/>
-          <a:p>
-            <a:pPr algn="ctr" indent="0" marL="0">
-              <a:lnSpc>
-                <a:spcPct val="120000"/>
-              </a:lnSpc>
-              <a:buNone/>
-            </a:pPr>
-            <a:r>
-              <a:rPr lang="en-US" sz="1800" dirty="0">
-                <a:solidFill>
-                  <a:srgbClr val="111111"/>
-                </a:solidFill>
-                <a:latin typeface="Pretendard" pitchFamily="34" charset="0"/>
-                <a:ea typeface="Pretendard" pitchFamily="34" charset="-122"/>
-                <a:cs typeface="Pretendard" pitchFamily="34" charset="-120"/>
-              </a:rPr>
-              <a:t>14  Mixed Object Packing</a:t>
             </a:r>
             <a:endParaRPr lang="en-US" sz="1800" dirty="0"/>
           </a:p>
@@ -14465,8 +13804,8 @@
         </p:nvSpPr>
         <p:spPr>
           <a:xfrm>
-            <a:off x="822960" y="1554480"/>
-            <a:ext cx="4937760" cy="73152"/>
+            <a:off x="914400" y="1463040"/>
+            <a:ext cx="10241280" cy="73152"/>
           </a:xfrm>
           <a:prstGeom prst="rect">
             <a:avLst/>
@@ -14486,34 +13825,7 @@
       </p:sp>
       <p:sp>
         <p:nvSpPr>
-          <p:cNvPr id="10" name="Shape 8"/>
-          <p:cNvSpPr/>
-          <p:nvPr/>
-        </p:nvSpPr>
-        <p:spPr>
-          <a:xfrm>
-            <a:off x="6400800" y="1554480"/>
-            <a:ext cx="4937760" cy="73152"/>
-          </a:xfrm>
-          <a:prstGeom prst="rect">
-            <a:avLst/>
-          </a:prstGeom>
-          <a:solidFill>
-            <a:srgbClr val="F43F5E"/>
-          </a:solidFill>
-          <a:ln w="12700">
-            <a:solidFill>
-              <a:srgbClr val="F43F5E">
-                <a:alpha val="0"/>
-              </a:srgbClr>
-            </a:solidFill>
-            <a:prstDash val="solid"/>
-          </a:ln>
-        </p:spPr>
-      </p:sp>
-      <p:sp>
-        <p:nvSpPr>
-          <p:cNvPr id="11" name="mdpr:2-2-4f71ba:title:__title:2-2-4f71ba"/>
+          <p:cNvPr id="10" name="mdpr:2-2-4f71ba:title:__title:2-2-4f71ba"/>
           <p:cNvSpPr txBox="1"/>
           <p:nvPr/>
         </p:nvSpPr>
@@ -14547,7 +13859,24 @@
                 <a:ea typeface="Pretendard" pitchFamily="34" charset="-122"/>
                 <a:cs typeface="Pretendard" pitchFamily="34" charset="-120"/>
               </a:rPr>
-              <a:t>Object Shape Grammar (Cont. 2/2)</a:t>
+              <a:t>Object Shape Grammar</a:t>
+            </a:r>
+            <a:pPr algn="ctr" indent="0" marL="0">
+              <a:lnSpc>
+                <a:spcPct val="120000"/>
+              </a:lnSpc>
+              <a:buNone/>
+            </a:pPr>
+            <a:r>
+              <a:rPr lang="en-US" sz="2000" dirty="0">
+                <a:solidFill>
+                  <a:srgbClr val="8F8F8F"/>
+                </a:solidFill>
+                <a:latin typeface="Pretendard" pitchFamily="34" charset="0"/>
+                <a:ea typeface="Pretendard" pitchFamily="34" charset="-122"/>
+                <a:cs typeface="Pretendard" pitchFamily="34" charset="-120"/>
+              </a:rPr>
+              <a:t> (Cont. 2/2)</a:t>
             </a:r>
             <a:endParaRPr lang="en-US" sz="3400" dirty="0"/>
           </a:p>
@@ -14555,14 +13884,14 @@
       </p:sp>
       <p:sp>
         <p:nvSpPr>
-          <p:cNvPr id="12" name="mdpr:2-2-4f71ba:left:block-27-chunk-2"/>
+          <p:cNvPr id="11" name="mdpr:2-2-4f71ba:body:block-27-chunk-2"/>
           <p:cNvSpPr txBox="1"/>
           <p:nvPr/>
         </p:nvSpPr>
         <p:spPr>
           <a:xfrm>
-            <a:off x="896112" y="1664208"/>
-            <a:ext cx="4791456" cy="4169664"/>
+            <a:off x="987552" y="1572768"/>
+            <a:ext cx="10094976" cy="4261104"/>
           </a:xfrm>
           <a:prstGeom prst="rect">
             <a:avLst/>
@@ -14610,28 +13939,6 @@
             </a:r>
             <a:endParaRPr lang="en-US" sz="2200" dirty="0"/>
           </a:p>
-        </p:txBody>
-      </p:sp>
-      <p:sp>
-        <p:nvSpPr>
-          <p:cNvPr id="13" name="mdpr:2-2-4f71ba:right:block-27-chunk-2"/>
-          <p:cNvSpPr txBox="1"/>
-          <p:nvPr/>
-        </p:nvSpPr>
-        <p:spPr>
-          <a:xfrm>
-            <a:off x="6473952" y="1664208"/>
-            <a:ext cx="4791456" cy="4169664"/>
-          </a:xfrm>
-          <a:prstGeom prst="rect">
-            <a:avLst/>
-          </a:prstGeom>
-          <a:noFill/>
-          <a:ln/>
-        </p:spPr>
-        <p:txBody>
-          <a:bodyPr wrap="square" lIns="0" tIns="25400" rIns="25400" bIns="0" rtlCol="0" anchor="t"/>
-          <a:lstStyle/>
           <a:p>
             <a:pPr algn="l" indent="0" marL="0">
               <a:lnSpc>
@@ -14650,6 +13957,9 @@
               </a:rPr>
               <a:t>- Rounded panel</a:t>
             </a:r>
+            <a:endParaRPr lang="en-US" sz="2200" dirty="0"/>
+          </a:p>
+          <a:p>
             <a:pPr algn="l" indent="0" marL="0">
               <a:lnSpc>
                 <a:spcPct val="120000"/>
@@ -18389,222 +17699,49 @@
           </a:ln>
         </p:spPr>
       </p:sp>
-      <p:pic>
-        <p:nvPicPr>
-          <p:cNvPr id="9" name="Image 0" descr="preencoded.png">    </p:cNvPr>
-          <p:cNvPicPr>
-            <a:picLocks noChangeAspect="1"/>
-          </p:cNvPicPr>
-          <p:nvPr/>
-        </p:nvPicPr>
-        <p:blipFill>
-          <a:blip r:embed="rId1">
-            <a:extLst>
-              <a:ext uri="{96DAC541-7B7A-43D3-8B79-37D633B846F1}">
-                <asvg:svgBlip xmlns:asvg="http://schemas.microsoft.com/office/drawing/2016/SVG/main" r:embed="rId2"/>
-              </a:ext>
-            </a:extLst>
-          </a:blip>
-          <a:stretch>
-            <a:fillRect/>
-          </a:stretch>
-        </p:blipFill>
-        <p:spPr>
-          <a:xfrm>
-            <a:off x="914400" y="1865376"/>
-            <a:ext cx="10241280" cy="1024128"/>
-          </a:xfrm>
-          <a:prstGeom prst="rect">
-            <a:avLst/>
-          </a:prstGeom>
-        </p:spPr>
-      </p:pic>
-      <p:sp>
-        <p:nvSpPr>
-          <p:cNvPr id="10" name="Shape 7"/>
-          <p:cNvSpPr/>
-          <p:nvPr/>
-        </p:nvSpPr>
-        <p:spPr>
-          <a:xfrm>
-            <a:off x="914400" y="1865376"/>
-            <a:ext cx="10241280" cy="1024128"/>
-          </a:xfrm>
-          <a:prstGeom prst="rect">
-            <a:avLst/>
-          </a:prstGeom>
-          <a:solidFill>
-            <a:srgbClr val="FFFFFF">
-              <a:alpha val="0"/>
-            </a:srgbClr>
-          </a:solidFill>
-          <a:ln w="12700">
-            <a:solidFill>
-              <a:srgbClr val="E5E7EB">
+      <p:sp>
+        <p:nvSpPr>
+          <p:cNvPr id="9" name="Shape 7"/>
+          <p:cNvSpPr/>
+          <p:nvPr/>
+        </p:nvSpPr>
+        <p:spPr>
+          <a:xfrm>
+            <a:off x="822960" y="1938528"/>
+            <a:ext cx="73152" cy="2514600"/>
+          </a:xfrm>
+          <a:prstGeom prst="rect">
+            <a:avLst/>
+          </a:prstGeom>
+          <a:solidFill>
+            <a:srgbClr val="F43F5E"/>
+          </a:solidFill>
+          <a:ln w="12700">
+            <a:solidFill>
+              <a:srgbClr val="F43F5E">
                 <a:alpha val="0"/>
               </a:srgbClr>
             </a:solidFill>
             <a:prstDash val="solid"/>
           </a:ln>
-          <a:effectLst>
-            <a:outerShdw sx="100000" sy="100000" kx="0" ky="0" algn="bl" rotWithShape="0" blurRad="12700" dist="50800" dir="2700000">
-              <a:srgbClr val="000000">
-                <a:alpha val="8000"/>
-              </a:srgbClr>
-            </a:outerShdw>
-          </a:effectLst>
-        </p:spPr>
-      </p:sp>
-      <p:pic>
-        <p:nvPicPr>
-          <p:cNvPr id="11" name="Image 1" descr="preencoded.png">    </p:cNvPr>
-          <p:cNvPicPr>
-            <a:picLocks noChangeAspect="1"/>
-          </p:cNvPicPr>
-          <p:nvPr/>
-        </p:nvPicPr>
-        <p:blipFill>
-          <a:blip r:embed="rId3">
-            <a:extLst>
-              <a:ext uri="{96DAC541-7B7A-43D3-8B79-37D633B846F1}">
-                <asvg:svgBlip xmlns:asvg="http://schemas.microsoft.com/office/drawing/2016/SVG/main" r:embed="rId4"/>
-              </a:ext>
-            </a:extLst>
-          </a:blip>
-          <a:stretch>
-            <a:fillRect/>
-          </a:stretch>
-        </p:blipFill>
-        <p:spPr>
-          <a:xfrm>
-            <a:off x="914400" y="3191256"/>
-            <a:ext cx="10241280" cy="1024128"/>
-          </a:xfrm>
-          <a:prstGeom prst="rect">
-            <a:avLst/>
-          </a:prstGeom>
-        </p:spPr>
-      </p:pic>
-      <p:sp>
-        <p:nvSpPr>
-          <p:cNvPr id="12" name="Shape 8"/>
-          <p:cNvSpPr/>
-          <p:nvPr/>
-        </p:nvSpPr>
-        <p:spPr>
-          <a:xfrm>
-            <a:off x="914400" y="3191256"/>
-            <a:ext cx="10241280" cy="1024128"/>
-          </a:xfrm>
-          <a:prstGeom prst="rect">
-            <a:avLst/>
-          </a:prstGeom>
-          <a:solidFill>
-            <a:srgbClr val="FFFFFF">
-              <a:alpha val="0"/>
-            </a:srgbClr>
-          </a:solidFill>
-          <a:ln w="12700">
-            <a:solidFill>
-              <a:srgbClr val="E5E7EB">
-                <a:alpha val="0"/>
-              </a:srgbClr>
-            </a:solidFill>
-            <a:prstDash val="solid"/>
-          </a:ln>
-          <a:effectLst>
-            <a:outerShdw sx="100000" sy="100000" kx="0" ky="0" algn="bl" rotWithShape="0" blurRad="12700" dist="50800" dir="2700000">
-              <a:srgbClr val="000000">
-                <a:alpha val="8000"/>
-              </a:srgbClr>
-            </a:outerShdw>
-          </a:effectLst>
-        </p:spPr>
-      </p:sp>
-      <p:pic>
-        <p:nvPicPr>
-          <p:cNvPr id="13" name="Image 2" descr="preencoded.png">    </p:cNvPr>
-          <p:cNvPicPr>
-            <a:picLocks noChangeAspect="1"/>
-          </p:cNvPicPr>
-          <p:nvPr/>
-        </p:nvPicPr>
-        <p:blipFill>
-          <a:blip r:embed="rId5">
-            <a:extLst>
-              <a:ext uri="{96DAC541-7B7A-43D3-8B79-37D633B846F1}">
-                <asvg:svgBlip xmlns:asvg="http://schemas.microsoft.com/office/drawing/2016/SVG/main" r:embed="rId6"/>
-              </a:ext>
-            </a:extLst>
-          </a:blip>
-          <a:stretch>
-            <a:fillRect/>
-          </a:stretch>
-        </p:blipFill>
-        <p:spPr>
-          <a:xfrm>
-            <a:off x="914400" y="4507992"/>
-            <a:ext cx="10241280" cy="1024128"/>
-          </a:xfrm>
-          <a:prstGeom prst="rect">
-            <a:avLst/>
-          </a:prstGeom>
-        </p:spPr>
-      </p:pic>
-      <p:sp>
-        <p:nvSpPr>
-          <p:cNvPr id="14" name="Shape 9"/>
-          <p:cNvSpPr/>
-          <p:nvPr/>
-        </p:nvSpPr>
-        <p:spPr>
-          <a:xfrm>
-            <a:off x="914400" y="4507992"/>
-            <a:ext cx="10241280" cy="1024128"/>
-          </a:xfrm>
-          <a:prstGeom prst="rect">
-            <a:avLst/>
-          </a:prstGeom>
-          <a:solidFill>
-            <a:srgbClr val="FFFFFF">
-              <a:alpha val="0"/>
-            </a:srgbClr>
-          </a:solidFill>
-          <a:ln w="12700">
-            <a:solidFill>
-              <a:srgbClr val="E5E7EB">
-                <a:alpha val="0"/>
-              </a:srgbClr>
-            </a:solidFill>
-            <a:prstDash val="solid"/>
-          </a:ln>
-          <a:effectLst>
-            <a:outerShdw sx="100000" sy="100000" kx="0" ky="0" algn="bl" rotWithShape="0" blurRad="12700" dist="50800" dir="2700000">
-              <a:srgbClr val="000000">
-                <a:alpha val="8000"/>
-              </a:srgbClr>
-            </a:outerShdw>
-          </a:effectLst>
-        </p:spPr>
-      </p:sp>
-      <p:sp>
-        <p:nvSpPr>
-          <p:cNvPr id="15" name="Shape 10"/>
-          <p:cNvSpPr/>
-          <p:nvPr/>
-        </p:nvSpPr>
-        <p:spPr>
-          <a:xfrm>
-            <a:off x="786384" y="1956816"/>
-            <a:ext cx="32004" cy="3483864"/>
-          </a:xfrm>
-          <a:prstGeom prst="rect">
-            <a:avLst/>
-          </a:prstGeom>
-          <a:solidFill>
-            <a:srgbClr val="38BDF8">
-              <a:alpha val="80000"/>
-            </a:srgbClr>
+        </p:spPr>
+      </p:sp>
+      <p:sp>
+        <p:nvSpPr>
+          <p:cNvPr id="10" name="Shape 8"/>
+          <p:cNvSpPr/>
+          <p:nvPr/>
+        </p:nvSpPr>
+        <p:spPr>
+          <a:xfrm>
+            <a:off x="4343400" y="1938528"/>
+            <a:ext cx="73152" cy="2514600"/>
+          </a:xfrm>
+          <a:prstGeom prst="rect">
+            <a:avLst/>
+          </a:prstGeom>
+          <a:solidFill>
+            <a:srgbClr val="38BDF8"/>
           </a:solidFill>
           <a:ln w="12700">
             <a:solidFill>
@@ -18618,14 +17755,14 @@
       </p:sp>
       <p:sp>
         <p:nvSpPr>
-          <p:cNvPr id="16" name="Shape 11"/>
-          <p:cNvSpPr/>
-          <p:nvPr/>
-        </p:nvSpPr>
-        <p:spPr>
-          <a:xfrm>
-            <a:off x="914400" y="1865376"/>
-            <a:ext cx="73152" cy="1024128"/>
+          <p:cNvPr id="11" name="Shape 9"/>
+          <p:cNvSpPr/>
+          <p:nvPr/>
+        </p:nvSpPr>
+        <p:spPr>
+          <a:xfrm>
+            <a:off x="7863840" y="1938528"/>
+            <a:ext cx="73152" cy="2514600"/>
           </a:xfrm>
           <a:prstGeom prst="rect">
             <a:avLst/>
@@ -18645,61 +17782,7 @@
       </p:sp>
       <p:sp>
         <p:nvSpPr>
-          <p:cNvPr id="17" name="Shape 12"/>
-          <p:cNvSpPr/>
-          <p:nvPr/>
-        </p:nvSpPr>
-        <p:spPr>
-          <a:xfrm>
-            <a:off x="914400" y="3191256"/>
-            <a:ext cx="73152" cy="1024128"/>
-          </a:xfrm>
-          <a:prstGeom prst="rect">
-            <a:avLst/>
-          </a:prstGeom>
-          <a:solidFill>
-            <a:srgbClr val="38BDF8"/>
-          </a:solidFill>
-          <a:ln w="12700">
-            <a:solidFill>
-              <a:srgbClr val="38BDF8">
-                <a:alpha val="0"/>
-              </a:srgbClr>
-            </a:solidFill>
-            <a:prstDash val="solid"/>
-          </a:ln>
-        </p:spPr>
-      </p:sp>
-      <p:sp>
-        <p:nvSpPr>
-          <p:cNvPr id="18" name="Shape 13"/>
-          <p:cNvSpPr/>
-          <p:nvPr/>
-        </p:nvSpPr>
-        <p:spPr>
-          <a:xfrm>
-            <a:off x="914400" y="4507992"/>
-            <a:ext cx="73152" cy="1024128"/>
-          </a:xfrm>
-          <a:prstGeom prst="rect">
-            <a:avLst/>
-          </a:prstGeom>
-          <a:solidFill>
-            <a:srgbClr val="F43F5E"/>
-          </a:solidFill>
-          <a:ln w="12700">
-            <a:solidFill>
-              <a:srgbClr val="F43F5E">
-                <a:alpha val="0"/>
-              </a:srgbClr>
-            </a:solidFill>
-            <a:prstDash val="solid"/>
-          </a:ln>
-        </p:spPr>
-      </p:sp>
-      <p:sp>
-        <p:nvSpPr>
-          <p:cNvPr id="19" name="mdpr:actions-output-review-326e07:title:__title:actions-output-review-326e07"/>
+          <p:cNvPr id="12" name="mdpr:actions-output-review-326e07:title:__title:actions-output-review-326e07"/>
           <p:cNvSpPr txBox="1"/>
           <p:nvPr/>
         </p:nvSpPr>
@@ -18741,14 +17824,14 @@
       </p:sp>
       <p:sp>
         <p:nvSpPr>
-          <p:cNvPr id="20" name="mdpr:actions-output-review-326e07:item-1:block-41"/>
+          <p:cNvPr id="13" name="mdpr:actions-output-review-326e07:item-1:block-41"/>
           <p:cNvSpPr txBox="1"/>
           <p:nvPr/>
         </p:nvSpPr>
         <p:spPr>
           <a:xfrm>
-            <a:off x="1133856" y="1957548"/>
-            <a:ext cx="9820656" cy="839785"/>
+            <a:off x="1042416" y="2103120"/>
+            <a:ext cx="2825496" cy="2185416"/>
           </a:xfrm>
           <a:prstGeom prst="rect">
             <a:avLst/>
@@ -18800,14 +17883,14 @@
       </p:sp>
       <p:sp>
         <p:nvSpPr>
-          <p:cNvPr id="21" name="mdpr:actions-output-review-326e07:item-2:block-41"/>
+          <p:cNvPr id="14" name="mdpr:actions-output-review-326e07:item-2:block-41"/>
           <p:cNvSpPr txBox="1"/>
           <p:nvPr/>
         </p:nvSpPr>
         <p:spPr>
           <a:xfrm>
-            <a:off x="1133856" y="3283428"/>
-            <a:ext cx="9820656" cy="839785"/>
+            <a:off x="4562856" y="2103120"/>
+            <a:ext cx="2825496" cy="2185416"/>
           </a:xfrm>
           <a:prstGeom prst="rect">
             <a:avLst/>
@@ -18859,14 +17942,14 @@
       </p:sp>
       <p:sp>
         <p:nvSpPr>
-          <p:cNvPr id="22" name="mdpr:actions-output-review-326e07:item-3:block-41"/>
+          <p:cNvPr id="15" name="mdpr:actions-output-review-326e07:item-3:block-41"/>
           <p:cNvSpPr txBox="1"/>
           <p:nvPr/>
         </p:nvSpPr>
         <p:spPr>
           <a:xfrm>
-            <a:off x="1133856" y="4600164"/>
-            <a:ext cx="9820656" cy="839785"/>
+            <a:off x="8083296" y="2103120"/>
+            <a:ext cx="2825496" cy="2185416"/>
           </a:xfrm>
           <a:prstGeom prst="rect">
             <a:avLst/>
@@ -19176,8 +18259,8 @@
         </p:nvSpPr>
         <p:spPr>
           <a:xfrm>
-            <a:off x="822960" y="3099816"/>
-            <a:ext cx="10515600" cy="45720"/>
+            <a:off x="822960" y="1737360"/>
+            <a:ext cx="73152" cy="841248"/>
           </a:xfrm>
           <a:prstGeom prst="rect">
             <a:avLst/>
@@ -19203,8 +18286,8 @@
         </p:nvSpPr>
         <p:spPr>
           <a:xfrm>
-            <a:off x="822960" y="4288536"/>
-            <a:ext cx="2011680" cy="45720"/>
+            <a:off x="822960" y="2779776"/>
+            <a:ext cx="73152" cy="841248"/>
           </a:xfrm>
           <a:prstGeom prst="rect">
             <a:avLst/>
@@ -19230,7 +18313,7 @@
         </p:nvSpPr>
         <p:spPr>
           <a:xfrm>
-            <a:off x="822960" y="3300984"/>
+            <a:off x="822960" y="3822192"/>
             <a:ext cx="73152" cy="841248"/>
           </a:xfrm>
           <a:prstGeom prst="rect">
@@ -19251,7 +18334,115 @@
       </p:sp>
       <p:sp>
         <p:nvSpPr>
-          <p:cNvPr id="12" name="mdpr:2-2-7bfb60:title:__title:2-2-7bfb60"/>
+          <p:cNvPr id="12" name="Shape 10"/>
+          <p:cNvSpPr/>
+          <p:nvPr/>
+        </p:nvSpPr>
+        <p:spPr>
+          <a:xfrm>
+            <a:off x="822960" y="4864608"/>
+            <a:ext cx="73152" cy="841248"/>
+          </a:xfrm>
+          <a:prstGeom prst="rect">
+            <a:avLst/>
+          </a:prstGeom>
+          <a:solidFill>
+            <a:srgbClr val="38BDF8"/>
+          </a:solidFill>
+          <a:ln w="12700">
+            <a:solidFill>
+              <a:srgbClr val="38BDF8">
+                <a:alpha val="0"/>
+              </a:srgbClr>
+            </a:solidFill>
+            <a:prstDash val="solid"/>
+          </a:ln>
+        </p:spPr>
+      </p:sp>
+      <p:sp>
+        <p:nvSpPr>
+          <p:cNvPr id="13" name="Shape 11"/>
+          <p:cNvSpPr/>
+          <p:nvPr/>
+        </p:nvSpPr>
+        <p:spPr>
+          <a:xfrm>
+            <a:off x="6272784" y="1737360"/>
+            <a:ext cx="73152" cy="841248"/>
+          </a:xfrm>
+          <a:prstGeom prst="rect">
+            <a:avLst/>
+          </a:prstGeom>
+          <a:solidFill>
+            <a:srgbClr val="F43F5E"/>
+          </a:solidFill>
+          <a:ln w="12700">
+            <a:solidFill>
+              <a:srgbClr val="F43F5E">
+                <a:alpha val="0"/>
+              </a:srgbClr>
+            </a:solidFill>
+            <a:prstDash val="solid"/>
+          </a:ln>
+        </p:spPr>
+      </p:sp>
+      <p:sp>
+        <p:nvSpPr>
+          <p:cNvPr id="14" name="Shape 12"/>
+          <p:cNvSpPr/>
+          <p:nvPr/>
+        </p:nvSpPr>
+        <p:spPr>
+          <a:xfrm>
+            <a:off x="6272784" y="2779776"/>
+            <a:ext cx="73152" cy="841248"/>
+          </a:xfrm>
+          <a:prstGeom prst="rect">
+            <a:avLst/>
+          </a:prstGeom>
+          <a:solidFill>
+            <a:srgbClr val="38BDF8"/>
+          </a:solidFill>
+          <a:ln w="12700">
+            <a:solidFill>
+              <a:srgbClr val="38BDF8">
+                <a:alpha val="0"/>
+              </a:srgbClr>
+            </a:solidFill>
+            <a:prstDash val="solid"/>
+          </a:ln>
+        </p:spPr>
+      </p:sp>
+      <p:sp>
+        <p:nvSpPr>
+          <p:cNvPr id="15" name="Shape 13"/>
+          <p:cNvSpPr/>
+          <p:nvPr/>
+        </p:nvSpPr>
+        <p:spPr>
+          <a:xfrm>
+            <a:off x="6272784" y="3822192"/>
+            <a:ext cx="73152" cy="841248"/>
+          </a:xfrm>
+          <a:prstGeom prst="rect">
+            <a:avLst/>
+          </a:prstGeom>
+          <a:solidFill>
+            <a:srgbClr val="F43F5E"/>
+          </a:solidFill>
+          <a:ln w="12700">
+            <a:solidFill>
+              <a:srgbClr val="F43F5E">
+                <a:alpha val="0"/>
+              </a:srgbClr>
+            </a:solidFill>
+            <a:prstDash val="solid"/>
+          </a:ln>
+        </p:spPr>
+      </p:sp>
+      <p:sp>
+        <p:nvSpPr>
+          <p:cNvPr id="16" name="mdpr:2-2-7bfb60:title:__title:2-2-7bfb60"/>
           <p:cNvSpPr txBox="1"/>
           <p:nvPr/>
         </p:nvSpPr>
@@ -19285,7 +18476,24 @@
                 <a:ea typeface="Pretendard" pitchFamily="34" charset="-122"/>
                 <a:cs typeface="Pretendard" pitchFamily="34" charset="-120"/>
               </a:rPr>
-              <a:t>Agenda (Cont. 2/2)</a:t>
+              <a:t>Agenda</a:t>
+            </a:r>
+            <a:pPr algn="ctr" indent="0" marL="0">
+              <a:lnSpc>
+                <a:spcPct val="120000"/>
+              </a:lnSpc>
+              <a:buNone/>
+            </a:pPr>
+            <a:r>
+              <a:rPr lang="en-US" sz="2300" dirty="0">
+                <a:solidFill>
+                  <a:srgbClr val="8F8F8F"/>
+                </a:solidFill>
+                <a:latin typeface="Pretendard" pitchFamily="34" charset="0"/>
+                <a:ea typeface="Pretendard" pitchFamily="34" charset="-122"/>
+                <a:cs typeface="Pretendard" pitchFamily="34" charset="-120"/>
+              </a:rPr>
+              <a:t> (Cont. 2/2)</a:t>
             </a:r>
             <a:endParaRPr lang="en-US" sz="3800" dirty="0"/>
           </a:p>
@@ -19293,14 +18501,14 @@
       </p:sp>
       <p:sp>
         <p:nvSpPr>
-          <p:cNvPr id="13" name="mdpr:2-2-7bfb60:toc-item-1:toc-item-15"/>
+          <p:cNvPr id="17" name="mdpr:2-2-7bfb60:toc-item-1:toc-item-9"/>
           <p:cNvSpPr txBox="1"/>
           <p:nvPr/>
         </p:nvSpPr>
         <p:spPr>
           <a:xfrm>
-            <a:off x="1042416" y="3392424"/>
-            <a:ext cx="10094976" cy="658368"/>
+            <a:off x="1042416" y="1828800"/>
+            <a:ext cx="4645152" cy="658368"/>
           </a:xfrm>
           <a:prstGeom prst="rect">
             <a:avLst/>
@@ -19319,7 +18527,7 @@
               <a:buNone/>
             </a:pPr>
             <a:r>
-              <a:rPr lang="en-US" sz="2200" dirty="0">
+              <a:rPr lang="en-US" sz="1800" dirty="0">
                 <a:solidFill>
                   <a:srgbClr val="111111"/>
                 </a:solidFill>
@@ -19327,9 +18535,261 @@
                 <a:ea typeface="Pretendard" pitchFamily="34" charset="-122"/>
                 <a:cs typeface="Pretendard" pitchFamily="34" charset="-120"/>
               </a:rPr>
-              <a:t>01  Actions Output Review</a:t>
+              <a:t>09  Editable Proof Objects</a:t>
             </a:r>
-            <a:endParaRPr lang="en-US" sz="2200" dirty="0"/>
+            <a:endParaRPr lang="en-US" sz="1800" dirty="0"/>
+          </a:p>
+        </p:txBody>
+      </p:sp>
+      <p:sp>
+        <p:nvSpPr>
+          <p:cNvPr id="18" name="mdpr:2-2-7bfb60:toc-item-2:toc-item-10"/>
+          <p:cNvSpPr txBox="1"/>
+          <p:nvPr/>
+        </p:nvSpPr>
+        <p:spPr>
+          <a:xfrm>
+            <a:off x="1042416" y="2871216"/>
+            <a:ext cx="4645152" cy="658368"/>
+          </a:xfrm>
+          <a:prstGeom prst="rect">
+            <a:avLst/>
+          </a:prstGeom>
+          <a:noFill/>
+          <a:ln/>
+        </p:spPr>
+        <p:txBody>
+          <a:bodyPr wrap="square" lIns="0" tIns="25400" rIns="25400" bIns="0" rtlCol="0" anchor="ctr"/>
+          <a:lstStyle/>
+          <a:p>
+            <a:pPr algn="ctr" indent="0" marL="0">
+              <a:lnSpc>
+                <a:spcPct val="120000"/>
+              </a:lnSpc>
+              <a:buNone/>
+            </a:pPr>
+            <a:r>
+              <a:rPr lang="en-US" sz="1800" dirty="0">
+                <a:solidFill>
+                  <a:srgbClr val="111111"/>
+                </a:solidFill>
+                <a:latin typeface="Pretendard" pitchFamily="34" charset="0"/>
+                <a:ea typeface="Pretendard" pitchFamily="34" charset="-122"/>
+                <a:cs typeface="Pretendard" pitchFamily="34" charset="-120"/>
+              </a:rPr>
+              <a:t>10  Object Shape Grammar</a:t>
+            </a:r>
+            <a:endParaRPr lang="en-US" sz="1800" dirty="0"/>
+          </a:p>
+        </p:txBody>
+      </p:sp>
+      <p:sp>
+        <p:nvSpPr>
+          <p:cNvPr id="19" name="mdpr:2-2-7bfb60:toc-item-3:toc-item-11"/>
+          <p:cNvSpPr txBox="1"/>
+          <p:nvPr/>
+        </p:nvSpPr>
+        <p:spPr>
+          <a:xfrm>
+            <a:off x="1042416" y="3913632"/>
+            <a:ext cx="4645152" cy="658368"/>
+          </a:xfrm>
+          <a:prstGeom prst="rect">
+            <a:avLst/>
+          </a:prstGeom>
+          <a:noFill/>
+          <a:ln/>
+        </p:spPr>
+        <p:txBody>
+          <a:bodyPr wrap="square" lIns="0" tIns="25400" rIns="25400" bIns="0" rtlCol="0" anchor="ctr"/>
+          <a:lstStyle/>
+          <a:p>
+            <a:pPr algn="ctr" indent="0" marL="0">
+              <a:lnSpc>
+                <a:spcPct val="120000"/>
+              </a:lnSpc>
+              <a:buNone/>
+            </a:pPr>
+            <a:r>
+              <a:rPr lang="en-US" sz="1800" dirty="0">
+                <a:solidFill>
+                  <a:srgbClr val="111111"/>
+                </a:solidFill>
+                <a:latin typeface="Pretendard" pitchFamily="34" charset="0"/>
+                <a:ea typeface="Pretendard" pitchFamily="34" charset="-122"/>
+                <a:cs typeface="Pretendard" pitchFamily="34" charset="-120"/>
+              </a:rPr>
+              <a:t>11  Icon and Text Aside</a:t>
+            </a:r>
+            <a:endParaRPr lang="en-US" sz="1800" dirty="0"/>
+          </a:p>
+        </p:txBody>
+      </p:sp>
+      <p:sp>
+        <p:nvSpPr>
+          <p:cNvPr id="20" name="mdpr:2-2-7bfb60:toc-item-4:toc-item-12"/>
+          <p:cNvSpPr txBox="1"/>
+          <p:nvPr/>
+        </p:nvSpPr>
+        <p:spPr>
+          <a:xfrm>
+            <a:off x="1042416" y="4956048"/>
+            <a:ext cx="4645152" cy="658368"/>
+          </a:xfrm>
+          <a:prstGeom prst="rect">
+            <a:avLst/>
+          </a:prstGeom>
+          <a:noFill/>
+          <a:ln/>
+        </p:spPr>
+        <p:txBody>
+          <a:bodyPr wrap="square" lIns="0" tIns="25400" rIns="25400" bIns="0" rtlCol="0" anchor="ctr"/>
+          <a:lstStyle/>
+          <a:p>
+            <a:pPr algn="ctr" indent="0" marL="0">
+              <a:lnSpc>
+                <a:spcPct val="120000"/>
+              </a:lnSpc>
+              <a:buNone/>
+            </a:pPr>
+            <a:r>
+              <a:rPr lang="en-US" sz="1800" dirty="0">
+                <a:solidFill>
+                  <a:srgbClr val="111111"/>
+                </a:solidFill>
+                <a:latin typeface="Pretendard" pitchFamily="34" charset="0"/>
+                <a:ea typeface="Pretendard" pitchFamily="34" charset="-122"/>
+                <a:cs typeface="Pretendard" pitchFamily="34" charset="-120"/>
+              </a:rPr>
+              <a:t>12  Overflow Guard</a:t>
+            </a:r>
+            <a:endParaRPr lang="en-US" sz="1800" dirty="0"/>
+          </a:p>
+        </p:txBody>
+      </p:sp>
+      <p:sp>
+        <p:nvSpPr>
+          <p:cNvPr id="21" name="mdpr:2-2-7bfb60:toc-item-5:toc-item-13"/>
+          <p:cNvSpPr txBox="1"/>
+          <p:nvPr/>
+        </p:nvSpPr>
+        <p:spPr>
+          <a:xfrm>
+            <a:off x="6492240" y="1828800"/>
+            <a:ext cx="4645152" cy="658368"/>
+          </a:xfrm>
+          <a:prstGeom prst="rect">
+            <a:avLst/>
+          </a:prstGeom>
+          <a:noFill/>
+          <a:ln/>
+        </p:spPr>
+        <p:txBody>
+          <a:bodyPr wrap="square" lIns="0" tIns="25400" rIns="25400" bIns="0" rtlCol="0" anchor="ctr"/>
+          <a:lstStyle/>
+          <a:p>
+            <a:pPr algn="ctr" indent="0" marL="0">
+              <a:lnSpc>
+                <a:spcPct val="120000"/>
+              </a:lnSpc>
+              <a:buNone/>
+            </a:pPr>
+            <a:r>
+              <a:rPr lang="en-US" sz="1800" dirty="0">
+                <a:solidFill>
+                  <a:srgbClr val="111111"/>
+                </a:solidFill>
+                <a:latin typeface="Pretendard" pitchFamily="34" charset="0"/>
+                <a:ea typeface="Pretendard" pitchFamily="34" charset="-122"/>
+                <a:cs typeface="Pretendard" pitchFamily="34" charset="-120"/>
+              </a:rPr>
+              <a:t>13  Image Safe Frame</a:t>
+            </a:r>
+            <a:endParaRPr lang="en-US" sz="1800" dirty="0"/>
+          </a:p>
+        </p:txBody>
+      </p:sp>
+      <p:sp>
+        <p:nvSpPr>
+          <p:cNvPr id="22" name="mdpr:2-2-7bfb60:toc-item-6:toc-item-14"/>
+          <p:cNvSpPr txBox="1"/>
+          <p:nvPr/>
+        </p:nvSpPr>
+        <p:spPr>
+          <a:xfrm>
+            <a:off x="6492240" y="2871216"/>
+            <a:ext cx="4645152" cy="658368"/>
+          </a:xfrm>
+          <a:prstGeom prst="rect">
+            <a:avLst/>
+          </a:prstGeom>
+          <a:noFill/>
+          <a:ln/>
+        </p:spPr>
+        <p:txBody>
+          <a:bodyPr wrap="square" lIns="0" tIns="25400" rIns="25400" bIns="0" rtlCol="0" anchor="ctr"/>
+          <a:lstStyle/>
+          <a:p>
+            <a:pPr algn="ctr" indent="0" marL="0">
+              <a:lnSpc>
+                <a:spcPct val="120000"/>
+              </a:lnSpc>
+              <a:buNone/>
+            </a:pPr>
+            <a:r>
+              <a:rPr lang="en-US" sz="1800" dirty="0">
+                <a:solidFill>
+                  <a:srgbClr val="111111"/>
+                </a:solidFill>
+                <a:latin typeface="Pretendard" pitchFamily="34" charset="0"/>
+                <a:ea typeface="Pretendard" pitchFamily="34" charset="-122"/>
+                <a:cs typeface="Pretendard" pitchFamily="34" charset="-120"/>
+              </a:rPr>
+              <a:t>14  Mixed Object Packing</a:t>
+            </a:r>
+            <a:endParaRPr lang="en-US" sz="1800" dirty="0"/>
+          </a:p>
+        </p:txBody>
+      </p:sp>
+      <p:sp>
+        <p:nvSpPr>
+          <p:cNvPr id="23" name="mdpr:2-2-7bfb60:toc-item-7:toc-item-15"/>
+          <p:cNvSpPr txBox="1"/>
+          <p:nvPr/>
+        </p:nvSpPr>
+        <p:spPr>
+          <a:xfrm>
+            <a:off x="6492240" y="3913632"/>
+            <a:ext cx="4645152" cy="658368"/>
+          </a:xfrm>
+          <a:prstGeom prst="rect">
+            <a:avLst/>
+          </a:prstGeom>
+          <a:noFill/>
+          <a:ln/>
+        </p:spPr>
+        <p:txBody>
+          <a:bodyPr wrap="square" lIns="0" tIns="25400" rIns="25400" bIns="0" rtlCol="0" anchor="ctr"/>
+          <a:lstStyle/>
+          <a:p>
+            <a:pPr algn="ctr" indent="0" marL="0">
+              <a:lnSpc>
+                <a:spcPct val="120000"/>
+              </a:lnSpc>
+              <a:buNone/>
+            </a:pPr>
+            <a:r>
+              <a:rPr lang="en-US" sz="1800" dirty="0">
+                <a:solidFill>
+                  <a:srgbClr val="111111"/>
+                </a:solidFill>
+                <a:latin typeface="Pretendard" pitchFamily="34" charset="0"/>
+                <a:ea typeface="Pretendard" pitchFamily="34" charset="-122"/>
+                <a:cs typeface="Pretendard" pitchFamily="34" charset="-120"/>
+              </a:rPr>
+              <a:t>15  Actions Output Review</a:t>
+            </a:r>
+            <a:endParaRPr lang="en-US" sz="1800" dirty="0"/>
           </a:p>
         </p:txBody>
       </p:sp>
@@ -20222,222 +19682,49 @@
           </a:ln>
         </p:spPr>
       </p:sp>
-      <p:pic>
-        <p:nvPicPr>
-          <p:cNvPr id="9" name="Image 0" descr="preencoded.png">    </p:cNvPr>
-          <p:cNvPicPr>
-            <a:picLocks noChangeAspect="1"/>
-          </p:cNvPicPr>
-          <p:nvPr/>
-        </p:nvPicPr>
-        <p:blipFill>
-          <a:blip r:embed="rId1">
-            <a:extLst>
-              <a:ext uri="{96DAC541-7B7A-43D3-8B79-37D633B846F1}">
-                <asvg:svgBlip xmlns:asvg="http://schemas.microsoft.com/office/drawing/2016/SVG/main" r:embed="rId2"/>
-              </a:ext>
-            </a:extLst>
-          </a:blip>
-          <a:stretch>
-            <a:fillRect/>
-          </a:stretch>
-        </p:blipFill>
-        <p:spPr>
-          <a:xfrm>
-            <a:off x="914400" y="1865376"/>
-            <a:ext cx="10241280" cy="1024128"/>
-          </a:xfrm>
-          <a:prstGeom prst="rect">
-            <a:avLst/>
-          </a:prstGeom>
-        </p:spPr>
-      </p:pic>
-      <p:sp>
-        <p:nvSpPr>
-          <p:cNvPr id="10" name="Shape 7"/>
-          <p:cNvSpPr/>
-          <p:nvPr/>
-        </p:nvSpPr>
-        <p:spPr>
-          <a:xfrm>
-            <a:off x="914400" y="1865376"/>
-            <a:ext cx="10241280" cy="1024128"/>
-          </a:xfrm>
-          <a:prstGeom prst="rect">
-            <a:avLst/>
-          </a:prstGeom>
-          <a:solidFill>
-            <a:srgbClr val="FFFFFF">
-              <a:alpha val="0"/>
-            </a:srgbClr>
-          </a:solidFill>
-          <a:ln w="12700">
-            <a:solidFill>
-              <a:srgbClr val="E5E7EB">
+      <p:sp>
+        <p:nvSpPr>
+          <p:cNvPr id="9" name="Shape 7"/>
+          <p:cNvSpPr/>
+          <p:nvPr/>
+        </p:nvSpPr>
+        <p:spPr>
+          <a:xfrm>
+            <a:off x="822960" y="1938528"/>
+            <a:ext cx="73152" cy="2514600"/>
+          </a:xfrm>
+          <a:prstGeom prst="rect">
+            <a:avLst/>
+          </a:prstGeom>
+          <a:solidFill>
+            <a:srgbClr val="F43F5E"/>
+          </a:solidFill>
+          <a:ln w="12700">
+            <a:solidFill>
+              <a:srgbClr val="F43F5E">
                 <a:alpha val="0"/>
               </a:srgbClr>
             </a:solidFill>
             <a:prstDash val="solid"/>
           </a:ln>
-          <a:effectLst>
-            <a:outerShdw sx="100000" sy="100000" kx="0" ky="0" algn="bl" rotWithShape="0" blurRad="12700" dist="50800" dir="2700000">
-              <a:srgbClr val="000000">
-                <a:alpha val="8000"/>
-              </a:srgbClr>
-            </a:outerShdw>
-          </a:effectLst>
-        </p:spPr>
-      </p:sp>
-      <p:pic>
-        <p:nvPicPr>
-          <p:cNvPr id="11" name="Image 1" descr="preencoded.png">    </p:cNvPr>
-          <p:cNvPicPr>
-            <a:picLocks noChangeAspect="1"/>
-          </p:cNvPicPr>
-          <p:nvPr/>
-        </p:nvPicPr>
-        <p:blipFill>
-          <a:blip r:embed="rId3">
-            <a:extLst>
-              <a:ext uri="{96DAC541-7B7A-43D3-8B79-37D633B846F1}">
-                <asvg:svgBlip xmlns:asvg="http://schemas.microsoft.com/office/drawing/2016/SVG/main" r:embed="rId4"/>
-              </a:ext>
-            </a:extLst>
-          </a:blip>
-          <a:stretch>
-            <a:fillRect/>
-          </a:stretch>
-        </p:blipFill>
-        <p:spPr>
-          <a:xfrm>
-            <a:off x="914400" y="3191256"/>
-            <a:ext cx="10241280" cy="1024128"/>
-          </a:xfrm>
-          <a:prstGeom prst="rect">
-            <a:avLst/>
-          </a:prstGeom>
-        </p:spPr>
-      </p:pic>
-      <p:sp>
-        <p:nvSpPr>
-          <p:cNvPr id="12" name="Shape 8"/>
-          <p:cNvSpPr/>
-          <p:nvPr/>
-        </p:nvSpPr>
-        <p:spPr>
-          <a:xfrm>
-            <a:off x="914400" y="3191256"/>
-            <a:ext cx="10241280" cy="1024128"/>
-          </a:xfrm>
-          <a:prstGeom prst="rect">
-            <a:avLst/>
-          </a:prstGeom>
-          <a:solidFill>
-            <a:srgbClr val="FFFFFF">
-              <a:alpha val="0"/>
-            </a:srgbClr>
-          </a:solidFill>
-          <a:ln w="12700">
-            <a:solidFill>
-              <a:srgbClr val="E5E7EB">
-                <a:alpha val="0"/>
-              </a:srgbClr>
-            </a:solidFill>
-            <a:prstDash val="solid"/>
-          </a:ln>
-          <a:effectLst>
-            <a:outerShdw sx="100000" sy="100000" kx="0" ky="0" algn="bl" rotWithShape="0" blurRad="12700" dist="50800" dir="2700000">
-              <a:srgbClr val="000000">
-                <a:alpha val="8000"/>
-              </a:srgbClr>
-            </a:outerShdw>
-          </a:effectLst>
-        </p:spPr>
-      </p:sp>
-      <p:pic>
-        <p:nvPicPr>
-          <p:cNvPr id="13" name="Image 2" descr="preencoded.png">    </p:cNvPr>
-          <p:cNvPicPr>
-            <a:picLocks noChangeAspect="1"/>
-          </p:cNvPicPr>
-          <p:nvPr/>
-        </p:nvPicPr>
-        <p:blipFill>
-          <a:blip r:embed="rId5">
-            <a:extLst>
-              <a:ext uri="{96DAC541-7B7A-43D3-8B79-37D633B846F1}">
-                <asvg:svgBlip xmlns:asvg="http://schemas.microsoft.com/office/drawing/2016/SVG/main" r:embed="rId6"/>
-              </a:ext>
-            </a:extLst>
-          </a:blip>
-          <a:stretch>
-            <a:fillRect/>
-          </a:stretch>
-        </p:blipFill>
-        <p:spPr>
-          <a:xfrm>
-            <a:off x="914400" y="4507992"/>
-            <a:ext cx="10241280" cy="1024128"/>
-          </a:xfrm>
-          <a:prstGeom prst="rect">
-            <a:avLst/>
-          </a:prstGeom>
-        </p:spPr>
-      </p:pic>
-      <p:sp>
-        <p:nvSpPr>
-          <p:cNvPr id="14" name="Shape 9"/>
-          <p:cNvSpPr/>
-          <p:nvPr/>
-        </p:nvSpPr>
-        <p:spPr>
-          <a:xfrm>
-            <a:off x="914400" y="4507992"/>
-            <a:ext cx="10241280" cy="1024128"/>
-          </a:xfrm>
-          <a:prstGeom prst="rect">
-            <a:avLst/>
-          </a:prstGeom>
-          <a:solidFill>
-            <a:srgbClr val="FFFFFF">
-              <a:alpha val="0"/>
-            </a:srgbClr>
-          </a:solidFill>
-          <a:ln w="12700">
-            <a:solidFill>
-              <a:srgbClr val="E5E7EB">
-                <a:alpha val="0"/>
-              </a:srgbClr>
-            </a:solidFill>
-            <a:prstDash val="solid"/>
-          </a:ln>
-          <a:effectLst>
-            <a:outerShdw sx="100000" sy="100000" kx="0" ky="0" algn="bl" rotWithShape="0" blurRad="12700" dist="50800" dir="2700000">
-              <a:srgbClr val="000000">
-                <a:alpha val="8000"/>
-              </a:srgbClr>
-            </a:outerShdw>
-          </a:effectLst>
-        </p:spPr>
-      </p:sp>
-      <p:sp>
-        <p:nvSpPr>
-          <p:cNvPr id="15" name="Shape 10"/>
-          <p:cNvSpPr/>
-          <p:nvPr/>
-        </p:nvSpPr>
-        <p:spPr>
-          <a:xfrm>
-            <a:off x="786384" y="1956816"/>
-            <a:ext cx="32004" cy="3483864"/>
-          </a:xfrm>
-          <a:prstGeom prst="rect">
-            <a:avLst/>
-          </a:prstGeom>
-          <a:solidFill>
-            <a:srgbClr val="38BDF8">
-              <a:alpha val="80000"/>
-            </a:srgbClr>
+        </p:spPr>
+      </p:sp>
+      <p:sp>
+        <p:nvSpPr>
+          <p:cNvPr id="10" name="Shape 8"/>
+          <p:cNvSpPr/>
+          <p:nvPr/>
+        </p:nvSpPr>
+        <p:spPr>
+          <a:xfrm>
+            <a:off x="4343400" y="1938528"/>
+            <a:ext cx="73152" cy="2514600"/>
+          </a:xfrm>
+          <a:prstGeom prst="rect">
+            <a:avLst/>
+          </a:prstGeom>
+          <a:solidFill>
+            <a:srgbClr val="38BDF8"/>
           </a:solidFill>
           <a:ln w="12700">
             <a:solidFill>
@@ -20451,14 +19738,14 @@
       </p:sp>
       <p:sp>
         <p:nvSpPr>
-          <p:cNvPr id="16" name="Shape 11"/>
-          <p:cNvSpPr/>
-          <p:nvPr/>
-        </p:nvSpPr>
-        <p:spPr>
-          <a:xfrm>
-            <a:off x="914400" y="1865376"/>
-            <a:ext cx="73152" cy="1024128"/>
+          <p:cNvPr id="11" name="Shape 9"/>
+          <p:cNvSpPr/>
+          <p:nvPr/>
+        </p:nvSpPr>
+        <p:spPr>
+          <a:xfrm>
+            <a:off x="7863840" y="1938528"/>
+            <a:ext cx="73152" cy="2514600"/>
           </a:xfrm>
           <a:prstGeom prst="rect">
             <a:avLst/>
@@ -20478,61 +19765,7 @@
       </p:sp>
       <p:sp>
         <p:nvSpPr>
-          <p:cNvPr id="17" name="Shape 12"/>
-          <p:cNvSpPr/>
-          <p:nvPr/>
-        </p:nvSpPr>
-        <p:spPr>
-          <a:xfrm>
-            <a:off x="914400" y="3191256"/>
-            <a:ext cx="73152" cy="1024128"/>
-          </a:xfrm>
-          <a:prstGeom prst="rect">
-            <a:avLst/>
-          </a:prstGeom>
-          <a:solidFill>
-            <a:srgbClr val="38BDF8"/>
-          </a:solidFill>
-          <a:ln w="12700">
-            <a:solidFill>
-              <a:srgbClr val="38BDF8">
-                <a:alpha val="0"/>
-              </a:srgbClr>
-            </a:solidFill>
-            <a:prstDash val="solid"/>
-          </a:ln>
-        </p:spPr>
-      </p:sp>
-      <p:sp>
-        <p:nvSpPr>
-          <p:cNvPr id="18" name="Shape 13"/>
-          <p:cNvSpPr/>
-          <p:nvPr/>
-        </p:nvSpPr>
-        <p:spPr>
-          <a:xfrm>
-            <a:off x="914400" y="4507992"/>
-            <a:ext cx="73152" cy="1024128"/>
-          </a:xfrm>
-          <a:prstGeom prst="rect">
-            <a:avLst/>
-          </a:prstGeom>
-          <a:solidFill>
-            <a:srgbClr val="F43F5E"/>
-          </a:solidFill>
-          <a:ln w="12700">
-            <a:solidFill>
-              <a:srgbClr val="F43F5E">
-                <a:alpha val="0"/>
-              </a:srgbClr>
-            </a:solidFill>
-            <a:prstDash val="solid"/>
-          </a:ln>
-        </p:spPr>
-      </p:sp>
-      <p:sp>
-        <p:nvSpPr>
-          <p:cNvPr id="19" name="mdpr:1-2-32ac08:title:__title:1-2-32ac08"/>
+          <p:cNvPr id="12" name="mdpr:1-2-32ac08:title:__title:1-2-32ac08"/>
           <p:cNvSpPr txBox="1"/>
           <p:nvPr/>
         </p:nvSpPr>
@@ -20574,14 +19807,14 @@
       </p:sp>
       <p:sp>
         <p:nvSpPr>
-          <p:cNvPr id="20" name="mdpr:1-2-32ac08:item-1:block-6-chunk-1"/>
+          <p:cNvPr id="13" name="mdpr:1-2-32ac08:item-1:block-6-chunk-1"/>
           <p:cNvSpPr txBox="1"/>
           <p:nvPr/>
         </p:nvSpPr>
         <p:spPr>
           <a:xfrm>
-            <a:off x="1133856" y="1957548"/>
-            <a:ext cx="9820656" cy="839785"/>
+            <a:off x="1042416" y="2103120"/>
+            <a:ext cx="2825496" cy="2185416"/>
           </a:xfrm>
           <a:prstGeom prst="rect">
             <a:avLst/>
@@ -20633,14 +19866,14 @@
       </p:sp>
       <p:sp>
         <p:nvSpPr>
-          <p:cNvPr id="21" name="mdpr:1-2-32ac08:item-2:block-6-chunk-1"/>
+          <p:cNvPr id="14" name="mdpr:1-2-32ac08:item-2:block-6-chunk-1"/>
           <p:cNvSpPr txBox="1"/>
           <p:nvPr/>
         </p:nvSpPr>
         <p:spPr>
           <a:xfrm>
-            <a:off x="1133856" y="3283428"/>
-            <a:ext cx="9820656" cy="839785"/>
+            <a:off x="4562856" y="2103120"/>
+            <a:ext cx="2825496" cy="2185416"/>
           </a:xfrm>
           <a:prstGeom prst="rect">
             <a:avLst/>
@@ -20692,14 +19925,14 @@
       </p:sp>
       <p:sp>
         <p:nvSpPr>
-          <p:cNvPr id="22" name="mdpr:1-2-32ac08:item-3:block-6-chunk-1"/>
+          <p:cNvPr id="15" name="mdpr:1-2-32ac08:item-3:block-6-chunk-1"/>
           <p:cNvSpPr txBox="1"/>
           <p:nvPr/>
         </p:nvSpPr>
         <p:spPr>
           <a:xfrm>
-            <a:off x="1133856" y="4600164"/>
-            <a:ext cx="9820656" cy="839785"/>
+            <a:off x="8083296" y="2103120"/>
+            <a:ext cx="2825496" cy="2185416"/>
           </a:xfrm>
           <a:prstGeom prst="rect">
             <a:avLst/>
@@ -21003,61 +20236,7 @@
       </p:sp>
       <p:sp>
         <p:nvSpPr>
-          <p:cNvPr id="9" name="Shape 7"/>
-          <p:cNvSpPr/>
-          <p:nvPr/>
-        </p:nvSpPr>
-        <p:spPr>
-          <a:xfrm>
-            <a:off x="822960" y="1554480"/>
-            <a:ext cx="4937760" cy="73152"/>
-          </a:xfrm>
-          <a:prstGeom prst="rect">
-            <a:avLst/>
-          </a:prstGeom>
-          <a:solidFill>
-            <a:srgbClr val="F43F5E"/>
-          </a:solidFill>
-          <a:ln w="12700">
-            <a:solidFill>
-              <a:srgbClr val="F43F5E">
-                <a:alpha val="0"/>
-              </a:srgbClr>
-            </a:solidFill>
-            <a:prstDash val="solid"/>
-          </a:ln>
-        </p:spPr>
-      </p:sp>
-      <p:sp>
-        <p:nvSpPr>
-          <p:cNvPr id="10" name="Shape 8"/>
-          <p:cNvSpPr/>
-          <p:nvPr/>
-        </p:nvSpPr>
-        <p:spPr>
-          <a:xfrm>
-            <a:off x="6400800" y="1554480"/>
-            <a:ext cx="4937760" cy="73152"/>
-          </a:xfrm>
-          <a:prstGeom prst="rect">
-            <a:avLst/>
-          </a:prstGeom>
-          <a:solidFill>
-            <a:srgbClr val="F43F5E"/>
-          </a:solidFill>
-          <a:ln w="12700">
-            <a:solidFill>
-              <a:srgbClr val="F43F5E">
-                <a:alpha val="0"/>
-              </a:srgbClr>
-            </a:solidFill>
-            <a:prstDash val="solid"/>
-          </a:ln>
-        </p:spPr>
-      </p:sp>
-      <p:sp>
-        <p:nvSpPr>
-          <p:cNvPr id="11" name="mdpr:2-2-14f8eb:title:__title:2-2-14f8eb"/>
+          <p:cNvPr id="9" name="mdpr:2-2-14f8eb:title:__title:2-2-14f8eb"/>
           <p:cNvSpPr txBox="1"/>
           <p:nvPr/>
         </p:nvSpPr>
@@ -21091,7 +20270,24 @@
                 <a:ea typeface="Pretendard" pitchFamily="34" charset="-122"/>
                 <a:cs typeface="Pretendard" pitchFamily="34" charset="-120"/>
               </a:rPr>
-              <a:t>Composition Contract (Cont. 2/2)</a:t>
+              <a:t>Composition Contract</a:t>
+            </a:r>
+            <a:pPr algn="ctr" indent="0" marL="0">
+              <a:lnSpc>
+                <a:spcPct val="120000"/>
+              </a:lnSpc>
+              <a:buNone/>
+            </a:pPr>
+            <a:r>
+              <a:rPr lang="en-US" sz="2000" dirty="0">
+                <a:solidFill>
+                  <a:srgbClr val="8F8F8F"/>
+                </a:solidFill>
+                <a:latin typeface="Pretendard" pitchFamily="34" charset="0"/>
+                <a:ea typeface="Pretendard" pitchFamily="34" charset="-122"/>
+                <a:cs typeface="Pretendard" pitchFamily="34" charset="-120"/>
+              </a:rPr>
+              <a:t> (Cont. 2/2)</a:t>
             </a:r>
             <a:endParaRPr lang="en-US" sz="3400" dirty="0"/>
           </a:p>
@@ -21099,14 +20295,14 @@
       </p:sp>
       <p:sp>
         <p:nvSpPr>
-          <p:cNvPr id="12" name="mdpr:2-2-14f8eb:left:block-6-chunk-2"/>
+          <p:cNvPr id="10" name="mdpr:2-2-14f8eb:left:block-6-chunk-2"/>
           <p:cNvSpPr txBox="1"/>
           <p:nvPr/>
         </p:nvSpPr>
         <p:spPr>
           <a:xfrm>
-            <a:off x="896112" y="1664208"/>
-            <a:ext cx="4791456" cy="4169664"/>
+            <a:off x="896112" y="1463040"/>
+            <a:ext cx="4791456" cy="4261104"/>
           </a:xfrm>
           <a:prstGeom prst="rect">
             <a:avLst/>
@@ -21158,14 +20354,14 @@
       </p:sp>
       <p:sp>
         <p:nvSpPr>
-          <p:cNvPr id="13" name="mdpr:2-2-14f8eb:right:block-6-chunk-2"/>
+          <p:cNvPr id="11" name="mdpr:2-2-14f8eb:right:block-6-chunk-2"/>
           <p:cNvSpPr txBox="1"/>
           <p:nvPr/>
         </p:nvSpPr>
         <p:spPr>
           <a:xfrm>
-            <a:off x="6473952" y="1664208"/>
-            <a:ext cx="4791456" cy="4169664"/>
+            <a:off x="6473952" y="1463040"/>
+            <a:ext cx="4791456" cy="4261104"/>
           </a:xfrm>
           <a:prstGeom prst="rect">
             <a:avLst/>
@@ -21467,222 +20663,49 @@
           </a:ln>
         </p:spPr>
       </p:sp>
-      <p:pic>
-        <p:nvPicPr>
-          <p:cNvPr id="9" name="Image 0" descr="preencoded.png">    </p:cNvPr>
-          <p:cNvPicPr>
-            <a:picLocks noChangeAspect="1"/>
-          </p:cNvPicPr>
-          <p:nvPr/>
-        </p:nvPicPr>
-        <p:blipFill>
-          <a:blip r:embed="rId1">
-            <a:extLst>
-              <a:ext uri="{96DAC541-7B7A-43D3-8B79-37D633B846F1}">
-                <asvg:svgBlip xmlns:asvg="http://schemas.microsoft.com/office/drawing/2016/SVG/main" r:embed="rId2"/>
-              </a:ext>
-            </a:extLst>
-          </a:blip>
-          <a:stretch>
-            <a:fillRect/>
-          </a:stretch>
-        </p:blipFill>
-        <p:spPr>
-          <a:xfrm>
-            <a:off x="914400" y="1865376"/>
-            <a:ext cx="10241280" cy="1024128"/>
-          </a:xfrm>
-          <a:prstGeom prst="rect">
-            <a:avLst/>
-          </a:prstGeom>
-        </p:spPr>
-      </p:pic>
-      <p:sp>
-        <p:nvSpPr>
-          <p:cNvPr id="10" name="Shape 7"/>
-          <p:cNvSpPr/>
-          <p:nvPr/>
-        </p:nvSpPr>
-        <p:spPr>
-          <a:xfrm>
-            <a:off x="914400" y="1865376"/>
-            <a:ext cx="10241280" cy="1024128"/>
-          </a:xfrm>
-          <a:prstGeom prst="rect">
-            <a:avLst/>
-          </a:prstGeom>
-          <a:solidFill>
-            <a:srgbClr val="FFFFFF">
-              <a:alpha val="0"/>
-            </a:srgbClr>
-          </a:solidFill>
-          <a:ln w="12700">
-            <a:solidFill>
-              <a:srgbClr val="E5E7EB">
+      <p:sp>
+        <p:nvSpPr>
+          <p:cNvPr id="9" name="Shape 7"/>
+          <p:cNvSpPr/>
+          <p:nvPr/>
+        </p:nvSpPr>
+        <p:spPr>
+          <a:xfrm>
+            <a:off x="822960" y="1938528"/>
+            <a:ext cx="73152" cy="2514600"/>
+          </a:xfrm>
+          <a:prstGeom prst="rect">
+            <a:avLst/>
+          </a:prstGeom>
+          <a:solidFill>
+            <a:srgbClr val="F43F5E"/>
+          </a:solidFill>
+          <a:ln w="12700">
+            <a:solidFill>
+              <a:srgbClr val="F43F5E">
                 <a:alpha val="0"/>
               </a:srgbClr>
             </a:solidFill>
             <a:prstDash val="solid"/>
           </a:ln>
-          <a:effectLst>
-            <a:outerShdw sx="100000" sy="100000" kx="0" ky="0" algn="bl" rotWithShape="0" blurRad="12700" dist="50800" dir="2700000">
-              <a:srgbClr val="000000">
-                <a:alpha val="8000"/>
-              </a:srgbClr>
-            </a:outerShdw>
-          </a:effectLst>
-        </p:spPr>
-      </p:sp>
-      <p:pic>
-        <p:nvPicPr>
-          <p:cNvPr id="11" name="Image 1" descr="preencoded.png">    </p:cNvPr>
-          <p:cNvPicPr>
-            <a:picLocks noChangeAspect="1"/>
-          </p:cNvPicPr>
-          <p:nvPr/>
-        </p:nvPicPr>
-        <p:blipFill>
-          <a:blip r:embed="rId3">
-            <a:extLst>
-              <a:ext uri="{96DAC541-7B7A-43D3-8B79-37D633B846F1}">
-                <asvg:svgBlip xmlns:asvg="http://schemas.microsoft.com/office/drawing/2016/SVG/main" r:embed="rId4"/>
-              </a:ext>
-            </a:extLst>
-          </a:blip>
-          <a:stretch>
-            <a:fillRect/>
-          </a:stretch>
-        </p:blipFill>
-        <p:spPr>
-          <a:xfrm>
-            <a:off x="914400" y="3191256"/>
-            <a:ext cx="10241280" cy="1024128"/>
-          </a:xfrm>
-          <a:prstGeom prst="rect">
-            <a:avLst/>
-          </a:prstGeom>
-        </p:spPr>
-      </p:pic>
-      <p:sp>
-        <p:nvSpPr>
-          <p:cNvPr id="12" name="Shape 8"/>
-          <p:cNvSpPr/>
-          <p:nvPr/>
-        </p:nvSpPr>
-        <p:spPr>
-          <a:xfrm>
-            <a:off x="914400" y="3191256"/>
-            <a:ext cx="10241280" cy="1024128"/>
-          </a:xfrm>
-          <a:prstGeom prst="rect">
-            <a:avLst/>
-          </a:prstGeom>
-          <a:solidFill>
-            <a:srgbClr val="FFFFFF">
-              <a:alpha val="0"/>
-            </a:srgbClr>
-          </a:solidFill>
-          <a:ln w="12700">
-            <a:solidFill>
-              <a:srgbClr val="E5E7EB">
-                <a:alpha val="0"/>
-              </a:srgbClr>
-            </a:solidFill>
-            <a:prstDash val="solid"/>
-          </a:ln>
-          <a:effectLst>
-            <a:outerShdw sx="100000" sy="100000" kx="0" ky="0" algn="bl" rotWithShape="0" blurRad="12700" dist="50800" dir="2700000">
-              <a:srgbClr val="000000">
-                <a:alpha val="8000"/>
-              </a:srgbClr>
-            </a:outerShdw>
-          </a:effectLst>
-        </p:spPr>
-      </p:sp>
-      <p:pic>
-        <p:nvPicPr>
-          <p:cNvPr id="13" name="Image 2" descr="preencoded.png">    </p:cNvPr>
-          <p:cNvPicPr>
-            <a:picLocks noChangeAspect="1"/>
-          </p:cNvPicPr>
-          <p:nvPr/>
-        </p:nvPicPr>
-        <p:blipFill>
-          <a:blip r:embed="rId5">
-            <a:extLst>
-              <a:ext uri="{96DAC541-7B7A-43D3-8B79-37D633B846F1}">
-                <asvg:svgBlip xmlns:asvg="http://schemas.microsoft.com/office/drawing/2016/SVG/main" r:embed="rId6"/>
-              </a:ext>
-            </a:extLst>
-          </a:blip>
-          <a:stretch>
-            <a:fillRect/>
-          </a:stretch>
-        </p:blipFill>
-        <p:spPr>
-          <a:xfrm>
-            <a:off x="914400" y="4507992"/>
-            <a:ext cx="10241280" cy="1024128"/>
-          </a:xfrm>
-          <a:prstGeom prst="rect">
-            <a:avLst/>
-          </a:prstGeom>
-        </p:spPr>
-      </p:pic>
-      <p:sp>
-        <p:nvSpPr>
-          <p:cNvPr id="14" name="Shape 9"/>
-          <p:cNvSpPr/>
-          <p:nvPr/>
-        </p:nvSpPr>
-        <p:spPr>
-          <a:xfrm>
-            <a:off x="914400" y="4507992"/>
-            <a:ext cx="10241280" cy="1024128"/>
-          </a:xfrm>
-          <a:prstGeom prst="rect">
-            <a:avLst/>
-          </a:prstGeom>
-          <a:solidFill>
-            <a:srgbClr val="FFFFFF">
-              <a:alpha val="0"/>
-            </a:srgbClr>
-          </a:solidFill>
-          <a:ln w="12700">
-            <a:solidFill>
-              <a:srgbClr val="E5E7EB">
-                <a:alpha val="0"/>
-              </a:srgbClr>
-            </a:solidFill>
-            <a:prstDash val="solid"/>
-          </a:ln>
-          <a:effectLst>
-            <a:outerShdw sx="100000" sy="100000" kx="0" ky="0" algn="bl" rotWithShape="0" blurRad="12700" dist="50800" dir="2700000">
-              <a:srgbClr val="000000">
-                <a:alpha val="8000"/>
-              </a:srgbClr>
-            </a:outerShdw>
-          </a:effectLst>
-        </p:spPr>
-      </p:sp>
-      <p:sp>
-        <p:nvSpPr>
-          <p:cNvPr id="15" name="Shape 10"/>
-          <p:cNvSpPr/>
-          <p:nvPr/>
-        </p:nvSpPr>
-        <p:spPr>
-          <a:xfrm>
-            <a:off x="786384" y="1956816"/>
-            <a:ext cx="32004" cy="3483864"/>
-          </a:xfrm>
-          <a:prstGeom prst="rect">
-            <a:avLst/>
-          </a:prstGeom>
-          <a:solidFill>
-            <a:srgbClr val="38BDF8">
-              <a:alpha val="80000"/>
-            </a:srgbClr>
+        </p:spPr>
+      </p:sp>
+      <p:sp>
+        <p:nvSpPr>
+          <p:cNvPr id="10" name="Shape 8"/>
+          <p:cNvSpPr/>
+          <p:nvPr/>
+        </p:nvSpPr>
+        <p:spPr>
+          <a:xfrm>
+            <a:off x="4343400" y="1938528"/>
+            <a:ext cx="73152" cy="2514600"/>
+          </a:xfrm>
+          <a:prstGeom prst="rect">
+            <a:avLst/>
+          </a:prstGeom>
+          <a:solidFill>
+            <a:srgbClr val="38BDF8"/>
           </a:solidFill>
           <a:ln w="12700">
             <a:solidFill>
@@ -21696,14 +20719,14 @@
       </p:sp>
       <p:sp>
         <p:nvSpPr>
-          <p:cNvPr id="16" name="Shape 11"/>
-          <p:cNvSpPr/>
-          <p:nvPr/>
-        </p:nvSpPr>
-        <p:spPr>
-          <a:xfrm>
-            <a:off x="914400" y="1865376"/>
-            <a:ext cx="73152" cy="1024128"/>
+          <p:cNvPr id="11" name="Shape 9"/>
+          <p:cNvSpPr/>
+          <p:nvPr/>
+        </p:nvSpPr>
+        <p:spPr>
+          <a:xfrm>
+            <a:off x="7863840" y="1938528"/>
+            <a:ext cx="73152" cy="2514600"/>
           </a:xfrm>
           <a:prstGeom prst="rect">
             <a:avLst/>
@@ -21723,61 +20746,7 @@
       </p:sp>
       <p:sp>
         <p:nvSpPr>
-          <p:cNvPr id="17" name="Shape 12"/>
-          <p:cNvSpPr/>
-          <p:nvPr/>
-        </p:nvSpPr>
-        <p:spPr>
-          <a:xfrm>
-            <a:off x="914400" y="3191256"/>
-            <a:ext cx="73152" cy="1024128"/>
-          </a:xfrm>
-          <a:prstGeom prst="rect">
-            <a:avLst/>
-          </a:prstGeom>
-          <a:solidFill>
-            <a:srgbClr val="38BDF8"/>
-          </a:solidFill>
-          <a:ln w="12700">
-            <a:solidFill>
-              <a:srgbClr val="38BDF8">
-                <a:alpha val="0"/>
-              </a:srgbClr>
-            </a:solidFill>
-            <a:prstDash val="solid"/>
-          </a:ln>
-        </p:spPr>
-      </p:sp>
-      <p:sp>
-        <p:nvSpPr>
-          <p:cNvPr id="18" name="Shape 13"/>
-          <p:cNvSpPr/>
-          <p:nvPr/>
-        </p:nvSpPr>
-        <p:spPr>
-          <a:xfrm>
-            <a:off x="914400" y="4507992"/>
-            <a:ext cx="73152" cy="1024128"/>
-          </a:xfrm>
-          <a:prstGeom prst="rect">
-            <a:avLst/>
-          </a:prstGeom>
-          <a:solidFill>
-            <a:srgbClr val="F43F5E"/>
-          </a:solidFill>
-          <a:ln w="12700">
-            <a:solidFill>
-              <a:srgbClr val="F43F5E">
-                <a:alpha val="0"/>
-              </a:srgbClr>
-            </a:solidFill>
-            <a:prstDash val="solid"/>
-          </a:ln>
-        </p:spPr>
-      </p:sp>
-      <p:sp>
-        <p:nvSpPr>
-          <p:cNvPr id="19" name="mdpr:1-2-dfa474:title:__title:1-2-dfa474"/>
+          <p:cNvPr id="12" name="mdpr:1-2-dfa474:title:__title:1-2-dfa474"/>
           <p:cNvSpPr txBox="1"/>
           <p:nvPr/>
         </p:nvSpPr>
@@ -21819,14 +20788,14 @@
       </p:sp>
       <p:sp>
         <p:nvSpPr>
-          <p:cNvPr id="20" name="mdpr:1-2-dfa474:item-1:block-8-chunk-1"/>
+          <p:cNvPr id="13" name="mdpr:1-2-dfa474:item-1:block-8-chunk-1"/>
           <p:cNvSpPr txBox="1"/>
           <p:nvPr/>
         </p:nvSpPr>
         <p:spPr>
           <a:xfrm>
-            <a:off x="1133856" y="1957548"/>
-            <a:ext cx="9820656" cy="839785"/>
+            <a:off x="1042416" y="2103120"/>
+            <a:ext cx="2825496" cy="2185416"/>
           </a:xfrm>
           <a:prstGeom prst="rect">
             <a:avLst/>
@@ -21878,14 +20847,14 @@
       </p:sp>
       <p:sp>
         <p:nvSpPr>
-          <p:cNvPr id="21" name="mdpr:1-2-dfa474:item-2:block-8-chunk-1"/>
+          <p:cNvPr id="14" name="mdpr:1-2-dfa474:item-2:block-8-chunk-1"/>
           <p:cNvSpPr txBox="1"/>
           <p:nvPr/>
         </p:nvSpPr>
         <p:spPr>
           <a:xfrm>
-            <a:off x="1133856" y="3283428"/>
-            <a:ext cx="9820656" cy="839785"/>
+            <a:off x="4562856" y="2103120"/>
+            <a:ext cx="2825496" cy="2185416"/>
           </a:xfrm>
           <a:prstGeom prst="rect">
             <a:avLst/>
@@ -21937,14 +20906,14 @@
       </p:sp>
       <p:sp>
         <p:nvSpPr>
-          <p:cNvPr id="22" name="mdpr:1-2-dfa474:item-3:block-8-chunk-1"/>
+          <p:cNvPr id="15" name="mdpr:1-2-dfa474:item-3:block-8-chunk-1"/>
           <p:cNvSpPr txBox="1"/>
           <p:nvPr/>
         </p:nvSpPr>
         <p:spPr>
           <a:xfrm>
-            <a:off x="1133856" y="4600164"/>
-            <a:ext cx="9820656" cy="839785"/>
+            <a:off x="8083296" y="2103120"/>
+            <a:ext cx="2825496" cy="2185416"/>
           </a:xfrm>
           <a:prstGeom prst="rect">
             <a:avLst/>
@@ -22248,61 +21217,7 @@
       </p:sp>
       <p:sp>
         <p:nvSpPr>
-          <p:cNvPr id="9" name="Shape 7"/>
-          <p:cNvSpPr/>
-          <p:nvPr/>
-        </p:nvSpPr>
-        <p:spPr>
-          <a:xfrm>
-            <a:off x="822960" y="1554480"/>
-            <a:ext cx="4937760" cy="73152"/>
-          </a:xfrm>
-          <a:prstGeom prst="rect">
-            <a:avLst/>
-          </a:prstGeom>
-          <a:solidFill>
-            <a:srgbClr val="F43F5E"/>
-          </a:solidFill>
-          <a:ln w="12700">
-            <a:solidFill>
-              <a:srgbClr val="F43F5E">
-                <a:alpha val="0"/>
-              </a:srgbClr>
-            </a:solidFill>
-            <a:prstDash val="solid"/>
-          </a:ln>
-        </p:spPr>
-      </p:sp>
-      <p:sp>
-        <p:nvSpPr>
-          <p:cNvPr id="10" name="Shape 8"/>
-          <p:cNvSpPr/>
-          <p:nvPr/>
-        </p:nvSpPr>
-        <p:spPr>
-          <a:xfrm>
-            <a:off x="6400800" y="1554480"/>
-            <a:ext cx="4937760" cy="73152"/>
-          </a:xfrm>
-          <a:prstGeom prst="rect">
-            <a:avLst/>
-          </a:prstGeom>
-          <a:solidFill>
-            <a:srgbClr val="F43F5E"/>
-          </a:solidFill>
-          <a:ln w="12700">
-            <a:solidFill>
-              <a:srgbClr val="F43F5E">
-                <a:alpha val="0"/>
-              </a:srgbClr>
-            </a:solidFill>
-            <a:prstDash val="solid"/>
-          </a:ln>
-        </p:spPr>
-      </p:sp>
-      <p:sp>
-        <p:nvSpPr>
-          <p:cNvPr id="11" name="mdpr:2-2-149bde:title:__title:2-2-149bde"/>
+          <p:cNvPr id="9" name="mdpr:2-2-149bde:title:__title:2-2-149bde"/>
           <p:cNvSpPr txBox="1"/>
           <p:nvPr/>
         </p:nvSpPr>
@@ -22336,7 +21251,24 @@
                 <a:ea typeface="Pretendard" pitchFamily="34" charset="-122"/>
                 <a:cs typeface="Pretendard" pitchFamily="34" charset="-120"/>
               </a:rPr>
-              <a:t>Pruned Style Families (Cont. 2/2)</a:t>
+              <a:t>Pruned Style Families</a:t>
+            </a:r>
+            <a:pPr algn="ctr" indent="0" marL="0">
+              <a:lnSpc>
+                <a:spcPct val="120000"/>
+              </a:lnSpc>
+              <a:buNone/>
+            </a:pPr>
+            <a:r>
+              <a:rPr lang="en-US" sz="2000" dirty="0">
+                <a:solidFill>
+                  <a:srgbClr val="8F8F8F"/>
+                </a:solidFill>
+                <a:latin typeface="Pretendard" pitchFamily="34" charset="0"/>
+                <a:ea typeface="Pretendard" pitchFamily="34" charset="-122"/>
+                <a:cs typeface="Pretendard" pitchFamily="34" charset="-120"/>
+              </a:rPr>
+              <a:t> (Cont. 2/2)</a:t>
             </a:r>
             <a:endParaRPr lang="en-US" sz="3400" dirty="0"/>
           </a:p>
@@ -22344,14 +21276,14 @@
       </p:sp>
       <p:sp>
         <p:nvSpPr>
-          <p:cNvPr id="12" name="mdpr:2-2-149bde:left:block-8-chunk-2"/>
+          <p:cNvPr id="10" name="mdpr:2-2-149bde:left:block-8-chunk-2"/>
           <p:cNvSpPr txBox="1"/>
           <p:nvPr/>
         </p:nvSpPr>
         <p:spPr>
           <a:xfrm>
-            <a:off x="896112" y="1664208"/>
-            <a:ext cx="4791456" cy="4169664"/>
+            <a:off x="896112" y="1463040"/>
+            <a:ext cx="4791456" cy="4261104"/>
           </a:xfrm>
           <a:prstGeom prst="rect">
             <a:avLst/>
@@ -22403,14 +21335,14 @@
       </p:sp>
       <p:sp>
         <p:nvSpPr>
-          <p:cNvPr id="13" name="mdpr:2-2-149bde:right:block-8-chunk-2"/>
+          <p:cNvPr id="11" name="mdpr:2-2-149bde:right:block-8-chunk-2"/>
           <p:cNvSpPr txBox="1"/>
           <p:nvPr/>
         </p:nvSpPr>
         <p:spPr>
           <a:xfrm>
-            <a:off x="6473952" y="1664208"/>
-            <a:ext cx="4791456" cy="4169664"/>
+            <a:off x="6473952" y="1463040"/>
+            <a:ext cx="4791456" cy="4261104"/>
           </a:xfrm>
           <a:prstGeom prst="rect">
             <a:avLst/>
@@ -22712,16 +21644,148 @@
           </a:ln>
         </p:spPr>
       </p:sp>
-      <p:sp>
-        <p:nvSpPr>
-          <p:cNvPr id="9" name="Shape 7"/>
-          <p:cNvSpPr/>
-          <p:nvPr/>
-        </p:nvSpPr>
-        <p:spPr>
-          <a:xfrm>
-            <a:off x="822960" y="1554480"/>
-            <a:ext cx="4937760" cy="73152"/>
+      <p:pic>
+        <p:nvPicPr>
+          <p:cNvPr id="9" name="Image 0" descr="preencoded.png">    </p:cNvPr>
+          <p:cNvPicPr>
+            <a:picLocks noChangeAspect="1"/>
+          </p:cNvPicPr>
+          <p:nvPr/>
+        </p:nvPicPr>
+        <p:blipFill>
+          <a:blip r:embed="rId1">
+            <a:extLst>
+              <a:ext uri="{96DAC541-7B7A-43D3-8B79-37D633B846F1}">
+                <asvg:svgBlip xmlns:asvg="http://schemas.microsoft.com/office/drawing/2016/SVG/main" r:embed="rId2"/>
+              </a:ext>
+            </a:extLst>
+          </a:blip>
+          <a:stretch>
+            <a:fillRect/>
+          </a:stretch>
+        </p:blipFill>
+        <p:spPr>
+          <a:xfrm>
+            <a:off x="914400" y="2523744"/>
+            <a:ext cx="10241280" cy="1024128"/>
+          </a:xfrm>
+          <a:prstGeom prst="rect">
+            <a:avLst/>
+          </a:prstGeom>
+        </p:spPr>
+      </p:pic>
+      <p:sp>
+        <p:nvSpPr>
+          <p:cNvPr id="10" name="Shape 7"/>
+          <p:cNvSpPr/>
+          <p:nvPr/>
+        </p:nvSpPr>
+        <p:spPr>
+          <a:xfrm>
+            <a:off x="914400" y="2523744"/>
+            <a:ext cx="10241280" cy="1024128"/>
+          </a:xfrm>
+          <a:prstGeom prst="rect">
+            <a:avLst/>
+          </a:prstGeom>
+          <a:solidFill>
+            <a:srgbClr val="FFFFFF">
+              <a:alpha val="0"/>
+            </a:srgbClr>
+          </a:solidFill>
+          <a:ln w="12700">
+            <a:solidFill>
+              <a:srgbClr val="E5E7EB">
+                <a:alpha val="0"/>
+              </a:srgbClr>
+            </a:solidFill>
+            <a:prstDash val="solid"/>
+          </a:ln>
+          <a:effectLst>
+            <a:outerShdw sx="100000" sy="100000" kx="0" ky="0" algn="bl" rotWithShape="0" blurRad="12700" dist="50800" dir="2700000">
+              <a:srgbClr val="000000">
+                <a:alpha val="8000"/>
+              </a:srgbClr>
+            </a:outerShdw>
+          </a:effectLst>
+        </p:spPr>
+      </p:sp>
+      <p:pic>
+        <p:nvPicPr>
+          <p:cNvPr id="11" name="Image 1" descr="preencoded.png">    </p:cNvPr>
+          <p:cNvPicPr>
+            <a:picLocks noChangeAspect="1"/>
+          </p:cNvPicPr>
+          <p:nvPr/>
+        </p:nvPicPr>
+        <p:blipFill>
+          <a:blip r:embed="rId3">
+            <a:extLst>
+              <a:ext uri="{96DAC541-7B7A-43D3-8B79-37D633B846F1}">
+                <asvg:svgBlip xmlns:asvg="http://schemas.microsoft.com/office/drawing/2016/SVG/main" r:embed="rId4"/>
+              </a:ext>
+            </a:extLst>
+          </a:blip>
+          <a:stretch>
+            <a:fillRect/>
+          </a:stretch>
+        </p:blipFill>
+        <p:spPr>
+          <a:xfrm>
+            <a:off x="914400" y="3849624"/>
+            <a:ext cx="10241280" cy="1024128"/>
+          </a:xfrm>
+          <a:prstGeom prst="rect">
+            <a:avLst/>
+          </a:prstGeom>
+        </p:spPr>
+      </p:pic>
+      <p:sp>
+        <p:nvSpPr>
+          <p:cNvPr id="12" name="Shape 8"/>
+          <p:cNvSpPr/>
+          <p:nvPr/>
+        </p:nvSpPr>
+        <p:spPr>
+          <a:xfrm>
+            <a:off x="914400" y="3849624"/>
+            <a:ext cx="10241280" cy="1024128"/>
+          </a:xfrm>
+          <a:prstGeom prst="rect">
+            <a:avLst/>
+          </a:prstGeom>
+          <a:solidFill>
+            <a:srgbClr val="FFFFFF">
+              <a:alpha val="0"/>
+            </a:srgbClr>
+          </a:solidFill>
+          <a:ln w="12700">
+            <a:solidFill>
+              <a:srgbClr val="E5E7EB">
+                <a:alpha val="0"/>
+              </a:srgbClr>
+            </a:solidFill>
+            <a:prstDash val="solid"/>
+          </a:ln>
+          <a:effectLst>
+            <a:outerShdw sx="100000" sy="100000" kx="0" ky="0" algn="bl" rotWithShape="0" blurRad="12700" dist="50800" dir="2700000">
+              <a:srgbClr val="000000">
+                <a:alpha val="8000"/>
+              </a:srgbClr>
+            </a:outerShdw>
+          </a:effectLst>
+        </p:spPr>
+      </p:sp>
+      <p:sp>
+        <p:nvSpPr>
+          <p:cNvPr id="13" name="Shape 9"/>
+          <p:cNvSpPr/>
+          <p:nvPr/>
+        </p:nvSpPr>
+        <p:spPr>
+          <a:xfrm>
+            <a:off x="914400" y="2523744"/>
+            <a:ext cx="73152" cy="1024128"/>
           </a:xfrm>
           <a:prstGeom prst="rect">
             <a:avLst/>
@@ -22741,24 +21805,24 @@
       </p:sp>
       <p:sp>
         <p:nvSpPr>
-          <p:cNvPr id="10" name="Shape 8"/>
-          <p:cNvSpPr/>
-          <p:nvPr/>
-        </p:nvSpPr>
-        <p:spPr>
-          <a:xfrm>
-            <a:off x="6400800" y="1554480"/>
-            <a:ext cx="4937760" cy="73152"/>
-          </a:xfrm>
-          <a:prstGeom prst="rect">
-            <a:avLst/>
-          </a:prstGeom>
-          <a:solidFill>
-            <a:srgbClr val="F43F5E"/>
-          </a:solidFill>
-          <a:ln w="12700">
-            <a:solidFill>
-              <a:srgbClr val="F43F5E">
+          <p:cNvPr id="14" name="Shape 10"/>
+          <p:cNvSpPr/>
+          <p:nvPr/>
+        </p:nvSpPr>
+        <p:spPr>
+          <a:xfrm>
+            <a:off x="914400" y="3849624"/>
+            <a:ext cx="73152" cy="1024128"/>
+          </a:xfrm>
+          <a:prstGeom prst="rect">
+            <a:avLst/>
+          </a:prstGeom>
+          <a:solidFill>
+            <a:srgbClr val="38BDF8"/>
+          </a:solidFill>
+          <a:ln w="12700">
+            <a:solidFill>
+              <a:srgbClr val="38BDF8">
                 <a:alpha val="0"/>
               </a:srgbClr>
             </a:solidFill>
@@ -22768,7 +21832,7 @@
       </p:sp>
       <p:sp>
         <p:nvSpPr>
-          <p:cNvPr id="11" name="mdpr:1-2-5a84f1:title:__title:1-2-5a84f1"/>
+          <p:cNvPr id="15" name="mdpr:1-2-5a84f1:title:__title:1-2-5a84f1"/>
           <p:cNvSpPr txBox="1"/>
           <p:nvPr/>
         </p:nvSpPr>
@@ -22810,14 +21874,14 @@
       </p:sp>
       <p:sp>
         <p:nvSpPr>
-          <p:cNvPr id="12" name="mdpr:1-2-5a84f1:left:block-10-chunk-1"/>
+          <p:cNvPr id="16" name="mdpr:1-2-5a84f1:item-1:block-10-chunk-1"/>
           <p:cNvSpPr txBox="1"/>
           <p:nvPr/>
         </p:nvSpPr>
         <p:spPr>
           <a:xfrm>
-            <a:off x="896112" y="1664208"/>
-            <a:ext cx="4791456" cy="4169664"/>
+            <a:off x="1133856" y="2615916"/>
+            <a:ext cx="9820656" cy="839785"/>
           </a:xfrm>
           <a:prstGeom prst="rect">
             <a:avLst/>
@@ -22826,7 +21890,7 @@
           <a:ln/>
         </p:spPr>
         <p:txBody>
-          <a:bodyPr wrap="square" lIns="0" tIns="25400" rIns="25400" bIns="0" rtlCol="0" anchor="t"/>
+          <a:bodyPr wrap="square" lIns="0" tIns="25400" rIns="25400" bIns="0" rtlCol="0" anchor="ctr"/>
           <a:lstStyle/>
           <a:p>
             <a:pPr algn="l" indent="0" marL="0">
@@ -22844,7 +21908,7 @@
                 <a:ea typeface="Pretendard" pitchFamily="34" charset="-122"/>
                 <a:cs typeface="Pretendard" pitchFamily="34" charset="-120"/>
               </a:rPr>
-              <a:t>- Headings</a:t>
+              <a:t>Headings</a:t>
             </a:r>
             <a:pPr algn="l" indent="0" marL="0">
               <a:lnSpc>
@@ -22869,14 +21933,14 @@
       </p:sp>
       <p:sp>
         <p:nvSpPr>
-          <p:cNvPr id="13" name="mdpr:1-2-5a84f1:right:block-10-chunk-1"/>
+          <p:cNvPr id="17" name="mdpr:1-2-5a84f1:item-2:block-10-chunk-1"/>
           <p:cNvSpPr txBox="1"/>
           <p:nvPr/>
         </p:nvSpPr>
         <p:spPr>
           <a:xfrm>
-            <a:off x="6473952" y="1664208"/>
-            <a:ext cx="4791456" cy="4169664"/>
+            <a:off x="1133856" y="3941796"/>
+            <a:ext cx="9820656" cy="839785"/>
           </a:xfrm>
           <a:prstGeom prst="rect">
             <a:avLst/>
@@ -22885,7 +21949,7 @@
           <a:ln/>
         </p:spPr>
         <p:txBody>
-          <a:bodyPr wrap="square" lIns="0" tIns="25400" rIns="25400" bIns="0" rtlCol="0" anchor="t"/>
+          <a:bodyPr wrap="square" lIns="0" tIns="25400" rIns="25400" bIns="0" rtlCol="0" anchor="ctr"/>
           <a:lstStyle/>
           <a:p>
             <a:pPr algn="l" indent="0" marL="0">
@@ -22903,7 +21967,7 @@
                 <a:ea typeface="Pretendard" pitchFamily="34" charset="-122"/>
                 <a:cs typeface="Pretendard" pitchFamily="34" charset="-120"/>
               </a:rPr>
-              <a:t>- Lists</a:t>
+              <a:t>Lists</a:t>
             </a:r>
             <a:pPr algn="l" indent="0" marL="0">
               <a:lnSpc>
